--- a/slides/SDR_Demo.pptx
+++ b/slides/SDR_Demo.pptx
@@ -24,7 +24,6 @@
     <p:sldId id="272" r:id="rId23"/>
     <p:sldId id="273" r:id="rId24"/>
     <p:sldId id="274" r:id="rId25"/>
-    <p:sldId id="275" r:id="rId26"/>
   </p:sldIdLst>
   <p:sldSz cx="12191695" cy="6858000" type="screen4x3"/>
   <p:notesSz cx="6858000" cy="9144000"/>
@@ -3447,7 +3446,7 @@
                 </a:solidFill>
                 <a:latin typeface="Calibri"/>
               </a:rPr>
-              <a:t>DEMO 1</a:t>
+              <a:t>DEMO 2</a:t>
             </a:r>
           </a:p>
         </p:txBody>
@@ -3486,7 +3485,7 @@
                 </a:solidFill>
                 <a:latin typeface="Calibri"/>
               </a:rPr>
-              <a:t>Live Spectrum &amp; Waterfall</a:t>
+              <a:t>Tunable NBFM Voice Receiver</a:t>
             </a:r>
           </a:p>
         </p:txBody>
@@ -3627,7 +3626,7 @@
                 </a:solidFill>
                 <a:latin typeface="Calibri"/>
               </a:rPr>
-              <a:t>•  Flowgraph: 01_spectrum_waterfall_tunable.grc</a:t>
+              <a:t>•  Flowgraph: 02_nbfm_voice_receiver.grc</a:t>
             </a:r>
           </a:p>
           <a:p>
@@ -3646,7 +3645,7 @@
                 </a:solidFill>
                 <a:latin typeface="Calibri"/>
               </a:rPr>
-              <a:t>•  One flowgraph, both ham bands -- retype the center frequency live: 146.520 MHz (2m) then 446.000 MHz (70cm).</a:t>
+              <a:t>•  A real narrowband FM voice receiver -- channel filter, resampler, FM demodulator, straight to the speakers.</a:t>
             </a:r>
           </a:p>
           <a:p>
@@ -3665,7 +3664,7 @@
                 </a:solidFill>
                 <a:latin typeface="Calibri"/>
               </a:rPr>
-              <a:t>•  Key up the handheld on each band and watch the signal light up the spectrum plot and waterfall in real time.</a:t>
+              <a:t>•  Default: 146.520 MHz, the national 2m simplex calling frequency. Key up the handheld there and it comes through the laptop.</a:t>
             </a:r>
           </a:p>
           <a:p>
@@ -3684,7 +3683,7 @@
                 </a:solidFill>
                 <a:latin typeface="Calibri"/>
               </a:rPr>
-              <a:t>•  Talking point: this is the same 10 MHz of RF spectrum a traditional radio can only look at one narrow slice of at a time.</a:t>
+              <a:t>•  Talking point: this whole receiver -- the part that's a dedicated chip in a normal radio -- is about a dozen blocks of software here.</a:t>
             </a:r>
           </a:p>
         </p:txBody>
@@ -3762,7 +3761,7 @@
                 </a:solidFill>
                 <a:latin typeface="Calibri"/>
               </a:rPr>
-              <a:t>9 / 20</a:t>
+              <a:t>9 / 19</a:t>
             </a:r>
           </a:p>
         </p:txBody>
@@ -3859,11 +3858,11 @@
             <a:r>
               <a:rPr sz="1400" b="1" i="0">
                 <a:solidFill>
-                  <a:srgbClr val="35D0BA"/>
-                </a:solidFill>
-                <a:latin typeface="Calibri"/>
-              </a:rPr>
-              <a:t>DEMO 2</a:t>
+                  <a:srgbClr val="FFB020"/>
+                </a:solidFill>
+                <a:latin typeface="Calibri"/>
+              </a:rPr>
+              <a:t>DEMO 3 · THE HEADLINE DEMO</a:t>
             </a:r>
           </a:p>
         </p:txBody>
@@ -3877,7 +3876,7 @@
         <p:spPr>
           <a:xfrm>
             <a:off x="640080" y="786384"/>
-            <a:ext cx="10881360" cy="822960"/>
+            <a:ext cx="10881360" cy="914400"/>
           </a:xfrm>
           <a:prstGeom prst="rect">
             <a:avLst/>
@@ -3896,13 +3895,13 @@
               </a:lnSpc>
             </a:pPr>
             <a:r>
-              <a:rPr sz="3200" b="1" i="0">
+              <a:rPr sz="3400" b="1" i="0">
                 <a:solidFill>
                   <a:srgbClr val="FFFFFF"/>
                 </a:solidFill>
                 <a:latin typeface="Calibri"/>
               </a:rPr>
-              <a:t>Tunable NBFM Voice Receiver</a:t>
+              <a:t>Record the Entire 2m Band</a:t>
             </a:r>
           </a:p>
         </p:txBody>
@@ -3915,14 +3914,14 @@
         </p:nvSpPr>
         <p:spPr>
           <a:xfrm>
-            <a:off x="640080" y="1481328"/>
+            <a:off x="640080" y="1554480"/>
             <a:ext cx="1005840" cy="50800"/>
           </a:xfrm>
           <a:prstGeom prst="rect">
             <a:avLst/>
           </a:prstGeom>
           <a:solidFill>
-            <a:srgbClr val="35D0BA"/>
+            <a:srgbClr val="FFB020"/>
           </a:solidFill>
           <a:ln>
             <a:noFill/>
@@ -3953,69 +3952,14 @@
       </p:sp>
       <p:sp>
         <p:nvSpPr>
-          <p:cNvPr id="6" name="Rounded Rectangle 5"/>
-          <p:cNvSpPr/>
-          <p:nvPr/>
-        </p:nvSpPr>
-        <p:spPr>
-          <a:xfrm>
-            <a:off x="640080" y="1691640"/>
-            <a:ext cx="1371600" cy="320040"/>
-          </a:xfrm>
-          <a:prstGeom prst="roundRect">
-            <a:avLst>
-              <a:gd name="adj" fmla="val 50000"/>
-            </a:avLst>
-          </a:prstGeom>
-          <a:solidFill>
-            <a:srgbClr val="1B5E58"/>
-          </a:solidFill>
-          <a:ln>
-            <a:noFill/>
-          </a:ln>
-          <a:effectLst/>
-        </p:spPr>
-        <p:style>
-          <a:lnRef idx="1">
-            <a:schemeClr val="accent1"/>
-          </a:lnRef>
-          <a:fillRef idx="3">
-            <a:schemeClr val="accent1"/>
-          </a:fillRef>
-          <a:effectRef idx="2">
-            <a:schemeClr val="accent1"/>
-          </a:effectRef>
-          <a:fontRef idx="minor">
-            <a:schemeClr val="lt1"/>
-          </a:fontRef>
-        </p:style>
-        <p:txBody>
-          <a:bodyPr rtlCol="0" anchor="ctr" lIns="50800" rIns="50800" tIns="0" bIns="0"/>
-          <a:lstStyle/>
-          <a:p>
-            <a:pPr algn="ctr"/>
-            <a:r>
-              <a:rPr sz="1200" b="1">
-                <a:solidFill>
-                  <a:srgbClr val="35D0BA"/>
-                </a:solidFill>
-                <a:latin typeface="Calibri"/>
-              </a:rPr>
-              <a:t>RECEIVE ONLY</a:t>
-            </a:r>
-          </a:p>
-        </p:txBody>
-      </p:sp>
-      <p:sp>
-        <p:nvSpPr>
-          <p:cNvPr id="7" name="TextBox 6"/>
+          <p:cNvPr id="6" name="TextBox 5"/>
           <p:cNvSpPr txBox="1"/>
           <p:nvPr/>
         </p:nvSpPr>
         <p:spPr>
           <a:xfrm>
-            <a:off x="640080" y="2286000"/>
-            <a:ext cx="10698480" cy="3474720"/>
+            <a:off x="640080" y="1920240"/>
+            <a:ext cx="10698480" cy="4114800"/>
           </a:xfrm>
           <a:prstGeom prst="rect">
             <a:avLst/>
@@ -4043,7 +3987,7 @@
                 </a:solidFill>
                 <a:latin typeface="Calibri"/>
               </a:rPr>
-              <a:t>•  Flowgraph: 02_nbfm_voice_receiver.grc</a:t>
+              <a:t>•  Flowgraph: 03_record_2m_band_to_file.grc</a:t>
             </a:r>
           </a:p>
           <a:p>
@@ -4062,7 +4006,7 @@
                 </a:solidFill>
                 <a:latin typeface="Calibri"/>
               </a:rPr>
-              <a:t>•  A real narrowband FM voice receiver -- channel filter, resampler, FM demodulator, straight to the speakers.</a:t>
+              <a:t>•  Tunes to 146.0 MHz center at 6 Msps -- covers 143.0 to 149.0 MHz, the whole 144-148 MHz 2m band with margin to spare.</a:t>
             </a:r>
           </a:p>
           <a:p>
@@ -4081,7 +4025,23 @@
                 </a:solidFill>
                 <a:latin typeface="Calibri"/>
               </a:rPr>
-              <a:t>•  Default: 146.520 MHz, the national 2m simplex calling frequency. Key up the handheld there and it comes through the laptop.</a:t>
+              <a:t>•  Not one channel -- every signal on the entire band, captured at once</a:t>
+            </a:r>
+          </a:p>
+          <a:p>
+            <a:pPr lvl="1">
+              <a:spcAft>
+                <a:spcPts val="600"/>
+              </a:spcAft>
+            </a:pPr>
+            <a:r>
+              <a:rPr sz="1600">
+                <a:solidFill>
+                  <a:srgbClr val="8EA7BA"/>
+                </a:solidFill>
+                <a:latin typeface="Calibri"/>
+              </a:rPr>
+              <a:t>–  Raw IQ, written to a self-describing file (sample rate + center frequency saved in the header)</a:t>
             </a:r>
           </a:p>
           <a:p>
@@ -4100,14 +4060,14 @@
                 </a:solidFill>
                 <a:latin typeface="Calibri"/>
               </a:rPr>
-              <a:t>•  Talking point: this whole receiver -- the part that's a dedicated chip in a normal radio -- is about a dozen blocks of software here.</a:t>
-            </a:r>
-          </a:p>
-        </p:txBody>
-      </p:sp>
-      <p:sp>
-        <p:nvSpPr>
-          <p:cNvPr id="8" name="TextBox 7"/>
+              <a:t>•  Live: hit Execute, key up the handheld once or twice, hit Stop. ~2.9 GB/minute -- a 20-30 second capture is plenty for the demo.</a:t>
+            </a:r>
+          </a:p>
+        </p:txBody>
+      </p:sp>
+      <p:sp>
+        <p:nvSpPr>
+          <p:cNvPr id="7" name="TextBox 6"/>
           <p:cNvSpPr txBox="1"/>
           <p:nvPr/>
         </p:nvSpPr>
@@ -4146,7 +4106,7 @@
       </p:sp>
       <p:sp>
         <p:nvSpPr>
-          <p:cNvPr id="9" name="TextBox 8"/>
+          <p:cNvPr id="8" name="TextBox 7"/>
           <p:cNvSpPr txBox="1"/>
           <p:nvPr/>
         </p:nvSpPr>
@@ -4178,7 +4138,7 @@
                 </a:solidFill>
                 <a:latin typeface="Calibri"/>
               </a:rPr>
-              <a:t>10 / 20</a:t>
+              <a:t>10 / 19</a:t>
             </a:r>
           </a:p>
         </p:txBody>
@@ -4279,7 +4239,7 @@
                 </a:solidFill>
                 <a:latin typeface="Calibri"/>
               </a:rPr>
-              <a:t>DEMO 3 · THE HEADLINE DEMO</a:t>
+              <a:t>DEMO 3B · THE PAYOFF</a:t>
             </a:r>
           </a:p>
         </p:txBody>
@@ -4318,7 +4278,7 @@
                 </a:solidFill>
                 <a:latin typeface="Calibri"/>
               </a:rPr>
-              <a:t>Record the Entire 2m Band</a:t>
+              <a:t>...And Play It Back Over the Air</a:t>
             </a:r>
           </a:p>
         </p:txBody>
@@ -4369,14 +4329,69 @@
       </p:sp>
       <p:sp>
         <p:nvSpPr>
-          <p:cNvPr id="6" name="TextBox 5"/>
+          <p:cNvPr id="6" name="Rounded Rectangle 5"/>
+          <p:cNvSpPr/>
+          <p:nvPr/>
+        </p:nvSpPr>
+        <p:spPr>
+          <a:xfrm>
+            <a:off x="640080" y="1737360"/>
+            <a:ext cx="2103120" cy="365760"/>
+          </a:xfrm>
+          <a:prstGeom prst="roundRect">
+            <a:avLst>
+              <a:gd name="adj" fmla="val 50000"/>
+            </a:avLst>
+          </a:prstGeom>
+          <a:solidFill>
+            <a:srgbClr val="4A3612"/>
+          </a:solidFill>
+          <a:ln>
+            <a:noFill/>
+          </a:ln>
+          <a:effectLst/>
+        </p:spPr>
+        <p:style>
+          <a:lnRef idx="1">
+            <a:schemeClr val="accent1"/>
+          </a:lnRef>
+          <a:fillRef idx="3">
+            <a:schemeClr val="accent1"/>
+          </a:fillRef>
+          <a:effectRef idx="2">
+            <a:schemeClr val="accent1"/>
+          </a:effectRef>
+          <a:fontRef idx="minor">
+            <a:schemeClr val="lt1"/>
+          </a:fontRef>
+        </p:style>
+        <p:txBody>
+          <a:bodyPr rtlCol="0" anchor="ctr" lIns="50800" rIns="50800" tIns="0" bIns="0"/>
+          <a:lstStyle/>
+          <a:p>
+            <a:pPr algn="ctr"/>
+            <a:r>
+              <a:rPr sz="1200" b="1">
+                <a:solidFill>
+                  <a:srgbClr val="FFB020"/>
+                </a:solidFill>
+                <a:latin typeface="Calibri"/>
+              </a:rPr>
+              <a:t>TRANSMITS — SEE NEXT SLIDE</a:t>
+            </a:r>
+          </a:p>
+        </p:txBody>
+      </p:sp>
+      <p:sp>
+        <p:nvSpPr>
+          <p:cNvPr id="7" name="TextBox 6"/>
           <p:cNvSpPr txBox="1"/>
           <p:nvPr/>
         </p:nvSpPr>
         <p:spPr>
           <a:xfrm>
-            <a:off x="640080" y="1920240"/>
-            <a:ext cx="10698480" cy="4114800"/>
+            <a:off x="640080" y="2331720"/>
+            <a:ext cx="10698480" cy="3657600"/>
           </a:xfrm>
           <a:prstGeom prst="rect">
             <a:avLst/>
@@ -4404,7 +4419,7 @@
                 </a:solidFill>
                 <a:latin typeface="Calibri"/>
               </a:rPr>
-              <a:t>•  Flowgraph: 03_record_2m_band_to_file.grc</a:t>
+              <a:t>•  Flowgraph: 04_playback_2m_band_from_file.grc</a:t>
             </a:r>
           </a:p>
           <a:p>
@@ -4423,7 +4438,7 @@
                 </a:solidFill>
                 <a:latin typeface="Calibri"/>
               </a:rPr>
-              <a:t>•  Tunes to 146.0 MHz center at 6 Msps -- covers 143.0 to 149.0 MHz, the whole 144-148 MHz 2m band with margin to spare.</a:t>
+              <a:t>•  Reads the file back and feeds it straight into the HackRF's transmitter -- the exact recorded band reappears on the air.</a:t>
             </a:r>
           </a:p>
           <a:p>
@@ -4442,23 +4457,7 @@
                 </a:solidFill>
                 <a:latin typeface="Calibri"/>
               </a:rPr>
-              <a:t>•  Not one channel -- every signal on the entire band, captured at once</a:t>
-            </a:r>
-          </a:p>
-          <a:p>
-            <a:pPr lvl="1">
-              <a:spcAft>
-                <a:spcPts val="600"/>
-              </a:spcAft>
-            </a:pPr>
-            <a:r>
-              <a:rPr sz="1600">
-                <a:solidFill>
-                  <a:srgbClr val="8EA7BA"/>
-                </a:solidFill>
-                <a:latin typeface="Calibri"/>
-              </a:rPr>
-              <a:t>–  Raw IQ, written to a self-describing file (sample rate + center frequency saved in the header)</a:t>
+              <a:t>•  Watch the waterfall reproduce exactly what was captured; the handheld hears the same signal a second time, live.</a:t>
             </a:r>
           </a:p>
           <a:p>
@@ -4477,14 +4476,14 @@
                 </a:solidFill>
                 <a:latin typeface="Calibri"/>
               </a:rPr>
-              <a:t>•  Live: hit Execute, key up the handheld once or twice, hit Stop. ~2.9 GB/minute -- a 20-30 second capture is plenty for the demo.</a:t>
-            </a:r>
-          </a:p>
-        </p:txBody>
-      </p:sp>
-      <p:sp>
-        <p:nvSpPr>
-          <p:cNvPr id="7" name="TextBox 6"/>
+              <a:t>•  This is the moment that makes SDR click: the recording *is* the radio signal -- numbers on disk, transmitted back as RF.</a:t>
+            </a:r>
+          </a:p>
+        </p:txBody>
+      </p:sp>
+      <p:sp>
+        <p:nvSpPr>
+          <p:cNvPr id="8" name="TextBox 7"/>
           <p:cNvSpPr txBox="1"/>
           <p:nvPr/>
         </p:nvSpPr>
@@ -4523,7 +4522,7 @@
       </p:sp>
       <p:sp>
         <p:nvSpPr>
-          <p:cNvPr id="8" name="TextBox 7"/>
+          <p:cNvPr id="9" name="TextBox 8"/>
           <p:cNvSpPr txBox="1"/>
           <p:nvPr/>
         </p:nvSpPr>
@@ -4555,7 +4554,7 @@
                 </a:solidFill>
                 <a:latin typeface="Calibri"/>
               </a:rPr>
-              <a:t>11 / 20</a:t>
+              <a:t>11 / 19</a:t>
             </a:r>
           </a:p>
         </p:txBody>
@@ -4593,7 +4592,7 @@
             <a:avLst/>
           </a:prstGeom>
           <a:solidFill>
-            <a:srgbClr val="0A1929"/>
+            <a:srgbClr val="1A1406"/>
           </a:solidFill>
           <a:ln>
             <a:noFill/>
@@ -4630,7 +4629,7 @@
         </p:nvSpPr>
         <p:spPr>
           <a:xfrm>
-            <a:off x="640080" y="457200"/>
+            <a:off x="640080" y="502920"/>
             <a:ext cx="10881360" cy="365760"/>
           </a:xfrm>
           <a:prstGeom prst="rect">
@@ -4650,13 +4649,13 @@
               </a:lnSpc>
             </a:pPr>
             <a:r>
-              <a:rPr sz="1400" b="1" i="0">
+              <a:rPr sz="1600" b="1" i="0">
                 <a:solidFill>
                   <a:srgbClr val="FFB020"/>
                 </a:solidFill>
                 <a:latin typeface="Calibri"/>
               </a:rPr>
-              <a:t>DEMO 3B · THE PAYOFF</a:t>
+              <a:t>⚠  BEFORE WE TRANSMIT</a:t>
             </a:r>
           </a:p>
         </p:txBody>
@@ -4669,8 +4668,8 @@
         </p:nvSpPr>
         <p:spPr>
           <a:xfrm>
-            <a:off x="640080" y="786384"/>
-            <a:ext cx="10881360" cy="914400"/>
+            <a:off x="640080" y="914400"/>
+            <a:ext cx="10881360" cy="822960"/>
           </a:xfrm>
           <a:prstGeom prst="rect">
             <a:avLst/>
@@ -4695,7 +4694,7 @@
                 </a:solidFill>
                 <a:latin typeface="Calibri"/>
               </a:rPr>
-              <a:t>...And Play It Back Over the Air</a:t>
+              <a:t>Part 97 Ground Rules</a:t>
             </a:r>
           </a:p>
         </p:txBody>
@@ -4708,7 +4707,7 @@
         </p:nvSpPr>
         <p:spPr>
           <a:xfrm>
-            <a:off x="640080" y="1554480"/>
+            <a:off x="640080" y="1691640"/>
             <a:ext cx="1005840" cy="50800"/>
           </a:xfrm>
           <a:prstGeom prst="rect">
@@ -4746,69 +4745,14 @@
       </p:sp>
       <p:sp>
         <p:nvSpPr>
-          <p:cNvPr id="6" name="Rounded Rectangle 5"/>
-          <p:cNvSpPr/>
-          <p:nvPr/>
-        </p:nvSpPr>
-        <p:spPr>
-          <a:xfrm>
-            <a:off x="640080" y="1737360"/>
-            <a:ext cx="2103120" cy="365760"/>
-          </a:xfrm>
-          <a:prstGeom prst="roundRect">
-            <a:avLst>
-              <a:gd name="adj" fmla="val 50000"/>
-            </a:avLst>
-          </a:prstGeom>
-          <a:solidFill>
-            <a:srgbClr val="4A3612"/>
-          </a:solidFill>
-          <a:ln>
-            <a:noFill/>
-          </a:ln>
-          <a:effectLst/>
-        </p:spPr>
-        <p:style>
-          <a:lnRef idx="1">
-            <a:schemeClr val="accent1"/>
-          </a:lnRef>
-          <a:fillRef idx="3">
-            <a:schemeClr val="accent1"/>
-          </a:fillRef>
-          <a:effectRef idx="2">
-            <a:schemeClr val="accent1"/>
-          </a:effectRef>
-          <a:fontRef idx="minor">
-            <a:schemeClr val="lt1"/>
-          </a:fontRef>
-        </p:style>
-        <p:txBody>
-          <a:bodyPr rtlCol="0" anchor="ctr" lIns="50800" rIns="50800" tIns="0" bIns="0"/>
-          <a:lstStyle/>
-          <a:p>
-            <a:pPr algn="ctr"/>
-            <a:r>
-              <a:rPr sz="1200" b="1">
-                <a:solidFill>
-                  <a:srgbClr val="FFB020"/>
-                </a:solidFill>
-                <a:latin typeface="Calibri"/>
-              </a:rPr>
-              <a:t>TRANSMITS — SEE NEXT SLIDE</a:t>
-            </a:r>
-          </a:p>
-        </p:txBody>
-      </p:sp>
-      <p:sp>
-        <p:nvSpPr>
-          <p:cNvPr id="7" name="TextBox 6"/>
+          <p:cNvPr id="6" name="TextBox 5"/>
           <p:cNvSpPr txBox="1"/>
           <p:nvPr/>
         </p:nvSpPr>
         <p:spPr>
           <a:xfrm>
-            <a:off x="640080" y="2331720"/>
-            <a:ext cx="10698480" cy="3657600"/>
+            <a:off x="640080" y="2057400"/>
+            <a:ext cx="10698480" cy="4114800"/>
           </a:xfrm>
           <a:prstGeom prst="rect">
             <a:avLst/>
@@ -4826,17 +4770,17 @@
                 <a:spcPct val="112000"/>
               </a:lnSpc>
               <a:spcAft>
-                <a:spcPts val="1600"/>
+                <a:spcPts val="1400"/>
               </a:spcAft>
             </a:pPr>
             <a:r>
-              <a:rPr sz="1900">
-                <a:solidFill>
-                  <a:srgbClr val="D7E3EC"/>
-                </a:solidFill>
-                <a:latin typeface="Calibri"/>
-              </a:rPr>
-              <a:t>•  Flowgraph: 04_playback_2m_band_from_file.grc</a:t>
+              <a:rPr sz="1800">
+                <a:solidFill>
+                  <a:srgbClr val="F3E3C7"/>
+                </a:solidFill>
+                <a:latin typeface="Calibri"/>
+              </a:rPr>
+              <a:t>•  A licensed control operator is present the entire time we transmit.</a:t>
             </a:r>
           </a:p>
           <a:p>
@@ -4845,17 +4789,17 @@
                 <a:spcPct val="112000"/>
               </a:lnSpc>
               <a:spcAft>
-                <a:spcPts val="1600"/>
+                <a:spcPts val="1400"/>
               </a:spcAft>
             </a:pPr>
             <a:r>
-              <a:rPr sz="1900">
-                <a:solidFill>
-                  <a:srgbClr val="D7E3EC"/>
-                </a:solidFill>
-                <a:latin typeface="Calibri"/>
-              </a:rPr>
-              <a:t>•  Reads the file back and feeds it straight into the HackRF's transmitter -- the exact recorded band reappears on the air.</a:t>
+              <a:rPr sz="1800">
+                <a:solidFill>
+                  <a:srgbClr val="F3E3C7"/>
+                </a:solidFill>
+                <a:latin typeface="Calibri"/>
+              </a:rPr>
+              <a:t>•  We identify with callsign at the start/end and every 10 minutes.</a:t>
             </a:r>
           </a:p>
           <a:p>
@@ -4864,17 +4808,17 @@
                 <a:spcPct val="112000"/>
               </a:lnSpc>
               <a:spcAft>
-                <a:spcPts val="1600"/>
+                <a:spcPts val="1400"/>
               </a:spcAft>
             </a:pPr>
             <a:r>
-              <a:rPr sz="1900">
-                <a:solidFill>
-                  <a:srgbClr val="D7E3EC"/>
-                </a:solidFill>
-                <a:latin typeface="Calibri"/>
-              </a:rPr>
-              <a:t>•  Watch the waterfall reproduce exactly what was captured; the handheld hears the same signal a second time, live.</a:t>
+              <a:rPr sz="1800">
+                <a:solidFill>
+                  <a:srgbClr val="F3E3C7"/>
+                </a:solidFill>
+                <a:latin typeface="Calibri"/>
+              </a:rPr>
+              <a:t>•  No music, no broadcast content -- a brief, identified test transmission only.</a:t>
             </a:r>
           </a:p>
           <a:p>
@@ -4883,24 +4827,43 @@
                 <a:spcPct val="112000"/>
               </a:lnSpc>
               <a:spcAft>
-                <a:spcPts val="1600"/>
+                <a:spcPts val="1400"/>
               </a:spcAft>
             </a:pPr>
             <a:r>
-              <a:rPr sz="1900">
-                <a:solidFill>
-                  <a:srgbClr val="D7E3EC"/>
-                </a:solidFill>
-                <a:latin typeface="Calibri"/>
-              </a:rPr>
-              <a:t>•  This is the moment that makes SDR click: the recording *is* the radio signal -- numbers on disk, transmitted back as RF.</a:t>
-            </a:r>
-          </a:p>
-        </p:txBody>
-      </p:sp>
-      <p:sp>
-        <p:nvSpPr>
-          <p:cNvPr id="8" name="TextBox 7"/>
+              <a:rPr sz="1800">
+                <a:solidFill>
+                  <a:srgbClr val="F3E3C7"/>
+                </a:solidFill>
+                <a:latin typeface="Calibri"/>
+              </a:rPr>
+              <a:t>•  Power stays at the minimum needed -- TX gain starts low and only comes up as far as the demo needs.</a:t>
+            </a:r>
+          </a:p>
+          <a:p>
+            <a:pPr>
+              <a:lnSpc>
+                <a:spcPct val="112000"/>
+              </a:lnSpc>
+              <a:spcAft>
+                <a:spcPts val="1400"/>
+              </a:spcAft>
+            </a:pPr>
+            <a:r>
+              <a:rPr sz="1800">
+                <a:solidFill>
+                  <a:srgbClr val="F3E3C7"/>
+                </a:solidFill>
+                <a:latin typeface="Calibri"/>
+              </a:rPr>
+              <a:t>•  No control operator today, or want zero on-air emission? The HackRF TX port can go into a dummy load instead of an antenna -- same demo, nothing radiated.</a:t>
+            </a:r>
+          </a:p>
+        </p:txBody>
+      </p:sp>
+      <p:sp>
+        <p:nvSpPr>
+          <p:cNvPr id="7" name="TextBox 6"/>
           <p:cNvSpPr txBox="1"/>
           <p:nvPr/>
         </p:nvSpPr>
@@ -4939,7 +4902,7 @@
       </p:sp>
       <p:sp>
         <p:nvSpPr>
-          <p:cNvPr id="9" name="TextBox 8"/>
+          <p:cNvPr id="8" name="TextBox 7"/>
           <p:cNvSpPr txBox="1"/>
           <p:nvPr/>
         </p:nvSpPr>
@@ -4971,7 +4934,7 @@
                 </a:solidFill>
                 <a:latin typeface="Calibri"/>
               </a:rPr>
-              <a:t>12 / 20</a:t>
+              <a:t>12 / 19</a:t>
             </a:r>
           </a:p>
         </p:txBody>
@@ -5009,7 +4972,7 @@
             <a:avLst/>
           </a:prstGeom>
           <a:solidFill>
-            <a:srgbClr val="1A1406"/>
+            <a:srgbClr val="0A1929"/>
           </a:solidFill>
           <a:ln>
             <a:noFill/>
@@ -5046,7 +5009,7 @@
         </p:nvSpPr>
         <p:spPr>
           <a:xfrm>
-            <a:off x="640080" y="502920"/>
+            <a:off x="640080" y="457200"/>
             <a:ext cx="10881360" cy="365760"/>
           </a:xfrm>
           <a:prstGeom prst="rect">
@@ -5066,13 +5029,13 @@
               </a:lnSpc>
             </a:pPr>
             <a:r>
-              <a:rPr sz="1600" b="1" i="0">
+              <a:rPr sz="1400" b="1" i="0">
                 <a:solidFill>
                   <a:srgbClr val="FFB020"/>
                 </a:solidFill>
                 <a:latin typeface="Calibri"/>
               </a:rPr>
-              <a:t>⚠  BEFORE WE TRANSMIT</a:t>
+              <a:t>DEMO 4  ·  OPTIONAL</a:t>
             </a:r>
           </a:p>
         </p:txBody>
@@ -5085,7 +5048,7 @@
         </p:nvSpPr>
         <p:spPr>
           <a:xfrm>
-            <a:off x="640080" y="914400"/>
+            <a:off x="640080" y="786384"/>
             <a:ext cx="10881360" cy="822960"/>
           </a:xfrm>
           <a:prstGeom prst="rect">
@@ -5105,13 +5068,13 @@
               </a:lnSpc>
             </a:pPr>
             <a:r>
-              <a:rPr sz="3400" b="1" i="0">
+              <a:rPr sz="3200" b="1" i="0">
                 <a:solidFill>
                   <a:srgbClr val="FFFFFF"/>
                 </a:solidFill>
                 <a:latin typeface="Calibri"/>
               </a:rPr>
-              <a:t>Part 97 Ground Rules</a:t>
+              <a:t>NBFM Voice Transmitter</a:t>
             </a:r>
           </a:p>
         </p:txBody>
@@ -5124,14 +5087,14 @@
         </p:nvSpPr>
         <p:spPr>
           <a:xfrm>
-            <a:off x="640080" y="1691640"/>
+            <a:off x="640080" y="1481328"/>
             <a:ext cx="1005840" cy="50800"/>
           </a:xfrm>
           <a:prstGeom prst="rect">
             <a:avLst/>
           </a:prstGeom>
           <a:solidFill>
-            <a:srgbClr val="FFB020"/>
+            <a:srgbClr val="35D0BA"/>
           </a:solidFill>
           <a:ln>
             <a:noFill/>
@@ -5162,14 +5125,69 @@
       </p:sp>
       <p:sp>
         <p:nvSpPr>
-          <p:cNvPr id="6" name="TextBox 5"/>
+          <p:cNvPr id="6" name="Rounded Rectangle 5"/>
+          <p:cNvSpPr/>
+          <p:nvPr/>
+        </p:nvSpPr>
+        <p:spPr>
+          <a:xfrm>
+            <a:off x="640080" y="1691640"/>
+            <a:ext cx="2286000" cy="320040"/>
+          </a:xfrm>
+          <a:prstGeom prst="roundRect">
+            <a:avLst>
+              <a:gd name="adj" fmla="val 50000"/>
+            </a:avLst>
+          </a:prstGeom>
+          <a:solidFill>
+            <a:srgbClr val="4A3612"/>
+          </a:solidFill>
+          <a:ln>
+            <a:noFill/>
+          </a:ln>
+          <a:effectLst/>
+        </p:spPr>
+        <p:style>
+          <a:lnRef idx="1">
+            <a:schemeClr val="accent1"/>
+          </a:lnRef>
+          <a:fillRef idx="3">
+            <a:schemeClr val="accent1"/>
+          </a:fillRef>
+          <a:effectRef idx="2">
+            <a:schemeClr val="accent1"/>
+          </a:effectRef>
+          <a:fontRef idx="minor">
+            <a:schemeClr val="lt1"/>
+          </a:fontRef>
+        </p:style>
+        <p:txBody>
+          <a:bodyPr rtlCol="0" anchor="ctr" lIns="50800" rIns="50800" tIns="0" bIns="0"/>
+          <a:lstStyle/>
+          <a:p>
+            <a:pPr algn="ctr"/>
+            <a:r>
+              <a:rPr sz="1200" b="1">
+                <a:solidFill>
+                  <a:srgbClr val="FFB020"/>
+                </a:solidFill>
+                <a:latin typeface="Calibri"/>
+              </a:rPr>
+              <a:t>TRANSMITS — CONTROL OP REQUIRED</a:t>
+            </a:r>
+          </a:p>
+        </p:txBody>
+      </p:sp>
+      <p:sp>
+        <p:nvSpPr>
+          <p:cNvPr id="7" name="TextBox 6"/>
           <p:cNvSpPr txBox="1"/>
           <p:nvPr/>
         </p:nvSpPr>
         <p:spPr>
           <a:xfrm>
-            <a:off x="640080" y="2057400"/>
-            <a:ext cx="10698480" cy="4114800"/>
+            <a:off x="640080" y="2286000"/>
+            <a:ext cx="10698480" cy="3474720"/>
           </a:xfrm>
           <a:prstGeom prst="rect">
             <a:avLst/>
@@ -5187,17 +5205,17 @@
                 <a:spcPct val="112000"/>
               </a:lnSpc>
               <a:spcAft>
-                <a:spcPts val="1400"/>
+                <a:spcPts val="1600"/>
               </a:spcAft>
             </a:pPr>
             <a:r>
-              <a:rPr sz="1800">
-                <a:solidFill>
-                  <a:srgbClr val="F3E3C7"/>
-                </a:solidFill>
-                <a:latin typeface="Calibri"/>
-              </a:rPr>
-              <a:t>•  A licensed control operator is present the entire time we transmit.</a:t>
+              <a:rPr sz="1900">
+                <a:solidFill>
+                  <a:srgbClr val="D7E3EC"/>
+                </a:solidFill>
+                <a:latin typeface="Calibri"/>
+              </a:rPr>
+              <a:t>•  Flowgraph: 05_nbfm_voice_transmitter.grc</a:t>
             </a:r>
           </a:p>
           <a:p>
@@ -5206,17 +5224,17 @@
                 <a:spcPct val="112000"/>
               </a:lnSpc>
               <a:spcAft>
-                <a:spcPts val="1400"/>
+                <a:spcPts val="1600"/>
               </a:spcAft>
             </a:pPr>
             <a:r>
-              <a:rPr sz="1800">
-                <a:solidFill>
-                  <a:srgbClr val="F3E3C7"/>
-                </a:solidFill>
-                <a:latin typeface="Calibri"/>
-              </a:rPr>
-              <a:t>•  We identify with callsign at the start/end and every 10 minutes.</a:t>
+              <a:rPr sz="1900">
+                <a:solidFill>
+                  <a:srgbClr val="D7E3EC"/>
+                </a:solidFill>
+                <a:latin typeface="Calibri"/>
+              </a:rPr>
+              <a:t>•  The reverse direction: laptop microphone → NBFM modulator → HackRF → antenna.</a:t>
             </a:r>
           </a:p>
           <a:p>
@@ -5225,17 +5243,17 @@
                 <a:spcPct val="112000"/>
               </a:lnSpc>
               <a:spcAft>
-                <a:spcPts val="1400"/>
+                <a:spcPts val="1600"/>
               </a:spcAft>
             </a:pPr>
             <a:r>
-              <a:rPr sz="1800">
-                <a:solidFill>
-                  <a:srgbClr val="F3E3C7"/>
-                </a:solidFill>
-                <a:latin typeface="Calibri"/>
-              </a:rPr>
-              <a:t>•  No music, no broadcast content -- a brief, identified test transmission only.</a:t>
+              <a:rPr sz="1900">
+                <a:solidFill>
+                  <a:srgbClr val="D7E3EC"/>
+                </a:solidFill>
+                <a:latin typeface="Calibri"/>
+              </a:rPr>
+              <a:t>•  Talk into the laptop, hear yourself on the handheld -- live two-way, same 146.520 MHz simplex frequency as Demo 2.</a:t>
             </a:r>
           </a:p>
           <a:p>
@@ -5244,43 +5262,24 @@
                 <a:spcPct val="112000"/>
               </a:lnSpc>
               <a:spcAft>
-                <a:spcPts val="1400"/>
+                <a:spcPts val="1600"/>
               </a:spcAft>
             </a:pPr>
             <a:r>
-              <a:rPr sz="1800">
-                <a:solidFill>
-                  <a:srgbClr val="F3E3C7"/>
-                </a:solidFill>
-                <a:latin typeface="Calibri"/>
-              </a:rPr>
-              <a:t>•  Power stays at the minimum needed -- TX gain starts low and only comes up as far as the demo needs.</a:t>
-            </a:r>
-          </a:p>
-          <a:p>
-            <a:pPr>
-              <a:lnSpc>
-                <a:spcPct val="112000"/>
-              </a:lnSpc>
-              <a:spcAft>
-                <a:spcPts val="1400"/>
-              </a:spcAft>
-            </a:pPr>
-            <a:r>
-              <a:rPr sz="1800">
-                <a:solidFill>
-                  <a:srgbClr val="F3E3C7"/>
-                </a:solidFill>
-                <a:latin typeface="Calibri"/>
-              </a:rPr>
-              <a:t>•  No control operator today, or want zero on-air emission? The HackRF TX port can go into a dummy load instead of an antenna -- same demo, nothing radiated.</a:t>
-            </a:r>
-          </a:p>
-        </p:txBody>
-      </p:sp>
-      <p:sp>
-        <p:nvSpPr>
-          <p:cNvPr id="7" name="TextBox 6"/>
+              <a:rPr sz="1900">
+                <a:solidFill>
+                  <a:srgbClr val="D7E3EC"/>
+                </a:solidFill>
+                <a:latin typeface="Calibri"/>
+              </a:rPr>
+              <a:t>•  Skip this one if there's no control operator in the room -- Demos 0-3 already tell the full story.</a:t>
+            </a:r>
+          </a:p>
+        </p:txBody>
+      </p:sp>
+      <p:sp>
+        <p:nvSpPr>
+          <p:cNvPr id="8" name="TextBox 7"/>
           <p:cNvSpPr txBox="1"/>
           <p:nvPr/>
         </p:nvSpPr>
@@ -5319,7 +5318,7 @@
       </p:sp>
       <p:sp>
         <p:nvSpPr>
-          <p:cNvPr id="8" name="TextBox 7"/>
+          <p:cNvPr id="9" name="TextBox 8"/>
           <p:cNvSpPr txBox="1"/>
           <p:nvPr/>
         </p:nvSpPr>
@@ -5351,7 +5350,7 @@
                 </a:solidFill>
                 <a:latin typeface="Calibri"/>
               </a:rPr>
-              <a:t>13 / 20</a:t>
+              <a:t>13 / 19</a:t>
             </a:r>
           </a:p>
         </p:txBody>
@@ -5448,11 +5447,11 @@
             <a:r>
               <a:rPr sz="1400" b="1" i="0">
                 <a:solidFill>
-                  <a:srgbClr val="FFB020"/>
-                </a:solidFill>
-                <a:latin typeface="Calibri"/>
-              </a:rPr>
-              <a:t>DEMO 4  ·  OPTIONAL</a:t>
+                  <a:srgbClr val="35D0BA"/>
+                </a:solidFill>
+                <a:latin typeface="Calibri"/>
+              </a:rPr>
+              <a:t>RECAP</a:t>
             </a:r>
           </a:p>
         </p:txBody>
@@ -5491,7 +5490,7 @@
                 </a:solidFill>
                 <a:latin typeface="Calibri"/>
               </a:rPr>
-              <a:t>NBFM Voice Transmitter</a:t>
+              <a:t>What Just Happened, Technically</a:t>
             </a:r>
           </a:p>
         </p:txBody>
@@ -5542,69 +5541,14 @@
       </p:sp>
       <p:sp>
         <p:nvSpPr>
-          <p:cNvPr id="6" name="Rounded Rectangle 5"/>
-          <p:cNvSpPr/>
-          <p:nvPr/>
-        </p:nvSpPr>
-        <p:spPr>
-          <a:xfrm>
-            <a:off x="640080" y="1691640"/>
-            <a:ext cx="2286000" cy="320040"/>
-          </a:xfrm>
-          <a:prstGeom prst="roundRect">
-            <a:avLst>
-              <a:gd name="adj" fmla="val 50000"/>
-            </a:avLst>
-          </a:prstGeom>
-          <a:solidFill>
-            <a:srgbClr val="4A3612"/>
-          </a:solidFill>
-          <a:ln>
-            <a:noFill/>
-          </a:ln>
-          <a:effectLst/>
-        </p:spPr>
-        <p:style>
-          <a:lnRef idx="1">
-            <a:schemeClr val="accent1"/>
-          </a:lnRef>
-          <a:fillRef idx="3">
-            <a:schemeClr val="accent1"/>
-          </a:fillRef>
-          <a:effectRef idx="2">
-            <a:schemeClr val="accent1"/>
-          </a:effectRef>
-          <a:fontRef idx="minor">
-            <a:schemeClr val="lt1"/>
-          </a:fontRef>
-        </p:style>
-        <p:txBody>
-          <a:bodyPr rtlCol="0" anchor="ctr" lIns="50800" rIns="50800" tIns="0" bIns="0"/>
-          <a:lstStyle/>
-          <a:p>
-            <a:pPr algn="ctr"/>
-            <a:r>
-              <a:rPr sz="1200" b="1">
-                <a:solidFill>
-                  <a:srgbClr val="FFB020"/>
-                </a:solidFill>
-                <a:latin typeface="Calibri"/>
-              </a:rPr>
-              <a:t>TRANSMITS — CONTROL OP REQUIRED</a:t>
-            </a:r>
-          </a:p>
-        </p:txBody>
-      </p:sp>
-      <p:sp>
-        <p:nvSpPr>
-          <p:cNvPr id="7" name="TextBox 6"/>
+          <p:cNvPr id="6" name="TextBox 5"/>
           <p:cNvSpPr txBox="1"/>
           <p:nvPr/>
         </p:nvSpPr>
         <p:spPr>
           <a:xfrm>
-            <a:off x="640080" y="2286000"/>
-            <a:ext cx="10698480" cy="3474720"/>
+            <a:off x="640080" y="1920240"/>
+            <a:ext cx="10698480" cy="4114800"/>
           </a:xfrm>
           <a:prstGeom prst="rect">
             <a:avLst/>
@@ -5632,7 +5576,7 @@
                 </a:solidFill>
                 <a:latin typeface="Calibri"/>
               </a:rPr>
-              <a:t>•  Flowgraph: 05_nbfm_voice_transmitter.grc</a:t>
+              <a:t>•  One piece of hardware -- the same HackRF -- was an FM radio, a spectrum analyzer, a repeater receiver, a wideband recorder, and a voice transceiver, in the same 20 minutes.</a:t>
             </a:r>
           </a:p>
           <a:p>
@@ -5651,7 +5595,7 @@
                 </a:solidFill>
                 <a:latin typeface="Calibri"/>
               </a:rPr>
-              <a:t>•  The reverse direction: laptop microphone → NBFM modulator → HackRF → antenna.</a:t>
+              <a:t>•  The only thing that changed between demos was which flowgraph was loaded -- no soldering, no new hardware.</a:t>
             </a:r>
           </a:p>
           <a:p>
@@ -5670,7 +5614,7 @@
                 </a:solidFill>
                 <a:latin typeface="Calibri"/>
               </a:rPr>
-              <a:t>•  Talk into the laptop, hear yourself on the handheld -- live two-way, same 146.520 MHz simplex frequency as Demo 2.</a:t>
+              <a:t>•  The recording in Demo 3 wasn't a simulation of the 2m band -- it was the actual RF, represented as numbers, played back as actual RF.</a:t>
             </a:r>
           </a:p>
           <a:p>
@@ -5689,14 +5633,14 @@
                 </a:solidFill>
                 <a:latin typeface="Calibri"/>
               </a:rPr>
-              <a:t>•  Skip this one if there's no control operator in the room -- Demos 0-3 already tell the full story.</a:t>
-            </a:r>
-          </a:p>
-        </p:txBody>
-      </p:sp>
-      <p:sp>
-        <p:nvSpPr>
-          <p:cNvPr id="8" name="TextBox 7"/>
+              <a:t>•  That's the whole idea of “software defined”: the radio is defined by the software running on general-purpose hardware, not by purpose-built circuitry.</a:t>
+            </a:r>
+          </a:p>
+        </p:txBody>
+      </p:sp>
+      <p:sp>
+        <p:nvSpPr>
+          <p:cNvPr id="7" name="TextBox 6"/>
           <p:cNvSpPr txBox="1"/>
           <p:nvPr/>
         </p:nvSpPr>
@@ -5735,7 +5679,7 @@
       </p:sp>
       <p:sp>
         <p:nvSpPr>
-          <p:cNvPr id="9" name="TextBox 8"/>
+          <p:cNvPr id="8" name="TextBox 7"/>
           <p:cNvSpPr txBox="1"/>
           <p:nvPr/>
         </p:nvSpPr>
@@ -5767,7 +5711,7 @@
                 </a:solidFill>
                 <a:latin typeface="Calibri"/>
               </a:rPr>
-              <a:t>14 / 20</a:t>
+              <a:t>14 / 19</a:t>
             </a:r>
           </a:p>
         </p:txBody>
@@ -5868,7 +5812,7 @@
                 </a:solidFill>
                 <a:latin typeface="Calibri"/>
               </a:rPr>
-              <a:t>RECAP</a:t>
+              <a:t>WHERE THIS GOES NEXT</a:t>
             </a:r>
           </a:p>
         </p:txBody>
@@ -5907,7 +5851,7 @@
                 </a:solidFill>
                 <a:latin typeface="Calibri"/>
               </a:rPr>
-              <a:t>What Just Happened, Technically</a:t>
+              <a:t>More Demo Ideas</a:t>
             </a:r>
           </a:p>
         </p:txBody>
@@ -5964,8 +5908,47 @@
         </p:nvSpPr>
         <p:spPr>
           <a:xfrm>
-            <a:off x="640080" y="1920240"/>
-            <a:ext cx="10698480" cy="4114800"/>
+            <a:off x="640080" y="1874519"/>
+            <a:ext cx="5120640" cy="320040"/>
+          </a:xfrm>
+          <a:prstGeom prst="rect">
+            <a:avLst/>
+          </a:prstGeom>
+          <a:noFill/>
+        </p:spPr>
+        <p:txBody>
+          <a:bodyPr wrap="square" anchor="t" lIns="0" rIns="0" tIns="0" bIns="0">
+            <a:spAutoFit/>
+          </a:bodyPr>
+          <a:lstStyle/>
+          <a:p>
+            <a:pPr algn="l">
+              <a:lnSpc>
+                <a:spcPct val="115000"/>
+              </a:lnSpc>
+            </a:pPr>
+            <a:r>
+              <a:rPr sz="1600" b="1" i="0">
+                <a:solidFill>
+                  <a:srgbClr val="35D0BA"/>
+                </a:solidFill>
+                <a:latin typeface="Calibri"/>
+              </a:rPr>
+              <a:t>Quick wins</a:t>
+            </a:r>
+          </a:p>
+        </p:txBody>
+      </p:sp>
+      <p:sp>
+        <p:nvSpPr>
+          <p:cNvPr id="7" name="TextBox 6"/>
+          <p:cNvSpPr txBox="1"/>
+          <p:nvPr/>
+        </p:nvSpPr>
+        <p:spPr>
+          <a:xfrm>
+            <a:off x="640080" y="2286000"/>
+            <a:ext cx="5120640" cy="3474720"/>
           </a:xfrm>
           <a:prstGeom prst="rect">
             <a:avLst/>
@@ -5983,17 +5966,17 @@
                 <a:spcPct val="112000"/>
               </a:lnSpc>
               <a:spcAft>
-                <a:spcPts val="1600"/>
+                <a:spcPts val="1400"/>
               </a:spcAft>
             </a:pPr>
             <a:r>
-              <a:rPr sz="1900">
+              <a:rPr sz="1700">
                 <a:solidFill>
                   <a:srgbClr val="D7E3EC"/>
                 </a:solidFill>
                 <a:latin typeface="Calibri"/>
               </a:rPr>
-              <a:t>•  One piece of hardware -- the same HackRF -- was an FM radio, a spectrum analyzer, a repeater receiver, a wideband recorder, and a voice transceiver, in the same 20 minutes.</a:t>
+              <a:t>•  CTCSS/PL tone squelch decode</a:t>
             </a:r>
           </a:p>
           <a:p>
@@ -6002,17 +5985,17 @@
                 <a:spcPct val="112000"/>
               </a:lnSpc>
               <a:spcAft>
-                <a:spcPts val="1600"/>
+                <a:spcPts val="1400"/>
               </a:spcAft>
             </a:pPr>
             <a:r>
-              <a:rPr sz="1900">
+              <a:rPr sz="1700">
                 <a:solidFill>
                   <a:srgbClr val="D7E3EC"/>
                 </a:solidFill>
                 <a:latin typeface="Calibri"/>
               </a:rPr>
-              <a:t>•  The only thing that changed between demos was which flowgraph was loaded -- no soldering, no new hardware.</a:t>
+              <a:t>•  CW (Morse) ID transmitter</a:t>
             </a:r>
           </a:p>
           <a:p>
@@ -6021,17 +6004,17 @@
                 <a:spcPct val="112000"/>
               </a:lnSpc>
               <a:spcAft>
-                <a:spcPts val="1600"/>
+                <a:spcPts val="1400"/>
               </a:spcAft>
             </a:pPr>
             <a:r>
-              <a:rPr sz="1900">
+              <a:rPr sz="1700">
                 <a:solidFill>
                   <a:srgbClr val="D7E3EC"/>
                 </a:solidFill>
                 <a:latin typeface="Calibri"/>
               </a:rPr>
-              <a:t>•  The recording in Demo 3 wasn't a simulation of the 2m band -- it was the actual RF, represented as numbers, played back as actual RF.</a:t>
+              <a:t>•  RDS decode from FM broadcast</a:t>
             </a:r>
           </a:p>
           <a:p>
@@ -6040,31 +6023,31 @@
                 <a:spcPct val="112000"/>
               </a:lnSpc>
               <a:spcAft>
-                <a:spcPts val="1600"/>
+                <a:spcPts val="1400"/>
               </a:spcAft>
             </a:pPr>
             <a:r>
-              <a:rPr sz="1900">
+              <a:rPr sz="1700">
                 <a:solidFill>
                   <a:srgbClr val="D7E3EC"/>
                 </a:solidFill>
                 <a:latin typeface="Calibri"/>
               </a:rPr>
-              <a:t>•  That's the whole idea of “software defined”: the radio is defined by the software running on general-purpose hardware, not by purpose-built circuitry.</a:t>
-            </a:r>
-          </a:p>
-        </p:txBody>
-      </p:sp>
-      <p:sp>
-        <p:nvSpPr>
-          <p:cNvPr id="7" name="TextBox 6"/>
+              <a:t>•  APRS decode (144.390 MHz)</a:t>
+            </a:r>
+          </a:p>
+        </p:txBody>
+      </p:sp>
+      <p:sp>
+        <p:nvSpPr>
+          <p:cNvPr id="8" name="TextBox 7"/>
           <p:cNvSpPr txBox="1"/>
           <p:nvPr/>
         </p:nvSpPr>
         <p:spPr>
           <a:xfrm>
-            <a:off x="640080" y="6473952"/>
-            <a:ext cx="7315200" cy="274320"/>
+            <a:off x="6309360" y="1874519"/>
+            <a:ext cx="5120640" cy="320040"/>
           </a:xfrm>
           <a:prstGeom prst="rect">
             <a:avLst/>
@@ -6083,27 +6066,126 @@
               </a:lnSpc>
             </a:pPr>
             <a:r>
-              <a:rPr sz="1000" b="0" i="0">
-                <a:solidFill>
-                  <a:srgbClr val="8EA7BA"/>
-                </a:solidFill>
-                <a:latin typeface="Calibri"/>
-              </a:rPr>
-              <a:t>SDR Demo -- GNU Radio + HackRF + Ham Handheld</a:t>
-            </a:r>
-          </a:p>
-        </p:txBody>
-      </p:sp>
-      <p:sp>
-        <p:nvSpPr>
-          <p:cNvPr id="8" name="TextBox 7"/>
+              <a:rPr sz="1600" b="1" i="0">
+                <a:solidFill>
+                  <a:srgbClr val="35D0BA"/>
+                </a:solidFill>
+                <a:latin typeface="Calibri"/>
+              </a:rPr>
+              <a:t>Bigger swings</a:t>
+            </a:r>
+          </a:p>
+        </p:txBody>
+      </p:sp>
+      <p:sp>
+        <p:nvSpPr>
+          <p:cNvPr id="9" name="TextBox 8"/>
           <p:cNvSpPr txBox="1"/>
           <p:nvPr/>
         </p:nvSpPr>
         <p:spPr>
           <a:xfrm>
-            <a:off x="11292840" y="6473952"/>
-            <a:ext cx="731520" cy="274320"/>
+            <a:off x="6309360" y="2286000"/>
+            <a:ext cx="5120640" cy="3474720"/>
+          </a:xfrm>
+          <a:prstGeom prst="rect">
+            <a:avLst/>
+          </a:prstGeom>
+          <a:noFill/>
+        </p:spPr>
+        <p:txBody>
+          <a:bodyPr wrap="square">
+            <a:spAutoFit/>
+          </a:bodyPr>
+          <a:lstStyle/>
+          <a:p>
+            <a:pPr>
+              <a:lnSpc>
+                <a:spcPct val="112000"/>
+              </a:lnSpc>
+              <a:spcAft>
+                <a:spcPts val="1400"/>
+              </a:spcAft>
+            </a:pPr>
+            <a:r>
+              <a:rPr sz="1700">
+                <a:solidFill>
+                  <a:srgbClr val="D7E3EC"/>
+                </a:solidFill>
+                <a:latin typeface="Calibri"/>
+              </a:rPr>
+              <a:t>•  WSPR / FT8 weak-signal decode</a:t>
+            </a:r>
+          </a:p>
+          <a:p>
+            <a:pPr>
+              <a:lnSpc>
+                <a:spcPct val="112000"/>
+              </a:lnSpc>
+              <a:spcAft>
+                <a:spcPts val="1400"/>
+              </a:spcAft>
+            </a:pPr>
+            <a:r>
+              <a:rPr sz="1700">
+                <a:solidFill>
+                  <a:srgbClr val="D7E3EC"/>
+                </a:solidFill>
+                <a:latin typeface="Calibri"/>
+              </a:rPr>
+              <a:t>•  ADS-B aircraft tracking (1090 MHz)</a:t>
+            </a:r>
+          </a:p>
+          <a:p>
+            <a:pPr>
+              <a:lnSpc>
+                <a:spcPct val="112000"/>
+              </a:lnSpc>
+              <a:spcAft>
+                <a:spcPts val="1400"/>
+              </a:spcAft>
+            </a:pPr>
+            <a:r>
+              <a:rPr sz="1700">
+                <a:solidFill>
+                  <a:srgbClr val="D7E3EC"/>
+                </a:solidFill>
+                <a:latin typeface="Calibri"/>
+              </a:rPr>
+              <a:t>•  Cross-band digital repeater</a:t>
+            </a:r>
+          </a:p>
+          <a:p>
+            <a:pPr>
+              <a:lnSpc>
+                <a:spcPct val="112000"/>
+              </a:lnSpc>
+              <a:spcAft>
+                <a:spcPts val="1400"/>
+              </a:spcAft>
+            </a:pPr>
+            <a:r>
+              <a:rPr sz="1700">
+                <a:solidFill>
+                  <a:srgbClr val="D7E3EC"/>
+                </a:solidFill>
+                <a:latin typeface="Calibri"/>
+              </a:rPr>
+              <a:t>•  Digital voice (DMR / D-STAR) decode</a:t>
+            </a:r>
+          </a:p>
+        </p:txBody>
+      </p:sp>
+      <p:sp>
+        <p:nvSpPr>
+          <p:cNvPr id="10" name="TextBox 9"/>
+          <p:cNvSpPr txBox="1"/>
+          <p:nvPr/>
+        </p:nvSpPr>
+        <p:spPr>
+          <a:xfrm>
+            <a:off x="640080" y="5943600"/>
+            <a:ext cx="10058400" cy="365760"/>
           </a:xfrm>
           <a:prstGeom prst="rect">
             <a:avLst/>
@@ -6116,6 +6198,84 @@
           </a:bodyPr>
           <a:lstStyle/>
           <a:p>
+            <a:pPr algn="l">
+              <a:lnSpc>
+                <a:spcPct val="115000"/>
+              </a:lnSpc>
+            </a:pPr>
+            <a:r>
+              <a:rPr sz="1300" b="0" i="1">
+                <a:solidFill>
+                  <a:srgbClr val="8EA7BA"/>
+                </a:solidFill>
+                <a:latin typeface="Calibri"/>
+              </a:rPr>
+              <a:t>Full writeup with effort/dependency notes: BRAINSTORM.md</a:t>
+            </a:r>
+          </a:p>
+        </p:txBody>
+      </p:sp>
+      <p:sp>
+        <p:nvSpPr>
+          <p:cNvPr id="11" name="TextBox 10"/>
+          <p:cNvSpPr txBox="1"/>
+          <p:nvPr/>
+        </p:nvSpPr>
+        <p:spPr>
+          <a:xfrm>
+            <a:off x="640080" y="6473952"/>
+            <a:ext cx="7315200" cy="274320"/>
+          </a:xfrm>
+          <a:prstGeom prst="rect">
+            <a:avLst/>
+          </a:prstGeom>
+          <a:noFill/>
+        </p:spPr>
+        <p:txBody>
+          <a:bodyPr wrap="square" anchor="t" lIns="0" rIns="0" tIns="0" bIns="0">
+            <a:spAutoFit/>
+          </a:bodyPr>
+          <a:lstStyle/>
+          <a:p>
+            <a:pPr algn="l">
+              <a:lnSpc>
+                <a:spcPct val="115000"/>
+              </a:lnSpc>
+            </a:pPr>
+            <a:r>
+              <a:rPr sz="1000" b="0" i="0">
+                <a:solidFill>
+                  <a:srgbClr val="8EA7BA"/>
+                </a:solidFill>
+                <a:latin typeface="Calibri"/>
+              </a:rPr>
+              <a:t>SDR Demo -- GNU Radio + HackRF + Ham Handheld</a:t>
+            </a:r>
+          </a:p>
+        </p:txBody>
+      </p:sp>
+      <p:sp>
+        <p:nvSpPr>
+          <p:cNvPr id="12" name="TextBox 11"/>
+          <p:cNvSpPr txBox="1"/>
+          <p:nvPr/>
+        </p:nvSpPr>
+        <p:spPr>
+          <a:xfrm>
+            <a:off x="11292840" y="6473952"/>
+            <a:ext cx="731520" cy="274320"/>
+          </a:xfrm>
+          <a:prstGeom prst="rect">
+            <a:avLst/>
+          </a:prstGeom>
+          <a:noFill/>
+        </p:spPr>
+        <p:txBody>
+          <a:bodyPr wrap="square" anchor="t" lIns="0" rIns="0" tIns="0" bIns="0">
+            <a:spAutoFit/>
+          </a:bodyPr>
+          <a:lstStyle/>
+          <a:p>
             <a:pPr algn="r">
               <a:lnSpc>
                 <a:spcPct val="115000"/>
@@ -6128,7 +6288,7 @@
                 </a:solidFill>
                 <a:latin typeface="Calibri"/>
               </a:rPr>
-              <a:t>15 / 20</a:t>
+              <a:t>15 / 19</a:t>
             </a:r>
           </a:p>
         </p:txBody>
@@ -6229,7 +6389,7 @@
                 </a:solidFill>
                 <a:latin typeface="Calibri"/>
               </a:rPr>
-              <a:t>WHERE THIS GOES NEXT</a:t>
+              <a:t>REFERENCE</a:t>
             </a:r>
           </a:p>
         </p:txBody>
@@ -6268,7 +6428,7 @@
                 </a:solidFill>
                 <a:latin typeface="Calibri"/>
               </a:rPr>
-              <a:t>More Demo Ideas</a:t>
+              <a:t>Specs at a Glance</a:t>
             </a:r>
           </a:p>
         </p:txBody>
@@ -6319,14 +6479,868 @@
       </p:sp>
       <p:sp>
         <p:nvSpPr>
-          <p:cNvPr id="6" name="TextBox 5"/>
+          <p:cNvPr id="6" name="Rectangle 5"/>
+          <p:cNvSpPr/>
+          <p:nvPr/>
+        </p:nvSpPr>
+        <p:spPr>
+          <a:xfrm>
+            <a:off x="640080" y="1920240"/>
+            <a:ext cx="10881360" cy="566928"/>
+          </a:xfrm>
+          <a:prstGeom prst="rect">
+            <a:avLst/>
+          </a:prstGeom>
+          <a:solidFill>
+            <a:srgbClr val="0F2438"/>
+          </a:solidFill>
+          <a:ln>
+            <a:noFill/>
+          </a:ln>
+          <a:effectLst/>
+        </p:spPr>
+        <p:style>
+          <a:lnRef idx="1">
+            <a:schemeClr val="accent1"/>
+          </a:lnRef>
+          <a:fillRef idx="3">
+            <a:schemeClr val="accent1"/>
+          </a:fillRef>
+          <a:effectRef idx="2">
+            <a:schemeClr val="accent1"/>
+          </a:effectRef>
+          <a:fontRef idx="minor">
+            <a:schemeClr val="lt1"/>
+          </a:fontRef>
+        </p:style>
+        <p:txBody>
+          <a:bodyPr rtlCol="0" anchor="ctr"/>
+          <a:lstStyle/>
+          <a:p>
+            <a:pPr algn="ctr"/>
+          </a:p>
+        </p:txBody>
+      </p:sp>
+      <p:sp>
+        <p:nvSpPr>
+          <p:cNvPr id="7" name="TextBox 6"/>
           <p:cNvSpPr txBox="1"/>
           <p:nvPr/>
         </p:nvSpPr>
         <p:spPr>
           <a:xfrm>
-            <a:off x="640080" y="1874519"/>
-            <a:ext cx="5120640" cy="320040"/>
+            <a:off x="868680" y="1920240"/>
+            <a:ext cx="4114800" cy="566928"/>
+          </a:xfrm>
+          <a:prstGeom prst="rect">
+            <a:avLst/>
+          </a:prstGeom>
+          <a:noFill/>
+        </p:spPr>
+        <p:txBody>
+          <a:bodyPr wrap="square" anchor="ctr" lIns="0" rIns="0" tIns="0" bIns="0">
+            <a:spAutoFit/>
+          </a:bodyPr>
+          <a:lstStyle/>
+          <a:p>
+            <a:pPr algn="l">
+              <a:lnSpc>
+                <a:spcPct val="115000"/>
+              </a:lnSpc>
+            </a:pPr>
+            <a:r>
+              <a:rPr sz="1500" b="1" i="0">
+                <a:solidFill>
+                  <a:srgbClr val="35D0BA"/>
+                </a:solidFill>
+                <a:latin typeface="Calibri"/>
+              </a:rPr>
+              <a:t>Frequency range</a:t>
+            </a:r>
+          </a:p>
+        </p:txBody>
+      </p:sp>
+      <p:sp>
+        <p:nvSpPr>
+          <p:cNvPr id="8" name="TextBox 7"/>
+          <p:cNvSpPr txBox="1"/>
+          <p:nvPr/>
+        </p:nvSpPr>
+        <p:spPr>
+          <a:xfrm>
+            <a:off x="5212080" y="1920240"/>
+            <a:ext cx="6126480" cy="566928"/>
+          </a:xfrm>
+          <a:prstGeom prst="rect">
+            <a:avLst/>
+          </a:prstGeom>
+          <a:noFill/>
+        </p:spPr>
+        <p:txBody>
+          <a:bodyPr wrap="square" anchor="ctr" lIns="0" rIns="0" tIns="0" bIns="0">
+            <a:spAutoFit/>
+          </a:bodyPr>
+          <a:lstStyle/>
+          <a:p>
+            <a:pPr algn="l">
+              <a:lnSpc>
+                <a:spcPct val="115000"/>
+              </a:lnSpc>
+            </a:pPr>
+            <a:r>
+              <a:rPr sz="1500" b="0" i="0">
+                <a:solidFill>
+                  <a:srgbClr val="D7E3EC"/>
+                </a:solidFill>
+                <a:latin typeface="Calibri"/>
+              </a:rPr>
+              <a:t>1 MHz – 6 GHz (HackRF One)</a:t>
+            </a:r>
+          </a:p>
+        </p:txBody>
+      </p:sp>
+      <p:sp>
+        <p:nvSpPr>
+          <p:cNvPr id="9" name="Rectangle 8"/>
+          <p:cNvSpPr/>
+          <p:nvPr/>
+        </p:nvSpPr>
+        <p:spPr>
+          <a:xfrm>
+            <a:off x="640080" y="2487168"/>
+            <a:ext cx="10881360" cy="566928"/>
+          </a:xfrm>
+          <a:prstGeom prst="rect">
+            <a:avLst/>
+          </a:prstGeom>
+          <a:solidFill>
+            <a:srgbClr val="0A1929"/>
+          </a:solidFill>
+          <a:ln>
+            <a:noFill/>
+          </a:ln>
+          <a:effectLst/>
+        </p:spPr>
+        <p:style>
+          <a:lnRef idx="1">
+            <a:schemeClr val="accent1"/>
+          </a:lnRef>
+          <a:fillRef idx="3">
+            <a:schemeClr val="accent1"/>
+          </a:fillRef>
+          <a:effectRef idx="2">
+            <a:schemeClr val="accent1"/>
+          </a:effectRef>
+          <a:fontRef idx="minor">
+            <a:schemeClr val="lt1"/>
+          </a:fontRef>
+        </p:style>
+        <p:txBody>
+          <a:bodyPr rtlCol="0" anchor="ctr"/>
+          <a:lstStyle/>
+          <a:p>
+            <a:pPr algn="ctr"/>
+          </a:p>
+        </p:txBody>
+      </p:sp>
+      <p:sp>
+        <p:nvSpPr>
+          <p:cNvPr id="10" name="TextBox 9"/>
+          <p:cNvSpPr txBox="1"/>
+          <p:nvPr/>
+        </p:nvSpPr>
+        <p:spPr>
+          <a:xfrm>
+            <a:off x="868680" y="2487168"/>
+            <a:ext cx="4114800" cy="566928"/>
+          </a:xfrm>
+          <a:prstGeom prst="rect">
+            <a:avLst/>
+          </a:prstGeom>
+          <a:noFill/>
+        </p:spPr>
+        <p:txBody>
+          <a:bodyPr wrap="square" anchor="ctr" lIns="0" rIns="0" tIns="0" bIns="0">
+            <a:spAutoFit/>
+          </a:bodyPr>
+          <a:lstStyle/>
+          <a:p>
+            <a:pPr algn="l">
+              <a:lnSpc>
+                <a:spcPct val="115000"/>
+              </a:lnSpc>
+            </a:pPr>
+            <a:r>
+              <a:rPr sz="1500" b="1" i="0">
+                <a:solidFill>
+                  <a:srgbClr val="35D0BA"/>
+                </a:solidFill>
+                <a:latin typeface="Calibri"/>
+              </a:rPr>
+              <a:t>Sample rate used today</a:t>
+            </a:r>
+          </a:p>
+        </p:txBody>
+      </p:sp>
+      <p:sp>
+        <p:nvSpPr>
+          <p:cNvPr id="11" name="TextBox 10"/>
+          <p:cNvSpPr txBox="1"/>
+          <p:nvPr/>
+        </p:nvSpPr>
+        <p:spPr>
+          <a:xfrm>
+            <a:off x="5212080" y="2487168"/>
+            <a:ext cx="6126480" cy="566928"/>
+          </a:xfrm>
+          <a:prstGeom prst="rect">
+            <a:avLst/>
+          </a:prstGeom>
+          <a:noFill/>
+        </p:spPr>
+        <p:txBody>
+          <a:bodyPr wrap="square" anchor="ctr" lIns="0" rIns="0" tIns="0" bIns="0">
+            <a:spAutoFit/>
+          </a:bodyPr>
+          <a:lstStyle/>
+          <a:p>
+            <a:pPr algn="l">
+              <a:lnSpc>
+                <a:spcPct val="115000"/>
+              </a:lnSpc>
+            </a:pPr>
+            <a:r>
+              <a:rPr sz="1500" b="0" i="0">
+                <a:solidFill>
+                  <a:srgbClr val="D7E3EC"/>
+                </a:solidFill>
+                <a:latin typeface="Calibri"/>
+              </a:rPr>
+              <a:t>2–10 Msps depending on demo</a:t>
+            </a:r>
+          </a:p>
+        </p:txBody>
+      </p:sp>
+      <p:sp>
+        <p:nvSpPr>
+          <p:cNvPr id="12" name="Rectangle 11"/>
+          <p:cNvSpPr/>
+          <p:nvPr/>
+        </p:nvSpPr>
+        <p:spPr>
+          <a:xfrm>
+            <a:off x="640080" y="3054096"/>
+            <a:ext cx="10881360" cy="566928"/>
+          </a:xfrm>
+          <a:prstGeom prst="rect">
+            <a:avLst/>
+          </a:prstGeom>
+          <a:solidFill>
+            <a:srgbClr val="0F2438"/>
+          </a:solidFill>
+          <a:ln>
+            <a:noFill/>
+          </a:ln>
+          <a:effectLst/>
+        </p:spPr>
+        <p:style>
+          <a:lnRef idx="1">
+            <a:schemeClr val="accent1"/>
+          </a:lnRef>
+          <a:fillRef idx="3">
+            <a:schemeClr val="accent1"/>
+          </a:fillRef>
+          <a:effectRef idx="2">
+            <a:schemeClr val="accent1"/>
+          </a:effectRef>
+          <a:fontRef idx="minor">
+            <a:schemeClr val="lt1"/>
+          </a:fontRef>
+        </p:style>
+        <p:txBody>
+          <a:bodyPr rtlCol="0" anchor="ctr"/>
+          <a:lstStyle/>
+          <a:p>
+            <a:pPr algn="ctr"/>
+          </a:p>
+        </p:txBody>
+      </p:sp>
+      <p:sp>
+        <p:nvSpPr>
+          <p:cNvPr id="13" name="TextBox 12"/>
+          <p:cNvSpPr txBox="1"/>
+          <p:nvPr/>
+        </p:nvSpPr>
+        <p:spPr>
+          <a:xfrm>
+            <a:off x="868680" y="3054096"/>
+            <a:ext cx="4114800" cy="566928"/>
+          </a:xfrm>
+          <a:prstGeom prst="rect">
+            <a:avLst/>
+          </a:prstGeom>
+          <a:noFill/>
+        </p:spPr>
+        <p:txBody>
+          <a:bodyPr wrap="square" anchor="ctr" lIns="0" rIns="0" tIns="0" bIns="0">
+            <a:spAutoFit/>
+          </a:bodyPr>
+          <a:lstStyle/>
+          <a:p>
+            <a:pPr algn="l">
+              <a:lnSpc>
+                <a:spcPct val="115000"/>
+              </a:lnSpc>
+            </a:pPr>
+            <a:r>
+              <a:rPr sz="1500" b="1" i="0">
+                <a:solidFill>
+                  <a:srgbClr val="35D0BA"/>
+                </a:solidFill>
+                <a:latin typeface="Calibri"/>
+              </a:rPr>
+              <a:t>2m band</a:t>
+            </a:r>
+          </a:p>
+        </p:txBody>
+      </p:sp>
+      <p:sp>
+        <p:nvSpPr>
+          <p:cNvPr id="14" name="TextBox 13"/>
+          <p:cNvSpPr txBox="1"/>
+          <p:nvPr/>
+        </p:nvSpPr>
+        <p:spPr>
+          <a:xfrm>
+            <a:off x="5212080" y="3054096"/>
+            <a:ext cx="6126480" cy="566928"/>
+          </a:xfrm>
+          <a:prstGeom prst="rect">
+            <a:avLst/>
+          </a:prstGeom>
+          <a:noFill/>
+        </p:spPr>
+        <p:txBody>
+          <a:bodyPr wrap="square" anchor="ctr" lIns="0" rIns="0" tIns="0" bIns="0">
+            <a:spAutoFit/>
+          </a:bodyPr>
+          <a:lstStyle/>
+          <a:p>
+            <a:pPr algn="l">
+              <a:lnSpc>
+                <a:spcPct val="115000"/>
+              </a:lnSpc>
+            </a:pPr>
+            <a:r>
+              <a:rPr sz="1500" b="0" i="0">
+                <a:solidFill>
+                  <a:srgbClr val="D7E3EC"/>
+                </a:solidFill>
+                <a:latin typeface="Calibri"/>
+              </a:rPr>
+              <a:t>144.000 – 148.000 MHz</a:t>
+            </a:r>
+          </a:p>
+        </p:txBody>
+      </p:sp>
+      <p:sp>
+        <p:nvSpPr>
+          <p:cNvPr id="15" name="Rectangle 14"/>
+          <p:cNvSpPr/>
+          <p:nvPr/>
+        </p:nvSpPr>
+        <p:spPr>
+          <a:xfrm>
+            <a:off x="640080" y="3621024"/>
+            <a:ext cx="10881360" cy="566928"/>
+          </a:xfrm>
+          <a:prstGeom prst="rect">
+            <a:avLst/>
+          </a:prstGeom>
+          <a:solidFill>
+            <a:srgbClr val="0A1929"/>
+          </a:solidFill>
+          <a:ln>
+            <a:noFill/>
+          </a:ln>
+          <a:effectLst/>
+        </p:spPr>
+        <p:style>
+          <a:lnRef idx="1">
+            <a:schemeClr val="accent1"/>
+          </a:lnRef>
+          <a:fillRef idx="3">
+            <a:schemeClr val="accent1"/>
+          </a:fillRef>
+          <a:effectRef idx="2">
+            <a:schemeClr val="accent1"/>
+          </a:effectRef>
+          <a:fontRef idx="minor">
+            <a:schemeClr val="lt1"/>
+          </a:fontRef>
+        </p:style>
+        <p:txBody>
+          <a:bodyPr rtlCol="0" anchor="ctr"/>
+          <a:lstStyle/>
+          <a:p>
+            <a:pPr algn="ctr"/>
+          </a:p>
+        </p:txBody>
+      </p:sp>
+      <p:sp>
+        <p:nvSpPr>
+          <p:cNvPr id="16" name="TextBox 15"/>
+          <p:cNvSpPr txBox="1"/>
+          <p:nvPr/>
+        </p:nvSpPr>
+        <p:spPr>
+          <a:xfrm>
+            <a:off x="868680" y="3621024"/>
+            <a:ext cx="4114800" cy="566928"/>
+          </a:xfrm>
+          <a:prstGeom prst="rect">
+            <a:avLst/>
+          </a:prstGeom>
+          <a:noFill/>
+        </p:spPr>
+        <p:txBody>
+          <a:bodyPr wrap="square" anchor="ctr" lIns="0" rIns="0" tIns="0" bIns="0">
+            <a:spAutoFit/>
+          </a:bodyPr>
+          <a:lstStyle/>
+          <a:p>
+            <a:pPr algn="l">
+              <a:lnSpc>
+                <a:spcPct val="115000"/>
+              </a:lnSpc>
+            </a:pPr>
+            <a:r>
+              <a:rPr sz="1500" b="1" i="0">
+                <a:solidFill>
+                  <a:srgbClr val="35D0BA"/>
+                </a:solidFill>
+                <a:latin typeface="Calibri"/>
+              </a:rPr>
+              <a:t>70cm band</a:t>
+            </a:r>
+          </a:p>
+        </p:txBody>
+      </p:sp>
+      <p:sp>
+        <p:nvSpPr>
+          <p:cNvPr id="17" name="TextBox 16"/>
+          <p:cNvSpPr txBox="1"/>
+          <p:nvPr/>
+        </p:nvSpPr>
+        <p:spPr>
+          <a:xfrm>
+            <a:off x="5212080" y="3621024"/>
+            <a:ext cx="6126480" cy="566928"/>
+          </a:xfrm>
+          <a:prstGeom prst="rect">
+            <a:avLst/>
+          </a:prstGeom>
+          <a:noFill/>
+        </p:spPr>
+        <p:txBody>
+          <a:bodyPr wrap="square" anchor="ctr" lIns="0" rIns="0" tIns="0" bIns="0">
+            <a:spAutoFit/>
+          </a:bodyPr>
+          <a:lstStyle/>
+          <a:p>
+            <a:pPr algn="l">
+              <a:lnSpc>
+                <a:spcPct val="115000"/>
+              </a:lnSpc>
+            </a:pPr>
+            <a:r>
+              <a:rPr sz="1500" b="0" i="0">
+                <a:solidFill>
+                  <a:srgbClr val="D7E3EC"/>
+                </a:solidFill>
+                <a:latin typeface="Calibri"/>
+              </a:rPr>
+              <a:t>420.000 – 450.000 MHz</a:t>
+            </a:r>
+          </a:p>
+        </p:txBody>
+      </p:sp>
+      <p:sp>
+        <p:nvSpPr>
+          <p:cNvPr id="18" name="Rectangle 17"/>
+          <p:cNvSpPr/>
+          <p:nvPr/>
+        </p:nvSpPr>
+        <p:spPr>
+          <a:xfrm>
+            <a:off x="640080" y="4187952"/>
+            <a:ext cx="10881360" cy="566928"/>
+          </a:xfrm>
+          <a:prstGeom prst="rect">
+            <a:avLst/>
+          </a:prstGeom>
+          <a:solidFill>
+            <a:srgbClr val="0F2438"/>
+          </a:solidFill>
+          <a:ln>
+            <a:noFill/>
+          </a:ln>
+          <a:effectLst/>
+        </p:spPr>
+        <p:style>
+          <a:lnRef idx="1">
+            <a:schemeClr val="accent1"/>
+          </a:lnRef>
+          <a:fillRef idx="3">
+            <a:schemeClr val="accent1"/>
+          </a:fillRef>
+          <a:effectRef idx="2">
+            <a:schemeClr val="accent1"/>
+          </a:effectRef>
+          <a:fontRef idx="minor">
+            <a:schemeClr val="lt1"/>
+          </a:fontRef>
+        </p:style>
+        <p:txBody>
+          <a:bodyPr rtlCol="0" anchor="ctr"/>
+          <a:lstStyle/>
+          <a:p>
+            <a:pPr algn="ctr"/>
+          </a:p>
+        </p:txBody>
+      </p:sp>
+      <p:sp>
+        <p:nvSpPr>
+          <p:cNvPr id="19" name="TextBox 18"/>
+          <p:cNvSpPr txBox="1"/>
+          <p:nvPr/>
+        </p:nvSpPr>
+        <p:spPr>
+          <a:xfrm>
+            <a:off x="868680" y="4187952"/>
+            <a:ext cx="4114800" cy="566928"/>
+          </a:xfrm>
+          <a:prstGeom prst="rect">
+            <a:avLst/>
+          </a:prstGeom>
+          <a:noFill/>
+        </p:spPr>
+        <p:txBody>
+          <a:bodyPr wrap="square" anchor="ctr" lIns="0" rIns="0" tIns="0" bIns="0">
+            <a:spAutoFit/>
+          </a:bodyPr>
+          <a:lstStyle/>
+          <a:p>
+            <a:pPr algn="l">
+              <a:lnSpc>
+                <a:spcPct val="115000"/>
+              </a:lnSpc>
+            </a:pPr>
+            <a:r>
+              <a:rPr sz="1500" b="1" i="0">
+                <a:solidFill>
+                  <a:srgbClr val="35D0BA"/>
+                </a:solidFill>
+                <a:latin typeface="Calibri"/>
+              </a:rPr>
+              <a:t>2m simplex calling freq</a:t>
+            </a:r>
+          </a:p>
+        </p:txBody>
+      </p:sp>
+      <p:sp>
+        <p:nvSpPr>
+          <p:cNvPr id="20" name="TextBox 19"/>
+          <p:cNvSpPr txBox="1"/>
+          <p:nvPr/>
+        </p:nvSpPr>
+        <p:spPr>
+          <a:xfrm>
+            <a:off x="5212080" y="4187952"/>
+            <a:ext cx="6126480" cy="566928"/>
+          </a:xfrm>
+          <a:prstGeom prst="rect">
+            <a:avLst/>
+          </a:prstGeom>
+          <a:noFill/>
+        </p:spPr>
+        <p:txBody>
+          <a:bodyPr wrap="square" anchor="ctr" lIns="0" rIns="0" tIns="0" bIns="0">
+            <a:spAutoFit/>
+          </a:bodyPr>
+          <a:lstStyle/>
+          <a:p>
+            <a:pPr algn="l">
+              <a:lnSpc>
+                <a:spcPct val="115000"/>
+              </a:lnSpc>
+            </a:pPr>
+            <a:r>
+              <a:rPr sz="1500" b="0" i="0">
+                <a:solidFill>
+                  <a:srgbClr val="D7E3EC"/>
+                </a:solidFill>
+                <a:latin typeface="Calibri"/>
+              </a:rPr>
+              <a:t>146.520 MHz</a:t>
+            </a:r>
+          </a:p>
+        </p:txBody>
+      </p:sp>
+      <p:sp>
+        <p:nvSpPr>
+          <p:cNvPr id="21" name="Rectangle 20"/>
+          <p:cNvSpPr/>
+          <p:nvPr/>
+        </p:nvSpPr>
+        <p:spPr>
+          <a:xfrm>
+            <a:off x="640080" y="4754880"/>
+            <a:ext cx="10881360" cy="566928"/>
+          </a:xfrm>
+          <a:prstGeom prst="rect">
+            <a:avLst/>
+          </a:prstGeom>
+          <a:solidFill>
+            <a:srgbClr val="0A1929"/>
+          </a:solidFill>
+          <a:ln>
+            <a:noFill/>
+          </a:ln>
+          <a:effectLst/>
+        </p:spPr>
+        <p:style>
+          <a:lnRef idx="1">
+            <a:schemeClr val="accent1"/>
+          </a:lnRef>
+          <a:fillRef idx="3">
+            <a:schemeClr val="accent1"/>
+          </a:fillRef>
+          <a:effectRef idx="2">
+            <a:schemeClr val="accent1"/>
+          </a:effectRef>
+          <a:fontRef idx="minor">
+            <a:schemeClr val="lt1"/>
+          </a:fontRef>
+        </p:style>
+        <p:txBody>
+          <a:bodyPr rtlCol="0" anchor="ctr"/>
+          <a:lstStyle/>
+          <a:p>
+            <a:pPr algn="ctr"/>
+          </a:p>
+        </p:txBody>
+      </p:sp>
+      <p:sp>
+        <p:nvSpPr>
+          <p:cNvPr id="22" name="TextBox 21"/>
+          <p:cNvSpPr txBox="1"/>
+          <p:nvPr/>
+        </p:nvSpPr>
+        <p:spPr>
+          <a:xfrm>
+            <a:off x="868680" y="4754880"/>
+            <a:ext cx="4114800" cy="566928"/>
+          </a:xfrm>
+          <a:prstGeom prst="rect">
+            <a:avLst/>
+          </a:prstGeom>
+          <a:noFill/>
+        </p:spPr>
+        <p:txBody>
+          <a:bodyPr wrap="square" anchor="ctr" lIns="0" rIns="0" tIns="0" bIns="0">
+            <a:spAutoFit/>
+          </a:bodyPr>
+          <a:lstStyle/>
+          <a:p>
+            <a:pPr algn="l">
+              <a:lnSpc>
+                <a:spcPct val="115000"/>
+              </a:lnSpc>
+            </a:pPr>
+            <a:r>
+              <a:rPr sz="1500" b="1" i="0">
+                <a:solidFill>
+                  <a:srgbClr val="35D0BA"/>
+                </a:solidFill>
+                <a:latin typeface="Calibri"/>
+              </a:rPr>
+              <a:t>Demo 3 capture</a:t>
+            </a:r>
+          </a:p>
+        </p:txBody>
+      </p:sp>
+      <p:sp>
+        <p:nvSpPr>
+          <p:cNvPr id="23" name="TextBox 22"/>
+          <p:cNvSpPr txBox="1"/>
+          <p:nvPr/>
+        </p:nvSpPr>
+        <p:spPr>
+          <a:xfrm>
+            <a:off x="5212080" y="4754880"/>
+            <a:ext cx="6126480" cy="566928"/>
+          </a:xfrm>
+          <a:prstGeom prst="rect">
+            <a:avLst/>
+          </a:prstGeom>
+          <a:noFill/>
+        </p:spPr>
+        <p:txBody>
+          <a:bodyPr wrap="square" anchor="ctr" lIns="0" rIns="0" tIns="0" bIns="0">
+            <a:spAutoFit/>
+          </a:bodyPr>
+          <a:lstStyle/>
+          <a:p>
+            <a:pPr algn="l">
+              <a:lnSpc>
+                <a:spcPct val="115000"/>
+              </a:lnSpc>
+            </a:pPr>
+            <a:r>
+              <a:rPr sz="1500" b="0" i="0">
+                <a:solidFill>
+                  <a:srgbClr val="D7E3EC"/>
+                </a:solidFill>
+                <a:latin typeface="Calibri"/>
+              </a:rPr>
+              <a:t>146.0 MHz center @ 6 Msps ≈ 2.9 GB/min</a:t>
+            </a:r>
+          </a:p>
+        </p:txBody>
+      </p:sp>
+      <p:sp>
+        <p:nvSpPr>
+          <p:cNvPr id="24" name="Rectangle 23"/>
+          <p:cNvSpPr/>
+          <p:nvPr/>
+        </p:nvSpPr>
+        <p:spPr>
+          <a:xfrm>
+            <a:off x="640080" y="5321808"/>
+            <a:ext cx="10881360" cy="566928"/>
+          </a:xfrm>
+          <a:prstGeom prst="rect">
+            <a:avLst/>
+          </a:prstGeom>
+          <a:solidFill>
+            <a:srgbClr val="0F2438"/>
+          </a:solidFill>
+          <a:ln>
+            <a:noFill/>
+          </a:ln>
+          <a:effectLst/>
+        </p:spPr>
+        <p:style>
+          <a:lnRef idx="1">
+            <a:schemeClr val="accent1"/>
+          </a:lnRef>
+          <a:fillRef idx="3">
+            <a:schemeClr val="accent1"/>
+          </a:fillRef>
+          <a:effectRef idx="2">
+            <a:schemeClr val="accent1"/>
+          </a:effectRef>
+          <a:fontRef idx="minor">
+            <a:schemeClr val="lt1"/>
+          </a:fontRef>
+        </p:style>
+        <p:txBody>
+          <a:bodyPr rtlCol="0" anchor="ctr"/>
+          <a:lstStyle/>
+          <a:p>
+            <a:pPr algn="ctr"/>
+          </a:p>
+        </p:txBody>
+      </p:sp>
+      <p:sp>
+        <p:nvSpPr>
+          <p:cNvPr id="25" name="TextBox 24"/>
+          <p:cNvSpPr txBox="1"/>
+          <p:nvPr/>
+        </p:nvSpPr>
+        <p:spPr>
+          <a:xfrm>
+            <a:off x="868680" y="5321808"/>
+            <a:ext cx="4114800" cy="566928"/>
+          </a:xfrm>
+          <a:prstGeom prst="rect">
+            <a:avLst/>
+          </a:prstGeom>
+          <a:noFill/>
+        </p:spPr>
+        <p:txBody>
+          <a:bodyPr wrap="square" anchor="ctr" lIns="0" rIns="0" tIns="0" bIns="0">
+            <a:spAutoFit/>
+          </a:bodyPr>
+          <a:lstStyle/>
+          <a:p>
+            <a:pPr algn="l">
+              <a:lnSpc>
+                <a:spcPct val="115000"/>
+              </a:lnSpc>
+            </a:pPr>
+            <a:r>
+              <a:rPr sz="1500" b="1" i="0">
+                <a:solidFill>
+                  <a:srgbClr val="35D0BA"/>
+                </a:solidFill>
+                <a:latin typeface="Calibri"/>
+              </a:rPr>
+              <a:t>HackRF TX power (typical)</a:t>
+            </a:r>
+          </a:p>
+        </p:txBody>
+      </p:sp>
+      <p:sp>
+        <p:nvSpPr>
+          <p:cNvPr id="26" name="TextBox 25"/>
+          <p:cNvSpPr txBox="1"/>
+          <p:nvPr/>
+        </p:nvSpPr>
+        <p:spPr>
+          <a:xfrm>
+            <a:off x="5212080" y="5321808"/>
+            <a:ext cx="6126480" cy="566928"/>
+          </a:xfrm>
+          <a:prstGeom prst="rect">
+            <a:avLst/>
+          </a:prstGeom>
+          <a:noFill/>
+        </p:spPr>
+        <p:txBody>
+          <a:bodyPr wrap="square" anchor="ctr" lIns="0" rIns="0" tIns="0" bIns="0">
+            <a:spAutoFit/>
+          </a:bodyPr>
+          <a:lstStyle/>
+          <a:p>
+            <a:pPr algn="l">
+              <a:lnSpc>
+                <a:spcPct val="115000"/>
+              </a:lnSpc>
+            </a:pPr>
+            <a:r>
+              <a:rPr sz="1500" b="0" i="0">
+                <a:solidFill>
+                  <a:srgbClr val="D7E3EC"/>
+                </a:solidFill>
+                <a:latin typeface="Calibri"/>
+              </a:rPr>
+              <a:t>≈ 10–15 dBm max, kept low for these demos</a:t>
+            </a:r>
+          </a:p>
+        </p:txBody>
+      </p:sp>
+      <p:sp>
+        <p:nvSpPr>
+          <p:cNvPr id="27" name="TextBox 26"/>
+          <p:cNvSpPr txBox="1"/>
+          <p:nvPr/>
+        </p:nvSpPr>
+        <p:spPr>
+          <a:xfrm>
+            <a:off x="640080" y="6473952"/>
+            <a:ext cx="7315200" cy="274320"/>
           </a:xfrm>
           <a:prstGeom prst="rect">
             <a:avLst/>
@@ -6345,126 +7359,27 @@
               </a:lnSpc>
             </a:pPr>
             <a:r>
-              <a:rPr sz="1600" b="1" i="0">
-                <a:solidFill>
-                  <a:srgbClr val="35D0BA"/>
-                </a:solidFill>
-                <a:latin typeface="Calibri"/>
-              </a:rPr>
-              <a:t>Quick wins</a:t>
-            </a:r>
-          </a:p>
-        </p:txBody>
-      </p:sp>
-      <p:sp>
-        <p:nvSpPr>
-          <p:cNvPr id="7" name="TextBox 6"/>
+              <a:rPr sz="1000" b="0" i="0">
+                <a:solidFill>
+                  <a:srgbClr val="8EA7BA"/>
+                </a:solidFill>
+                <a:latin typeface="Calibri"/>
+              </a:rPr>
+              <a:t>SDR Demo -- GNU Radio + HackRF + Ham Handheld</a:t>
+            </a:r>
+          </a:p>
+        </p:txBody>
+      </p:sp>
+      <p:sp>
+        <p:nvSpPr>
+          <p:cNvPr id="28" name="TextBox 27"/>
           <p:cNvSpPr txBox="1"/>
           <p:nvPr/>
         </p:nvSpPr>
         <p:spPr>
           <a:xfrm>
-            <a:off x="640080" y="2286000"/>
-            <a:ext cx="5120640" cy="3474720"/>
-          </a:xfrm>
-          <a:prstGeom prst="rect">
-            <a:avLst/>
-          </a:prstGeom>
-          <a:noFill/>
-        </p:spPr>
-        <p:txBody>
-          <a:bodyPr wrap="square">
-            <a:spAutoFit/>
-          </a:bodyPr>
-          <a:lstStyle/>
-          <a:p>
-            <a:pPr>
-              <a:lnSpc>
-                <a:spcPct val="112000"/>
-              </a:lnSpc>
-              <a:spcAft>
-                <a:spcPts val="1400"/>
-              </a:spcAft>
-            </a:pPr>
-            <a:r>
-              <a:rPr sz="1700">
-                <a:solidFill>
-                  <a:srgbClr val="D7E3EC"/>
-                </a:solidFill>
-                <a:latin typeface="Calibri"/>
-              </a:rPr>
-              <a:t>•  CTCSS/PL tone squelch decode</a:t>
-            </a:r>
-          </a:p>
-          <a:p>
-            <a:pPr>
-              <a:lnSpc>
-                <a:spcPct val="112000"/>
-              </a:lnSpc>
-              <a:spcAft>
-                <a:spcPts val="1400"/>
-              </a:spcAft>
-            </a:pPr>
-            <a:r>
-              <a:rPr sz="1700">
-                <a:solidFill>
-                  <a:srgbClr val="D7E3EC"/>
-                </a:solidFill>
-                <a:latin typeface="Calibri"/>
-              </a:rPr>
-              <a:t>•  CW (Morse) ID transmitter</a:t>
-            </a:r>
-          </a:p>
-          <a:p>
-            <a:pPr>
-              <a:lnSpc>
-                <a:spcPct val="112000"/>
-              </a:lnSpc>
-              <a:spcAft>
-                <a:spcPts val="1400"/>
-              </a:spcAft>
-            </a:pPr>
-            <a:r>
-              <a:rPr sz="1700">
-                <a:solidFill>
-                  <a:srgbClr val="D7E3EC"/>
-                </a:solidFill>
-                <a:latin typeface="Calibri"/>
-              </a:rPr>
-              <a:t>•  RDS decode from FM broadcast</a:t>
-            </a:r>
-          </a:p>
-          <a:p>
-            <a:pPr>
-              <a:lnSpc>
-                <a:spcPct val="112000"/>
-              </a:lnSpc>
-              <a:spcAft>
-                <a:spcPts val="1400"/>
-              </a:spcAft>
-            </a:pPr>
-            <a:r>
-              <a:rPr sz="1700">
-                <a:solidFill>
-                  <a:srgbClr val="D7E3EC"/>
-                </a:solidFill>
-                <a:latin typeface="Calibri"/>
-              </a:rPr>
-              <a:t>•  APRS decode (144.390 MHz)</a:t>
-            </a:r>
-          </a:p>
-        </p:txBody>
-      </p:sp>
-      <p:sp>
-        <p:nvSpPr>
-          <p:cNvPr id="8" name="TextBox 7"/>
-          <p:cNvSpPr txBox="1"/>
-          <p:nvPr/>
-        </p:nvSpPr>
-        <p:spPr>
-          <a:xfrm>
-            <a:off x="6309360" y="1874519"/>
-            <a:ext cx="5120640" cy="320040"/>
+            <a:off x="11292840" y="6473952"/>
+            <a:ext cx="731520" cy="274320"/>
           </a:xfrm>
           <a:prstGeom prst="rect">
             <a:avLst/>
@@ -6477,235 +7392,19 @@
           </a:bodyPr>
           <a:lstStyle/>
           <a:p>
-            <a:pPr algn="l">
+            <a:pPr algn="r">
               <a:lnSpc>
                 <a:spcPct val="115000"/>
               </a:lnSpc>
             </a:pPr>
             <a:r>
-              <a:rPr sz="1600" b="1" i="0">
-                <a:solidFill>
-                  <a:srgbClr val="35D0BA"/>
-                </a:solidFill>
-                <a:latin typeface="Calibri"/>
-              </a:rPr>
-              <a:t>Bigger swings</a:t>
-            </a:r>
-          </a:p>
-        </p:txBody>
-      </p:sp>
-      <p:sp>
-        <p:nvSpPr>
-          <p:cNvPr id="9" name="TextBox 8"/>
-          <p:cNvSpPr txBox="1"/>
-          <p:nvPr/>
-        </p:nvSpPr>
-        <p:spPr>
-          <a:xfrm>
-            <a:off x="6309360" y="2286000"/>
-            <a:ext cx="5120640" cy="3474720"/>
-          </a:xfrm>
-          <a:prstGeom prst="rect">
-            <a:avLst/>
-          </a:prstGeom>
-          <a:noFill/>
-        </p:spPr>
-        <p:txBody>
-          <a:bodyPr wrap="square">
-            <a:spAutoFit/>
-          </a:bodyPr>
-          <a:lstStyle/>
-          <a:p>
-            <a:pPr>
-              <a:lnSpc>
-                <a:spcPct val="112000"/>
-              </a:lnSpc>
-              <a:spcAft>
-                <a:spcPts val="1400"/>
-              </a:spcAft>
-            </a:pPr>
-            <a:r>
-              <a:rPr sz="1700">
-                <a:solidFill>
-                  <a:srgbClr val="D7E3EC"/>
-                </a:solidFill>
-                <a:latin typeface="Calibri"/>
-              </a:rPr>
-              <a:t>•  WSPR / FT8 weak-signal decode</a:t>
-            </a:r>
-          </a:p>
-          <a:p>
-            <a:pPr>
-              <a:lnSpc>
-                <a:spcPct val="112000"/>
-              </a:lnSpc>
-              <a:spcAft>
-                <a:spcPts val="1400"/>
-              </a:spcAft>
-            </a:pPr>
-            <a:r>
-              <a:rPr sz="1700">
-                <a:solidFill>
-                  <a:srgbClr val="D7E3EC"/>
-                </a:solidFill>
-                <a:latin typeface="Calibri"/>
-              </a:rPr>
-              <a:t>•  ADS-B aircraft tracking (1090 MHz)</a:t>
-            </a:r>
-          </a:p>
-          <a:p>
-            <a:pPr>
-              <a:lnSpc>
-                <a:spcPct val="112000"/>
-              </a:lnSpc>
-              <a:spcAft>
-                <a:spcPts val="1400"/>
-              </a:spcAft>
-            </a:pPr>
-            <a:r>
-              <a:rPr sz="1700">
-                <a:solidFill>
-                  <a:srgbClr val="D7E3EC"/>
-                </a:solidFill>
-                <a:latin typeface="Calibri"/>
-              </a:rPr>
-              <a:t>•  Cross-band digital repeater</a:t>
-            </a:r>
-          </a:p>
-          <a:p>
-            <a:pPr>
-              <a:lnSpc>
-                <a:spcPct val="112000"/>
-              </a:lnSpc>
-              <a:spcAft>
-                <a:spcPts val="1400"/>
-              </a:spcAft>
-            </a:pPr>
-            <a:r>
-              <a:rPr sz="1700">
-                <a:solidFill>
-                  <a:srgbClr val="D7E3EC"/>
-                </a:solidFill>
-                <a:latin typeface="Calibri"/>
-              </a:rPr>
-              <a:t>•  Digital voice (DMR / D-STAR) decode</a:t>
-            </a:r>
-          </a:p>
-        </p:txBody>
-      </p:sp>
-      <p:sp>
-        <p:nvSpPr>
-          <p:cNvPr id="10" name="TextBox 9"/>
-          <p:cNvSpPr txBox="1"/>
-          <p:nvPr/>
-        </p:nvSpPr>
-        <p:spPr>
-          <a:xfrm>
-            <a:off x="640080" y="5943600"/>
-            <a:ext cx="10058400" cy="365760"/>
-          </a:xfrm>
-          <a:prstGeom prst="rect">
-            <a:avLst/>
-          </a:prstGeom>
-          <a:noFill/>
-        </p:spPr>
-        <p:txBody>
-          <a:bodyPr wrap="square" anchor="t" lIns="0" rIns="0" tIns="0" bIns="0">
-            <a:spAutoFit/>
-          </a:bodyPr>
-          <a:lstStyle/>
-          <a:p>
-            <a:pPr algn="l">
-              <a:lnSpc>
-                <a:spcPct val="115000"/>
-              </a:lnSpc>
-            </a:pPr>
-            <a:r>
-              <a:rPr sz="1300" b="0" i="1">
+              <a:rPr sz="1000" b="0" i="0">
                 <a:solidFill>
                   <a:srgbClr val="8EA7BA"/>
                 </a:solidFill>
                 <a:latin typeface="Calibri"/>
               </a:rPr>
-              <a:t>Full writeup with effort/dependency notes: BRAINSTORM.md</a:t>
-            </a:r>
-          </a:p>
-        </p:txBody>
-      </p:sp>
-      <p:sp>
-        <p:nvSpPr>
-          <p:cNvPr id="11" name="TextBox 10"/>
-          <p:cNvSpPr txBox="1"/>
-          <p:nvPr/>
-        </p:nvSpPr>
-        <p:spPr>
-          <a:xfrm>
-            <a:off x="640080" y="6473952"/>
-            <a:ext cx="7315200" cy="274320"/>
-          </a:xfrm>
-          <a:prstGeom prst="rect">
-            <a:avLst/>
-          </a:prstGeom>
-          <a:noFill/>
-        </p:spPr>
-        <p:txBody>
-          <a:bodyPr wrap="square" anchor="t" lIns="0" rIns="0" tIns="0" bIns="0">
-            <a:spAutoFit/>
-          </a:bodyPr>
-          <a:lstStyle/>
-          <a:p>
-            <a:pPr algn="l">
-              <a:lnSpc>
-                <a:spcPct val="115000"/>
-              </a:lnSpc>
-            </a:pPr>
-            <a:r>
-              <a:rPr sz="1000" b="0" i="0">
-                <a:solidFill>
-                  <a:srgbClr val="8EA7BA"/>
-                </a:solidFill>
-                <a:latin typeface="Calibri"/>
-              </a:rPr>
-              <a:t>SDR Demo -- GNU Radio + HackRF + Ham Handheld</a:t>
-            </a:r>
-          </a:p>
-        </p:txBody>
-      </p:sp>
-      <p:sp>
-        <p:nvSpPr>
-          <p:cNvPr id="12" name="TextBox 11"/>
-          <p:cNvSpPr txBox="1"/>
-          <p:nvPr/>
-        </p:nvSpPr>
-        <p:spPr>
-          <a:xfrm>
-            <a:off x="11292840" y="6473952"/>
-            <a:ext cx="731520" cy="274320"/>
-          </a:xfrm>
-          <a:prstGeom prst="rect">
-            <a:avLst/>
-          </a:prstGeom>
-          <a:noFill/>
-        </p:spPr>
-        <p:txBody>
-          <a:bodyPr wrap="square" anchor="t" lIns="0" rIns="0" tIns="0" bIns="0">
-            <a:spAutoFit/>
-          </a:bodyPr>
-          <a:lstStyle/>
-          <a:p>
-            <a:pPr algn="r">
-              <a:lnSpc>
-                <a:spcPct val="115000"/>
-              </a:lnSpc>
-            </a:pPr>
-            <a:r>
-              <a:rPr sz="1000" b="0" i="0">
-                <a:solidFill>
-                  <a:srgbClr val="8EA7BA"/>
-                </a:solidFill>
-                <a:latin typeface="Calibri"/>
-              </a:rPr>
-              <a:t>16 / 20</a:t>
+              <a:t>16 / 19</a:t>
             </a:r>
           </a:p>
         </p:txBody>
@@ -6806,7 +7505,7 @@
                 </a:solidFill>
                 <a:latin typeface="Calibri"/>
               </a:rPr>
-              <a:t>REFERENCE</a:t>
+              <a:t>RESOURCES</a:t>
             </a:r>
           </a:p>
         </p:txBody>
@@ -6845,7 +7544,7 @@
                 </a:solidFill>
                 <a:latin typeface="Calibri"/>
               </a:rPr>
-              <a:t>Specs at a Glance</a:t>
+              <a:t>Go Build Something</a:t>
             </a:r>
           </a:p>
         </p:txBody>
@@ -6896,58 +7595,14 @@
       </p:sp>
       <p:sp>
         <p:nvSpPr>
-          <p:cNvPr id="6" name="Rectangle 5"/>
-          <p:cNvSpPr/>
+          <p:cNvPr id="6" name="TextBox 5"/>
+          <p:cNvSpPr txBox="1"/>
           <p:nvPr/>
         </p:nvSpPr>
         <p:spPr>
           <a:xfrm>
             <a:off x="640080" y="1920240"/>
-            <a:ext cx="10881360" cy="566928"/>
-          </a:xfrm>
-          <a:prstGeom prst="rect">
-            <a:avLst/>
-          </a:prstGeom>
-          <a:solidFill>
-            <a:srgbClr val="0F2438"/>
-          </a:solidFill>
-          <a:ln>
-            <a:noFill/>
-          </a:ln>
-          <a:effectLst/>
-        </p:spPr>
-        <p:style>
-          <a:lnRef idx="1">
-            <a:schemeClr val="accent1"/>
-          </a:lnRef>
-          <a:fillRef idx="3">
-            <a:schemeClr val="accent1"/>
-          </a:fillRef>
-          <a:effectRef idx="2">
-            <a:schemeClr val="accent1"/>
-          </a:effectRef>
-          <a:fontRef idx="minor">
-            <a:schemeClr val="lt1"/>
-          </a:fontRef>
-        </p:style>
-        <p:txBody>
-          <a:bodyPr rtlCol="0" anchor="ctr"/>
-          <a:lstStyle/>
-          <a:p>
-            <a:pPr algn="ctr"/>
-          </a:p>
-        </p:txBody>
-      </p:sp>
-      <p:sp>
-        <p:nvSpPr>
-          <p:cNvPr id="7" name="TextBox 6"/>
-          <p:cNvSpPr txBox="1"/>
-          <p:nvPr/>
-        </p:nvSpPr>
-        <p:spPr>
-          <a:xfrm>
-            <a:off x="868680" y="1920240"/>
-            <a:ext cx="4114800" cy="566928"/>
+            <a:ext cx="10698480" cy="4114800"/>
           </a:xfrm>
           <a:prstGeom prst="rect">
             <a:avLst/>
@@ -6955,802 +7610,190 @@
           <a:noFill/>
         </p:spPr>
         <p:txBody>
-          <a:bodyPr wrap="square" anchor="ctr" lIns="0" rIns="0" tIns="0" bIns="0">
+          <a:bodyPr wrap="square">
             <a:spAutoFit/>
           </a:bodyPr>
           <a:lstStyle/>
           <a:p>
-            <a:pPr algn="l">
-              <a:lnSpc>
-                <a:spcPct val="115000"/>
-              </a:lnSpc>
-            </a:pPr>
-            <a:r>
-              <a:rPr sz="1500" b="1" i="0">
-                <a:solidFill>
-                  <a:srgbClr val="35D0BA"/>
-                </a:solidFill>
-                <a:latin typeface="Calibri"/>
-              </a:rPr>
-              <a:t>Frequency range</a:t>
-            </a:r>
-          </a:p>
-        </p:txBody>
-      </p:sp>
-      <p:sp>
-        <p:nvSpPr>
-          <p:cNvPr id="8" name="TextBox 7"/>
-          <p:cNvSpPr txBox="1"/>
-          <p:nvPr/>
-        </p:nvSpPr>
-        <p:spPr>
-          <a:xfrm>
-            <a:off x="5212080" y="1920240"/>
-            <a:ext cx="6126480" cy="566928"/>
-          </a:xfrm>
-          <a:prstGeom prst="rect">
-            <a:avLst/>
-          </a:prstGeom>
-          <a:noFill/>
-        </p:spPr>
-        <p:txBody>
-          <a:bodyPr wrap="square" anchor="ctr" lIns="0" rIns="0" tIns="0" bIns="0">
-            <a:spAutoFit/>
-          </a:bodyPr>
-          <a:lstStyle/>
-          <a:p>
-            <a:pPr algn="l">
-              <a:lnSpc>
-                <a:spcPct val="115000"/>
-              </a:lnSpc>
-            </a:pPr>
-            <a:r>
-              <a:rPr sz="1500" b="0" i="0">
+            <a:pPr>
+              <a:lnSpc>
+                <a:spcPct val="112000"/>
+              </a:lnSpc>
+              <a:spcAft>
+                <a:spcPts val="1800"/>
+              </a:spcAft>
+            </a:pPr>
+            <a:r>
+              <a:rPr sz="1900">
                 <a:solidFill>
                   <a:srgbClr val="D7E3EC"/>
                 </a:solidFill>
                 <a:latin typeface="Calibri"/>
               </a:rPr>
-              <a:t>1 MHz – 6 GHz (HackRF One)</a:t>
-            </a:r>
-          </a:p>
-        </p:txBody>
-      </p:sp>
-      <p:sp>
-        <p:nvSpPr>
-          <p:cNvPr id="9" name="Rectangle 8"/>
-          <p:cNvSpPr/>
-          <p:nvPr/>
-        </p:nvSpPr>
-        <p:spPr>
-          <a:xfrm>
-            <a:off x="640080" y="2487168"/>
-            <a:ext cx="10881360" cy="566928"/>
-          </a:xfrm>
-          <a:prstGeom prst="rect">
-            <a:avLst/>
-          </a:prstGeom>
-          <a:solidFill>
-            <a:srgbClr val="0A1929"/>
-          </a:solidFill>
-          <a:ln>
-            <a:noFill/>
-          </a:ln>
-          <a:effectLst/>
-        </p:spPr>
-        <p:style>
-          <a:lnRef idx="1">
-            <a:schemeClr val="accent1"/>
-          </a:lnRef>
-          <a:fillRef idx="3">
-            <a:schemeClr val="accent1"/>
-          </a:fillRef>
-          <a:effectRef idx="2">
-            <a:schemeClr val="accent1"/>
-          </a:effectRef>
-          <a:fontRef idx="minor">
-            <a:schemeClr val="lt1"/>
-          </a:fontRef>
-        </p:style>
-        <p:txBody>
-          <a:bodyPr rtlCol="0" anchor="ctr"/>
-          <a:lstStyle/>
-          <a:p>
-            <a:pPr algn="ctr"/>
-          </a:p>
-        </p:txBody>
-      </p:sp>
-      <p:sp>
-        <p:nvSpPr>
-          <p:cNvPr id="10" name="TextBox 9"/>
-          <p:cNvSpPr txBox="1"/>
-          <p:nvPr/>
-        </p:nvSpPr>
-        <p:spPr>
-          <a:xfrm>
-            <a:off x="868680" y="2487168"/>
-            <a:ext cx="4114800" cy="566928"/>
-          </a:xfrm>
-          <a:prstGeom prst="rect">
-            <a:avLst/>
-          </a:prstGeom>
-          <a:noFill/>
-        </p:spPr>
-        <p:txBody>
-          <a:bodyPr wrap="square" anchor="ctr" lIns="0" rIns="0" tIns="0" bIns="0">
-            <a:spAutoFit/>
-          </a:bodyPr>
-          <a:lstStyle/>
-          <a:p>
-            <a:pPr algn="l">
-              <a:lnSpc>
-                <a:spcPct val="115000"/>
-              </a:lnSpc>
-            </a:pPr>
-            <a:r>
-              <a:rPr sz="1500" b="1" i="0">
-                <a:solidFill>
-                  <a:srgbClr val="35D0BA"/>
-                </a:solidFill>
-                <a:latin typeface="Calibri"/>
-              </a:rPr>
-              <a:t>Sample rate used today</a:t>
-            </a:r>
-          </a:p>
-        </p:txBody>
-      </p:sp>
-      <p:sp>
-        <p:nvSpPr>
-          <p:cNvPr id="11" name="TextBox 10"/>
-          <p:cNvSpPr txBox="1"/>
-          <p:nvPr/>
-        </p:nvSpPr>
-        <p:spPr>
-          <a:xfrm>
-            <a:off x="5212080" y="2487168"/>
-            <a:ext cx="6126480" cy="566928"/>
-          </a:xfrm>
-          <a:prstGeom prst="rect">
-            <a:avLst/>
-          </a:prstGeom>
-          <a:noFill/>
-        </p:spPr>
-        <p:txBody>
-          <a:bodyPr wrap="square" anchor="ctr" lIns="0" rIns="0" tIns="0" bIns="0">
-            <a:spAutoFit/>
-          </a:bodyPr>
-          <a:lstStyle/>
-          <a:p>
-            <a:pPr algn="l">
-              <a:lnSpc>
-                <a:spcPct val="115000"/>
-              </a:lnSpc>
-            </a:pPr>
-            <a:r>
-              <a:rPr sz="1500" b="0" i="0">
+              <a:t>•  GNU Radio</a:t>
+            </a:r>
+          </a:p>
+          <a:p>
+            <a:pPr lvl="1">
+              <a:spcAft>
+                <a:spcPts val="600"/>
+              </a:spcAft>
+            </a:pPr>
+            <a:r>
+              <a:rPr sz="1600">
+                <a:solidFill>
+                  <a:srgbClr val="8EA7BA"/>
+                </a:solidFill>
+                <a:latin typeface="Calibri"/>
+              </a:rPr>
+              <a:t>–  gnuradio.org — the toolkit, docs, and tutorials</a:t>
+            </a:r>
+          </a:p>
+          <a:p>
+            <a:pPr>
+              <a:lnSpc>
+                <a:spcPct val="112000"/>
+              </a:lnSpc>
+              <a:spcAft>
+                <a:spcPts val="1800"/>
+              </a:spcAft>
+            </a:pPr>
+            <a:r>
+              <a:rPr sz="1900">
                 <a:solidFill>
                   <a:srgbClr val="D7E3EC"/>
                 </a:solidFill>
                 <a:latin typeface="Calibri"/>
               </a:rPr>
-              <a:t>2–10 Msps depending on demo</a:t>
-            </a:r>
-          </a:p>
-        </p:txBody>
-      </p:sp>
-      <p:sp>
-        <p:nvSpPr>
-          <p:cNvPr id="12" name="Rectangle 11"/>
-          <p:cNvSpPr/>
-          <p:nvPr/>
-        </p:nvSpPr>
-        <p:spPr>
-          <a:xfrm>
-            <a:off x="640080" y="3054096"/>
-            <a:ext cx="10881360" cy="566928"/>
-          </a:xfrm>
-          <a:prstGeom prst="rect">
-            <a:avLst/>
-          </a:prstGeom>
-          <a:solidFill>
-            <a:srgbClr val="0F2438"/>
-          </a:solidFill>
-          <a:ln>
-            <a:noFill/>
-          </a:ln>
-          <a:effectLst/>
-        </p:spPr>
-        <p:style>
-          <a:lnRef idx="1">
-            <a:schemeClr val="accent1"/>
-          </a:lnRef>
-          <a:fillRef idx="3">
-            <a:schemeClr val="accent1"/>
-          </a:fillRef>
-          <a:effectRef idx="2">
-            <a:schemeClr val="accent1"/>
-          </a:effectRef>
-          <a:fontRef idx="minor">
-            <a:schemeClr val="lt1"/>
-          </a:fontRef>
-        </p:style>
-        <p:txBody>
-          <a:bodyPr rtlCol="0" anchor="ctr"/>
-          <a:lstStyle/>
-          <a:p>
-            <a:pPr algn="ctr"/>
-          </a:p>
-        </p:txBody>
-      </p:sp>
-      <p:sp>
-        <p:nvSpPr>
-          <p:cNvPr id="13" name="TextBox 12"/>
-          <p:cNvSpPr txBox="1"/>
-          <p:nvPr/>
-        </p:nvSpPr>
-        <p:spPr>
-          <a:xfrm>
-            <a:off x="868680" y="3054096"/>
-            <a:ext cx="4114800" cy="566928"/>
-          </a:xfrm>
-          <a:prstGeom prst="rect">
-            <a:avLst/>
-          </a:prstGeom>
-          <a:noFill/>
-        </p:spPr>
-        <p:txBody>
-          <a:bodyPr wrap="square" anchor="ctr" lIns="0" rIns="0" tIns="0" bIns="0">
-            <a:spAutoFit/>
-          </a:bodyPr>
-          <a:lstStyle/>
-          <a:p>
-            <a:pPr algn="l">
-              <a:lnSpc>
-                <a:spcPct val="115000"/>
-              </a:lnSpc>
-            </a:pPr>
-            <a:r>
-              <a:rPr sz="1500" b="1" i="0">
-                <a:solidFill>
-                  <a:srgbClr val="35D0BA"/>
-                </a:solidFill>
-                <a:latin typeface="Calibri"/>
-              </a:rPr>
-              <a:t>2m band</a:t>
-            </a:r>
-          </a:p>
-        </p:txBody>
-      </p:sp>
-      <p:sp>
-        <p:nvSpPr>
-          <p:cNvPr id="14" name="TextBox 13"/>
-          <p:cNvSpPr txBox="1"/>
-          <p:nvPr/>
-        </p:nvSpPr>
-        <p:spPr>
-          <a:xfrm>
-            <a:off x="5212080" y="3054096"/>
-            <a:ext cx="6126480" cy="566928"/>
-          </a:xfrm>
-          <a:prstGeom prst="rect">
-            <a:avLst/>
-          </a:prstGeom>
-          <a:noFill/>
-        </p:spPr>
-        <p:txBody>
-          <a:bodyPr wrap="square" anchor="ctr" lIns="0" rIns="0" tIns="0" bIns="0">
-            <a:spAutoFit/>
-          </a:bodyPr>
-          <a:lstStyle/>
-          <a:p>
-            <a:pPr algn="l">
-              <a:lnSpc>
-                <a:spcPct val="115000"/>
-              </a:lnSpc>
-            </a:pPr>
-            <a:r>
-              <a:rPr sz="1500" b="0" i="0">
+              <a:t>•  HackRF One</a:t>
+            </a:r>
+          </a:p>
+          <a:p>
+            <a:pPr lvl="1">
+              <a:spcAft>
+                <a:spcPts val="600"/>
+              </a:spcAft>
+            </a:pPr>
+            <a:r>
+              <a:rPr sz="1600">
+                <a:solidFill>
+                  <a:srgbClr val="8EA7BA"/>
+                </a:solidFill>
+                <a:latin typeface="Calibri"/>
+              </a:rPr>
+              <a:t>–  greatscottgadgets.com/hackrf — hardware + firmware</a:t>
+            </a:r>
+          </a:p>
+          <a:p>
+            <a:pPr>
+              <a:lnSpc>
+                <a:spcPct val="112000"/>
+              </a:lnSpc>
+              <a:spcAft>
+                <a:spcPts val="1800"/>
+              </a:spcAft>
+            </a:pPr>
+            <a:r>
+              <a:rPr sz="1900">
                 <a:solidFill>
                   <a:srgbClr val="D7E3EC"/>
                 </a:solidFill>
                 <a:latin typeface="Calibri"/>
               </a:rPr>
-              <a:t>144.000 – 148.000 MHz</a:t>
-            </a:r>
-          </a:p>
-        </p:txBody>
-      </p:sp>
-      <p:sp>
-        <p:nvSpPr>
-          <p:cNvPr id="15" name="Rectangle 14"/>
-          <p:cNvSpPr/>
-          <p:nvPr/>
-        </p:nvSpPr>
-        <p:spPr>
-          <a:xfrm>
-            <a:off x="640080" y="3621024"/>
-            <a:ext cx="10881360" cy="566928"/>
-          </a:xfrm>
-          <a:prstGeom prst="rect">
-            <a:avLst/>
-          </a:prstGeom>
-          <a:solidFill>
-            <a:srgbClr val="0A1929"/>
-          </a:solidFill>
-          <a:ln>
-            <a:noFill/>
-          </a:ln>
-          <a:effectLst/>
-        </p:spPr>
-        <p:style>
-          <a:lnRef idx="1">
-            <a:schemeClr val="accent1"/>
-          </a:lnRef>
-          <a:fillRef idx="3">
-            <a:schemeClr val="accent1"/>
-          </a:fillRef>
-          <a:effectRef idx="2">
-            <a:schemeClr val="accent1"/>
-          </a:effectRef>
-          <a:fontRef idx="minor">
-            <a:schemeClr val="lt1"/>
-          </a:fontRef>
-        </p:style>
-        <p:txBody>
-          <a:bodyPr rtlCol="0" anchor="ctr"/>
-          <a:lstStyle/>
-          <a:p>
-            <a:pPr algn="ctr"/>
-          </a:p>
-        </p:txBody>
-      </p:sp>
-      <p:sp>
-        <p:nvSpPr>
-          <p:cNvPr id="16" name="TextBox 15"/>
-          <p:cNvSpPr txBox="1"/>
-          <p:nvPr/>
-        </p:nvSpPr>
-        <p:spPr>
-          <a:xfrm>
-            <a:off x="868680" y="3621024"/>
-            <a:ext cx="4114800" cy="566928"/>
-          </a:xfrm>
-          <a:prstGeom prst="rect">
-            <a:avLst/>
-          </a:prstGeom>
-          <a:noFill/>
-        </p:spPr>
-        <p:txBody>
-          <a:bodyPr wrap="square" anchor="ctr" lIns="0" rIns="0" tIns="0" bIns="0">
-            <a:spAutoFit/>
-          </a:bodyPr>
-          <a:lstStyle/>
-          <a:p>
-            <a:pPr algn="l">
-              <a:lnSpc>
-                <a:spcPct val="115000"/>
-              </a:lnSpc>
-            </a:pPr>
-            <a:r>
-              <a:rPr sz="1500" b="1" i="0">
-                <a:solidFill>
-                  <a:srgbClr val="35D0BA"/>
-                </a:solidFill>
-                <a:latin typeface="Calibri"/>
-              </a:rPr>
-              <a:t>70cm band</a:t>
-            </a:r>
-          </a:p>
-        </p:txBody>
-      </p:sp>
-      <p:sp>
-        <p:nvSpPr>
-          <p:cNvPr id="17" name="TextBox 16"/>
-          <p:cNvSpPr txBox="1"/>
-          <p:nvPr/>
-        </p:nvSpPr>
-        <p:spPr>
-          <a:xfrm>
-            <a:off x="5212080" y="3621024"/>
-            <a:ext cx="6126480" cy="566928"/>
-          </a:xfrm>
-          <a:prstGeom prst="rect">
-            <a:avLst/>
-          </a:prstGeom>
-          <a:noFill/>
-        </p:spPr>
-        <p:txBody>
-          <a:bodyPr wrap="square" anchor="ctr" lIns="0" rIns="0" tIns="0" bIns="0">
-            <a:spAutoFit/>
-          </a:bodyPr>
-          <a:lstStyle/>
-          <a:p>
-            <a:pPr algn="l">
-              <a:lnSpc>
-                <a:spcPct val="115000"/>
-              </a:lnSpc>
-            </a:pPr>
-            <a:r>
-              <a:rPr sz="1500" b="0" i="0">
+              <a:t>•  SoapySDR</a:t>
+            </a:r>
+          </a:p>
+          <a:p>
+            <a:pPr lvl="1">
+              <a:spcAft>
+                <a:spcPts val="600"/>
+              </a:spcAft>
+            </a:pPr>
+            <a:r>
+              <a:rPr sz="1600">
+                <a:solidFill>
+                  <a:srgbClr val="8EA7BA"/>
+                </a:solidFill>
+                <a:latin typeface="Calibri"/>
+              </a:rPr>
+              <a:t>–  github.com/pothosware/SoapySDR — the hardware abstraction layer used today</a:t>
+            </a:r>
+          </a:p>
+          <a:p>
+            <a:pPr>
+              <a:lnSpc>
+                <a:spcPct val="112000"/>
+              </a:lnSpc>
+              <a:spcAft>
+                <a:spcPts val="1800"/>
+              </a:spcAft>
+            </a:pPr>
+            <a:r>
+              <a:rPr sz="1900">
                 <a:solidFill>
                   <a:srgbClr val="D7E3EC"/>
                 </a:solidFill>
                 <a:latin typeface="Calibri"/>
               </a:rPr>
-              <a:t>420.000 – 450.000 MHz</a:t>
-            </a:r>
-          </a:p>
-        </p:txBody>
-      </p:sp>
-      <p:sp>
-        <p:nvSpPr>
-          <p:cNvPr id="18" name="Rectangle 17"/>
-          <p:cNvSpPr/>
-          <p:nvPr/>
-        </p:nvSpPr>
-        <p:spPr>
-          <a:xfrm>
-            <a:off x="640080" y="4187952"/>
-            <a:ext cx="10881360" cy="566928"/>
-          </a:xfrm>
-          <a:prstGeom prst="rect">
-            <a:avLst/>
-          </a:prstGeom>
-          <a:solidFill>
-            <a:srgbClr val="0F2438"/>
-          </a:solidFill>
-          <a:ln>
-            <a:noFill/>
-          </a:ln>
-          <a:effectLst/>
-        </p:spPr>
-        <p:style>
-          <a:lnRef idx="1">
-            <a:schemeClr val="accent1"/>
-          </a:lnRef>
-          <a:fillRef idx="3">
-            <a:schemeClr val="accent1"/>
-          </a:fillRef>
-          <a:effectRef idx="2">
-            <a:schemeClr val="accent1"/>
-          </a:effectRef>
-          <a:fontRef idx="minor">
-            <a:schemeClr val="lt1"/>
-          </a:fontRef>
-        </p:style>
-        <p:txBody>
-          <a:bodyPr rtlCol="0" anchor="ctr"/>
-          <a:lstStyle/>
-          <a:p>
-            <a:pPr algn="ctr"/>
-          </a:p>
-        </p:txBody>
-      </p:sp>
-      <p:sp>
-        <p:nvSpPr>
-          <p:cNvPr id="19" name="TextBox 18"/>
-          <p:cNvSpPr txBox="1"/>
-          <p:nvPr/>
-        </p:nvSpPr>
-        <p:spPr>
-          <a:xfrm>
-            <a:off x="868680" y="4187952"/>
-            <a:ext cx="4114800" cy="566928"/>
-          </a:xfrm>
-          <a:prstGeom prst="rect">
-            <a:avLst/>
-          </a:prstGeom>
-          <a:noFill/>
-        </p:spPr>
-        <p:txBody>
-          <a:bodyPr wrap="square" anchor="ctr" lIns="0" rIns="0" tIns="0" bIns="0">
-            <a:spAutoFit/>
-          </a:bodyPr>
-          <a:lstStyle/>
-          <a:p>
-            <a:pPr algn="l">
-              <a:lnSpc>
-                <a:spcPct val="115000"/>
-              </a:lnSpc>
-            </a:pPr>
-            <a:r>
-              <a:rPr sz="1500" b="1" i="0">
-                <a:solidFill>
-                  <a:srgbClr val="35D0BA"/>
-                </a:solidFill>
-                <a:latin typeface="Calibri"/>
-              </a:rPr>
-              <a:t>2m simplex calling freq</a:t>
-            </a:r>
-          </a:p>
-        </p:txBody>
-      </p:sp>
-      <p:sp>
-        <p:nvSpPr>
-          <p:cNvPr id="20" name="TextBox 19"/>
-          <p:cNvSpPr txBox="1"/>
-          <p:nvPr/>
-        </p:nvSpPr>
-        <p:spPr>
-          <a:xfrm>
-            <a:off x="5212080" y="4187952"/>
-            <a:ext cx="6126480" cy="566928"/>
-          </a:xfrm>
-          <a:prstGeom prst="rect">
-            <a:avLst/>
-          </a:prstGeom>
-          <a:noFill/>
-        </p:spPr>
-        <p:txBody>
-          <a:bodyPr wrap="square" anchor="ctr" lIns="0" rIns="0" tIns="0" bIns="0">
-            <a:spAutoFit/>
-          </a:bodyPr>
-          <a:lstStyle/>
-          <a:p>
-            <a:pPr algn="l">
-              <a:lnSpc>
-                <a:spcPct val="115000"/>
-              </a:lnSpc>
-            </a:pPr>
-            <a:r>
-              <a:rPr sz="1500" b="0" i="0">
+              <a:t>•  ARRL</a:t>
+            </a:r>
+          </a:p>
+          <a:p>
+            <a:pPr lvl="1">
+              <a:spcAft>
+                <a:spcPts val="600"/>
+              </a:spcAft>
+            </a:pPr>
+            <a:r>
+              <a:rPr sz="1600">
+                <a:solidFill>
+                  <a:srgbClr val="8EA7BA"/>
+                </a:solidFill>
+                <a:latin typeface="Calibri"/>
+              </a:rPr>
+              <a:t>–  arrl.org — licensing info and Part 97 reference</a:t>
+            </a:r>
+          </a:p>
+          <a:p>
+            <a:pPr>
+              <a:lnSpc>
+                <a:spcPct val="112000"/>
+              </a:lnSpc>
+              <a:spcAft>
+                <a:spcPts val="1800"/>
+              </a:spcAft>
+            </a:pPr>
+            <a:r>
+              <a:rPr sz="1900">
                 <a:solidFill>
                   <a:srgbClr val="D7E3EC"/>
                 </a:solidFill>
                 <a:latin typeface="Calibri"/>
               </a:rPr>
-              <a:t>146.520 MHz</a:t>
-            </a:r>
-          </a:p>
-        </p:txBody>
-      </p:sp>
-      <p:sp>
-        <p:nvSpPr>
-          <p:cNvPr id="21" name="Rectangle 20"/>
-          <p:cNvSpPr/>
-          <p:nvPr/>
-        </p:nvSpPr>
-        <p:spPr>
-          <a:xfrm>
-            <a:off x="640080" y="4754880"/>
-            <a:ext cx="10881360" cy="566928"/>
-          </a:xfrm>
-          <a:prstGeom prst="rect">
-            <a:avLst/>
-          </a:prstGeom>
-          <a:solidFill>
-            <a:srgbClr val="0A1929"/>
-          </a:solidFill>
-          <a:ln>
-            <a:noFill/>
-          </a:ln>
-          <a:effectLst/>
-        </p:spPr>
-        <p:style>
-          <a:lnRef idx="1">
-            <a:schemeClr val="accent1"/>
-          </a:lnRef>
-          <a:fillRef idx="3">
-            <a:schemeClr val="accent1"/>
-          </a:fillRef>
-          <a:effectRef idx="2">
-            <a:schemeClr val="accent1"/>
-          </a:effectRef>
-          <a:fontRef idx="minor">
-            <a:schemeClr val="lt1"/>
-          </a:fontRef>
-        </p:style>
-        <p:txBody>
-          <a:bodyPr rtlCol="0" anchor="ctr"/>
-          <a:lstStyle/>
-          <a:p>
-            <a:pPr algn="ctr"/>
-          </a:p>
-        </p:txBody>
-      </p:sp>
-      <p:sp>
-        <p:nvSpPr>
-          <p:cNvPr id="22" name="TextBox 21"/>
-          <p:cNvSpPr txBox="1"/>
-          <p:nvPr/>
-        </p:nvSpPr>
-        <p:spPr>
-          <a:xfrm>
-            <a:off x="868680" y="4754880"/>
-            <a:ext cx="4114800" cy="566928"/>
-          </a:xfrm>
-          <a:prstGeom prst="rect">
-            <a:avLst/>
-          </a:prstGeom>
-          <a:noFill/>
-        </p:spPr>
-        <p:txBody>
-          <a:bodyPr wrap="square" anchor="ctr" lIns="0" rIns="0" tIns="0" bIns="0">
-            <a:spAutoFit/>
-          </a:bodyPr>
-          <a:lstStyle/>
-          <a:p>
-            <a:pPr algn="l">
-              <a:lnSpc>
-                <a:spcPct val="115000"/>
-              </a:lnSpc>
-            </a:pPr>
-            <a:r>
-              <a:rPr sz="1500" b="1" i="0">
-                <a:solidFill>
-                  <a:srgbClr val="35D0BA"/>
-                </a:solidFill>
-                <a:latin typeface="Calibri"/>
-              </a:rPr>
-              <a:t>Demo 3 capture</a:t>
-            </a:r>
-          </a:p>
-        </p:txBody>
-      </p:sp>
-      <p:sp>
-        <p:nvSpPr>
-          <p:cNvPr id="23" name="TextBox 22"/>
-          <p:cNvSpPr txBox="1"/>
-          <p:nvPr/>
-        </p:nvSpPr>
-        <p:spPr>
-          <a:xfrm>
-            <a:off x="5212080" y="4754880"/>
-            <a:ext cx="6126480" cy="566928"/>
-          </a:xfrm>
-          <a:prstGeom prst="rect">
-            <a:avLst/>
-          </a:prstGeom>
-          <a:noFill/>
-        </p:spPr>
-        <p:txBody>
-          <a:bodyPr wrap="square" anchor="ctr" lIns="0" rIns="0" tIns="0" bIns="0">
-            <a:spAutoFit/>
-          </a:bodyPr>
-          <a:lstStyle/>
-          <a:p>
-            <a:pPr algn="l">
-              <a:lnSpc>
-                <a:spcPct val="115000"/>
-              </a:lnSpc>
-            </a:pPr>
-            <a:r>
-              <a:rPr sz="1500" b="0" i="0">
-                <a:solidFill>
-                  <a:srgbClr val="D7E3EC"/>
-                </a:solidFill>
-                <a:latin typeface="Calibri"/>
-              </a:rPr>
-              <a:t>146.0 MHz center @ 6 Msps ≈ 2.9 GB/min</a:t>
-            </a:r>
-          </a:p>
-        </p:txBody>
-      </p:sp>
-      <p:sp>
-        <p:nvSpPr>
-          <p:cNvPr id="24" name="Rectangle 23"/>
-          <p:cNvSpPr/>
-          <p:nvPr/>
-        </p:nvSpPr>
-        <p:spPr>
-          <a:xfrm>
-            <a:off x="640080" y="5321808"/>
-            <a:ext cx="10881360" cy="566928"/>
-          </a:xfrm>
-          <a:prstGeom prst="rect">
-            <a:avLst/>
-          </a:prstGeom>
-          <a:solidFill>
-            <a:srgbClr val="0F2438"/>
-          </a:solidFill>
-          <a:ln>
-            <a:noFill/>
-          </a:ln>
-          <a:effectLst/>
-        </p:spPr>
-        <p:style>
-          <a:lnRef idx="1">
-            <a:schemeClr val="accent1"/>
-          </a:lnRef>
-          <a:fillRef idx="3">
-            <a:schemeClr val="accent1"/>
-          </a:fillRef>
-          <a:effectRef idx="2">
-            <a:schemeClr val="accent1"/>
-          </a:effectRef>
-          <a:fontRef idx="minor">
-            <a:schemeClr val="lt1"/>
-          </a:fontRef>
-        </p:style>
-        <p:txBody>
-          <a:bodyPr rtlCol="0" anchor="ctr"/>
-          <a:lstStyle/>
-          <a:p>
-            <a:pPr algn="ctr"/>
-          </a:p>
-        </p:txBody>
-      </p:sp>
-      <p:sp>
-        <p:nvSpPr>
-          <p:cNvPr id="25" name="TextBox 24"/>
-          <p:cNvSpPr txBox="1"/>
-          <p:nvPr/>
-        </p:nvSpPr>
-        <p:spPr>
-          <a:xfrm>
-            <a:off x="868680" y="5321808"/>
-            <a:ext cx="4114800" cy="566928"/>
-          </a:xfrm>
-          <a:prstGeom prst="rect">
-            <a:avLst/>
-          </a:prstGeom>
-          <a:noFill/>
-        </p:spPr>
-        <p:txBody>
-          <a:bodyPr wrap="square" anchor="ctr" lIns="0" rIns="0" tIns="0" bIns="0">
-            <a:spAutoFit/>
-          </a:bodyPr>
-          <a:lstStyle/>
-          <a:p>
-            <a:pPr algn="l">
-              <a:lnSpc>
-                <a:spcPct val="115000"/>
-              </a:lnSpc>
-            </a:pPr>
-            <a:r>
-              <a:rPr sz="1500" b="1" i="0">
-                <a:solidFill>
-                  <a:srgbClr val="35D0BA"/>
-                </a:solidFill>
-                <a:latin typeface="Calibri"/>
-              </a:rPr>
-              <a:t>HackRF TX power (typical)</a:t>
-            </a:r>
-          </a:p>
-        </p:txBody>
-      </p:sp>
-      <p:sp>
-        <p:nvSpPr>
-          <p:cNvPr id="26" name="TextBox 25"/>
-          <p:cNvSpPr txBox="1"/>
-          <p:nvPr/>
-        </p:nvSpPr>
-        <p:spPr>
-          <a:xfrm>
-            <a:off x="5212080" y="5321808"/>
-            <a:ext cx="6126480" cy="566928"/>
-          </a:xfrm>
-          <a:prstGeom prst="rect">
-            <a:avLst/>
-          </a:prstGeom>
-          <a:noFill/>
-        </p:spPr>
-        <p:txBody>
-          <a:bodyPr wrap="square" anchor="ctr" lIns="0" rIns="0" tIns="0" bIns="0">
-            <a:spAutoFit/>
-          </a:bodyPr>
-          <a:lstStyle/>
-          <a:p>
-            <a:pPr algn="l">
-              <a:lnSpc>
-                <a:spcPct val="115000"/>
-              </a:lnSpc>
-            </a:pPr>
-            <a:r>
-              <a:rPr sz="1500" b="0" i="0">
-                <a:solidFill>
-                  <a:srgbClr val="D7E3EC"/>
-                </a:solidFill>
-                <a:latin typeface="Calibri"/>
-              </a:rPr>
-              <a:t>≈ 10–15 dBm max, kept low for these demos</a:t>
-            </a:r>
-          </a:p>
-        </p:txBody>
-      </p:sp>
-      <p:sp>
-        <p:nvSpPr>
-          <p:cNvPr id="27" name="TextBox 26"/>
+              <a:t>•  This kit</a:t>
+            </a:r>
+          </a:p>
+          <a:p>
+            <a:pPr lvl="1">
+              <a:spcAft>
+                <a:spcPts val="600"/>
+              </a:spcAft>
+            </a:pPr>
+            <a:r>
+              <a:rPr sz="1600">
+                <a:solidFill>
+                  <a:srgbClr val="8EA7BA"/>
+                </a:solidFill>
+                <a:latin typeface="Calibri"/>
+              </a:rPr>
+              <a:t>–  All flowgraphs, README, and brainstorm doc are in this repo’s flowgraphs/ and top-level README.md / BRAINSTORM.md</a:t>
+            </a:r>
+          </a:p>
+        </p:txBody>
+      </p:sp>
+      <p:sp>
+        <p:nvSpPr>
+          <p:cNvPr id="7" name="TextBox 6"/>
           <p:cNvSpPr txBox="1"/>
           <p:nvPr/>
         </p:nvSpPr>
@@ -7789,7 +7832,7 @@
       </p:sp>
       <p:sp>
         <p:nvSpPr>
-          <p:cNvPr id="28" name="TextBox 27"/>
+          <p:cNvPr id="8" name="TextBox 7"/>
           <p:cNvSpPr txBox="1"/>
           <p:nvPr/>
         </p:nvSpPr>
@@ -7821,7 +7864,7 @@
                 </a:solidFill>
                 <a:latin typeface="Calibri"/>
               </a:rPr>
-              <a:t>17 / 20</a:t>
+              <a:t>17 / 19</a:t>
             </a:r>
           </a:p>
         </p:txBody>
@@ -7896,8 +7939,8 @@
         </p:nvSpPr>
         <p:spPr>
           <a:xfrm>
-            <a:off x="640080" y="457200"/>
-            <a:ext cx="10881360" cy="365760"/>
+            <a:off x="822960" y="2651760"/>
+            <a:ext cx="10515600" cy="1097280"/>
           </a:xfrm>
           <a:prstGeom prst="rect">
             <a:avLst/>
@@ -7916,13 +7959,13 @@
               </a:lnSpc>
             </a:pPr>
             <a:r>
-              <a:rPr sz="1400" b="1" i="0">
-                <a:solidFill>
-                  <a:srgbClr val="35D0BA"/>
-                </a:solidFill>
-                <a:latin typeface="Calibri"/>
-              </a:rPr>
-              <a:t>RESOURCES</a:t>
+              <a:rPr sz="4800" b="1" i="0">
+                <a:solidFill>
+                  <a:srgbClr val="FFFFFF"/>
+                </a:solidFill>
+                <a:latin typeface="Calibri"/>
+              </a:rPr>
+              <a:t>Thank You</a:t>
             </a:r>
           </a:p>
         </p:txBody>
@@ -7935,8 +7978,8 @@
         </p:nvSpPr>
         <p:spPr>
           <a:xfrm>
-            <a:off x="640080" y="786384"/>
-            <a:ext cx="10881360" cy="822960"/>
+            <a:off x="822960" y="3657600"/>
+            <a:ext cx="10058400" cy="548640"/>
           </a:xfrm>
           <a:prstGeom prst="rect">
             <a:avLst/>
@@ -7955,13 +7998,13 @@
               </a:lnSpc>
             </a:pPr>
             <a:r>
-              <a:rPr sz="3200" b="1" i="0">
-                <a:solidFill>
-                  <a:srgbClr val="FFFFFF"/>
-                </a:solidFill>
-                <a:latin typeface="Calibri"/>
-              </a:rPr>
-              <a:t>Go Build Something</a:t>
+              <a:rPr sz="2000" b="0" i="0">
+                <a:solidFill>
+                  <a:srgbClr val="D7E3EC"/>
+                </a:solidFill>
+                <a:latin typeface="Calibri"/>
+              </a:rPr>
+              <a:t>Questions? Let's get on the air.</a:t>
             </a:r>
           </a:p>
         </p:txBody>
@@ -7974,8 +8017,8 @@
         </p:nvSpPr>
         <p:spPr>
           <a:xfrm>
-            <a:off x="640080" y="1481328"/>
-            <a:ext cx="1005840" cy="50800"/>
+            <a:off x="841248" y="4206240"/>
+            <a:ext cx="1280160" cy="50800"/>
           </a:xfrm>
           <a:prstGeom prst="rect">
             <a:avLst/>
@@ -8018,206 +8061,8 @@
         </p:nvSpPr>
         <p:spPr>
           <a:xfrm>
-            <a:off x="640080" y="1920240"/>
-            <a:ext cx="10698480" cy="4114800"/>
-          </a:xfrm>
-          <a:prstGeom prst="rect">
-            <a:avLst/>
-          </a:prstGeom>
-          <a:noFill/>
-        </p:spPr>
-        <p:txBody>
-          <a:bodyPr wrap="square">
-            <a:spAutoFit/>
-          </a:bodyPr>
-          <a:lstStyle/>
-          <a:p>
-            <a:pPr>
-              <a:lnSpc>
-                <a:spcPct val="112000"/>
-              </a:lnSpc>
-              <a:spcAft>
-                <a:spcPts val="1800"/>
-              </a:spcAft>
-            </a:pPr>
-            <a:r>
-              <a:rPr sz="1900">
-                <a:solidFill>
-                  <a:srgbClr val="D7E3EC"/>
-                </a:solidFill>
-                <a:latin typeface="Calibri"/>
-              </a:rPr>
-              <a:t>•  GNU Radio</a:t>
-            </a:r>
-          </a:p>
-          <a:p>
-            <a:pPr lvl="1">
-              <a:spcAft>
-                <a:spcPts val="600"/>
-              </a:spcAft>
-            </a:pPr>
-            <a:r>
-              <a:rPr sz="1600">
-                <a:solidFill>
-                  <a:srgbClr val="8EA7BA"/>
-                </a:solidFill>
-                <a:latin typeface="Calibri"/>
-              </a:rPr>
-              <a:t>–  gnuradio.org — the toolkit, docs, and tutorials</a:t>
-            </a:r>
-          </a:p>
-          <a:p>
-            <a:pPr>
-              <a:lnSpc>
-                <a:spcPct val="112000"/>
-              </a:lnSpc>
-              <a:spcAft>
-                <a:spcPts val="1800"/>
-              </a:spcAft>
-            </a:pPr>
-            <a:r>
-              <a:rPr sz="1900">
-                <a:solidFill>
-                  <a:srgbClr val="D7E3EC"/>
-                </a:solidFill>
-                <a:latin typeface="Calibri"/>
-              </a:rPr>
-              <a:t>•  HackRF One</a:t>
-            </a:r>
-          </a:p>
-          <a:p>
-            <a:pPr lvl="1">
-              <a:spcAft>
-                <a:spcPts val="600"/>
-              </a:spcAft>
-            </a:pPr>
-            <a:r>
-              <a:rPr sz="1600">
-                <a:solidFill>
-                  <a:srgbClr val="8EA7BA"/>
-                </a:solidFill>
-                <a:latin typeface="Calibri"/>
-              </a:rPr>
-              <a:t>–  greatscottgadgets.com/hackrf — hardware + firmware</a:t>
-            </a:r>
-          </a:p>
-          <a:p>
-            <a:pPr>
-              <a:lnSpc>
-                <a:spcPct val="112000"/>
-              </a:lnSpc>
-              <a:spcAft>
-                <a:spcPts val="1800"/>
-              </a:spcAft>
-            </a:pPr>
-            <a:r>
-              <a:rPr sz="1900">
-                <a:solidFill>
-                  <a:srgbClr val="D7E3EC"/>
-                </a:solidFill>
-                <a:latin typeface="Calibri"/>
-              </a:rPr>
-              <a:t>•  SoapySDR</a:t>
-            </a:r>
-          </a:p>
-          <a:p>
-            <a:pPr lvl="1">
-              <a:spcAft>
-                <a:spcPts val="600"/>
-              </a:spcAft>
-            </a:pPr>
-            <a:r>
-              <a:rPr sz="1600">
-                <a:solidFill>
-                  <a:srgbClr val="8EA7BA"/>
-                </a:solidFill>
-                <a:latin typeface="Calibri"/>
-              </a:rPr>
-              <a:t>–  github.com/pothosware/SoapySDR — the hardware abstraction layer used today</a:t>
-            </a:r>
-          </a:p>
-          <a:p>
-            <a:pPr>
-              <a:lnSpc>
-                <a:spcPct val="112000"/>
-              </a:lnSpc>
-              <a:spcAft>
-                <a:spcPts val="1800"/>
-              </a:spcAft>
-            </a:pPr>
-            <a:r>
-              <a:rPr sz="1900">
-                <a:solidFill>
-                  <a:srgbClr val="D7E3EC"/>
-                </a:solidFill>
-                <a:latin typeface="Calibri"/>
-              </a:rPr>
-              <a:t>•  ARRL</a:t>
-            </a:r>
-          </a:p>
-          <a:p>
-            <a:pPr lvl="1">
-              <a:spcAft>
-                <a:spcPts val="600"/>
-              </a:spcAft>
-            </a:pPr>
-            <a:r>
-              <a:rPr sz="1600">
-                <a:solidFill>
-                  <a:srgbClr val="8EA7BA"/>
-                </a:solidFill>
-                <a:latin typeface="Calibri"/>
-              </a:rPr>
-              <a:t>–  arrl.org — licensing info and Part 97 reference</a:t>
-            </a:r>
-          </a:p>
-          <a:p>
-            <a:pPr>
-              <a:lnSpc>
-                <a:spcPct val="112000"/>
-              </a:lnSpc>
-              <a:spcAft>
-                <a:spcPts val="1800"/>
-              </a:spcAft>
-            </a:pPr>
-            <a:r>
-              <a:rPr sz="1900">
-                <a:solidFill>
-                  <a:srgbClr val="D7E3EC"/>
-                </a:solidFill>
-                <a:latin typeface="Calibri"/>
-              </a:rPr>
-              <a:t>•  This kit</a:t>
-            </a:r>
-          </a:p>
-          <a:p>
-            <a:pPr lvl="1">
-              <a:spcAft>
-                <a:spcPts val="600"/>
-              </a:spcAft>
-            </a:pPr>
-            <a:r>
-              <a:rPr sz="1600">
-                <a:solidFill>
-                  <a:srgbClr val="8EA7BA"/>
-                </a:solidFill>
-                <a:latin typeface="Calibri"/>
-              </a:rPr>
-              <a:t>–  All flowgraphs, README, and brainstorm doc are in this repo’s flowgraphs/ and top-level README.md / BRAINSTORM.md</a:t>
-            </a:r>
-          </a:p>
-        </p:txBody>
-      </p:sp>
-      <p:sp>
-        <p:nvSpPr>
-          <p:cNvPr id="7" name="TextBox 6"/>
-          <p:cNvSpPr txBox="1"/>
-          <p:nvPr/>
-        </p:nvSpPr>
-        <p:spPr>
-          <a:xfrm>
-            <a:off x="640080" y="6473952"/>
-            <a:ext cx="7315200" cy="274320"/>
+            <a:off x="822960" y="6035040"/>
+            <a:ext cx="7315200" cy="365760"/>
           </a:xfrm>
           <a:prstGeom prst="rect">
             <a:avLst/>
@@ -8236,52 +8081,13 @@
               </a:lnSpc>
             </a:pPr>
             <a:r>
-              <a:rPr sz="1000" b="0" i="0">
+              <a:rPr sz="1400" b="0" i="0">
                 <a:solidFill>
                   <a:srgbClr val="8EA7BA"/>
                 </a:solidFill>
                 <a:latin typeface="Calibri"/>
               </a:rPr>
-              <a:t>SDR Demo -- GNU Radio + HackRF + Ham Handheld</a:t>
-            </a:r>
-          </a:p>
-        </p:txBody>
-      </p:sp>
-      <p:sp>
-        <p:nvSpPr>
-          <p:cNvPr id="8" name="TextBox 7"/>
-          <p:cNvSpPr txBox="1"/>
-          <p:nvPr/>
-        </p:nvSpPr>
-        <p:spPr>
-          <a:xfrm>
-            <a:off x="11292840" y="6473952"/>
-            <a:ext cx="731520" cy="274320"/>
-          </a:xfrm>
-          <a:prstGeom prst="rect">
-            <a:avLst/>
-          </a:prstGeom>
-          <a:noFill/>
-        </p:spPr>
-        <p:txBody>
-          <a:bodyPr wrap="square" anchor="t" lIns="0" rIns="0" tIns="0" bIns="0">
-            <a:spAutoFit/>
-          </a:bodyPr>
-          <a:lstStyle/>
-          <a:p>
-            <a:pPr algn="r">
-              <a:lnSpc>
-                <a:spcPct val="115000"/>
-              </a:lnSpc>
-            </a:pPr>
-            <a:r>
-              <a:rPr sz="1000" b="0" i="0">
-                <a:solidFill>
-                  <a:srgbClr val="8EA7BA"/>
-                </a:solidFill>
-                <a:latin typeface="Calibri"/>
-              </a:rPr>
-              <a:t>18 / 20</a:t>
+              <a:t>Mark Grennan  •  W5TSU  •  mark@grennan.com</a:t>
             </a:r>
           </a:p>
         </p:txBody>
@@ -9480,230 +9286,7 @@
                 </a:solidFill>
                 <a:latin typeface="Calibri"/>
               </a:rPr>
-              <a:t>1 / 20</a:t>
-            </a:r>
-          </a:p>
-        </p:txBody>
-      </p:sp>
-    </p:spTree>
-  </p:cSld>
-  <p:clrMapOvr>
-    <a:masterClrMapping/>
-  </p:clrMapOvr>
-</p:sld>
-</file>
-
-<file path=ppt/slides/slide20.xml><?xml version="1.0" encoding="utf-8"?>
-<p:sld xmlns:a="http://schemas.openxmlformats.org/drawingml/2006/main" xmlns:p="http://schemas.openxmlformats.org/presentationml/2006/main" xmlns:r="http://schemas.openxmlformats.org/officeDocument/2006/relationships">
-  <p:cSld>
-    <p:spTree>
-      <p:nvGrpSpPr>
-        <p:cNvPr id="1" name=""/>
-        <p:cNvGrpSpPr/>
-        <p:nvPr/>
-      </p:nvGrpSpPr>
-      <p:grpSpPr/>
-      <p:sp>
-        <p:nvSpPr>
-          <p:cNvPr id="2" name="Rectangle 1"/>
-          <p:cNvSpPr/>
-          <p:nvPr/>
-        </p:nvSpPr>
-        <p:spPr>
-          <a:xfrm>
-            <a:off x="0" y="0"/>
-            <a:ext cx="12191695" cy="6858000"/>
-          </a:xfrm>
-          <a:prstGeom prst="rect">
-            <a:avLst/>
-          </a:prstGeom>
-          <a:solidFill>
-            <a:srgbClr val="0A1929"/>
-          </a:solidFill>
-          <a:ln>
-            <a:noFill/>
-          </a:ln>
-          <a:effectLst/>
-        </p:spPr>
-        <p:style>
-          <a:lnRef idx="1">
-            <a:schemeClr val="accent1"/>
-          </a:lnRef>
-          <a:fillRef idx="3">
-            <a:schemeClr val="accent1"/>
-          </a:fillRef>
-          <a:effectRef idx="2">
-            <a:schemeClr val="accent1"/>
-          </a:effectRef>
-          <a:fontRef idx="minor">
-            <a:schemeClr val="lt1"/>
-          </a:fontRef>
-        </p:style>
-        <p:txBody>
-          <a:bodyPr rtlCol="0" anchor="ctr"/>
-          <a:lstStyle/>
-          <a:p>
-            <a:pPr algn="ctr"/>
-          </a:p>
-        </p:txBody>
-      </p:sp>
-      <p:sp>
-        <p:nvSpPr>
-          <p:cNvPr id="3" name="TextBox 2"/>
-          <p:cNvSpPr txBox="1"/>
-          <p:nvPr/>
-        </p:nvSpPr>
-        <p:spPr>
-          <a:xfrm>
-            <a:off x="822960" y="2651760"/>
-            <a:ext cx="10515600" cy="1097280"/>
-          </a:xfrm>
-          <a:prstGeom prst="rect">
-            <a:avLst/>
-          </a:prstGeom>
-          <a:noFill/>
-        </p:spPr>
-        <p:txBody>
-          <a:bodyPr wrap="square" anchor="t" lIns="0" rIns="0" tIns="0" bIns="0">
-            <a:spAutoFit/>
-          </a:bodyPr>
-          <a:lstStyle/>
-          <a:p>
-            <a:pPr algn="l">
-              <a:lnSpc>
-                <a:spcPct val="115000"/>
-              </a:lnSpc>
-            </a:pPr>
-            <a:r>
-              <a:rPr sz="4800" b="1" i="0">
-                <a:solidFill>
-                  <a:srgbClr val="FFFFFF"/>
-                </a:solidFill>
-                <a:latin typeface="Calibri"/>
-              </a:rPr>
-              <a:t>Thank You</a:t>
-            </a:r>
-          </a:p>
-        </p:txBody>
-      </p:sp>
-      <p:sp>
-        <p:nvSpPr>
-          <p:cNvPr id="4" name="TextBox 3"/>
-          <p:cNvSpPr txBox="1"/>
-          <p:nvPr/>
-        </p:nvSpPr>
-        <p:spPr>
-          <a:xfrm>
-            <a:off x="822960" y="3657600"/>
-            <a:ext cx="10058400" cy="548640"/>
-          </a:xfrm>
-          <a:prstGeom prst="rect">
-            <a:avLst/>
-          </a:prstGeom>
-          <a:noFill/>
-        </p:spPr>
-        <p:txBody>
-          <a:bodyPr wrap="square" anchor="t" lIns="0" rIns="0" tIns="0" bIns="0">
-            <a:spAutoFit/>
-          </a:bodyPr>
-          <a:lstStyle/>
-          <a:p>
-            <a:pPr algn="l">
-              <a:lnSpc>
-                <a:spcPct val="115000"/>
-              </a:lnSpc>
-            </a:pPr>
-            <a:r>
-              <a:rPr sz="2000" b="0" i="0">
-                <a:solidFill>
-                  <a:srgbClr val="D7E3EC"/>
-                </a:solidFill>
-                <a:latin typeface="Calibri"/>
-              </a:rPr>
-              <a:t>Questions? Let's get on the air.</a:t>
-            </a:r>
-          </a:p>
-        </p:txBody>
-      </p:sp>
-      <p:sp>
-        <p:nvSpPr>
-          <p:cNvPr id="5" name="Rectangle 4"/>
-          <p:cNvSpPr/>
-          <p:nvPr/>
-        </p:nvSpPr>
-        <p:spPr>
-          <a:xfrm>
-            <a:off x="841248" y="4206240"/>
-            <a:ext cx="1280160" cy="50800"/>
-          </a:xfrm>
-          <a:prstGeom prst="rect">
-            <a:avLst/>
-          </a:prstGeom>
-          <a:solidFill>
-            <a:srgbClr val="35D0BA"/>
-          </a:solidFill>
-          <a:ln>
-            <a:noFill/>
-          </a:ln>
-          <a:effectLst/>
-        </p:spPr>
-        <p:style>
-          <a:lnRef idx="1">
-            <a:schemeClr val="accent1"/>
-          </a:lnRef>
-          <a:fillRef idx="3">
-            <a:schemeClr val="accent1"/>
-          </a:fillRef>
-          <a:effectRef idx="2">
-            <a:schemeClr val="accent1"/>
-          </a:effectRef>
-          <a:fontRef idx="minor">
-            <a:schemeClr val="lt1"/>
-          </a:fontRef>
-        </p:style>
-        <p:txBody>
-          <a:bodyPr rtlCol="0" anchor="ctr"/>
-          <a:lstStyle/>
-          <a:p>
-            <a:pPr algn="ctr"/>
-          </a:p>
-        </p:txBody>
-      </p:sp>
-      <p:sp>
-        <p:nvSpPr>
-          <p:cNvPr id="6" name="TextBox 5"/>
-          <p:cNvSpPr txBox="1"/>
-          <p:nvPr/>
-        </p:nvSpPr>
-        <p:spPr>
-          <a:xfrm>
-            <a:off x="822960" y="6035040"/>
-            <a:ext cx="7315200" cy="365760"/>
-          </a:xfrm>
-          <a:prstGeom prst="rect">
-            <a:avLst/>
-          </a:prstGeom>
-          <a:noFill/>
-        </p:spPr>
-        <p:txBody>
-          <a:bodyPr wrap="square" anchor="t" lIns="0" rIns="0" tIns="0" bIns="0">
-            <a:spAutoFit/>
-          </a:bodyPr>
-          <a:lstStyle/>
-          <a:p>
-            <a:pPr algn="l">
-              <a:lnSpc>
-                <a:spcPct val="115000"/>
-              </a:lnSpc>
-            </a:pPr>
-            <a:r>
-              <a:rPr sz="1400" b="0" i="0">
-                <a:solidFill>
-                  <a:srgbClr val="8EA7BA"/>
-                </a:solidFill>
-                <a:latin typeface="Calibri"/>
-              </a:rPr>
-              <a:t>Mark Grennan  •  W5TSU  •  mark@grennan.com</a:t>
+              <a:t>1 / 19</a:t>
             </a:r>
           </a:p>
         </p:txBody>
@@ -10376,7 +9959,7 @@
                 </a:solidFill>
                 <a:latin typeface="Calibri"/>
               </a:rPr>
-              <a:t>2 / 20</a:t>
+              <a:t>2 / 19</a:t>
             </a:r>
           </a:p>
         </p:txBody>
@@ -11076,7 +10659,7 @@
                 </a:solidFill>
                 <a:latin typeface="Calibri"/>
               </a:rPr>
-              <a:t>3 / 20</a:t>
+              <a:t>3 / 19</a:t>
             </a:r>
           </a:p>
         </p:txBody>
@@ -11177,7 +10760,7 @@
                 </a:solidFill>
                 <a:latin typeface="Calibri"/>
               </a:rPr>
-              <a:t>WHY IT MATTERS</a:t>
+              <a:t>THE HARDWARE</a:t>
             </a:r>
           </a:p>
         </p:txBody>
@@ -11216,7 +10799,7 @@
                 </a:solidFill>
                 <a:latin typeface="Calibri"/>
               </a:rPr>
-              <a:t>One Radio, Many Radios</a:t>
+              <a:t>HackRF One + Ham Handheld</a:t>
             </a:r>
           </a:p>
         </p:txBody>
@@ -11267,14 +10850,101 @@
       </p:sp>
       <p:sp>
         <p:nvSpPr>
-          <p:cNvPr id="6" name="TextBox 5"/>
+          <p:cNvPr id="6" name="Rounded Rectangle 5"/>
+          <p:cNvSpPr/>
+          <p:nvPr/>
+        </p:nvSpPr>
+        <p:spPr>
+          <a:xfrm>
+            <a:off x="640080" y="1920240"/>
+            <a:ext cx="5212080" cy="4114800"/>
+          </a:xfrm>
+          <a:prstGeom prst="roundRect">
+            <a:avLst>
+              <a:gd name="adj" fmla="val 4000"/>
+            </a:avLst>
+          </a:prstGeom>
+          <a:solidFill>
+            <a:srgbClr val="0F2438"/>
+          </a:solidFill>
+          <a:ln w="12700">
+            <a:solidFill>
+              <a:srgbClr val="1B5E58"/>
+            </a:solidFill>
+          </a:ln>
+          <a:effectLst/>
+        </p:spPr>
+        <p:style>
+          <a:lnRef idx="1">
+            <a:schemeClr val="accent1"/>
+          </a:lnRef>
+          <a:fillRef idx="3">
+            <a:schemeClr val="accent1"/>
+          </a:fillRef>
+          <a:effectRef idx="2">
+            <a:schemeClr val="accent1"/>
+          </a:effectRef>
+          <a:fontRef idx="minor">
+            <a:schemeClr val="lt1"/>
+          </a:fontRef>
+        </p:style>
+        <p:txBody>
+          <a:bodyPr rtlCol="0" anchor="ctr"/>
+          <a:lstStyle/>
+          <a:p>
+            <a:pPr algn="ctr"/>
+          </a:p>
+        </p:txBody>
+      </p:sp>
+      <p:sp>
+        <p:nvSpPr>
+          <p:cNvPr id="7" name="TextBox 6"/>
           <p:cNvSpPr txBox="1"/>
           <p:nvPr/>
         </p:nvSpPr>
         <p:spPr>
           <a:xfrm>
-            <a:off x="640080" y="1920240"/>
-            <a:ext cx="10698480" cy="4114800"/>
+            <a:off x="960120" y="2148840"/>
+            <a:ext cx="4572000" cy="365760"/>
+          </a:xfrm>
+          <a:prstGeom prst="rect">
+            <a:avLst/>
+          </a:prstGeom>
+          <a:noFill/>
+        </p:spPr>
+        <p:txBody>
+          <a:bodyPr wrap="square" anchor="t" lIns="0" rIns="0" tIns="0" bIns="0">
+            <a:spAutoFit/>
+          </a:bodyPr>
+          <a:lstStyle/>
+          <a:p>
+            <a:pPr algn="l">
+              <a:lnSpc>
+                <a:spcPct val="115000"/>
+              </a:lnSpc>
+            </a:pPr>
+            <a:r>
+              <a:rPr sz="2000" b="1" i="0">
+                <a:solidFill>
+                  <a:srgbClr val="35D0BA"/>
+                </a:solidFill>
+                <a:latin typeface="Calibri"/>
+              </a:rPr>
+              <a:t>HackRF One</a:t>
+            </a:r>
+          </a:p>
+        </p:txBody>
+      </p:sp>
+      <p:sp>
+        <p:nvSpPr>
+          <p:cNvPr id="8" name="TextBox 7"/>
+          <p:cNvSpPr txBox="1"/>
+          <p:nvPr/>
+        </p:nvSpPr>
+        <p:spPr>
+          <a:xfrm>
+            <a:off x="960120" y="2606040"/>
+            <a:ext cx="4572000" cy="3200400"/>
           </a:xfrm>
           <a:prstGeom prst="rect">
             <a:avLst/>
@@ -11292,33 +10962,36 @@
                 <a:spcPct val="112000"/>
               </a:lnSpc>
               <a:spcAft>
-                <a:spcPts val="1800"/>
+                <a:spcPts val="1200"/>
               </a:spcAft>
             </a:pPr>
             <a:r>
-              <a:rPr sz="1900">
+              <a:rPr sz="1600">
                 <a:solidFill>
                   <a:srgbClr val="D7E3EC"/>
                 </a:solidFill>
                 <a:latin typeface="Calibri"/>
               </a:rPr>
-              <a:t>•  Flexibility</a:t>
-            </a:r>
-          </a:p>
-          <a:p>
-            <a:pPr lvl="1">
+              <a:t>•  1 MHz – 6 GHz tuning range</a:t>
+            </a:r>
+          </a:p>
+          <a:p>
+            <a:pPr>
+              <a:lnSpc>
+                <a:spcPct val="112000"/>
+              </a:lnSpc>
               <a:spcAft>
-                <a:spcPts val="600"/>
+                <a:spcPts val="1200"/>
               </a:spcAft>
             </a:pPr>
             <a:r>
               <a:rPr sz="1600">
                 <a:solidFill>
-                  <a:srgbClr val="8EA7BA"/>
-                </a:solidFill>
-                <a:latin typeface="Calibri"/>
-              </a:rPr>
-              <a:t>–  A ham repeater receiver, a broadcast FM receiver, and a wideband recorder are all just different flowgraphs on the same box.</a:t>
+                  <a:srgbClr val="D7E3EC"/>
+                </a:solidFill>
+                <a:latin typeface="Calibri"/>
+              </a:rPr>
+              <a:t>•  Up to 20 Msps, 8-bit ADC/DAC</a:t>
             </a:r>
           </a:p>
           <a:p>
@@ -11327,33 +11000,36 @@
                 <a:spcPct val="112000"/>
               </a:lnSpc>
               <a:spcAft>
-                <a:spcPts val="1800"/>
+                <a:spcPts val="1200"/>
               </a:spcAft>
             </a:pPr>
             <a:r>
-              <a:rPr sz="1900">
+              <a:rPr sz="1600">
                 <a:solidFill>
                   <a:srgbClr val="D7E3EC"/>
                 </a:solidFill>
                 <a:latin typeface="Calibri"/>
               </a:rPr>
-              <a:t>•  Access</a:t>
-            </a:r>
-          </a:p>
-          <a:p>
-            <a:pPr lvl="1">
+              <a:t>•  Half-duplex (RX or TX, not both at once)</a:t>
+            </a:r>
+          </a:p>
+          <a:p>
+            <a:pPr>
+              <a:lnSpc>
+                <a:spcPct val="112000"/>
+              </a:lnSpc>
               <a:spcAft>
-                <a:spcPts val="600"/>
+                <a:spcPts val="1200"/>
               </a:spcAft>
             </a:pPr>
             <a:r>
               <a:rPr sz="1600">
                 <a:solidFill>
-                  <a:srgbClr val="8EA7BA"/>
-                </a:solidFill>
-                <a:latin typeface="Calibri"/>
-              </a:rPr>
-              <a:t>–  A $300 HackRF + a laptop gets a student or new ham hands-on with RF/DSP concepts that used to need a rack of lab gear.</a:t>
+                  <a:srgbClr val="D7E3EC"/>
+                </a:solidFill>
+                <a:latin typeface="Calibri"/>
+              </a:rPr>
+              <a:t>•  USB-powered, open source hardware</a:t>
             </a:r>
           </a:p>
           <a:p>
@@ -11362,82 +11038,79 @@
                 <a:spcPct val="112000"/>
               </a:lnSpc>
               <a:spcAft>
-                <a:spcPts val="1800"/>
+                <a:spcPts val="1200"/>
               </a:spcAft>
             </a:pPr>
             <a:r>
-              <a:rPr sz="1900">
+              <a:rPr sz="1600">
                 <a:solidFill>
                   <a:srgbClr val="D7E3EC"/>
                 </a:solidFill>
                 <a:latin typeface="Calibri"/>
               </a:rPr>
-              <a:t>•  Prototyping speed</a:t>
-            </a:r>
-          </a:p>
-          <a:p>
-            <a:pPr lvl="1">
-              <a:spcAft>
-                <a:spcPts val="600"/>
-              </a:spcAft>
-            </a:pPr>
-            <a:r>
-              <a:rPr sz="1600">
-                <a:solidFill>
-                  <a:srgbClr val="8EA7BA"/>
-                </a:solidFill>
-                <a:latin typeface="Calibri"/>
-              </a:rPr>
-              <a:t>–  Try an idea by dragging blocks in GNU Radio Companion instead of designing a circuit board.</a:t>
-            </a:r>
-          </a:p>
-          <a:p>
-            <a:pPr>
-              <a:lnSpc>
-                <a:spcPct val="112000"/>
-              </a:lnSpc>
-              <a:spcAft>
-                <a:spcPts val="1800"/>
-              </a:spcAft>
-            </a:pPr>
-            <a:r>
-              <a:rPr sz="1900">
-                <a:solidFill>
-                  <a:srgbClr val="D7E3EC"/>
-                </a:solidFill>
-                <a:latin typeface="Calibri"/>
-              </a:rPr>
-              <a:t>•  It's how modern radio actually works</a:t>
-            </a:r>
-          </a:p>
-          <a:p>
-            <a:pPr lvl="1">
-              <a:spcAft>
-                <a:spcPts val="600"/>
-              </a:spcAft>
-            </a:pPr>
-            <a:r>
-              <a:rPr sz="1600">
-                <a:solidFill>
-                  <a:srgbClr val="8EA7BA"/>
-                </a:solidFill>
-                <a:latin typeface="Calibri"/>
-              </a:rPr>
-              <a:t>–  Cell networks, WiFi, and most new ham/commercial gear are SDR under the hood already.</a:t>
-            </a:r>
-          </a:p>
-        </p:txBody>
-      </p:sp>
-      <p:sp>
-        <p:nvSpPr>
-          <p:cNvPr id="7" name="TextBox 6"/>
+              <a:t>•  This talk: driven via SoapySDR from GNU Radio</a:t>
+            </a:r>
+          </a:p>
+        </p:txBody>
+      </p:sp>
+      <p:sp>
+        <p:nvSpPr>
+          <p:cNvPr id="9" name="Rounded Rectangle 8"/>
+          <p:cNvSpPr/>
+          <p:nvPr/>
+        </p:nvSpPr>
+        <p:spPr>
+          <a:xfrm>
+            <a:off x="6309360" y="1920240"/>
+            <a:ext cx="5212080" cy="4114800"/>
+          </a:xfrm>
+          <a:prstGeom prst="roundRect">
+            <a:avLst>
+              <a:gd name="adj" fmla="val 4000"/>
+            </a:avLst>
+          </a:prstGeom>
+          <a:solidFill>
+            <a:srgbClr val="0F2438"/>
+          </a:solidFill>
+          <a:ln w="12700">
+            <a:solidFill>
+              <a:srgbClr val="1B5E58"/>
+            </a:solidFill>
+          </a:ln>
+          <a:effectLst/>
+        </p:spPr>
+        <p:style>
+          <a:lnRef idx="1">
+            <a:schemeClr val="accent1"/>
+          </a:lnRef>
+          <a:fillRef idx="3">
+            <a:schemeClr val="accent1"/>
+          </a:fillRef>
+          <a:effectRef idx="2">
+            <a:schemeClr val="accent1"/>
+          </a:effectRef>
+          <a:fontRef idx="minor">
+            <a:schemeClr val="lt1"/>
+          </a:fontRef>
+        </p:style>
+        <p:txBody>
+          <a:bodyPr rtlCol="0" anchor="ctr"/>
+          <a:lstStyle/>
+          <a:p>
+            <a:pPr algn="ctr"/>
+          </a:p>
+        </p:txBody>
+      </p:sp>
+      <p:sp>
+        <p:nvSpPr>
+          <p:cNvPr id="10" name="TextBox 9"/>
           <p:cNvSpPr txBox="1"/>
           <p:nvPr/>
         </p:nvSpPr>
         <p:spPr>
           <a:xfrm>
-            <a:off x="640080" y="6473952"/>
-            <a:ext cx="7315200" cy="274320"/>
+            <a:off x="6629400" y="2148840"/>
+            <a:ext cx="4572000" cy="365760"/>
           </a:xfrm>
           <a:prstGeom prst="rect">
             <a:avLst/>
@@ -11456,27 +11129,126 @@
               </a:lnSpc>
             </a:pPr>
             <a:r>
-              <a:rPr sz="1000" b="0" i="0">
-                <a:solidFill>
-                  <a:srgbClr val="8EA7BA"/>
-                </a:solidFill>
-                <a:latin typeface="Calibri"/>
-              </a:rPr>
-              <a:t>SDR Demo -- GNU Radio + HackRF + Ham Handheld</a:t>
-            </a:r>
-          </a:p>
-        </p:txBody>
-      </p:sp>
-      <p:sp>
-        <p:nvSpPr>
-          <p:cNvPr id="8" name="TextBox 7"/>
+              <a:rPr sz="2000" b="1" i="0">
+                <a:solidFill>
+                  <a:srgbClr val="35D0BA"/>
+                </a:solidFill>
+                <a:latin typeface="Calibri"/>
+              </a:rPr>
+              <a:t>Dual-Band Handheld (144/440)</a:t>
+            </a:r>
+          </a:p>
+        </p:txBody>
+      </p:sp>
+      <p:sp>
+        <p:nvSpPr>
+          <p:cNvPr id="11" name="TextBox 10"/>
           <p:cNvSpPr txBox="1"/>
           <p:nvPr/>
         </p:nvSpPr>
         <p:spPr>
           <a:xfrm>
-            <a:off x="11292840" y="6473952"/>
-            <a:ext cx="731520" cy="274320"/>
+            <a:off x="6629400" y="2606040"/>
+            <a:ext cx="4572000" cy="3200400"/>
+          </a:xfrm>
+          <a:prstGeom prst="rect">
+            <a:avLst/>
+          </a:prstGeom>
+          <a:noFill/>
+        </p:spPr>
+        <p:txBody>
+          <a:bodyPr wrap="square">
+            <a:spAutoFit/>
+          </a:bodyPr>
+          <a:lstStyle/>
+          <a:p>
+            <a:pPr>
+              <a:lnSpc>
+                <a:spcPct val="112000"/>
+              </a:lnSpc>
+              <a:spcAft>
+                <a:spcPts val="1200"/>
+              </a:spcAft>
+            </a:pPr>
+            <a:r>
+              <a:rPr sz="1600">
+                <a:solidFill>
+                  <a:srgbClr val="D7E3EC"/>
+                </a:solidFill>
+                <a:latin typeface="Calibri"/>
+              </a:rPr>
+              <a:t>•  Our “known-good” reference radio</a:t>
+            </a:r>
+          </a:p>
+          <a:p>
+            <a:pPr>
+              <a:lnSpc>
+                <a:spcPct val="112000"/>
+              </a:lnSpc>
+              <a:spcAft>
+                <a:spcPts val="1200"/>
+              </a:spcAft>
+            </a:pPr>
+            <a:r>
+              <a:rPr sz="1600">
+                <a:solidFill>
+                  <a:srgbClr val="D7E3EC"/>
+                </a:solidFill>
+                <a:latin typeface="Calibri"/>
+              </a:rPr>
+              <a:t>•  2m (144-148 MHz) and 70cm (420-450 MHz)</a:t>
+            </a:r>
+          </a:p>
+          <a:p>
+            <a:pPr>
+              <a:lnSpc>
+                <a:spcPct val="112000"/>
+              </a:lnSpc>
+              <a:spcAft>
+                <a:spcPts val="1200"/>
+              </a:spcAft>
+            </a:pPr>
+            <a:r>
+              <a:rPr sz="1600">
+                <a:solidFill>
+                  <a:srgbClr val="D7E3EC"/>
+                </a:solidFill>
+                <a:latin typeface="Calibri"/>
+              </a:rPr>
+              <a:t>•  Keys up so we can watch/hear the HackRF receive it</a:t>
+            </a:r>
+          </a:p>
+          <a:p>
+            <a:pPr>
+              <a:lnSpc>
+                <a:spcPct val="112000"/>
+              </a:lnSpc>
+              <a:spcAft>
+                <a:spcPts val="1200"/>
+              </a:spcAft>
+            </a:pPr>
+            <a:r>
+              <a:rPr sz="1600">
+                <a:solidFill>
+                  <a:srgbClr val="D7E3EC"/>
+                </a:solidFill>
+                <a:latin typeface="Calibri"/>
+              </a:rPr>
+              <a:t>•  Receives our HackRF transmissions in the reverse demos</a:t>
+            </a:r>
+          </a:p>
+        </p:txBody>
+      </p:sp>
+      <p:sp>
+        <p:nvSpPr>
+          <p:cNvPr id="12" name="TextBox 11"/>
+          <p:cNvSpPr txBox="1"/>
+          <p:nvPr/>
+        </p:nvSpPr>
+        <p:spPr>
+          <a:xfrm>
+            <a:off x="640080" y="6473952"/>
+            <a:ext cx="7315200" cy="274320"/>
           </a:xfrm>
           <a:prstGeom prst="rect">
             <a:avLst/>
@@ -11489,6 +11261,45 @@
           </a:bodyPr>
           <a:lstStyle/>
           <a:p>
+            <a:pPr algn="l">
+              <a:lnSpc>
+                <a:spcPct val="115000"/>
+              </a:lnSpc>
+            </a:pPr>
+            <a:r>
+              <a:rPr sz="1000" b="0" i="0">
+                <a:solidFill>
+                  <a:srgbClr val="8EA7BA"/>
+                </a:solidFill>
+                <a:latin typeface="Calibri"/>
+              </a:rPr>
+              <a:t>SDR Demo -- GNU Radio + HackRF + Ham Handheld</a:t>
+            </a:r>
+          </a:p>
+        </p:txBody>
+      </p:sp>
+      <p:sp>
+        <p:nvSpPr>
+          <p:cNvPr id="13" name="TextBox 12"/>
+          <p:cNvSpPr txBox="1"/>
+          <p:nvPr/>
+        </p:nvSpPr>
+        <p:spPr>
+          <a:xfrm>
+            <a:off x="11292840" y="6473952"/>
+            <a:ext cx="731520" cy="274320"/>
+          </a:xfrm>
+          <a:prstGeom prst="rect">
+            <a:avLst/>
+          </a:prstGeom>
+          <a:noFill/>
+        </p:spPr>
+        <p:txBody>
+          <a:bodyPr wrap="square" anchor="t" lIns="0" rIns="0" tIns="0" bIns="0">
+            <a:spAutoFit/>
+          </a:bodyPr>
+          <a:lstStyle/>
+          <a:p>
             <a:pPr algn="r">
               <a:lnSpc>
                 <a:spcPct val="115000"/>
@@ -11501,7 +11312,7 @@
                 </a:solidFill>
                 <a:latin typeface="Calibri"/>
               </a:rPr>
-              <a:t>4 / 20</a:t>
+              <a:t>4 / 19</a:t>
             </a:r>
           </a:p>
         </p:txBody>
@@ -11602,7 +11413,7 @@
                 </a:solidFill>
                 <a:latin typeface="Calibri"/>
               </a:rPr>
-              <a:t>THE HARDWARE</a:t>
+              <a:t>THE SOFTWARE</a:t>
             </a:r>
           </a:p>
         </p:txBody>
@@ -11641,7 +11452,7 @@
                 </a:solidFill>
                 <a:latin typeface="Calibri"/>
               </a:rPr>
-              <a:t>HackRF One + Ham Handheld</a:t>
+              <a:t>GNU Radio + GNU Radio Companion</a:t>
             </a:r>
           </a:p>
         </p:txBody>
@@ -11692,14 +11503,113 @@
       </p:sp>
       <p:sp>
         <p:nvSpPr>
-          <p:cNvPr id="6" name="Rounded Rectangle 5"/>
+          <p:cNvPr id="6" name="TextBox 5"/>
+          <p:cNvSpPr txBox="1"/>
+          <p:nvPr/>
+        </p:nvSpPr>
+        <p:spPr>
+          <a:xfrm>
+            <a:off x="640080" y="1920240"/>
+            <a:ext cx="6126480" cy="4114800"/>
+          </a:xfrm>
+          <a:prstGeom prst="rect">
+            <a:avLst/>
+          </a:prstGeom>
+          <a:noFill/>
+        </p:spPr>
+        <p:txBody>
+          <a:bodyPr wrap="square">
+            <a:spAutoFit/>
+          </a:bodyPr>
+          <a:lstStyle/>
+          <a:p>
+            <a:pPr>
+              <a:lnSpc>
+                <a:spcPct val="112000"/>
+              </a:lnSpc>
+              <a:spcAft>
+                <a:spcPts val="1600"/>
+              </a:spcAft>
+            </a:pPr>
+            <a:r>
+              <a:rPr sz="1800">
+                <a:solidFill>
+                  <a:srgbClr val="D7E3EC"/>
+                </a:solidFill>
+                <a:latin typeface="Calibri"/>
+              </a:rPr>
+              <a:t>•  GNU Radio: open-source DSP toolkit -- filters, modulators, demodulators, resamplers, all as reusable building blocks.</a:t>
+            </a:r>
+          </a:p>
+          <a:p>
+            <a:pPr>
+              <a:lnSpc>
+                <a:spcPct val="112000"/>
+              </a:lnSpc>
+              <a:spcAft>
+                <a:spcPts val="1600"/>
+              </a:spcAft>
+            </a:pPr>
+            <a:r>
+              <a:rPr sz="1800">
+                <a:solidFill>
+                  <a:srgbClr val="D7E3EC"/>
+                </a:solidFill>
+                <a:latin typeface="Calibri"/>
+              </a:rPr>
+              <a:t>•  GNU Radio Companion (GRC): drag-and-drop flowgraph editor that generates the underlying Python for you.</a:t>
+            </a:r>
+          </a:p>
+          <a:p>
+            <a:pPr>
+              <a:lnSpc>
+                <a:spcPct val="112000"/>
+              </a:lnSpc>
+              <a:spcAft>
+                <a:spcPts val="1600"/>
+              </a:spcAft>
+            </a:pPr>
+            <a:r>
+              <a:rPr sz="1800">
+                <a:solidFill>
+                  <a:srgbClr val="D7E3EC"/>
+                </a:solidFill>
+                <a:latin typeface="Calibri"/>
+              </a:rPr>
+              <a:t>•  SoapySDR: hardware abstraction layer -- the same flowgraph blocks work whether it's a HackRF, RTL-SDR, LimeSDR, or others.</a:t>
+            </a:r>
+          </a:p>
+          <a:p>
+            <a:pPr>
+              <a:lnSpc>
+                <a:spcPct val="112000"/>
+              </a:lnSpc>
+              <a:spcAft>
+                <a:spcPts val="1600"/>
+              </a:spcAft>
+            </a:pPr>
+            <a:r>
+              <a:rPr sz="1800">
+                <a:solidFill>
+                  <a:srgbClr val="D7E3EC"/>
+                </a:solidFill>
+                <a:latin typeface="Calibri"/>
+              </a:rPr>
+              <a:t>•  Every flowgraph in this demo is a plain-text .grc file -- versionable, diffable, shareable.</a:t>
+            </a:r>
+          </a:p>
+        </p:txBody>
+      </p:sp>
+      <p:sp>
+        <p:nvSpPr>
+          <p:cNvPr id="7" name="Rounded Rectangle 6"/>
           <p:cNvSpPr/>
           <p:nvPr/>
         </p:nvSpPr>
         <p:spPr>
           <a:xfrm>
-            <a:off x="640080" y="1920240"/>
-            <a:ext cx="5212080" cy="4114800"/>
+            <a:off x="7223760" y="1920240"/>
+            <a:ext cx="4297680" cy="3931920"/>
           </a:xfrm>
           <a:prstGeom prst="roundRect">
             <a:avLst>
@@ -11740,14 +11650,14 @@
       </p:sp>
       <p:sp>
         <p:nvSpPr>
-          <p:cNvPr id="7" name="TextBox 6"/>
+          <p:cNvPr id="8" name="TextBox 7"/>
           <p:cNvSpPr txBox="1"/>
           <p:nvPr/>
         </p:nvSpPr>
         <p:spPr>
           <a:xfrm>
-            <a:off x="960120" y="2148840"/>
-            <a:ext cx="4572000" cy="365760"/>
+            <a:off x="7543800" y="2148840"/>
+            <a:ext cx="3657600" cy="320040"/>
           </a:xfrm>
           <a:prstGeom prst="rect">
             <a:avLst/>
@@ -11766,131 +11676,13 @@
               </a:lnSpc>
             </a:pPr>
             <a:r>
-              <a:rPr sz="2000" b="1" i="0">
-                <a:solidFill>
-                  <a:srgbClr val="35D0BA"/>
-                </a:solidFill>
-                <a:latin typeface="Calibri"/>
-              </a:rPr>
-              <a:t>HackRF One</a:t>
-            </a:r>
-          </a:p>
-        </p:txBody>
-      </p:sp>
-      <p:sp>
-        <p:nvSpPr>
-          <p:cNvPr id="8" name="TextBox 7"/>
-          <p:cNvSpPr txBox="1"/>
-          <p:nvPr/>
-        </p:nvSpPr>
-        <p:spPr>
-          <a:xfrm>
-            <a:off x="960120" y="2606040"/>
-            <a:ext cx="4572000" cy="3200400"/>
-          </a:xfrm>
-          <a:prstGeom prst="rect">
-            <a:avLst/>
-          </a:prstGeom>
-          <a:noFill/>
-        </p:spPr>
-        <p:txBody>
-          <a:bodyPr wrap="square">
-            <a:spAutoFit/>
-          </a:bodyPr>
-          <a:lstStyle/>
-          <a:p>
-            <a:pPr>
-              <a:lnSpc>
-                <a:spcPct val="112000"/>
-              </a:lnSpc>
-              <a:spcAft>
-                <a:spcPts val="1200"/>
-              </a:spcAft>
-            </a:pPr>
-            <a:r>
-              <a:rPr sz="1600">
-                <a:solidFill>
-                  <a:srgbClr val="D7E3EC"/>
-                </a:solidFill>
-                <a:latin typeface="Calibri"/>
-              </a:rPr>
-              <a:t>•  1 MHz – 6 GHz tuning range</a:t>
-            </a:r>
-          </a:p>
-          <a:p>
-            <a:pPr>
-              <a:lnSpc>
-                <a:spcPct val="112000"/>
-              </a:lnSpc>
-              <a:spcAft>
-                <a:spcPts val="1200"/>
-              </a:spcAft>
-            </a:pPr>
-            <a:r>
-              <a:rPr sz="1600">
-                <a:solidFill>
-                  <a:srgbClr val="D7E3EC"/>
-                </a:solidFill>
-                <a:latin typeface="Calibri"/>
-              </a:rPr>
-              <a:t>•  Up to 20 Msps, 8-bit ADC/DAC</a:t>
-            </a:r>
-          </a:p>
-          <a:p>
-            <a:pPr>
-              <a:lnSpc>
-                <a:spcPct val="112000"/>
-              </a:lnSpc>
-              <a:spcAft>
-                <a:spcPts val="1200"/>
-              </a:spcAft>
-            </a:pPr>
-            <a:r>
-              <a:rPr sz="1600">
-                <a:solidFill>
-                  <a:srgbClr val="D7E3EC"/>
-                </a:solidFill>
-                <a:latin typeface="Calibri"/>
-              </a:rPr>
-              <a:t>•  Half-duplex (RX or TX, not both at once)</a:t>
-            </a:r>
-          </a:p>
-          <a:p>
-            <a:pPr>
-              <a:lnSpc>
-                <a:spcPct val="112000"/>
-              </a:lnSpc>
-              <a:spcAft>
-                <a:spcPts val="1200"/>
-              </a:spcAft>
-            </a:pPr>
-            <a:r>
-              <a:rPr sz="1600">
-                <a:solidFill>
-                  <a:srgbClr val="D7E3EC"/>
-                </a:solidFill>
-                <a:latin typeface="Calibri"/>
-              </a:rPr>
-              <a:t>•  USB-powered, open source hardware</a:t>
-            </a:r>
-          </a:p>
-          <a:p>
-            <a:pPr>
-              <a:lnSpc>
-                <a:spcPct val="112000"/>
-              </a:lnSpc>
-              <a:spcAft>
-                <a:spcPts val="1200"/>
-              </a:spcAft>
-            </a:pPr>
-            <a:r>
-              <a:rPr sz="1600">
-                <a:solidFill>
-                  <a:srgbClr val="D7E3EC"/>
-                </a:solidFill>
-                <a:latin typeface="Calibri"/>
-              </a:rPr>
-              <a:t>•  This talk: driven via SoapySDR from GNU Radio</a:t>
+              <a:rPr sz="1500" b="1" i="0">
+                <a:solidFill>
+                  <a:srgbClr val="8EA7BA"/>
+                </a:solidFill>
+                <a:latin typeface="Calibri"/>
+              </a:rPr>
+              <a:t>Toolchain</a:t>
             </a:r>
           </a:p>
         </p:txBody>
@@ -11903,21 +11695,19 @@
         </p:nvSpPr>
         <p:spPr>
           <a:xfrm>
-            <a:off x="6309360" y="1920240"/>
-            <a:ext cx="5212080" cy="4114800"/>
+            <a:off x="7543800" y="2606040"/>
+            <a:ext cx="3657600" cy="566928"/>
           </a:xfrm>
           <a:prstGeom prst="roundRect">
             <a:avLst>
-              <a:gd name="adj" fmla="val 4000"/>
+              <a:gd name="adj" fmla="val 20000"/>
             </a:avLst>
           </a:prstGeom>
           <a:solidFill>
-            <a:srgbClr val="0F2438"/>
+            <a:srgbClr val="1B5E58"/>
           </a:solidFill>
-          <a:ln w="12700">
-            <a:solidFill>
-              <a:srgbClr val="1B5E58"/>
-            </a:solidFill>
+          <a:ln>
+            <a:noFill/>
           </a:ln>
           <a:effectLst/>
         </p:spPr>
@@ -11936,6 +11726,59 @@
           </a:fontRef>
         </p:style>
         <p:txBody>
+          <a:bodyPr rtlCol="0" anchor="ctr" lIns="127000"/>
+          <a:lstStyle/>
+          <a:p>
+            <a:pPr algn="ctr"/>
+            <a:r>
+              <a:rPr sz="1300" b="1">
+                <a:solidFill>
+                  <a:srgbClr val="FFFFFF"/>
+                </a:solidFill>
+                <a:latin typeface="Calibri"/>
+              </a:rPr>
+              <a:t>Flowgraph (.grc)</a:t>
+            </a:r>
+          </a:p>
+        </p:txBody>
+      </p:sp>
+      <p:sp>
+        <p:nvSpPr>
+          <p:cNvPr id="10" name="Down Arrow 9"/>
+          <p:cNvSpPr/>
+          <p:nvPr/>
+        </p:nvSpPr>
+        <p:spPr>
+          <a:xfrm>
+            <a:off x="9262872" y="3172968"/>
+            <a:ext cx="219456" cy="146304"/>
+          </a:xfrm>
+          <a:prstGeom prst="downArrow">
+            <a:avLst/>
+          </a:prstGeom>
+          <a:solidFill>
+            <a:srgbClr val="35D0BA"/>
+          </a:solidFill>
+          <a:ln>
+            <a:noFill/>
+          </a:ln>
+          <a:effectLst/>
+        </p:spPr>
+        <p:style>
+          <a:lnRef idx="1">
+            <a:schemeClr val="accent1"/>
+          </a:lnRef>
+          <a:fillRef idx="3">
+            <a:schemeClr val="accent1"/>
+          </a:fillRef>
+          <a:effectRef idx="2">
+            <a:schemeClr val="accent1"/>
+          </a:effectRef>
+          <a:fontRef idx="minor">
+            <a:schemeClr val="lt1"/>
+          </a:fontRef>
+        </p:style>
+        <p:txBody>
           <a:bodyPr rtlCol="0" anchor="ctr"/>
           <a:lstStyle/>
           <a:p>
@@ -11945,14 +11788,366 @@
       </p:sp>
       <p:sp>
         <p:nvSpPr>
-          <p:cNvPr id="10" name="TextBox 9"/>
+          <p:cNvPr id="11" name="Rounded Rectangle 10"/>
+          <p:cNvSpPr/>
+          <p:nvPr/>
+        </p:nvSpPr>
+        <p:spPr>
+          <a:xfrm>
+            <a:off x="7543800" y="3319272"/>
+            <a:ext cx="3657600" cy="566928"/>
+          </a:xfrm>
+          <a:prstGeom prst="roundRect">
+            <a:avLst>
+              <a:gd name="adj" fmla="val 20000"/>
+            </a:avLst>
+          </a:prstGeom>
+          <a:solidFill>
+            <a:srgbClr val="1B5E58"/>
+          </a:solidFill>
+          <a:ln>
+            <a:noFill/>
+          </a:ln>
+          <a:effectLst/>
+        </p:spPr>
+        <p:style>
+          <a:lnRef idx="1">
+            <a:schemeClr val="accent1"/>
+          </a:lnRef>
+          <a:fillRef idx="3">
+            <a:schemeClr val="accent1"/>
+          </a:fillRef>
+          <a:effectRef idx="2">
+            <a:schemeClr val="accent1"/>
+          </a:effectRef>
+          <a:fontRef idx="minor">
+            <a:schemeClr val="lt1"/>
+          </a:fontRef>
+        </p:style>
+        <p:txBody>
+          <a:bodyPr rtlCol="0" anchor="ctr" lIns="127000"/>
+          <a:lstStyle/>
+          <a:p>
+            <a:pPr algn="ctr"/>
+            <a:r>
+              <a:rPr sz="1300" b="1">
+                <a:solidFill>
+                  <a:srgbClr val="FFFFFF"/>
+                </a:solidFill>
+                <a:latin typeface="Calibri"/>
+              </a:rPr>
+              <a:t>GNU Radio Companion</a:t>
+            </a:r>
+          </a:p>
+        </p:txBody>
+      </p:sp>
+      <p:sp>
+        <p:nvSpPr>
+          <p:cNvPr id="12" name="Down Arrow 11"/>
+          <p:cNvSpPr/>
+          <p:nvPr/>
+        </p:nvSpPr>
+        <p:spPr>
+          <a:xfrm>
+            <a:off x="9262872" y="3886200"/>
+            <a:ext cx="219456" cy="146304"/>
+          </a:xfrm>
+          <a:prstGeom prst="downArrow">
+            <a:avLst/>
+          </a:prstGeom>
+          <a:solidFill>
+            <a:srgbClr val="35D0BA"/>
+          </a:solidFill>
+          <a:ln>
+            <a:noFill/>
+          </a:ln>
+          <a:effectLst/>
+        </p:spPr>
+        <p:style>
+          <a:lnRef idx="1">
+            <a:schemeClr val="accent1"/>
+          </a:lnRef>
+          <a:fillRef idx="3">
+            <a:schemeClr val="accent1"/>
+          </a:fillRef>
+          <a:effectRef idx="2">
+            <a:schemeClr val="accent1"/>
+          </a:effectRef>
+          <a:fontRef idx="minor">
+            <a:schemeClr val="lt1"/>
+          </a:fontRef>
+        </p:style>
+        <p:txBody>
+          <a:bodyPr rtlCol="0" anchor="ctr"/>
+          <a:lstStyle/>
+          <a:p>
+            <a:pPr algn="ctr"/>
+          </a:p>
+        </p:txBody>
+      </p:sp>
+      <p:sp>
+        <p:nvSpPr>
+          <p:cNvPr id="13" name="Rounded Rectangle 12"/>
+          <p:cNvSpPr/>
+          <p:nvPr/>
+        </p:nvSpPr>
+        <p:spPr>
+          <a:xfrm>
+            <a:off x="7543800" y="4032504"/>
+            <a:ext cx="3657600" cy="566928"/>
+          </a:xfrm>
+          <a:prstGeom prst="roundRect">
+            <a:avLst>
+              <a:gd name="adj" fmla="val 20000"/>
+            </a:avLst>
+          </a:prstGeom>
+          <a:solidFill>
+            <a:srgbClr val="1B5E58"/>
+          </a:solidFill>
+          <a:ln>
+            <a:noFill/>
+          </a:ln>
+          <a:effectLst/>
+        </p:spPr>
+        <p:style>
+          <a:lnRef idx="1">
+            <a:schemeClr val="accent1"/>
+          </a:lnRef>
+          <a:fillRef idx="3">
+            <a:schemeClr val="accent1"/>
+          </a:fillRef>
+          <a:effectRef idx="2">
+            <a:schemeClr val="accent1"/>
+          </a:effectRef>
+          <a:fontRef idx="minor">
+            <a:schemeClr val="lt1"/>
+          </a:fontRef>
+        </p:style>
+        <p:txBody>
+          <a:bodyPr rtlCol="0" anchor="ctr" lIns="127000"/>
+          <a:lstStyle/>
+          <a:p>
+            <a:pPr algn="ctr"/>
+            <a:r>
+              <a:rPr sz="1300" b="1">
+                <a:solidFill>
+                  <a:srgbClr val="FFFFFF"/>
+                </a:solidFill>
+                <a:latin typeface="Calibri"/>
+              </a:rPr>
+              <a:t>Generated Python</a:t>
+            </a:r>
+          </a:p>
+        </p:txBody>
+      </p:sp>
+      <p:sp>
+        <p:nvSpPr>
+          <p:cNvPr id="14" name="Down Arrow 13"/>
+          <p:cNvSpPr/>
+          <p:nvPr/>
+        </p:nvSpPr>
+        <p:spPr>
+          <a:xfrm>
+            <a:off x="9262872" y="4599432"/>
+            <a:ext cx="219456" cy="146304"/>
+          </a:xfrm>
+          <a:prstGeom prst="downArrow">
+            <a:avLst/>
+          </a:prstGeom>
+          <a:solidFill>
+            <a:srgbClr val="35D0BA"/>
+          </a:solidFill>
+          <a:ln>
+            <a:noFill/>
+          </a:ln>
+          <a:effectLst/>
+        </p:spPr>
+        <p:style>
+          <a:lnRef idx="1">
+            <a:schemeClr val="accent1"/>
+          </a:lnRef>
+          <a:fillRef idx="3">
+            <a:schemeClr val="accent1"/>
+          </a:fillRef>
+          <a:effectRef idx="2">
+            <a:schemeClr val="accent1"/>
+          </a:effectRef>
+          <a:fontRef idx="minor">
+            <a:schemeClr val="lt1"/>
+          </a:fontRef>
+        </p:style>
+        <p:txBody>
+          <a:bodyPr rtlCol="0" anchor="ctr"/>
+          <a:lstStyle/>
+          <a:p>
+            <a:pPr algn="ctr"/>
+          </a:p>
+        </p:txBody>
+      </p:sp>
+      <p:sp>
+        <p:nvSpPr>
+          <p:cNvPr id="15" name="Rounded Rectangle 14"/>
+          <p:cNvSpPr/>
+          <p:nvPr/>
+        </p:nvSpPr>
+        <p:spPr>
+          <a:xfrm>
+            <a:off x="7543800" y="4745736"/>
+            <a:ext cx="3657600" cy="566928"/>
+          </a:xfrm>
+          <a:prstGeom prst="roundRect">
+            <a:avLst>
+              <a:gd name="adj" fmla="val 20000"/>
+            </a:avLst>
+          </a:prstGeom>
+          <a:solidFill>
+            <a:srgbClr val="1B5E58"/>
+          </a:solidFill>
+          <a:ln>
+            <a:noFill/>
+          </a:ln>
+          <a:effectLst/>
+        </p:spPr>
+        <p:style>
+          <a:lnRef idx="1">
+            <a:schemeClr val="accent1"/>
+          </a:lnRef>
+          <a:fillRef idx="3">
+            <a:schemeClr val="accent1"/>
+          </a:fillRef>
+          <a:effectRef idx="2">
+            <a:schemeClr val="accent1"/>
+          </a:effectRef>
+          <a:fontRef idx="minor">
+            <a:schemeClr val="lt1"/>
+          </a:fontRef>
+        </p:style>
+        <p:txBody>
+          <a:bodyPr rtlCol="0" anchor="ctr" lIns="127000"/>
+          <a:lstStyle/>
+          <a:p>
+            <a:pPr algn="ctr"/>
+            <a:r>
+              <a:rPr sz="1300" b="1">
+                <a:solidFill>
+                  <a:srgbClr val="FFFFFF"/>
+                </a:solidFill>
+                <a:latin typeface="Calibri"/>
+              </a:rPr>
+              <a:t>GNU Radio runtime + SoapySDR</a:t>
+            </a:r>
+          </a:p>
+        </p:txBody>
+      </p:sp>
+      <p:sp>
+        <p:nvSpPr>
+          <p:cNvPr id="16" name="Down Arrow 15"/>
+          <p:cNvSpPr/>
+          <p:nvPr/>
+        </p:nvSpPr>
+        <p:spPr>
+          <a:xfrm>
+            <a:off x="9262872" y="5312664"/>
+            <a:ext cx="219456" cy="146304"/>
+          </a:xfrm>
+          <a:prstGeom prst="downArrow">
+            <a:avLst/>
+          </a:prstGeom>
+          <a:solidFill>
+            <a:srgbClr val="35D0BA"/>
+          </a:solidFill>
+          <a:ln>
+            <a:noFill/>
+          </a:ln>
+          <a:effectLst/>
+        </p:spPr>
+        <p:style>
+          <a:lnRef idx="1">
+            <a:schemeClr val="accent1"/>
+          </a:lnRef>
+          <a:fillRef idx="3">
+            <a:schemeClr val="accent1"/>
+          </a:fillRef>
+          <a:effectRef idx="2">
+            <a:schemeClr val="accent1"/>
+          </a:effectRef>
+          <a:fontRef idx="minor">
+            <a:schemeClr val="lt1"/>
+          </a:fontRef>
+        </p:style>
+        <p:txBody>
+          <a:bodyPr rtlCol="0" anchor="ctr"/>
+          <a:lstStyle/>
+          <a:p>
+            <a:pPr algn="ctr"/>
+          </a:p>
+        </p:txBody>
+      </p:sp>
+      <p:sp>
+        <p:nvSpPr>
+          <p:cNvPr id="17" name="Rounded Rectangle 16"/>
+          <p:cNvSpPr/>
+          <p:nvPr/>
+        </p:nvSpPr>
+        <p:spPr>
+          <a:xfrm>
+            <a:off x="7543800" y="5458968"/>
+            <a:ext cx="3657600" cy="566928"/>
+          </a:xfrm>
+          <a:prstGeom prst="roundRect">
+            <a:avLst>
+              <a:gd name="adj" fmla="val 20000"/>
+            </a:avLst>
+          </a:prstGeom>
+          <a:solidFill>
+            <a:srgbClr val="1B5E58"/>
+          </a:solidFill>
+          <a:ln>
+            <a:noFill/>
+          </a:ln>
+          <a:effectLst/>
+        </p:spPr>
+        <p:style>
+          <a:lnRef idx="1">
+            <a:schemeClr val="accent1"/>
+          </a:lnRef>
+          <a:fillRef idx="3">
+            <a:schemeClr val="accent1"/>
+          </a:fillRef>
+          <a:effectRef idx="2">
+            <a:schemeClr val="accent1"/>
+          </a:effectRef>
+          <a:fontRef idx="minor">
+            <a:schemeClr val="lt1"/>
+          </a:fontRef>
+        </p:style>
+        <p:txBody>
+          <a:bodyPr rtlCol="0" anchor="ctr" lIns="127000"/>
+          <a:lstStyle/>
+          <a:p>
+            <a:pPr algn="ctr"/>
+            <a:r>
+              <a:rPr sz="1300" b="1">
+                <a:solidFill>
+                  <a:srgbClr val="FFFFFF"/>
+                </a:solidFill>
+                <a:latin typeface="Calibri"/>
+              </a:rPr>
+              <a:t>HackRF One</a:t>
+            </a:r>
+          </a:p>
+        </p:txBody>
+      </p:sp>
+      <p:sp>
+        <p:nvSpPr>
+          <p:cNvPr id="18" name="TextBox 17"/>
           <p:cNvSpPr txBox="1"/>
           <p:nvPr/>
         </p:nvSpPr>
         <p:spPr>
           <a:xfrm>
-            <a:off x="6629400" y="2148840"/>
-            <a:ext cx="4572000" cy="365760"/>
+            <a:off x="640080" y="6473952"/>
+            <a:ext cx="7315200" cy="274320"/>
           </a:xfrm>
           <a:prstGeom prst="rect">
             <a:avLst/>
@@ -11971,126 +12166,27 @@
               </a:lnSpc>
             </a:pPr>
             <a:r>
-              <a:rPr sz="2000" b="1" i="0">
-                <a:solidFill>
-                  <a:srgbClr val="35D0BA"/>
-                </a:solidFill>
-                <a:latin typeface="Calibri"/>
-              </a:rPr>
-              <a:t>Dual-Band Handheld (144/440)</a:t>
-            </a:r>
-          </a:p>
-        </p:txBody>
-      </p:sp>
-      <p:sp>
-        <p:nvSpPr>
-          <p:cNvPr id="11" name="TextBox 10"/>
+              <a:rPr sz="1000" b="0" i="0">
+                <a:solidFill>
+                  <a:srgbClr val="8EA7BA"/>
+                </a:solidFill>
+                <a:latin typeface="Calibri"/>
+              </a:rPr>
+              <a:t>SDR Demo -- GNU Radio + HackRF + Ham Handheld</a:t>
+            </a:r>
+          </a:p>
+        </p:txBody>
+      </p:sp>
+      <p:sp>
+        <p:nvSpPr>
+          <p:cNvPr id="19" name="TextBox 18"/>
           <p:cNvSpPr txBox="1"/>
           <p:nvPr/>
         </p:nvSpPr>
         <p:spPr>
           <a:xfrm>
-            <a:off x="6629400" y="2606040"/>
-            <a:ext cx="4572000" cy="3200400"/>
-          </a:xfrm>
-          <a:prstGeom prst="rect">
-            <a:avLst/>
-          </a:prstGeom>
-          <a:noFill/>
-        </p:spPr>
-        <p:txBody>
-          <a:bodyPr wrap="square">
-            <a:spAutoFit/>
-          </a:bodyPr>
-          <a:lstStyle/>
-          <a:p>
-            <a:pPr>
-              <a:lnSpc>
-                <a:spcPct val="112000"/>
-              </a:lnSpc>
-              <a:spcAft>
-                <a:spcPts val="1200"/>
-              </a:spcAft>
-            </a:pPr>
-            <a:r>
-              <a:rPr sz="1600">
-                <a:solidFill>
-                  <a:srgbClr val="D7E3EC"/>
-                </a:solidFill>
-                <a:latin typeface="Calibri"/>
-              </a:rPr>
-              <a:t>•  Our “known-good” reference radio</a:t>
-            </a:r>
-          </a:p>
-          <a:p>
-            <a:pPr>
-              <a:lnSpc>
-                <a:spcPct val="112000"/>
-              </a:lnSpc>
-              <a:spcAft>
-                <a:spcPts val="1200"/>
-              </a:spcAft>
-            </a:pPr>
-            <a:r>
-              <a:rPr sz="1600">
-                <a:solidFill>
-                  <a:srgbClr val="D7E3EC"/>
-                </a:solidFill>
-                <a:latin typeface="Calibri"/>
-              </a:rPr>
-              <a:t>•  2m (144-148 MHz) and 70cm (420-450 MHz)</a:t>
-            </a:r>
-          </a:p>
-          <a:p>
-            <a:pPr>
-              <a:lnSpc>
-                <a:spcPct val="112000"/>
-              </a:lnSpc>
-              <a:spcAft>
-                <a:spcPts val="1200"/>
-              </a:spcAft>
-            </a:pPr>
-            <a:r>
-              <a:rPr sz="1600">
-                <a:solidFill>
-                  <a:srgbClr val="D7E3EC"/>
-                </a:solidFill>
-                <a:latin typeface="Calibri"/>
-              </a:rPr>
-              <a:t>•  Keys up so we can watch/hear the HackRF receive it</a:t>
-            </a:r>
-          </a:p>
-          <a:p>
-            <a:pPr>
-              <a:lnSpc>
-                <a:spcPct val="112000"/>
-              </a:lnSpc>
-              <a:spcAft>
-                <a:spcPts val="1200"/>
-              </a:spcAft>
-            </a:pPr>
-            <a:r>
-              <a:rPr sz="1600">
-                <a:solidFill>
-                  <a:srgbClr val="D7E3EC"/>
-                </a:solidFill>
-                <a:latin typeface="Calibri"/>
-              </a:rPr>
-              <a:t>•  Receives our HackRF transmissions in the reverse demos</a:t>
-            </a:r>
-          </a:p>
-        </p:txBody>
-      </p:sp>
-      <p:sp>
-        <p:nvSpPr>
-          <p:cNvPr id="12" name="TextBox 11"/>
-          <p:cNvSpPr txBox="1"/>
-          <p:nvPr/>
-        </p:nvSpPr>
-        <p:spPr>
-          <a:xfrm>
-            <a:off x="640080" y="6473952"/>
-            <a:ext cx="7315200" cy="274320"/>
+            <a:off x="11292840" y="6473952"/>
+            <a:ext cx="731520" cy="274320"/>
           </a:xfrm>
           <a:prstGeom prst="rect">
             <a:avLst/>
@@ -12103,7 +12199,7 @@
           </a:bodyPr>
           <a:lstStyle/>
           <a:p>
-            <a:pPr algn="l">
+            <a:pPr algn="r">
               <a:lnSpc>
                 <a:spcPct val="115000"/>
               </a:lnSpc>
@@ -12115,46 +12211,7 @@
                 </a:solidFill>
                 <a:latin typeface="Calibri"/>
               </a:rPr>
-              <a:t>SDR Demo -- GNU Radio + HackRF + Ham Handheld</a:t>
-            </a:r>
-          </a:p>
-        </p:txBody>
-      </p:sp>
-      <p:sp>
-        <p:nvSpPr>
-          <p:cNvPr id="13" name="TextBox 12"/>
-          <p:cNvSpPr txBox="1"/>
-          <p:nvPr/>
-        </p:nvSpPr>
-        <p:spPr>
-          <a:xfrm>
-            <a:off x="11292840" y="6473952"/>
-            <a:ext cx="731520" cy="274320"/>
-          </a:xfrm>
-          <a:prstGeom prst="rect">
-            <a:avLst/>
-          </a:prstGeom>
-          <a:noFill/>
-        </p:spPr>
-        <p:txBody>
-          <a:bodyPr wrap="square" anchor="t" lIns="0" rIns="0" tIns="0" bIns="0">
-            <a:spAutoFit/>
-          </a:bodyPr>
-          <a:lstStyle/>
-          <a:p>
-            <a:pPr algn="r">
-              <a:lnSpc>
-                <a:spcPct val="115000"/>
-              </a:lnSpc>
-            </a:pPr>
-            <a:r>
-              <a:rPr sz="1000" b="0" i="0">
-                <a:solidFill>
-                  <a:srgbClr val="8EA7BA"/>
-                </a:solidFill>
-                <a:latin typeface="Calibri"/>
-              </a:rPr>
-              <a:t>5 / 20</a:t>
+              <a:t>5 / 19</a:t>
             </a:r>
           </a:p>
         </p:txBody>
@@ -12255,7 +12312,7 @@
                 </a:solidFill>
                 <a:latin typeface="Calibri"/>
               </a:rPr>
-              <a:t>THE SOFTWARE</a:t>
+              <a:t>CORE CONCEPT</a:t>
             </a:r>
           </a:p>
         </p:txBody>
@@ -12294,7 +12351,7 @@
                 </a:solidFill>
                 <a:latin typeface="Calibri"/>
               </a:rPr>
-              <a:t>GNU Radio + GNU Radio Companion</a:t>
+              <a:t>Reading a Flowgraph</a:t>
             </a:r>
           </a:p>
         </p:txBody>
@@ -12352,7 +12409,7 @@
         <p:spPr>
           <a:xfrm>
             <a:off x="640080" y="1920240"/>
-            <a:ext cx="6126480" cy="4114800"/>
+            <a:ext cx="10698480" cy="1828800"/>
           </a:xfrm>
           <a:prstGeom prst="rect">
             <a:avLst/>
@@ -12370,7 +12427,7 @@
                 <a:spcPct val="112000"/>
               </a:lnSpc>
               <a:spcAft>
-                <a:spcPts val="1600"/>
+                <a:spcPts val="1400"/>
               </a:spcAft>
             </a:pPr>
             <a:r>
@@ -12380,7 +12437,7 @@
                 </a:solidFill>
                 <a:latin typeface="Calibri"/>
               </a:rPr>
-              <a:t>•  GNU Radio: open-source DSP toolkit -- filters, modulators, demodulators, resamplers, all as reusable building blocks.</a:t>
+              <a:t>•  Blocks are connected left to right: a Source produces samples, middle blocks process them, a Sink consumes them.</a:t>
             </a:r>
           </a:p>
           <a:p>
@@ -12389,7 +12446,7 @@
                 <a:spcPct val="112000"/>
               </a:lnSpc>
               <a:spcAft>
-                <a:spcPts val="1600"/>
+                <a:spcPts val="1400"/>
               </a:spcAft>
             </a:pPr>
             <a:r>
@@ -12399,7 +12456,7 @@
                 </a:solidFill>
                 <a:latin typeface="Calibri"/>
               </a:rPr>
-              <a:t>•  GNU Radio Companion (GRC): drag-and-drop flowgraph editor that generates the underlying Python for you.</a:t>
+              <a:t>•  Everything on the RF side flows as complex IQ samples -- one number for signal strength/phase in two dimensions (I and Q), captured at the sample rate.</a:t>
             </a:r>
           </a:p>
           <a:p>
@@ -12408,7 +12465,7 @@
                 <a:spcPct val="112000"/>
               </a:lnSpc>
               <a:spcAft>
-                <a:spcPts val="1600"/>
+                <a:spcPts val="1400"/>
               </a:spcAft>
             </a:pPr>
             <a:r>
@@ -12418,26 +12475,7 @@
                 </a:solidFill>
                 <a:latin typeface="Calibri"/>
               </a:rPr>
-              <a:t>•  SoapySDR: hardware abstraction layer -- the same flowgraph blocks work whether it's a HackRF, RTL-SDR, LimeSDR, or others.</a:t>
-            </a:r>
-          </a:p>
-          <a:p>
-            <a:pPr>
-              <a:lnSpc>
-                <a:spcPct val="112000"/>
-              </a:lnSpc>
-              <a:spcAft>
-                <a:spcPts val="1600"/>
-              </a:spcAft>
-            </a:pPr>
-            <a:r>
-              <a:rPr sz="1800">
-                <a:solidFill>
-                  <a:srgbClr val="D7E3EC"/>
-                </a:solidFill>
-                <a:latin typeface="Calibri"/>
-              </a:rPr>
-              <a:t>•  Every flowgraph in this demo is a plain-text .grc file -- versionable, diffable, shareable.</a:t>
+              <a:t>•  Sample rate sets your instantaneous bandwidth: capture at 6 Msps and you're watching 6 MHz of spectrum at once, not just one channel.</a:t>
             </a:r>
           </a:p>
         </p:txBody>
@@ -12450,20 +12488,20 @@
         </p:nvSpPr>
         <p:spPr>
           <a:xfrm>
-            <a:off x="7223760" y="1920240"/>
-            <a:ext cx="4297680" cy="3931920"/>
+            <a:off x="678027" y="4206240"/>
+            <a:ext cx="2331720" cy="1005840"/>
           </a:xfrm>
           <a:prstGeom prst="roundRect">
             <a:avLst>
-              <a:gd name="adj" fmla="val 4000"/>
+              <a:gd name="adj" fmla="val 12000"/>
             </a:avLst>
           </a:prstGeom>
           <a:solidFill>
-            <a:srgbClr val="0F2438"/>
+            <a:srgbClr val="1B5E58"/>
           </a:solidFill>
-          <a:ln w="12700">
+          <a:ln w="15875">
             <a:solidFill>
-              <a:srgbClr val="1B5E58"/>
+              <a:srgbClr val="35D0BA"/>
             </a:solidFill>
           </a:ln>
           <a:effectLst/>
@@ -12487,115 +12525,31 @@
           <a:lstStyle/>
           <a:p>
             <a:pPr algn="ctr"/>
-          </a:p>
-        </p:txBody>
-      </p:sp>
-      <p:sp>
-        <p:nvSpPr>
-          <p:cNvPr id="8" name="TextBox 7"/>
-          <p:cNvSpPr txBox="1"/>
-          <p:nvPr/>
-        </p:nvSpPr>
-        <p:spPr>
-          <a:xfrm>
-            <a:off x="7543800" y="2148840"/>
-            <a:ext cx="3657600" cy="320040"/>
-          </a:xfrm>
-          <a:prstGeom prst="rect">
-            <a:avLst/>
-          </a:prstGeom>
-          <a:noFill/>
-        </p:spPr>
-        <p:txBody>
-          <a:bodyPr wrap="square" anchor="t" lIns="0" rIns="0" tIns="0" bIns="0">
-            <a:spAutoFit/>
-          </a:bodyPr>
-          <a:lstStyle/>
-          <a:p>
-            <a:pPr algn="l">
-              <a:lnSpc>
-                <a:spcPct val="115000"/>
-              </a:lnSpc>
-            </a:pPr>
-            <a:r>
-              <a:rPr sz="1500" b="1" i="0">
-                <a:solidFill>
-                  <a:srgbClr val="8EA7BA"/>
-                </a:solidFill>
-                <a:latin typeface="Calibri"/>
-              </a:rPr>
-              <a:t>Toolchain</a:t>
-            </a:r>
-          </a:p>
-        </p:txBody>
-      </p:sp>
-      <p:sp>
-        <p:nvSpPr>
-          <p:cNvPr id="9" name="Rounded Rectangle 8"/>
+            <a:r>
+              <a:rPr sz="1500" b="1">
+                <a:solidFill>
+                  <a:srgbClr val="FFFFFF"/>
+                </a:solidFill>
+                <a:latin typeface="Calibri"/>
+              </a:rPr>
+              <a:t>HackRF
+Source</a:t>
+            </a:r>
+          </a:p>
+        </p:txBody>
+      </p:sp>
+      <p:sp>
+        <p:nvSpPr>
+          <p:cNvPr id="8" name="Right Arrow 7"/>
           <p:cNvSpPr/>
           <p:nvPr/>
         </p:nvSpPr>
         <p:spPr>
           <a:xfrm>
-            <a:off x="7543800" y="2606040"/>
-            <a:ext cx="3657600" cy="566928"/>
-          </a:xfrm>
-          <a:prstGeom prst="roundRect">
-            <a:avLst>
-              <a:gd name="adj" fmla="val 20000"/>
-            </a:avLst>
-          </a:prstGeom>
-          <a:solidFill>
-            <a:srgbClr val="1B5E58"/>
-          </a:solidFill>
-          <a:ln>
-            <a:noFill/>
-          </a:ln>
-          <a:effectLst/>
-        </p:spPr>
-        <p:style>
-          <a:lnRef idx="1">
-            <a:schemeClr val="accent1"/>
-          </a:lnRef>
-          <a:fillRef idx="3">
-            <a:schemeClr val="accent1"/>
-          </a:fillRef>
-          <a:effectRef idx="2">
-            <a:schemeClr val="accent1"/>
-          </a:effectRef>
-          <a:fontRef idx="minor">
-            <a:schemeClr val="lt1"/>
-          </a:fontRef>
-        </p:style>
-        <p:txBody>
-          <a:bodyPr rtlCol="0" anchor="ctr" lIns="127000"/>
-          <a:lstStyle/>
-          <a:p>
-            <a:pPr algn="ctr"/>
-            <a:r>
-              <a:rPr sz="1300" b="1">
-                <a:solidFill>
-                  <a:srgbClr val="FFFFFF"/>
-                </a:solidFill>
-                <a:latin typeface="Calibri"/>
-              </a:rPr>
-              <a:t>Flowgraph (.grc)</a:t>
-            </a:r>
-          </a:p>
-        </p:txBody>
-      </p:sp>
-      <p:sp>
-        <p:nvSpPr>
-          <p:cNvPr id="10" name="Down Arrow 9"/>
-          <p:cNvSpPr/>
-          <p:nvPr/>
-        </p:nvSpPr>
-        <p:spPr>
-          <a:xfrm>
-            <a:off x="9262872" y="3172968"/>
-            <a:ext cx="219456" cy="146304"/>
-          </a:xfrm>
-          <a:prstGeom prst="downArrow">
+            <a:off x="3009747" y="4553712"/>
+            <a:ext cx="502920" cy="310896"/>
+          </a:xfrm>
+          <a:prstGeom prst="rightArrow">
             <a:avLst/>
           </a:prstGeom>
           <a:solidFill>
@@ -12630,25 +12584,27 @@
       </p:sp>
       <p:sp>
         <p:nvSpPr>
-          <p:cNvPr id="11" name="Rounded Rectangle 10"/>
+          <p:cNvPr id="9" name="Rounded Rectangle 8"/>
           <p:cNvSpPr/>
           <p:nvPr/>
         </p:nvSpPr>
         <p:spPr>
           <a:xfrm>
-            <a:off x="7543800" y="3319272"/>
-            <a:ext cx="3657600" cy="566928"/>
+            <a:off x="3512667" y="4206240"/>
+            <a:ext cx="2331720" cy="1005840"/>
           </a:xfrm>
           <a:prstGeom prst="roundRect">
             <a:avLst>
-              <a:gd name="adj" fmla="val 20000"/>
+              <a:gd name="adj" fmla="val 12000"/>
             </a:avLst>
           </a:prstGeom>
           <a:solidFill>
-            <a:srgbClr val="1B5E58"/>
+            <a:srgbClr val="0F2438"/>
           </a:solidFill>
-          <a:ln>
-            <a:noFill/>
+          <a:ln w="15875">
+            <a:solidFill>
+              <a:srgbClr val="35D0BA"/>
+            </a:solidFill>
           </a:ln>
           <a:effectLst/>
         </p:spPr>
@@ -12667,34 +12623,35 @@
           </a:fontRef>
         </p:style>
         <p:txBody>
-          <a:bodyPr rtlCol="0" anchor="ctr" lIns="127000"/>
+          <a:bodyPr rtlCol="0" anchor="ctr"/>
           <a:lstStyle/>
           <a:p>
             <a:pPr algn="ctr"/>
             <a:r>
-              <a:rPr sz="1300" b="1">
+              <a:rPr sz="1500" b="1">
                 <a:solidFill>
                   <a:srgbClr val="FFFFFF"/>
                 </a:solidFill>
                 <a:latin typeface="Calibri"/>
               </a:rPr>
-              <a:t>GNU Radio Companion</a:t>
-            </a:r>
-          </a:p>
-        </p:txBody>
-      </p:sp>
-      <p:sp>
-        <p:nvSpPr>
-          <p:cNvPr id="12" name="Down Arrow 11"/>
+              <a:t>Filter /
+Resample</a:t>
+            </a:r>
+          </a:p>
+        </p:txBody>
+      </p:sp>
+      <p:sp>
+        <p:nvSpPr>
+          <p:cNvPr id="10" name="Right Arrow 9"/>
           <p:cNvSpPr/>
           <p:nvPr/>
         </p:nvSpPr>
         <p:spPr>
           <a:xfrm>
-            <a:off x="9262872" y="3886200"/>
-            <a:ext cx="219456" cy="146304"/>
-          </a:xfrm>
-          <a:prstGeom prst="downArrow">
+            <a:off x="5844387" y="4553712"/>
+            <a:ext cx="502920" cy="310896"/>
+          </a:xfrm>
+          <a:prstGeom prst="rightArrow">
             <a:avLst/>
           </a:prstGeom>
           <a:solidFill>
@@ -12729,25 +12686,27 @@
       </p:sp>
       <p:sp>
         <p:nvSpPr>
-          <p:cNvPr id="13" name="Rounded Rectangle 12"/>
+          <p:cNvPr id="11" name="Rounded Rectangle 10"/>
           <p:cNvSpPr/>
           <p:nvPr/>
         </p:nvSpPr>
         <p:spPr>
           <a:xfrm>
-            <a:off x="7543800" y="4032504"/>
-            <a:ext cx="3657600" cy="566928"/>
+            <a:off x="6347307" y="4206240"/>
+            <a:ext cx="2331720" cy="1005840"/>
           </a:xfrm>
           <a:prstGeom prst="roundRect">
             <a:avLst>
-              <a:gd name="adj" fmla="val 20000"/>
+              <a:gd name="adj" fmla="val 12000"/>
             </a:avLst>
           </a:prstGeom>
           <a:solidFill>
-            <a:srgbClr val="1B5E58"/>
+            <a:srgbClr val="0F2438"/>
           </a:solidFill>
-          <a:ln>
-            <a:noFill/>
+          <a:ln w="15875">
+            <a:solidFill>
+              <a:srgbClr val="35D0BA"/>
+            </a:solidFill>
           </a:ln>
           <a:effectLst/>
         </p:spPr>
@@ -12766,34 +12725,34 @@
           </a:fontRef>
         </p:style>
         <p:txBody>
-          <a:bodyPr rtlCol="0" anchor="ctr" lIns="127000"/>
+          <a:bodyPr rtlCol="0" anchor="ctr"/>
           <a:lstStyle/>
           <a:p>
             <a:pPr algn="ctr"/>
             <a:r>
-              <a:rPr sz="1300" b="1">
+              <a:rPr sz="1500" b="1">
                 <a:solidFill>
                   <a:srgbClr val="FFFFFF"/>
                 </a:solidFill>
                 <a:latin typeface="Calibri"/>
               </a:rPr>
-              <a:t>Generated Python</a:t>
-            </a:r>
-          </a:p>
-        </p:txBody>
-      </p:sp>
-      <p:sp>
-        <p:nvSpPr>
-          <p:cNvPr id="14" name="Down Arrow 13"/>
+              <a:t>Demodulate</a:t>
+            </a:r>
+          </a:p>
+        </p:txBody>
+      </p:sp>
+      <p:sp>
+        <p:nvSpPr>
+          <p:cNvPr id="12" name="Right Arrow 11"/>
           <p:cNvSpPr/>
           <p:nvPr/>
         </p:nvSpPr>
         <p:spPr>
           <a:xfrm>
-            <a:off x="9262872" y="4599432"/>
-            <a:ext cx="219456" cy="146304"/>
-          </a:xfrm>
-          <a:prstGeom prst="downArrow">
+            <a:off x="8679027" y="4553712"/>
+            <a:ext cx="502920" cy="310896"/>
+          </a:xfrm>
+          <a:prstGeom prst="rightArrow">
             <a:avLst/>
           </a:prstGeom>
           <a:solidFill>
@@ -12828,25 +12787,27 @@
       </p:sp>
       <p:sp>
         <p:nvSpPr>
-          <p:cNvPr id="15" name="Rounded Rectangle 14"/>
+          <p:cNvPr id="13" name="Rounded Rectangle 12"/>
           <p:cNvSpPr/>
           <p:nvPr/>
         </p:nvSpPr>
         <p:spPr>
           <a:xfrm>
-            <a:off x="7543800" y="4745736"/>
-            <a:ext cx="3657600" cy="566928"/>
+            <a:off x="9181947" y="4206240"/>
+            <a:ext cx="2331720" cy="1005840"/>
           </a:xfrm>
           <a:prstGeom prst="roundRect">
             <a:avLst>
-              <a:gd name="adj" fmla="val 20000"/>
+              <a:gd name="adj" fmla="val 12000"/>
             </a:avLst>
           </a:prstGeom>
           <a:solidFill>
             <a:srgbClr val="1B5E58"/>
           </a:solidFill>
-          <a:ln>
-            <a:noFill/>
+          <a:ln w="15875">
+            <a:solidFill>
+              <a:srgbClr val="35D0BA"/>
+            </a:solidFill>
           </a:ln>
           <a:effectLst/>
         </p:spPr>
@@ -12865,124 +12826,26 @@
           </a:fontRef>
         </p:style>
         <p:txBody>
-          <a:bodyPr rtlCol="0" anchor="ctr" lIns="127000"/>
+          <a:bodyPr rtlCol="0" anchor="ctr"/>
           <a:lstStyle/>
           <a:p>
             <a:pPr algn="ctr"/>
             <a:r>
-              <a:rPr sz="1300" b="1">
+              <a:rPr sz="1500" b="1">
                 <a:solidFill>
                   <a:srgbClr val="FFFFFF"/>
                 </a:solidFill>
                 <a:latin typeface="Calibri"/>
               </a:rPr>
-              <a:t>GNU Radio runtime + SoapySDR</a:t>
-            </a:r>
-          </a:p>
-        </p:txBody>
-      </p:sp>
-      <p:sp>
-        <p:nvSpPr>
-          <p:cNvPr id="16" name="Down Arrow 15"/>
-          <p:cNvSpPr/>
-          <p:nvPr/>
-        </p:nvSpPr>
-        <p:spPr>
-          <a:xfrm>
-            <a:off x="9262872" y="5312664"/>
-            <a:ext cx="219456" cy="146304"/>
-          </a:xfrm>
-          <a:prstGeom prst="downArrow">
-            <a:avLst/>
-          </a:prstGeom>
-          <a:solidFill>
-            <a:srgbClr val="35D0BA"/>
-          </a:solidFill>
-          <a:ln>
-            <a:noFill/>
-          </a:ln>
-          <a:effectLst/>
-        </p:spPr>
-        <p:style>
-          <a:lnRef idx="1">
-            <a:schemeClr val="accent1"/>
-          </a:lnRef>
-          <a:fillRef idx="3">
-            <a:schemeClr val="accent1"/>
-          </a:fillRef>
-          <a:effectRef idx="2">
-            <a:schemeClr val="accent1"/>
-          </a:effectRef>
-          <a:fontRef idx="minor">
-            <a:schemeClr val="lt1"/>
-          </a:fontRef>
-        </p:style>
-        <p:txBody>
-          <a:bodyPr rtlCol="0" anchor="ctr"/>
-          <a:lstStyle/>
-          <a:p>
-            <a:pPr algn="ctr"/>
-          </a:p>
-        </p:txBody>
-      </p:sp>
-      <p:sp>
-        <p:nvSpPr>
-          <p:cNvPr id="17" name="Rounded Rectangle 16"/>
-          <p:cNvSpPr/>
-          <p:nvPr/>
-        </p:nvSpPr>
-        <p:spPr>
-          <a:xfrm>
-            <a:off x="7543800" y="5458968"/>
-            <a:ext cx="3657600" cy="566928"/>
-          </a:xfrm>
-          <a:prstGeom prst="roundRect">
-            <a:avLst>
-              <a:gd name="adj" fmla="val 20000"/>
-            </a:avLst>
-          </a:prstGeom>
-          <a:solidFill>
-            <a:srgbClr val="1B5E58"/>
-          </a:solidFill>
-          <a:ln>
-            <a:noFill/>
-          </a:ln>
-          <a:effectLst/>
-        </p:spPr>
-        <p:style>
-          <a:lnRef idx="1">
-            <a:schemeClr val="accent1"/>
-          </a:lnRef>
-          <a:fillRef idx="3">
-            <a:schemeClr val="accent1"/>
-          </a:fillRef>
-          <a:effectRef idx="2">
-            <a:schemeClr val="accent1"/>
-          </a:effectRef>
-          <a:fontRef idx="minor">
-            <a:schemeClr val="lt1"/>
-          </a:fontRef>
-        </p:style>
-        <p:txBody>
-          <a:bodyPr rtlCol="0" anchor="ctr" lIns="127000"/>
-          <a:lstStyle/>
-          <a:p>
-            <a:pPr algn="ctr"/>
-            <a:r>
-              <a:rPr sz="1300" b="1">
-                <a:solidFill>
-                  <a:srgbClr val="FFFFFF"/>
-                </a:solidFill>
-                <a:latin typeface="Calibri"/>
-              </a:rPr>
-              <a:t>HackRF One</a:t>
-            </a:r>
-          </a:p>
-        </p:txBody>
-      </p:sp>
-      <p:sp>
-        <p:nvSpPr>
-          <p:cNvPr id="18" name="TextBox 17"/>
+              <a:t>Audio / File
+Sink</a:t>
+            </a:r>
+          </a:p>
+        </p:txBody>
+      </p:sp>
+      <p:sp>
+        <p:nvSpPr>
+          <p:cNvPr id="14" name="TextBox 13"/>
           <p:cNvSpPr txBox="1"/>
           <p:nvPr/>
         </p:nvSpPr>
@@ -13021,7 +12884,7 @@
       </p:sp>
       <p:sp>
         <p:nvSpPr>
-          <p:cNvPr id="19" name="TextBox 18"/>
+          <p:cNvPr id="15" name="TextBox 14"/>
           <p:cNvSpPr txBox="1"/>
           <p:nvPr/>
         </p:nvSpPr>
@@ -13053,7 +12916,7 @@
                 </a:solidFill>
                 <a:latin typeface="Calibri"/>
               </a:rPr>
-              <a:t>6 / 20</a:t>
+              <a:t>6 / 19</a:t>
             </a:r>
           </a:p>
         </p:txBody>
@@ -13150,11 +13013,11 @@
             <a:r>
               <a:rPr sz="1400" b="1" i="0">
                 <a:solidFill>
-                  <a:srgbClr val="35D0BA"/>
-                </a:solidFill>
-                <a:latin typeface="Calibri"/>
-              </a:rPr>
-              <a:t>CORE CONCEPT</a:t>
+                  <a:srgbClr val="8EA7BA"/>
+                </a:solidFill>
+                <a:latin typeface="Calibri"/>
+              </a:rPr>
+              <a:t>DEMO 0  ·  ICEBREAKER</a:t>
             </a:r>
           </a:p>
         </p:txBody>
@@ -13193,7 +13056,7 @@
                 </a:solidFill>
                 <a:latin typeface="Calibri"/>
               </a:rPr>
-              <a:t>Reading a Flowgraph</a:t>
+              <a:t>FM Broadcast Receiver</a:t>
             </a:r>
           </a:p>
         </p:txBody>
@@ -13244,107 +13107,25 @@
       </p:sp>
       <p:sp>
         <p:nvSpPr>
-          <p:cNvPr id="6" name="TextBox 5"/>
-          <p:cNvSpPr txBox="1"/>
-          <p:nvPr/>
-        </p:nvSpPr>
-        <p:spPr>
-          <a:xfrm>
-            <a:off x="640080" y="1920240"/>
-            <a:ext cx="10698480" cy="1828800"/>
-          </a:xfrm>
-          <a:prstGeom prst="rect">
-            <a:avLst/>
-          </a:prstGeom>
-          <a:noFill/>
-        </p:spPr>
-        <p:txBody>
-          <a:bodyPr wrap="square">
-            <a:spAutoFit/>
-          </a:bodyPr>
-          <a:lstStyle/>
-          <a:p>
-            <a:pPr>
-              <a:lnSpc>
-                <a:spcPct val="112000"/>
-              </a:lnSpc>
-              <a:spcAft>
-                <a:spcPts val="1400"/>
-              </a:spcAft>
-            </a:pPr>
-            <a:r>
-              <a:rPr sz="1800">
-                <a:solidFill>
-                  <a:srgbClr val="D7E3EC"/>
-                </a:solidFill>
-                <a:latin typeface="Calibri"/>
-              </a:rPr>
-              <a:t>•  Blocks are connected left to right: a Source produces samples, middle blocks process them, a Sink consumes them.</a:t>
-            </a:r>
-          </a:p>
-          <a:p>
-            <a:pPr>
-              <a:lnSpc>
-                <a:spcPct val="112000"/>
-              </a:lnSpc>
-              <a:spcAft>
-                <a:spcPts val="1400"/>
-              </a:spcAft>
-            </a:pPr>
-            <a:r>
-              <a:rPr sz="1800">
-                <a:solidFill>
-                  <a:srgbClr val="D7E3EC"/>
-                </a:solidFill>
-                <a:latin typeface="Calibri"/>
-              </a:rPr>
-              <a:t>•  Everything on the RF side flows as complex IQ samples -- one number for signal strength/phase in two dimensions (I and Q), captured at the sample rate.</a:t>
-            </a:r>
-          </a:p>
-          <a:p>
-            <a:pPr>
-              <a:lnSpc>
-                <a:spcPct val="112000"/>
-              </a:lnSpc>
-              <a:spcAft>
-                <a:spcPts val="1400"/>
-              </a:spcAft>
-            </a:pPr>
-            <a:r>
-              <a:rPr sz="1800">
-                <a:solidFill>
-                  <a:srgbClr val="D7E3EC"/>
-                </a:solidFill>
-                <a:latin typeface="Calibri"/>
-              </a:rPr>
-              <a:t>•  Sample rate sets your instantaneous bandwidth: capture at 6 Msps and you're watching 6 MHz of spectrum at once, not just one channel.</a:t>
-            </a:r>
-          </a:p>
-        </p:txBody>
-      </p:sp>
-      <p:sp>
-        <p:nvSpPr>
-          <p:cNvPr id="7" name="Rounded Rectangle 6"/>
+          <p:cNvPr id="6" name="Rounded Rectangle 5"/>
           <p:cNvSpPr/>
           <p:nvPr/>
         </p:nvSpPr>
         <p:spPr>
           <a:xfrm>
-            <a:off x="678027" y="4206240"/>
-            <a:ext cx="2331720" cy="1005840"/>
+            <a:off x="640080" y="1691640"/>
+            <a:ext cx="1371600" cy="320040"/>
           </a:xfrm>
           <a:prstGeom prst="roundRect">
             <a:avLst>
-              <a:gd name="adj" fmla="val 12000"/>
+              <a:gd name="adj" fmla="val 50000"/>
             </a:avLst>
           </a:prstGeom>
           <a:solidFill>
             <a:srgbClr val="1B5E58"/>
           </a:solidFill>
-          <a:ln w="15875">
-            <a:solidFill>
-              <a:srgbClr val="35D0BA"/>
-            </a:solidFill>
+          <a:ln>
+            <a:noFill/>
           </a:ln>
           <a:effectLst/>
         </p:spPr>
@@ -13363,331 +13144,105 @@
           </a:fontRef>
         </p:style>
         <p:txBody>
-          <a:bodyPr rtlCol="0" anchor="ctr"/>
+          <a:bodyPr rtlCol="0" anchor="ctr" lIns="50800" rIns="50800" tIns="0" bIns="0"/>
           <a:lstStyle/>
           <a:p>
             <a:pPr algn="ctr"/>
             <a:r>
-              <a:rPr sz="1500" b="1">
-                <a:solidFill>
-                  <a:srgbClr val="FFFFFF"/>
-                </a:solidFill>
-                <a:latin typeface="Calibri"/>
-              </a:rPr>
-              <a:t>HackRF
-Source</a:t>
-            </a:r>
-          </a:p>
-        </p:txBody>
-      </p:sp>
-      <p:sp>
-        <p:nvSpPr>
-          <p:cNvPr id="8" name="Right Arrow 7"/>
-          <p:cNvSpPr/>
-          <p:nvPr/>
-        </p:nvSpPr>
-        <p:spPr>
-          <a:xfrm>
-            <a:off x="3009747" y="4553712"/>
-            <a:ext cx="502920" cy="310896"/>
-          </a:xfrm>
-          <a:prstGeom prst="rightArrow">
-            <a:avLst/>
-          </a:prstGeom>
-          <a:solidFill>
-            <a:srgbClr val="35D0BA"/>
-          </a:solidFill>
-          <a:ln>
-            <a:noFill/>
-          </a:ln>
-          <a:effectLst/>
-        </p:spPr>
-        <p:style>
-          <a:lnRef idx="1">
-            <a:schemeClr val="accent1"/>
-          </a:lnRef>
-          <a:fillRef idx="3">
-            <a:schemeClr val="accent1"/>
-          </a:fillRef>
-          <a:effectRef idx="2">
-            <a:schemeClr val="accent1"/>
-          </a:effectRef>
-          <a:fontRef idx="minor">
-            <a:schemeClr val="lt1"/>
-          </a:fontRef>
-        </p:style>
-        <p:txBody>
-          <a:bodyPr rtlCol="0" anchor="ctr"/>
-          <a:lstStyle/>
-          <a:p>
-            <a:pPr algn="ctr"/>
-          </a:p>
-        </p:txBody>
-      </p:sp>
-      <p:sp>
-        <p:nvSpPr>
-          <p:cNvPr id="9" name="Rounded Rectangle 8"/>
-          <p:cNvSpPr/>
-          <p:nvPr/>
-        </p:nvSpPr>
-        <p:spPr>
-          <a:xfrm>
-            <a:off x="3512667" y="4206240"/>
-            <a:ext cx="2331720" cy="1005840"/>
-          </a:xfrm>
-          <a:prstGeom prst="roundRect">
-            <a:avLst>
-              <a:gd name="adj" fmla="val 12000"/>
-            </a:avLst>
-          </a:prstGeom>
-          <a:solidFill>
-            <a:srgbClr val="0F2438"/>
-          </a:solidFill>
-          <a:ln w="15875">
-            <a:solidFill>
-              <a:srgbClr val="35D0BA"/>
-            </a:solidFill>
-          </a:ln>
-          <a:effectLst/>
-        </p:spPr>
-        <p:style>
-          <a:lnRef idx="1">
-            <a:schemeClr val="accent1"/>
-          </a:lnRef>
-          <a:fillRef idx="3">
-            <a:schemeClr val="accent1"/>
-          </a:fillRef>
-          <a:effectRef idx="2">
-            <a:schemeClr val="accent1"/>
-          </a:effectRef>
-          <a:fontRef idx="minor">
-            <a:schemeClr val="lt1"/>
-          </a:fontRef>
-        </p:style>
-        <p:txBody>
-          <a:bodyPr rtlCol="0" anchor="ctr"/>
-          <a:lstStyle/>
-          <a:p>
-            <a:pPr algn="ctr"/>
-            <a:r>
-              <a:rPr sz="1500" b="1">
-                <a:solidFill>
-                  <a:srgbClr val="FFFFFF"/>
-                </a:solidFill>
-                <a:latin typeface="Calibri"/>
-              </a:rPr>
-              <a:t>Filter /
-Resample</a:t>
-            </a:r>
-          </a:p>
-        </p:txBody>
-      </p:sp>
-      <p:sp>
-        <p:nvSpPr>
-          <p:cNvPr id="10" name="Right Arrow 9"/>
-          <p:cNvSpPr/>
-          <p:nvPr/>
-        </p:nvSpPr>
-        <p:spPr>
-          <a:xfrm>
-            <a:off x="5844387" y="4553712"/>
-            <a:ext cx="502920" cy="310896"/>
-          </a:xfrm>
-          <a:prstGeom prst="rightArrow">
-            <a:avLst/>
-          </a:prstGeom>
-          <a:solidFill>
-            <a:srgbClr val="35D0BA"/>
-          </a:solidFill>
-          <a:ln>
-            <a:noFill/>
-          </a:ln>
-          <a:effectLst/>
-        </p:spPr>
-        <p:style>
-          <a:lnRef idx="1">
-            <a:schemeClr val="accent1"/>
-          </a:lnRef>
-          <a:fillRef idx="3">
-            <a:schemeClr val="accent1"/>
-          </a:fillRef>
-          <a:effectRef idx="2">
-            <a:schemeClr val="accent1"/>
-          </a:effectRef>
-          <a:fontRef idx="minor">
-            <a:schemeClr val="lt1"/>
-          </a:fontRef>
-        </p:style>
-        <p:txBody>
-          <a:bodyPr rtlCol="0" anchor="ctr"/>
-          <a:lstStyle/>
-          <a:p>
-            <a:pPr algn="ctr"/>
-          </a:p>
-        </p:txBody>
-      </p:sp>
-      <p:sp>
-        <p:nvSpPr>
-          <p:cNvPr id="11" name="Rounded Rectangle 10"/>
-          <p:cNvSpPr/>
-          <p:nvPr/>
-        </p:nvSpPr>
-        <p:spPr>
-          <a:xfrm>
-            <a:off x="6347307" y="4206240"/>
-            <a:ext cx="2331720" cy="1005840"/>
-          </a:xfrm>
-          <a:prstGeom prst="roundRect">
-            <a:avLst>
-              <a:gd name="adj" fmla="val 12000"/>
-            </a:avLst>
-          </a:prstGeom>
-          <a:solidFill>
-            <a:srgbClr val="0F2438"/>
-          </a:solidFill>
-          <a:ln w="15875">
-            <a:solidFill>
-              <a:srgbClr val="35D0BA"/>
-            </a:solidFill>
-          </a:ln>
-          <a:effectLst/>
-        </p:spPr>
-        <p:style>
-          <a:lnRef idx="1">
-            <a:schemeClr val="accent1"/>
-          </a:lnRef>
-          <a:fillRef idx="3">
-            <a:schemeClr val="accent1"/>
-          </a:fillRef>
-          <a:effectRef idx="2">
-            <a:schemeClr val="accent1"/>
-          </a:effectRef>
-          <a:fontRef idx="minor">
-            <a:schemeClr val="lt1"/>
-          </a:fontRef>
-        </p:style>
-        <p:txBody>
-          <a:bodyPr rtlCol="0" anchor="ctr"/>
-          <a:lstStyle/>
-          <a:p>
-            <a:pPr algn="ctr"/>
-            <a:r>
-              <a:rPr sz="1500" b="1">
-                <a:solidFill>
-                  <a:srgbClr val="FFFFFF"/>
-                </a:solidFill>
-                <a:latin typeface="Calibri"/>
-              </a:rPr>
-              <a:t>Demodulate</a:t>
-            </a:r>
-          </a:p>
-        </p:txBody>
-      </p:sp>
-      <p:sp>
-        <p:nvSpPr>
-          <p:cNvPr id="12" name="Right Arrow 11"/>
-          <p:cNvSpPr/>
-          <p:nvPr/>
-        </p:nvSpPr>
-        <p:spPr>
-          <a:xfrm>
-            <a:off x="8679027" y="4553712"/>
-            <a:ext cx="502920" cy="310896"/>
-          </a:xfrm>
-          <a:prstGeom prst="rightArrow">
-            <a:avLst/>
-          </a:prstGeom>
-          <a:solidFill>
-            <a:srgbClr val="35D0BA"/>
-          </a:solidFill>
-          <a:ln>
-            <a:noFill/>
-          </a:ln>
-          <a:effectLst/>
-        </p:spPr>
-        <p:style>
-          <a:lnRef idx="1">
-            <a:schemeClr val="accent1"/>
-          </a:lnRef>
-          <a:fillRef idx="3">
-            <a:schemeClr val="accent1"/>
-          </a:fillRef>
-          <a:effectRef idx="2">
-            <a:schemeClr val="accent1"/>
-          </a:effectRef>
-          <a:fontRef idx="minor">
-            <a:schemeClr val="lt1"/>
-          </a:fontRef>
-        </p:style>
-        <p:txBody>
-          <a:bodyPr rtlCol="0" anchor="ctr"/>
-          <a:lstStyle/>
-          <a:p>
-            <a:pPr algn="ctr"/>
-          </a:p>
-        </p:txBody>
-      </p:sp>
-      <p:sp>
-        <p:nvSpPr>
-          <p:cNvPr id="13" name="Rounded Rectangle 12"/>
-          <p:cNvSpPr/>
-          <p:nvPr/>
-        </p:nvSpPr>
-        <p:spPr>
-          <a:xfrm>
-            <a:off x="9181947" y="4206240"/>
-            <a:ext cx="2331720" cy="1005840"/>
-          </a:xfrm>
-          <a:prstGeom prst="roundRect">
-            <a:avLst>
-              <a:gd name="adj" fmla="val 12000"/>
-            </a:avLst>
-          </a:prstGeom>
-          <a:solidFill>
-            <a:srgbClr val="1B5E58"/>
-          </a:solidFill>
-          <a:ln w="15875">
-            <a:solidFill>
-              <a:srgbClr val="35D0BA"/>
-            </a:solidFill>
-          </a:ln>
-          <a:effectLst/>
-        </p:spPr>
-        <p:style>
-          <a:lnRef idx="1">
-            <a:schemeClr val="accent1"/>
-          </a:lnRef>
-          <a:fillRef idx="3">
-            <a:schemeClr val="accent1"/>
-          </a:fillRef>
-          <a:effectRef idx="2">
-            <a:schemeClr val="accent1"/>
-          </a:effectRef>
-          <a:fontRef idx="minor">
-            <a:schemeClr val="lt1"/>
-          </a:fontRef>
-        </p:style>
-        <p:txBody>
-          <a:bodyPr rtlCol="0" anchor="ctr"/>
-          <a:lstStyle/>
-          <a:p>
-            <a:pPr algn="ctr"/>
-            <a:r>
-              <a:rPr sz="1500" b="1">
-                <a:solidFill>
-                  <a:srgbClr val="FFFFFF"/>
-                </a:solidFill>
-                <a:latin typeface="Calibri"/>
-              </a:rPr>
-              <a:t>Audio / File
-Sink</a:t>
-            </a:r>
-          </a:p>
-        </p:txBody>
-      </p:sp>
-      <p:sp>
-        <p:nvSpPr>
-          <p:cNvPr id="14" name="TextBox 13"/>
+              <a:rPr sz="1200" b="1">
+                <a:solidFill>
+                  <a:srgbClr val="35D0BA"/>
+                </a:solidFill>
+                <a:latin typeface="Calibri"/>
+              </a:rPr>
+              <a:t>RECEIVE ONLY</a:t>
+            </a:r>
+          </a:p>
+        </p:txBody>
+      </p:sp>
+      <p:sp>
+        <p:nvSpPr>
+          <p:cNvPr id="7" name="TextBox 6"/>
+          <p:cNvSpPr txBox="1"/>
+          <p:nvPr/>
+        </p:nvSpPr>
+        <p:spPr>
+          <a:xfrm>
+            <a:off x="640080" y="2286000"/>
+            <a:ext cx="10698480" cy="3291840"/>
+          </a:xfrm>
+          <a:prstGeom prst="rect">
+            <a:avLst/>
+          </a:prstGeom>
+          <a:noFill/>
+        </p:spPr>
+        <p:txBody>
+          <a:bodyPr wrap="square">
+            <a:spAutoFit/>
+          </a:bodyPr>
+          <a:lstStyle/>
+          <a:p>
+            <a:pPr>
+              <a:lnSpc>
+                <a:spcPct val="112000"/>
+              </a:lnSpc>
+              <a:spcAft>
+                <a:spcPts val="1600"/>
+              </a:spcAft>
+            </a:pPr>
+            <a:r>
+              <a:rPr sz="1900">
+                <a:solidFill>
+                  <a:srgbClr val="D7E3EC"/>
+                </a:solidFill>
+                <a:latin typeface="Calibri"/>
+              </a:rPr>
+              <a:t>•  Flowgraph: 06_bonus_fm_broadcast_receiver.grc</a:t>
+            </a:r>
+          </a:p>
+          <a:p>
+            <a:pPr>
+              <a:lnSpc>
+                <a:spcPct val="112000"/>
+              </a:lnSpc>
+              <a:spcAft>
+                <a:spcPts val="1600"/>
+              </a:spcAft>
+            </a:pPr>
+            <a:r>
+              <a:rPr sz="1900">
+                <a:solidFill>
+                  <a:srgbClr val="D7E3EC"/>
+                </a:solidFill>
+                <a:latin typeface="Calibri"/>
+              </a:rPr>
+              <a:t>•  Tune to any strong local FM station (88-108 MHz) and hear music instantly through the laptop speakers.</a:t>
+            </a:r>
+          </a:p>
+          <a:p>
+            <a:pPr>
+              <a:lnSpc>
+                <a:spcPct val="112000"/>
+              </a:lnSpc>
+              <a:spcAft>
+                <a:spcPts val="1600"/>
+              </a:spcAft>
+            </a:pPr>
+            <a:r>
+              <a:rPr sz="1900">
+                <a:solidFill>
+                  <a:srgbClr val="D7E3EC"/>
+                </a:solidFill>
+                <a:latin typeface="Calibri"/>
+              </a:rPr>
+              <a:t>•  Not a ham-band demo -- it's here to prove the whole chain works (driver, HackRF, GNU Radio, audio out) before the ham material, and it needs no license to receive.</a:t>
+            </a:r>
+          </a:p>
+        </p:txBody>
+      </p:sp>
+      <p:sp>
+        <p:nvSpPr>
+          <p:cNvPr id="8" name="TextBox 7"/>
           <p:cNvSpPr txBox="1"/>
           <p:nvPr/>
         </p:nvSpPr>
@@ -13726,7 +13281,7 @@
       </p:sp>
       <p:sp>
         <p:nvSpPr>
-          <p:cNvPr id="15" name="TextBox 14"/>
+          <p:cNvPr id="9" name="TextBox 8"/>
           <p:cNvSpPr txBox="1"/>
           <p:nvPr/>
         </p:nvSpPr>
@@ -13758,7 +13313,7 @@
                 </a:solidFill>
                 <a:latin typeface="Calibri"/>
               </a:rPr>
-              <a:t>7 / 20</a:t>
+              <a:t>7 / 19</a:t>
             </a:r>
           </a:p>
         </p:txBody>
@@ -13855,11 +13410,11 @@
             <a:r>
               <a:rPr sz="1400" b="1" i="0">
                 <a:solidFill>
-                  <a:srgbClr val="8EA7BA"/>
-                </a:solidFill>
-                <a:latin typeface="Calibri"/>
-              </a:rPr>
-              <a:t>DEMO 0  ·  ICEBREAKER</a:t>
+                  <a:srgbClr val="35D0BA"/>
+                </a:solidFill>
+                <a:latin typeface="Calibri"/>
+              </a:rPr>
+              <a:t>DEMO 1</a:t>
             </a:r>
           </a:p>
         </p:txBody>
@@ -13898,7 +13453,7 @@
                 </a:solidFill>
                 <a:latin typeface="Calibri"/>
               </a:rPr>
-              <a:t>FM Broadcast Receiver</a:t>
+              <a:t>Live Spectrum &amp; Waterfall</a:t>
             </a:r>
           </a:p>
         </p:txBody>
@@ -14011,7 +13566,7 @@
         <p:spPr>
           <a:xfrm>
             <a:off x="640080" y="2286000"/>
-            <a:ext cx="10698480" cy="3291840"/>
+            <a:ext cx="10698480" cy="3474720"/>
           </a:xfrm>
           <a:prstGeom prst="rect">
             <a:avLst/>
@@ -14039,7 +13594,7 @@
                 </a:solidFill>
                 <a:latin typeface="Calibri"/>
               </a:rPr>
-              <a:t>•  Flowgraph: 06_bonus_fm_broadcast_receiver.grc</a:t>
+              <a:t>•  Flowgraph: 01_spectrum_waterfall_tunable.grc</a:t>
             </a:r>
           </a:p>
           <a:p>
@@ -14058,7 +13613,7 @@
                 </a:solidFill>
                 <a:latin typeface="Calibri"/>
               </a:rPr>
-              <a:t>•  Tune to any strong local FM station (88-108 MHz) and hear music instantly through the laptop speakers.</a:t>
+              <a:t>•  One flowgraph, both ham bands -- retype the center frequency live: 146.520 MHz (2m) then 446.000 MHz (70cm).</a:t>
             </a:r>
           </a:p>
           <a:p>
@@ -14077,7 +13632,26 @@
                 </a:solidFill>
                 <a:latin typeface="Calibri"/>
               </a:rPr>
-              <a:t>•  Not a ham-band demo -- it's here to prove the whole chain works (driver, HackRF, GNU Radio, audio out) before the ham material, and it needs no license to receive.</a:t>
+              <a:t>•  Key up the handheld on each band and watch the signal light up the spectrum plot and waterfall in real time.</a:t>
+            </a:r>
+          </a:p>
+          <a:p>
+            <a:pPr>
+              <a:lnSpc>
+                <a:spcPct val="112000"/>
+              </a:lnSpc>
+              <a:spcAft>
+                <a:spcPts val="1600"/>
+              </a:spcAft>
+            </a:pPr>
+            <a:r>
+              <a:rPr sz="1900">
+                <a:solidFill>
+                  <a:srgbClr val="D7E3EC"/>
+                </a:solidFill>
+                <a:latin typeface="Calibri"/>
+              </a:rPr>
+              <a:t>•  Talking point: this is the same 10 MHz of RF spectrum a traditional radio can only look at one narrow slice of at a time.</a:t>
             </a:r>
           </a:p>
         </p:txBody>
@@ -14155,7 +13729,7 @@
                 </a:solidFill>
                 <a:latin typeface="Calibri"/>
               </a:rPr>
-              <a:t>8 / 20</a:t>
+              <a:t>8 / 19</a:t>
             </a:r>
           </a:p>
         </p:txBody>

--- a/slides/SDR_Demo.pptx
+++ b/slides/SDR_Demo.pptx
@@ -10799,7 +10799,7 @@
                 </a:solidFill>
                 <a:latin typeface="Calibri"/>
               </a:rPr>
-              <a:t>HackRF One + Ham Handheld</a:t>
+              <a:t>HackRF One</a:t>
             </a:r>
           </a:p>
         </p:txBody>
@@ -10930,7 +10930,7 @@
                 </a:solidFill>
                 <a:latin typeface="Calibri"/>
               </a:rPr>
-              <a:t>HackRF One</a:t>
+              <a:t>Core Specs</a:t>
             </a:r>
           </a:p>
         </p:txBody>
@@ -10991,7 +10991,7 @@
                 </a:solidFill>
                 <a:latin typeface="Calibri"/>
               </a:rPr>
-              <a:t>•  Up to 20 Msps, 8-bit ADC/DAC</a:t>
+              <a:t>•  Up to 20 Msps, 8-bit quadrature ADC/DAC (8-bit I, 8-bit Q)</a:t>
             </a:r>
           </a:p>
           <a:p>
@@ -11010,7 +11010,7 @@
                 </a:solidFill>
                 <a:latin typeface="Calibri"/>
               </a:rPr>
-              <a:t>•  Half-duplex (RX or TX, not both at once)</a:t>
+              <a:t>•  Half-duplex (RX or TX, never both at once)</a:t>
             </a:r>
           </a:p>
           <a:p>
@@ -11029,7 +11029,7 @@
                 </a:solidFill>
                 <a:latin typeface="Calibri"/>
               </a:rPr>
-              <a:t>•  USB-powered, open source hardware</a:t>
+              <a:t>•  Hi-Speed USB 2.0, USB-powered, open source hardware</a:t>
             </a:r>
           </a:p>
           <a:p>
@@ -11135,7 +11135,7 @@
                 </a:solidFill>
                 <a:latin typeface="Calibri"/>
               </a:rPr>
-              <a:t>Dual-Band Handheld (144/440)</a:t>
+              <a:t>TX Capabilities</a:t>
             </a:r>
           </a:p>
         </p:txBody>
@@ -11167,17 +11167,17 @@
                 <a:spcPct val="112000"/>
               </a:lnSpc>
               <a:spcAft>
-                <a:spcPts val="1200"/>
+                <a:spcPts val="1000"/>
               </a:spcAft>
             </a:pPr>
             <a:r>
-              <a:rPr sz="1600">
+              <a:rPr sz="1500">
                 <a:solidFill>
                   <a:srgbClr val="D7E3EC"/>
                 </a:solidFill>
                 <a:latin typeface="Calibri"/>
               </a:rPr>
-              <a:t>•  Our “known-good” reference radio</a:t>
+              <a:t>•  Two software-controlled TX gain stages -- no physical knobs: an on/off RF amp (~+11 dB) and a VGA/IF gain stage, 0-47 dB in 1 dB steps.</a:t>
             </a:r>
           </a:p>
           <a:p>
@@ -11186,17 +11186,17 @@
                 <a:spcPct val="112000"/>
               </a:lnSpc>
               <a:spcAft>
-                <a:spcPts val="1200"/>
+                <a:spcPts val="1000"/>
               </a:spcAft>
             </a:pPr>
             <a:r>
-              <a:rPr sz="1600">
+              <a:rPr sz="1500">
                 <a:solidFill>
                   <a:srgbClr val="D7E3EC"/>
                 </a:solidFill>
                 <a:latin typeface="Calibri"/>
               </a:rPr>
-              <a:t>•  2m (144-148 MHz) and 70cm (420-450 MHz)</a:t>
+              <a:t>•  Max output power varies with frequency -- roughly +5 to +15 dBm from 1 MHz-2.17 GHz, dropping to about 0-10 dBm up through 4 GHz. Best performance is actually 2170-2740 MHz.</a:t>
             </a:r>
           </a:p>
           <a:p>
@@ -11205,17 +11205,17 @@
                 <a:spcPct val="112000"/>
               </a:lnSpc>
               <a:spcAft>
-                <a:spcPts val="1200"/>
+                <a:spcPts val="1000"/>
               </a:spcAft>
             </a:pPr>
             <a:r>
-              <a:rPr sz="1600">
+              <a:rPr sz="1500">
                 <a:solidFill>
                   <a:srgbClr val="D7E3EC"/>
                 </a:solidFill>
                 <a:latin typeface="Calibri"/>
               </a:rPr>
-              <a:t>•  Keys up so we can watch/hear the HackRF receive it</a:t>
+              <a:t>•  Tonight's TX demos default to just 10 dB of VGA gain -- comfortably at the low end, per the "minimum power necessary" guidance.</a:t>
             </a:r>
           </a:p>
           <a:p>
@@ -11224,17 +11224,17 @@
                 <a:spcPct val="112000"/>
               </a:lnSpc>
               <a:spcAft>
-                <a:spcPts val="1200"/>
+                <a:spcPts val="1000"/>
               </a:spcAft>
             </a:pPr>
             <a:r>
-              <a:rPr sz="1600">
+              <a:rPr sz="1500">
                 <a:solidFill>
                   <a:srgbClr val="D7E3EC"/>
                 </a:solidFill>
                 <a:latin typeface="Calibri"/>
               </a:rPr>
-              <a:t>•  Receives our HackRF transmissions in the reverse demos</a:t>
+              <a:t>•  No built-in per-band TX filtering -- it's a general-purpose transmitter, so staying inside our allocated ham segments is on us.</a:t>
             </a:r>
           </a:p>
         </p:txBody>
@@ -11248,7 +11248,7 @@
         <p:spPr>
           <a:xfrm>
             <a:off x="640080" y="6473952"/>
-            <a:ext cx="7315200" cy="274320"/>
+            <a:ext cx="8229600" cy="274320"/>
           </a:xfrm>
           <a:prstGeom prst="rect">
             <a:avLst/>
@@ -11267,13 +11267,13 @@
               </a:lnSpc>
             </a:pPr>
             <a:r>
-              <a:rPr sz="1000" b="0" i="0">
+              <a:rPr sz="1000" b="0" i="1">
                 <a:solidFill>
                   <a:srgbClr val="8EA7BA"/>
                 </a:solidFill>
                 <a:latin typeface="Calibri"/>
               </a:rPr>
-              <a:t>SDR Demo -- GNU Radio + HackRF + Ham Handheld</a:t>
+              <a:t>Sources: hackrf.readthedocs.io, greatscottgadgets.com/hackrf/one</a:t>
             </a:r>
           </a:p>
         </p:txBody>

--- a/slides/SDR_Demo.pptx
+++ b/slides/SDR_Demo.pptx
@@ -3626,7 +3626,7 @@
                 </a:solidFill>
                 <a:latin typeface="Calibri"/>
               </a:rPr>
-              <a:t>•  Flowgraph: 02_nbfm_voice_receiver.grc</a:t>
+              <a:t>•  A real narrowband FM voice receiver -- channel filter, resampler, FM demodulator, straight to the speakers.</a:t>
             </a:r>
           </a:p>
           <a:p>
@@ -3645,7 +3645,7 @@
                 </a:solidFill>
                 <a:latin typeface="Calibri"/>
               </a:rPr>
-              <a:t>•  A real narrowband FM voice receiver -- channel filter, resampler, FM demodulator, straight to the speakers.</a:t>
+              <a:t>•  Tuned to 146.520 MHz, the national 2m simplex calling frequency.</a:t>
             </a:r>
           </a:p>
           <a:p>
@@ -3664,26 +3664,7 @@
                 </a:solidFill>
                 <a:latin typeface="Calibri"/>
               </a:rPr>
-              <a:t>•  Default: 146.520 MHz, the national 2m simplex calling frequency. Key up the handheld there and it comes through the laptop.</a:t>
-            </a:r>
-          </a:p>
-          <a:p>
-            <a:pPr>
-              <a:lnSpc>
-                <a:spcPct val="112000"/>
-              </a:lnSpc>
-              <a:spcAft>
-                <a:spcPts val="1600"/>
-              </a:spcAft>
-            </a:pPr>
-            <a:r>
-              <a:rPr sz="1900">
-                <a:solidFill>
-                  <a:srgbClr val="D7E3EC"/>
-                </a:solidFill>
-                <a:latin typeface="Calibri"/>
-              </a:rPr>
-              <a:t>•  Talking point: this whole receiver -- the part that's a dedicated chip in a normal radio -- is about a dozen blocks of software here.</a:t>
+              <a:t>•  This whole receiver -- normally a dedicated chip in an off-the-shelf radio -- is about a dozen blocks of software here.</a:t>
             </a:r>
           </a:p>
         </p:txBody>
@@ -3987,25 +3968,6 @@
                 </a:solidFill>
                 <a:latin typeface="Calibri"/>
               </a:rPr>
-              <a:t>•  Flowgraph: 03_record_2m_band_to_file.grc</a:t>
-            </a:r>
-          </a:p>
-          <a:p>
-            <a:pPr>
-              <a:lnSpc>
-                <a:spcPct val="112000"/>
-              </a:lnSpc>
-              <a:spcAft>
-                <a:spcPts val="1600"/>
-              </a:spcAft>
-            </a:pPr>
-            <a:r>
-              <a:rPr sz="1900">
-                <a:solidFill>
-                  <a:srgbClr val="D7E3EC"/>
-                </a:solidFill>
-                <a:latin typeface="Calibri"/>
-              </a:rPr>
               <a:t>•  Tunes to 146.0 MHz center at 6 Msps -- covers 143.0 to 149.0 MHz, the whole 144-148 MHz 2m band with margin to spare.</a:t>
             </a:r>
           </a:p>
@@ -4060,7 +4022,7 @@
                 </a:solidFill>
                 <a:latin typeface="Calibri"/>
               </a:rPr>
-              <a:t>•  Live: hit Execute, key up the handheld once or twice, hit Stop. ~2.9 GB/minute -- a 20-30 second capture is plenty for the demo.</a:t>
+              <a:t>•  A single recording captures everything transmitted on the band during that window -- roughly 2.9 GB per minute at this sample rate.</a:t>
             </a:r>
           </a:p>
         </p:txBody>
@@ -4419,7 +4381,7 @@
                 </a:solidFill>
                 <a:latin typeface="Calibri"/>
               </a:rPr>
-              <a:t>•  Flowgraph: 04_playback_2m_band_from_file.grc</a:t>
+              <a:t>•  Reads the file back and feeds it straight into the HackRF's transmitter -- the exact recorded band reappears on the air.</a:t>
             </a:r>
           </a:p>
           <a:p>
@@ -4438,26 +4400,7 @@
                 </a:solidFill>
                 <a:latin typeface="Calibri"/>
               </a:rPr>
-              <a:t>•  Reads the file back and feeds it straight into the HackRF's transmitter -- the exact recorded band reappears on the air.</a:t>
-            </a:r>
-          </a:p>
-          <a:p>
-            <a:pPr>
-              <a:lnSpc>
-                <a:spcPct val="112000"/>
-              </a:lnSpc>
-              <a:spcAft>
-                <a:spcPts val="1600"/>
-              </a:spcAft>
-            </a:pPr>
-            <a:r>
-              <a:rPr sz="1900">
-                <a:solidFill>
-                  <a:srgbClr val="D7E3EC"/>
-                </a:solidFill>
-                <a:latin typeface="Calibri"/>
-              </a:rPr>
-              <a:t>•  Watch the waterfall reproduce exactly what was captured; the handheld hears the same signal a second time, live.</a:t>
+              <a:t>•  The waterfall reproduces exactly what was captured; the handheld hears the same signal a second time, live.</a:t>
             </a:r>
           </a:p>
           <a:p>
@@ -5215,7 +5158,7 @@
                 </a:solidFill>
                 <a:latin typeface="Calibri"/>
               </a:rPr>
-              <a:t>•  Flowgraph: 05_nbfm_voice_transmitter.grc</a:t>
+              <a:t>•  The reverse direction: laptop microphone → NBFM modulator → HackRF → antenna.</a:t>
             </a:r>
           </a:p>
           <a:p>
@@ -5234,45 +5177,7 @@
                 </a:solidFill>
                 <a:latin typeface="Calibri"/>
               </a:rPr>
-              <a:t>•  The reverse direction: laptop microphone → NBFM modulator → HackRF → antenna.</a:t>
-            </a:r>
-          </a:p>
-          <a:p>
-            <a:pPr>
-              <a:lnSpc>
-                <a:spcPct val="112000"/>
-              </a:lnSpc>
-              <a:spcAft>
-                <a:spcPts val="1600"/>
-              </a:spcAft>
-            </a:pPr>
-            <a:r>
-              <a:rPr sz="1900">
-                <a:solidFill>
-                  <a:srgbClr val="D7E3EC"/>
-                </a:solidFill>
-                <a:latin typeface="Calibri"/>
-              </a:rPr>
-              <a:t>•  Talk into the laptop, hear yourself on the handheld -- live two-way, same 146.520 MHz simplex frequency as Demo 2.</a:t>
-            </a:r>
-          </a:p>
-          <a:p>
-            <a:pPr>
-              <a:lnSpc>
-                <a:spcPct val="112000"/>
-              </a:lnSpc>
-              <a:spcAft>
-                <a:spcPts val="1600"/>
-              </a:spcAft>
-            </a:pPr>
-            <a:r>
-              <a:rPr sz="1900">
-                <a:solidFill>
-                  <a:srgbClr val="D7E3EC"/>
-                </a:solidFill>
-                <a:latin typeface="Calibri"/>
-              </a:rPr>
-              <a:t>•  Skip this one if there's no control operator in the room -- Demos 0-3 already tell the full story.</a:t>
+              <a:t>•  Live two-way on the same 146.520 MHz simplex frequency as Demo 2.</a:t>
             </a:r>
           </a:p>
         </p:txBody>
@@ -13197,7 +13102,7 @@
                 </a:solidFill>
                 <a:latin typeface="Calibri"/>
               </a:rPr>
-              <a:t>•  Flowgraph: 06_bonus_fm_broadcast_receiver.grc</a:t>
+              <a:t>•  A quick tune to any strong local FM station brings music through the laptop speakers, instantly.</a:t>
             </a:r>
           </a:p>
           <a:p>
@@ -13216,26 +13121,7 @@
                 </a:solidFill>
                 <a:latin typeface="Calibri"/>
               </a:rPr>
-              <a:t>•  Tune to any strong local FM station (88-108 MHz) and hear music instantly through the laptop speakers.</a:t>
-            </a:r>
-          </a:p>
-          <a:p>
-            <a:pPr>
-              <a:lnSpc>
-                <a:spcPct val="112000"/>
-              </a:lnSpc>
-              <a:spcAft>
-                <a:spcPts val="1600"/>
-              </a:spcAft>
-            </a:pPr>
-            <a:r>
-              <a:rPr sz="1900">
-                <a:solidFill>
-                  <a:srgbClr val="D7E3EC"/>
-                </a:solidFill>
-                <a:latin typeface="Calibri"/>
-              </a:rPr>
-              <a:t>•  Not a ham-band demo -- it's here to prove the whole chain works (driver, HackRF, GNU Radio, audio out) before the ham material, and it needs no license to receive.</a:t>
+              <a:t>•  Not a ham-band demo -- it proves the whole chain works (driver, HackRF, GNU Radio, audio out) before the ham material, and it needs no license to receive.</a:t>
             </a:r>
           </a:p>
         </p:txBody>
@@ -13594,7 +13480,7 @@
                 </a:solidFill>
                 <a:latin typeface="Calibri"/>
               </a:rPr>
-              <a:t>•  Flowgraph: 01_spectrum_waterfall_tunable.grc</a:t>
+              <a:t>•  One flowgraph covers both ham bands -- we'll retune live between 2m and 70cm.</a:t>
             </a:r>
           </a:p>
           <a:p>
@@ -13613,7 +13499,7 @@
                 </a:solidFill>
                 <a:latin typeface="Calibri"/>
               </a:rPr>
-              <a:t>•  One flowgraph, both ham bands -- retype the center frequency live: 146.520 MHz (2m) then 446.000 MHz (70cm).</a:t>
+              <a:t>•  Watch the spectrum plot and waterfall light up in real time as a handheld transmission appears.</a:t>
             </a:r>
           </a:p>
           <a:p>
@@ -13632,26 +13518,7 @@
                 </a:solidFill>
                 <a:latin typeface="Calibri"/>
               </a:rPr>
-              <a:t>•  Key up the handheld on each band and watch the signal light up the spectrum plot and waterfall in real time.</a:t>
-            </a:r>
-          </a:p>
-          <a:p>
-            <a:pPr>
-              <a:lnSpc>
-                <a:spcPct val="112000"/>
-              </a:lnSpc>
-              <a:spcAft>
-                <a:spcPts val="1600"/>
-              </a:spcAft>
-            </a:pPr>
-            <a:r>
-              <a:rPr sz="1900">
-                <a:solidFill>
-                  <a:srgbClr val="D7E3EC"/>
-                </a:solidFill>
-                <a:latin typeface="Calibri"/>
-              </a:rPr>
-              <a:t>•  Talking point: this is the same 10 MHz of RF spectrum a traditional radio can only look at one narrow slice of at a time.</a:t>
+              <a:t>•  It's the same slice of RF spectrum a traditional radio can only look at one narrow channel of at a time.</a:t>
             </a:r>
           </a:p>
         </p:txBody>

--- a/slides/SDR_Demo.pptx
+++ b/slides/SDR_Demo.pptx
@@ -24,6 +24,8 @@
     <p:sldId id="272" r:id="rId23"/>
     <p:sldId id="273" r:id="rId24"/>
     <p:sldId id="274" r:id="rId25"/>
+    <p:sldId id="275" r:id="rId26"/>
+    <p:sldId id="276" r:id="rId27"/>
   </p:sldIdLst>
   <p:sldSz cx="12191695" cy="6858000" type="screen4x3"/>
   <p:notesSz cx="6858000" cy="9144000"/>
@@ -3742,7 +3744,7 @@
                 </a:solidFill>
                 <a:latin typeface="Calibri"/>
               </a:rPr>
-              <a:t>9 / 19</a:t>
+              <a:t>9 / 21</a:t>
             </a:r>
           </a:p>
         </p:txBody>
@@ -3780,7 +3782,7 @@
             <a:avLst/>
           </a:prstGeom>
           <a:solidFill>
-            <a:srgbClr val="0A1929"/>
+            <a:srgbClr val="1A1406"/>
           </a:solidFill>
           <a:ln>
             <a:noFill/>
@@ -3817,7 +3819,7 @@
         </p:nvSpPr>
         <p:spPr>
           <a:xfrm>
-            <a:off x="640080" y="457200"/>
+            <a:off x="640080" y="502920"/>
             <a:ext cx="10881360" cy="365760"/>
           </a:xfrm>
           <a:prstGeom prst="rect">
@@ -3837,13 +3839,13 @@
               </a:lnSpc>
             </a:pPr>
             <a:r>
-              <a:rPr sz="1400" b="1" i="0">
+              <a:rPr sz="1600" b="1" i="0">
                 <a:solidFill>
                   <a:srgbClr val="FFB020"/>
                 </a:solidFill>
                 <a:latin typeface="Calibri"/>
               </a:rPr>
-              <a:t>DEMO 3 · THE HEADLINE DEMO</a:t>
+              <a:t>⚠  BEFORE WE TRANSMIT</a:t>
             </a:r>
           </a:p>
         </p:txBody>
@@ -3856,8 +3858,8 @@
         </p:nvSpPr>
         <p:spPr>
           <a:xfrm>
-            <a:off x="640080" y="786384"/>
-            <a:ext cx="10881360" cy="914400"/>
+            <a:off x="640080" y="914400"/>
+            <a:ext cx="10881360" cy="822960"/>
           </a:xfrm>
           <a:prstGeom prst="rect">
             <a:avLst/>
@@ -3882,7 +3884,7 @@
                 </a:solidFill>
                 <a:latin typeface="Calibri"/>
               </a:rPr>
-              <a:t>Record the Entire 2m Band</a:t>
+              <a:t>Part 97 Ground Rules</a:t>
             </a:r>
           </a:p>
         </p:txBody>
@@ -3895,7 +3897,7 @@
         </p:nvSpPr>
         <p:spPr>
           <a:xfrm>
-            <a:off x="640080" y="1554480"/>
+            <a:off x="640080" y="1691640"/>
             <a:ext cx="1005840" cy="50800"/>
           </a:xfrm>
           <a:prstGeom prst="rect">
@@ -3939,7 +3941,7 @@
         </p:nvSpPr>
         <p:spPr>
           <a:xfrm>
-            <a:off x="640080" y="1920240"/>
+            <a:off x="640080" y="2057400"/>
             <a:ext cx="10698480" cy="4114800"/>
           </a:xfrm>
           <a:prstGeom prst="rect">
@@ -3958,17 +3960,17 @@
                 <a:spcPct val="112000"/>
               </a:lnSpc>
               <a:spcAft>
-                <a:spcPts val="1600"/>
+                <a:spcPts val="1400"/>
               </a:spcAft>
             </a:pPr>
             <a:r>
-              <a:rPr sz="1900">
-                <a:solidFill>
-                  <a:srgbClr val="D7E3EC"/>
-                </a:solidFill>
-                <a:latin typeface="Calibri"/>
-              </a:rPr>
-              <a:t>•  Tunes to 146.0 MHz center at 6 Msps -- covers 143.0 to 149.0 MHz, the whole 144-148 MHz 2m band with margin to spare.</a:t>
+              <a:rPr sz="1800">
+                <a:solidFill>
+                  <a:srgbClr val="F3E3C7"/>
+                </a:solidFill>
+                <a:latin typeface="Calibri"/>
+              </a:rPr>
+              <a:t>•  A licensed control operator is present the entire time we transmit.</a:t>
             </a:r>
           </a:p>
           <a:p>
@@ -3977,33 +3979,36 @@
                 <a:spcPct val="112000"/>
               </a:lnSpc>
               <a:spcAft>
-                <a:spcPts val="1600"/>
+                <a:spcPts val="1400"/>
               </a:spcAft>
             </a:pPr>
             <a:r>
-              <a:rPr sz="1900">
-                <a:solidFill>
-                  <a:srgbClr val="D7E3EC"/>
-                </a:solidFill>
-                <a:latin typeface="Calibri"/>
-              </a:rPr>
-              <a:t>•  Not one channel -- every signal on the entire band, captured at once</a:t>
-            </a:r>
-          </a:p>
-          <a:p>
-            <a:pPr lvl="1">
+              <a:rPr sz="1800">
+                <a:solidFill>
+                  <a:srgbClr val="F3E3C7"/>
+                </a:solidFill>
+                <a:latin typeface="Calibri"/>
+              </a:rPr>
+              <a:t>•  We identify with callsign at the start/end and every 10 minutes.</a:t>
+            </a:r>
+          </a:p>
+          <a:p>
+            <a:pPr>
+              <a:lnSpc>
+                <a:spcPct val="112000"/>
+              </a:lnSpc>
               <a:spcAft>
-                <a:spcPts val="600"/>
+                <a:spcPts val="1400"/>
               </a:spcAft>
             </a:pPr>
             <a:r>
-              <a:rPr sz="1600">
-                <a:solidFill>
-                  <a:srgbClr val="8EA7BA"/>
-                </a:solidFill>
-                <a:latin typeface="Calibri"/>
-              </a:rPr>
-              <a:t>–  Raw IQ, written to a self-describing file (sample rate + center frequency saved in the header)</a:t>
+              <a:rPr sz="1800">
+                <a:solidFill>
+                  <a:srgbClr val="F3E3C7"/>
+                </a:solidFill>
+                <a:latin typeface="Calibri"/>
+              </a:rPr>
+              <a:t>•  No music, no broadcast content -- a brief, identified test transmission only.</a:t>
             </a:r>
           </a:p>
           <a:p>
@@ -4012,17 +4017,36 @@
                 <a:spcPct val="112000"/>
               </a:lnSpc>
               <a:spcAft>
-                <a:spcPts val="1600"/>
+                <a:spcPts val="1400"/>
               </a:spcAft>
             </a:pPr>
             <a:r>
-              <a:rPr sz="1900">
-                <a:solidFill>
-                  <a:srgbClr val="D7E3EC"/>
-                </a:solidFill>
-                <a:latin typeface="Calibri"/>
-              </a:rPr>
-              <a:t>•  A single recording captures everything transmitted on the band during that window -- roughly 2.9 GB per minute at this sample rate.</a:t>
+              <a:rPr sz="1800">
+                <a:solidFill>
+                  <a:srgbClr val="F3E3C7"/>
+                </a:solidFill>
+                <a:latin typeface="Calibri"/>
+              </a:rPr>
+              <a:t>•  Power stays at the minimum needed -- TX gain starts low and only comes up as far as the demo needs.</a:t>
+            </a:r>
+          </a:p>
+          <a:p>
+            <a:pPr>
+              <a:lnSpc>
+                <a:spcPct val="112000"/>
+              </a:lnSpc>
+              <a:spcAft>
+                <a:spcPts val="1400"/>
+              </a:spcAft>
+            </a:pPr>
+            <a:r>
+              <a:rPr sz="1800">
+                <a:solidFill>
+                  <a:srgbClr val="F3E3C7"/>
+                </a:solidFill>
+                <a:latin typeface="Calibri"/>
+              </a:rPr>
+              <a:t>•  No control operator today, or want zero on-air emission? The HackRF TX port can go into a dummy load instead of an antenna -- same demo, nothing radiated.</a:t>
             </a:r>
           </a:p>
         </p:txBody>
@@ -4100,7 +4124,7 @@
                 </a:solidFill>
                 <a:latin typeface="Calibri"/>
               </a:rPr>
-              <a:t>10 / 19</a:t>
+              <a:t>10 / 21</a:t>
             </a:r>
           </a:p>
         </p:txBody>
@@ -4201,7 +4225,7 @@
                 </a:solidFill>
                 <a:latin typeface="Calibri"/>
               </a:rPr>
-              <a:t>DEMO 3B · THE PAYOFF</a:t>
+              <a:t>DEMO 3 · THE HEADLINE DEMO</a:t>
             </a:r>
           </a:p>
         </p:txBody>
@@ -4240,7 +4264,7 @@
                 </a:solidFill>
                 <a:latin typeface="Calibri"/>
               </a:rPr>
-              <a:t>...And Play It Back Over the Air</a:t>
+              <a:t>Record the Entire 2m Band</a:t>
             </a:r>
           </a:p>
         </p:txBody>
@@ -4291,69 +4315,14 @@
       </p:sp>
       <p:sp>
         <p:nvSpPr>
-          <p:cNvPr id="6" name="Rounded Rectangle 5"/>
-          <p:cNvSpPr/>
-          <p:nvPr/>
-        </p:nvSpPr>
-        <p:spPr>
-          <a:xfrm>
-            <a:off x="640080" y="1737360"/>
-            <a:ext cx="2103120" cy="365760"/>
-          </a:xfrm>
-          <a:prstGeom prst="roundRect">
-            <a:avLst>
-              <a:gd name="adj" fmla="val 50000"/>
-            </a:avLst>
-          </a:prstGeom>
-          <a:solidFill>
-            <a:srgbClr val="4A3612"/>
-          </a:solidFill>
-          <a:ln>
-            <a:noFill/>
-          </a:ln>
-          <a:effectLst/>
-        </p:spPr>
-        <p:style>
-          <a:lnRef idx="1">
-            <a:schemeClr val="accent1"/>
-          </a:lnRef>
-          <a:fillRef idx="3">
-            <a:schemeClr val="accent1"/>
-          </a:fillRef>
-          <a:effectRef idx="2">
-            <a:schemeClr val="accent1"/>
-          </a:effectRef>
-          <a:fontRef idx="minor">
-            <a:schemeClr val="lt1"/>
-          </a:fontRef>
-        </p:style>
-        <p:txBody>
-          <a:bodyPr rtlCol="0" anchor="ctr" lIns="50800" rIns="50800" tIns="0" bIns="0"/>
-          <a:lstStyle/>
-          <a:p>
-            <a:pPr algn="ctr"/>
-            <a:r>
-              <a:rPr sz="1200" b="1">
-                <a:solidFill>
-                  <a:srgbClr val="FFB020"/>
-                </a:solidFill>
-                <a:latin typeface="Calibri"/>
-              </a:rPr>
-              <a:t>TRANSMITS — SEE NEXT SLIDE</a:t>
-            </a:r>
-          </a:p>
-        </p:txBody>
-      </p:sp>
-      <p:sp>
-        <p:nvSpPr>
-          <p:cNvPr id="7" name="TextBox 6"/>
+          <p:cNvPr id="6" name="TextBox 5"/>
           <p:cNvSpPr txBox="1"/>
           <p:nvPr/>
         </p:nvSpPr>
         <p:spPr>
           <a:xfrm>
-            <a:off x="640080" y="2331720"/>
-            <a:ext cx="10698480" cy="3657600"/>
+            <a:off x="640080" y="1920240"/>
+            <a:ext cx="10698480" cy="4114800"/>
           </a:xfrm>
           <a:prstGeom prst="rect">
             <a:avLst/>
@@ -4381,7 +4350,7 @@
                 </a:solidFill>
                 <a:latin typeface="Calibri"/>
               </a:rPr>
-              <a:t>•  Reads the file back and feeds it straight into the HackRF's transmitter -- the exact recorded band reappears on the air.</a:t>
+              <a:t>•  Tunes to 146.0 MHz center at 6 Msps -- covers 143.0 to 149.0 MHz, the whole 144-148 MHz 2m band with margin to spare.</a:t>
             </a:r>
           </a:p>
           <a:p>
@@ -4400,7 +4369,23 @@
                 </a:solidFill>
                 <a:latin typeface="Calibri"/>
               </a:rPr>
-              <a:t>•  The waterfall reproduces exactly what was captured; the handheld hears the same signal a second time, live.</a:t>
+              <a:t>•  Not one channel -- every signal on the entire band, captured at once</a:t>
+            </a:r>
+          </a:p>
+          <a:p>
+            <a:pPr lvl="1">
+              <a:spcAft>
+                <a:spcPts val="600"/>
+              </a:spcAft>
+            </a:pPr>
+            <a:r>
+              <a:rPr sz="1600">
+                <a:solidFill>
+                  <a:srgbClr val="8EA7BA"/>
+                </a:solidFill>
+                <a:latin typeface="Calibri"/>
+              </a:rPr>
+              <a:t>–  Raw IQ, written to a self-describing file (sample rate + center frequency saved in the header)</a:t>
             </a:r>
           </a:p>
           <a:p>
@@ -4419,14 +4404,14 @@
                 </a:solidFill>
                 <a:latin typeface="Calibri"/>
               </a:rPr>
-              <a:t>•  This is the moment that makes SDR click: the recording *is* the radio signal -- numbers on disk, transmitted back as RF.</a:t>
-            </a:r>
-          </a:p>
-        </p:txBody>
-      </p:sp>
-      <p:sp>
-        <p:nvSpPr>
-          <p:cNvPr id="8" name="TextBox 7"/>
+              <a:t>•  A single recording captures everything transmitted on the band during that window -- roughly 2.9 GB per minute at this sample rate.</a:t>
+            </a:r>
+          </a:p>
+        </p:txBody>
+      </p:sp>
+      <p:sp>
+        <p:nvSpPr>
+          <p:cNvPr id="7" name="TextBox 6"/>
           <p:cNvSpPr txBox="1"/>
           <p:nvPr/>
         </p:nvSpPr>
@@ -4465,7 +4450,7 @@
       </p:sp>
       <p:sp>
         <p:nvSpPr>
-          <p:cNvPr id="9" name="TextBox 8"/>
+          <p:cNvPr id="8" name="TextBox 7"/>
           <p:cNvSpPr txBox="1"/>
           <p:nvPr/>
         </p:nvSpPr>
@@ -4497,7 +4482,7 @@
                 </a:solidFill>
                 <a:latin typeface="Calibri"/>
               </a:rPr>
-              <a:t>11 / 19</a:t>
+              <a:t>11 / 21</a:t>
             </a:r>
           </a:p>
         </p:txBody>
@@ -4535,7 +4520,7 @@
             <a:avLst/>
           </a:prstGeom>
           <a:solidFill>
-            <a:srgbClr val="1A1406"/>
+            <a:srgbClr val="0A1929"/>
           </a:solidFill>
           <a:ln>
             <a:noFill/>
@@ -4572,7 +4557,7 @@
         </p:nvSpPr>
         <p:spPr>
           <a:xfrm>
-            <a:off x="640080" y="502920"/>
+            <a:off x="640080" y="457200"/>
             <a:ext cx="10881360" cy="365760"/>
           </a:xfrm>
           <a:prstGeom prst="rect">
@@ -4592,13 +4577,13 @@
               </a:lnSpc>
             </a:pPr>
             <a:r>
-              <a:rPr sz="1600" b="1" i="0">
+              <a:rPr sz="1400" b="1" i="0">
                 <a:solidFill>
                   <a:srgbClr val="FFB020"/>
                 </a:solidFill>
                 <a:latin typeface="Calibri"/>
               </a:rPr>
-              <a:t>⚠  BEFORE WE TRANSMIT</a:t>
+              <a:t>DEMO 3B · THE PAYOFF</a:t>
             </a:r>
           </a:p>
         </p:txBody>
@@ -4611,8 +4596,8 @@
         </p:nvSpPr>
         <p:spPr>
           <a:xfrm>
-            <a:off x="640080" y="914400"/>
-            <a:ext cx="10881360" cy="822960"/>
+            <a:off x="640080" y="786384"/>
+            <a:ext cx="10881360" cy="914400"/>
           </a:xfrm>
           <a:prstGeom prst="rect">
             <a:avLst/>
@@ -4637,7 +4622,7 @@
                 </a:solidFill>
                 <a:latin typeface="Calibri"/>
               </a:rPr>
-              <a:t>Part 97 Ground Rules</a:t>
+              <a:t>...And Play It Back Over the Air</a:t>
             </a:r>
           </a:p>
         </p:txBody>
@@ -4650,7 +4635,7 @@
         </p:nvSpPr>
         <p:spPr>
           <a:xfrm>
-            <a:off x="640080" y="1691640"/>
+            <a:off x="640080" y="1554480"/>
             <a:ext cx="1005840" cy="50800"/>
           </a:xfrm>
           <a:prstGeom prst="rect">
@@ -4688,14 +4673,69 @@
       </p:sp>
       <p:sp>
         <p:nvSpPr>
-          <p:cNvPr id="6" name="TextBox 5"/>
+          <p:cNvPr id="6" name="Rounded Rectangle 5"/>
+          <p:cNvSpPr/>
+          <p:nvPr/>
+        </p:nvSpPr>
+        <p:spPr>
+          <a:xfrm>
+            <a:off x="640080" y="1737360"/>
+            <a:ext cx="2103120" cy="365760"/>
+          </a:xfrm>
+          <a:prstGeom prst="roundRect">
+            <a:avLst>
+              <a:gd name="adj" fmla="val 50000"/>
+            </a:avLst>
+          </a:prstGeom>
+          <a:solidFill>
+            <a:srgbClr val="4A3612"/>
+          </a:solidFill>
+          <a:ln>
+            <a:noFill/>
+          </a:ln>
+          <a:effectLst/>
+        </p:spPr>
+        <p:style>
+          <a:lnRef idx="1">
+            <a:schemeClr val="accent1"/>
+          </a:lnRef>
+          <a:fillRef idx="3">
+            <a:schemeClr val="accent1"/>
+          </a:fillRef>
+          <a:effectRef idx="2">
+            <a:schemeClr val="accent1"/>
+          </a:effectRef>
+          <a:fontRef idx="minor">
+            <a:schemeClr val="lt1"/>
+          </a:fontRef>
+        </p:style>
+        <p:txBody>
+          <a:bodyPr rtlCol="0" anchor="ctr" lIns="50800" rIns="50800" tIns="0" bIns="0"/>
+          <a:lstStyle/>
+          <a:p>
+            <a:pPr algn="ctr"/>
+            <a:r>
+              <a:rPr sz="1200" b="1">
+                <a:solidFill>
+                  <a:srgbClr val="FFB020"/>
+                </a:solidFill>
+                <a:latin typeface="Calibri"/>
+              </a:rPr>
+              <a:t>TRANSMITS — SEE NEXT SLIDE</a:t>
+            </a:r>
+          </a:p>
+        </p:txBody>
+      </p:sp>
+      <p:sp>
+        <p:nvSpPr>
+          <p:cNvPr id="7" name="TextBox 6"/>
           <p:cNvSpPr txBox="1"/>
           <p:nvPr/>
         </p:nvSpPr>
         <p:spPr>
           <a:xfrm>
-            <a:off x="640080" y="2057400"/>
-            <a:ext cx="10698480" cy="4114800"/>
+            <a:off x="640080" y="2331720"/>
+            <a:ext cx="10698480" cy="3657600"/>
           </a:xfrm>
           <a:prstGeom prst="rect">
             <a:avLst/>
@@ -4713,17 +4753,17 @@
                 <a:spcPct val="112000"/>
               </a:lnSpc>
               <a:spcAft>
-                <a:spcPts val="1400"/>
+                <a:spcPts val="1600"/>
               </a:spcAft>
             </a:pPr>
             <a:r>
-              <a:rPr sz="1800">
-                <a:solidFill>
-                  <a:srgbClr val="F3E3C7"/>
-                </a:solidFill>
-                <a:latin typeface="Calibri"/>
-              </a:rPr>
-              <a:t>•  A licensed control operator is present the entire time we transmit.</a:t>
+              <a:rPr sz="1900">
+                <a:solidFill>
+                  <a:srgbClr val="D7E3EC"/>
+                </a:solidFill>
+                <a:latin typeface="Calibri"/>
+              </a:rPr>
+              <a:t>•  Reads the file back and feeds it straight into the HackRF's transmitter -- the exact recorded band reappears on the air.</a:t>
             </a:r>
           </a:p>
           <a:p>
@@ -4732,17 +4772,17 @@
                 <a:spcPct val="112000"/>
               </a:lnSpc>
               <a:spcAft>
-                <a:spcPts val="1400"/>
+                <a:spcPts val="1600"/>
               </a:spcAft>
             </a:pPr>
             <a:r>
-              <a:rPr sz="1800">
-                <a:solidFill>
-                  <a:srgbClr val="F3E3C7"/>
-                </a:solidFill>
-                <a:latin typeface="Calibri"/>
-              </a:rPr>
-              <a:t>•  We identify with callsign at the start/end and every 10 minutes.</a:t>
+              <a:rPr sz="1900">
+                <a:solidFill>
+                  <a:srgbClr val="D7E3EC"/>
+                </a:solidFill>
+                <a:latin typeface="Calibri"/>
+              </a:rPr>
+              <a:t>•  The waterfall reproduces exactly what was captured; the handheld hears the same signal a second time, live.</a:t>
             </a:r>
           </a:p>
           <a:p>
@@ -4751,62 +4791,24 @@
                 <a:spcPct val="112000"/>
               </a:lnSpc>
               <a:spcAft>
-                <a:spcPts val="1400"/>
+                <a:spcPts val="1600"/>
               </a:spcAft>
             </a:pPr>
             <a:r>
-              <a:rPr sz="1800">
-                <a:solidFill>
-                  <a:srgbClr val="F3E3C7"/>
-                </a:solidFill>
-                <a:latin typeface="Calibri"/>
-              </a:rPr>
-              <a:t>•  No music, no broadcast content -- a brief, identified test transmission only.</a:t>
-            </a:r>
-          </a:p>
-          <a:p>
-            <a:pPr>
-              <a:lnSpc>
-                <a:spcPct val="112000"/>
-              </a:lnSpc>
-              <a:spcAft>
-                <a:spcPts val="1400"/>
-              </a:spcAft>
-            </a:pPr>
-            <a:r>
-              <a:rPr sz="1800">
-                <a:solidFill>
-                  <a:srgbClr val="F3E3C7"/>
-                </a:solidFill>
-                <a:latin typeface="Calibri"/>
-              </a:rPr>
-              <a:t>•  Power stays at the minimum needed -- TX gain starts low and only comes up as far as the demo needs.</a:t>
-            </a:r>
-          </a:p>
-          <a:p>
-            <a:pPr>
-              <a:lnSpc>
-                <a:spcPct val="112000"/>
-              </a:lnSpc>
-              <a:spcAft>
-                <a:spcPts val="1400"/>
-              </a:spcAft>
-            </a:pPr>
-            <a:r>
-              <a:rPr sz="1800">
-                <a:solidFill>
-                  <a:srgbClr val="F3E3C7"/>
-                </a:solidFill>
-                <a:latin typeface="Calibri"/>
-              </a:rPr>
-              <a:t>•  No control operator today, or want zero on-air emission? The HackRF TX port can go into a dummy load instead of an antenna -- same demo, nothing radiated.</a:t>
-            </a:r>
-          </a:p>
-        </p:txBody>
-      </p:sp>
-      <p:sp>
-        <p:nvSpPr>
-          <p:cNvPr id="7" name="TextBox 6"/>
+              <a:rPr sz="1900">
+                <a:solidFill>
+                  <a:srgbClr val="D7E3EC"/>
+                </a:solidFill>
+                <a:latin typeface="Calibri"/>
+              </a:rPr>
+              <a:t>•  This is the moment that makes SDR click: the recording *is* the radio signal -- numbers on disk, transmitted back as RF.</a:t>
+            </a:r>
+          </a:p>
+        </p:txBody>
+      </p:sp>
+      <p:sp>
+        <p:nvSpPr>
+          <p:cNvPr id="8" name="TextBox 7"/>
           <p:cNvSpPr txBox="1"/>
           <p:nvPr/>
         </p:nvSpPr>
@@ -4845,7 +4847,7 @@
       </p:sp>
       <p:sp>
         <p:nvSpPr>
-          <p:cNvPr id="8" name="TextBox 7"/>
+          <p:cNvPr id="9" name="TextBox 8"/>
           <p:cNvSpPr txBox="1"/>
           <p:nvPr/>
         </p:nvSpPr>
@@ -4877,7 +4879,7 @@
                 </a:solidFill>
                 <a:latin typeface="Calibri"/>
               </a:rPr>
-              <a:t>12 / 19</a:t>
+              <a:t>12 / 21</a:t>
             </a:r>
           </a:p>
         </p:txBody>
@@ -5255,7 +5257,7 @@
                 </a:solidFill>
                 <a:latin typeface="Calibri"/>
               </a:rPr>
-              <a:t>13 / 19</a:t>
+              <a:t>13 / 21</a:t>
             </a:r>
           </a:p>
         </p:txBody>
@@ -5356,7 +5358,7 @@
                 </a:solidFill>
                 <a:latin typeface="Calibri"/>
               </a:rPr>
-              <a:t>RECAP</a:t>
+              <a:t>THE SOFTWARE, REVISITED</a:t>
             </a:r>
           </a:p>
         </p:txBody>
@@ -5395,7 +5397,7 @@
                 </a:solidFill>
                 <a:latin typeface="Calibri"/>
               </a:rPr>
-              <a:t>What Just Happened, Technically</a:t>
+              <a:t>GNU Radio: What It Is, How It's Used</a:t>
             </a:r>
           </a:p>
         </p:txBody>
@@ -5446,14 +5448,101 @@
       </p:sp>
       <p:sp>
         <p:nvSpPr>
-          <p:cNvPr id="6" name="TextBox 5"/>
+          <p:cNvPr id="6" name="Rounded Rectangle 5"/>
+          <p:cNvSpPr/>
+          <p:nvPr/>
+        </p:nvSpPr>
+        <p:spPr>
+          <a:xfrm>
+            <a:off x="640080" y="1920240"/>
+            <a:ext cx="5212080" cy="4114800"/>
+          </a:xfrm>
+          <a:prstGeom prst="roundRect">
+            <a:avLst>
+              <a:gd name="adj" fmla="val 4000"/>
+            </a:avLst>
+          </a:prstGeom>
+          <a:solidFill>
+            <a:srgbClr val="0F2438"/>
+          </a:solidFill>
+          <a:ln w="12700">
+            <a:solidFill>
+              <a:srgbClr val="1B5E58"/>
+            </a:solidFill>
+          </a:ln>
+          <a:effectLst/>
+        </p:spPr>
+        <p:style>
+          <a:lnRef idx="1">
+            <a:schemeClr val="accent1"/>
+          </a:lnRef>
+          <a:fillRef idx="3">
+            <a:schemeClr val="accent1"/>
+          </a:fillRef>
+          <a:effectRef idx="2">
+            <a:schemeClr val="accent1"/>
+          </a:effectRef>
+          <a:fontRef idx="minor">
+            <a:schemeClr val="lt1"/>
+          </a:fontRef>
+        </p:style>
+        <p:txBody>
+          <a:bodyPr rtlCol="0" anchor="ctr"/>
+          <a:lstStyle/>
+          <a:p>
+            <a:pPr algn="ctr"/>
+          </a:p>
+        </p:txBody>
+      </p:sp>
+      <p:sp>
+        <p:nvSpPr>
+          <p:cNvPr id="7" name="TextBox 6"/>
           <p:cNvSpPr txBox="1"/>
           <p:nvPr/>
         </p:nvSpPr>
         <p:spPr>
           <a:xfrm>
-            <a:off x="640080" y="1920240"/>
-            <a:ext cx="10698480" cy="4114800"/>
+            <a:off x="960120" y="2148840"/>
+            <a:ext cx="4572000" cy="365760"/>
+          </a:xfrm>
+          <a:prstGeom prst="rect">
+            <a:avLst/>
+          </a:prstGeom>
+          <a:noFill/>
+        </p:spPr>
+        <p:txBody>
+          <a:bodyPr wrap="square" anchor="t" lIns="0" rIns="0" tIns="0" bIns="0">
+            <a:spAutoFit/>
+          </a:bodyPr>
+          <a:lstStyle/>
+          <a:p>
+            <a:pPr algn="l">
+              <a:lnSpc>
+                <a:spcPct val="115000"/>
+              </a:lnSpc>
+            </a:pPr>
+            <a:r>
+              <a:rPr sz="1900" b="1" i="0">
+                <a:solidFill>
+                  <a:srgbClr val="35D0BA"/>
+                </a:solidFill>
+                <a:latin typeface="Calibri"/>
+              </a:rPr>
+              <a:t>What It Actually Is</a:t>
+            </a:r>
+          </a:p>
+        </p:txBody>
+      </p:sp>
+      <p:sp>
+        <p:nvSpPr>
+          <p:cNvPr id="8" name="TextBox 7"/>
+          <p:cNvSpPr txBox="1"/>
+          <p:nvPr/>
+        </p:nvSpPr>
+        <p:spPr>
+          <a:xfrm>
+            <a:off x="960120" y="2606040"/>
+            <a:ext cx="4572000" cy="3200400"/>
           </a:xfrm>
           <a:prstGeom prst="rect">
             <a:avLst/>
@@ -5471,17 +5560,17 @@
                 <a:spcPct val="112000"/>
               </a:lnSpc>
               <a:spcAft>
-                <a:spcPts val="1600"/>
+                <a:spcPts val="1000"/>
               </a:spcAft>
             </a:pPr>
             <a:r>
-              <a:rPr sz="1900">
+              <a:rPr sz="1500">
                 <a:solidFill>
                   <a:srgbClr val="D7E3EC"/>
                 </a:solidFill>
                 <a:latin typeface="Calibri"/>
               </a:rPr>
-              <a:t>•  One piece of hardware -- the same HackRF -- was an FM radio, a spectrum analyzer, a repeater receiver, a wideband recorder, and a voice transceiver, in the same 20 minutes.</a:t>
+              <a:t>•  Started in 2001 (Eric Blossom); now stewarded by the GNU Radio Project and the GNU Radio Foundation.</a:t>
             </a:r>
           </a:p>
           <a:p>
@@ -5490,17 +5579,17 @@
                 <a:spcPct val="112000"/>
               </a:lnSpc>
               <a:spcAft>
-                <a:spcPts val="1600"/>
+                <a:spcPts val="1000"/>
               </a:spcAft>
             </a:pPr>
             <a:r>
-              <a:rPr sz="1900">
+              <a:rPr sz="1500">
                 <a:solidFill>
                   <a:srgbClr val="D7E3EC"/>
                 </a:solidFill>
                 <a:latin typeface="Calibri"/>
               </a:rPr>
-              <a:t>•  The only thing that changed between demos was which flowgraph was loaded -- no soldering, no new hardware.</a:t>
+              <a:t>•  C++ underneath for real-time DSP performance; Python (and GNU Radio Companion) on top for building and scripting flowgraphs.</a:t>
             </a:r>
           </a:p>
           <a:p>
@@ -5509,17 +5598,17 @@
                 <a:spcPct val="112000"/>
               </a:lnSpc>
               <a:spcAft>
-                <a:spcPts val="1600"/>
+                <a:spcPts val="1000"/>
               </a:spcAft>
             </a:pPr>
             <a:r>
-              <a:rPr sz="1900">
+              <a:rPr sz="1500">
                 <a:solidFill>
                   <a:srgbClr val="D7E3EC"/>
                 </a:solidFill>
                 <a:latin typeface="Calibri"/>
               </a:rPr>
-              <a:t>•  The recording in Demo 3 wasn't a simulation of the 2m band -- it was the actual RF, represented as numbers, played back as actual RF.</a:t>
+              <a:t>•  A scheduler manages sample buffers between blocks -- the same runtime whether the samples are live from a HackRF or read back from a file.</a:t>
             </a:r>
           </a:p>
           <a:p>
@@ -5528,31 +5617,79 @@
                 <a:spcPct val="112000"/>
               </a:lnSpc>
               <a:spcAft>
-                <a:spcPts val="1600"/>
+                <a:spcPts val="1000"/>
               </a:spcAft>
             </a:pPr>
             <a:r>
-              <a:rPr sz="1900">
+              <a:rPr sz="1500">
                 <a:solidFill>
                   <a:srgbClr val="D7E3EC"/>
                 </a:solidFill>
                 <a:latin typeface="Calibri"/>
               </a:rPr>
-              <a:t>•  That's the whole idea of “software defined”: the radio is defined by the software running on general-purpose hardware, not by purpose-built circuitry.</a:t>
-            </a:r>
-          </a:p>
-        </p:txBody>
-      </p:sp>
-      <p:sp>
-        <p:nvSpPr>
-          <p:cNvPr id="7" name="TextBox 6"/>
+              <a:t>•  Hundreds of built-in blocks -- filters, modulators, channel coding, synchronization -- plus a large ecosystem of out-of-tree (OOT) modules for specific protocols.</a:t>
+            </a:r>
+          </a:p>
+        </p:txBody>
+      </p:sp>
+      <p:sp>
+        <p:nvSpPr>
+          <p:cNvPr id="9" name="Rounded Rectangle 8"/>
+          <p:cNvSpPr/>
+          <p:nvPr/>
+        </p:nvSpPr>
+        <p:spPr>
+          <a:xfrm>
+            <a:off x="6309360" y="1920240"/>
+            <a:ext cx="5212080" cy="4114800"/>
+          </a:xfrm>
+          <a:prstGeom prst="roundRect">
+            <a:avLst>
+              <a:gd name="adj" fmla="val 4000"/>
+            </a:avLst>
+          </a:prstGeom>
+          <a:solidFill>
+            <a:srgbClr val="0F2438"/>
+          </a:solidFill>
+          <a:ln w="12700">
+            <a:solidFill>
+              <a:srgbClr val="1B5E58"/>
+            </a:solidFill>
+          </a:ln>
+          <a:effectLst/>
+        </p:spPr>
+        <p:style>
+          <a:lnRef idx="1">
+            <a:schemeClr val="accent1"/>
+          </a:lnRef>
+          <a:fillRef idx="3">
+            <a:schemeClr val="accent1"/>
+          </a:fillRef>
+          <a:effectRef idx="2">
+            <a:schemeClr val="accent1"/>
+          </a:effectRef>
+          <a:fontRef idx="minor">
+            <a:schemeClr val="lt1"/>
+          </a:fontRef>
+        </p:style>
+        <p:txBody>
+          <a:bodyPr rtlCol="0" anchor="ctr"/>
+          <a:lstStyle/>
+          <a:p>
+            <a:pPr algn="ctr"/>
+          </a:p>
+        </p:txBody>
+      </p:sp>
+      <p:sp>
+        <p:nvSpPr>
+          <p:cNvPr id="10" name="TextBox 9"/>
           <p:cNvSpPr txBox="1"/>
           <p:nvPr/>
         </p:nvSpPr>
         <p:spPr>
           <a:xfrm>
-            <a:off x="640080" y="6473952"/>
-            <a:ext cx="7315200" cy="274320"/>
+            <a:off x="6629400" y="2148840"/>
+            <a:ext cx="4572000" cy="365760"/>
           </a:xfrm>
           <a:prstGeom prst="rect">
             <a:avLst/>
@@ -5571,27 +5708,126 @@
               </a:lnSpc>
             </a:pPr>
             <a:r>
-              <a:rPr sz="1000" b="0" i="0">
-                <a:solidFill>
-                  <a:srgbClr val="8EA7BA"/>
-                </a:solidFill>
-                <a:latin typeface="Calibri"/>
-              </a:rPr>
-              <a:t>SDR Demo -- GNU Radio + HackRF + Ham Handheld</a:t>
-            </a:r>
-          </a:p>
-        </p:txBody>
-      </p:sp>
-      <p:sp>
-        <p:nvSpPr>
-          <p:cNvPr id="8" name="TextBox 7"/>
+              <a:rPr sz="1900" b="1" i="0">
+                <a:solidFill>
+                  <a:srgbClr val="35D0BA"/>
+                </a:solidFill>
+                <a:latin typeface="Calibri"/>
+              </a:rPr>
+              <a:t>How We Used It Tonight</a:t>
+            </a:r>
+          </a:p>
+        </p:txBody>
+      </p:sp>
+      <p:sp>
+        <p:nvSpPr>
+          <p:cNvPr id="11" name="TextBox 10"/>
           <p:cNvSpPr txBox="1"/>
           <p:nvPr/>
         </p:nvSpPr>
         <p:spPr>
           <a:xfrm>
-            <a:off x="11292840" y="6473952"/>
-            <a:ext cx="731520" cy="274320"/>
+            <a:off x="6629400" y="2606040"/>
+            <a:ext cx="4572000" cy="3200400"/>
+          </a:xfrm>
+          <a:prstGeom prst="rect">
+            <a:avLst/>
+          </a:prstGeom>
+          <a:noFill/>
+        </p:spPr>
+        <p:txBody>
+          <a:bodyPr wrap="square">
+            <a:spAutoFit/>
+          </a:bodyPr>
+          <a:lstStyle/>
+          <a:p>
+            <a:pPr>
+              <a:lnSpc>
+                <a:spcPct val="112000"/>
+              </a:lnSpc>
+              <a:spcAft>
+                <a:spcPts val="1000"/>
+              </a:spcAft>
+            </a:pPr>
+            <a:r>
+              <a:rPr sz="1500">
+                <a:solidFill>
+                  <a:srgbClr val="D7E3EC"/>
+                </a:solidFill>
+                <a:latin typeface="Calibri"/>
+              </a:rPr>
+              <a:t>•  Every demo was the same runtime, different flowgraph -- GRC just generates the Python self.connect(...) calls behind those block diagrams.</a:t>
+            </a:r>
+          </a:p>
+          <a:p>
+            <a:pPr>
+              <a:lnSpc>
+                <a:spcPct val="112000"/>
+              </a:lnSpc>
+              <a:spcAft>
+                <a:spcPts val="1000"/>
+              </a:spcAft>
+            </a:pPr>
+            <a:r>
+              <a:rPr sz="1500">
+                <a:solidFill>
+                  <a:srgbClr val="D7E3EC"/>
+                </a:solidFill>
+                <a:latin typeface="Calibri"/>
+              </a:rPr>
+              <a:t>•  SoapySDR blocks are what actually talked to the HackRF -- swap that one block and the same flowgraph can drive different hardware.</a:t>
+            </a:r>
+          </a:p>
+          <a:p>
+            <a:pPr>
+              <a:lnSpc>
+                <a:spcPct val="112000"/>
+              </a:lnSpc>
+              <a:spcAft>
+                <a:spcPts val="1000"/>
+              </a:spcAft>
+            </a:pPr>
+            <a:r>
+              <a:rPr sz="1500">
+                <a:solidFill>
+                  <a:srgbClr val="D7E3EC"/>
+                </a:solidFill>
+                <a:latin typeface="Calibri"/>
+              </a:rPr>
+              <a:t>•  Nothing here was compiled or flashed -- editing a flowgraph and rerunning it is the entire iteration loop.</a:t>
+            </a:r>
+          </a:p>
+          <a:p>
+            <a:pPr>
+              <a:lnSpc>
+                <a:spcPct val="112000"/>
+              </a:lnSpc>
+              <a:spcAft>
+                <a:spcPts val="1000"/>
+              </a:spcAft>
+            </a:pPr>
+            <a:r>
+              <a:rPr sz="1500">
+                <a:solidFill>
+                  <a:srgbClr val="D7E3EC"/>
+                </a:solidFill>
+                <a:latin typeface="Calibri"/>
+              </a:rPr>
+              <a:t>•  The .grc files themselves are plain text -- that's why this whole demo kit lives in a git repo.</a:t>
+            </a:r>
+          </a:p>
+        </p:txBody>
+      </p:sp>
+      <p:sp>
+        <p:nvSpPr>
+          <p:cNvPr id="12" name="TextBox 11"/>
+          <p:cNvSpPr txBox="1"/>
+          <p:nvPr/>
+        </p:nvSpPr>
+        <p:spPr>
+          <a:xfrm>
+            <a:off x="640080" y="6473952"/>
+            <a:ext cx="8229600" cy="274320"/>
           </a:xfrm>
           <a:prstGeom prst="rect">
             <a:avLst/>
@@ -5604,6 +5840,45 @@
           </a:bodyPr>
           <a:lstStyle/>
           <a:p>
+            <a:pPr algn="l">
+              <a:lnSpc>
+                <a:spcPct val="115000"/>
+              </a:lnSpc>
+            </a:pPr>
+            <a:r>
+              <a:rPr sz="1000" b="0" i="1">
+                <a:solidFill>
+                  <a:srgbClr val="8EA7BA"/>
+                </a:solidFill>
+                <a:latin typeface="Calibri"/>
+              </a:rPr>
+              <a:t>Source: gnuradio.org -- GNU Radio Conference (GRCon) happens every year</a:t>
+            </a:r>
+          </a:p>
+        </p:txBody>
+      </p:sp>
+      <p:sp>
+        <p:nvSpPr>
+          <p:cNvPr id="13" name="TextBox 12"/>
+          <p:cNvSpPr txBox="1"/>
+          <p:nvPr/>
+        </p:nvSpPr>
+        <p:spPr>
+          <a:xfrm>
+            <a:off x="11292840" y="6473952"/>
+            <a:ext cx="731520" cy="274320"/>
+          </a:xfrm>
+          <a:prstGeom prst="rect">
+            <a:avLst/>
+          </a:prstGeom>
+          <a:noFill/>
+        </p:spPr>
+        <p:txBody>
+          <a:bodyPr wrap="square" anchor="t" lIns="0" rIns="0" tIns="0" bIns="0">
+            <a:spAutoFit/>
+          </a:bodyPr>
+          <a:lstStyle/>
+          <a:p>
             <a:pPr algn="r">
               <a:lnSpc>
                 <a:spcPct val="115000"/>
@@ -5616,7 +5891,7 @@
                 </a:solidFill>
                 <a:latin typeface="Calibri"/>
               </a:rPr>
-              <a:t>14 / 19</a:t>
+              <a:t>14 / 21</a:t>
             </a:r>
           </a:p>
         </p:txBody>
@@ -5717,7 +5992,7 @@
                 </a:solidFill>
                 <a:latin typeface="Calibri"/>
               </a:rPr>
-              <a:t>WHERE THIS GOES NEXT</a:t>
+              <a:t>BEYOND TONIGHT'S SETUP</a:t>
             </a:r>
           </a:p>
         </p:txBody>
@@ -5756,7 +6031,7 @@
                 </a:solidFill>
                 <a:latin typeface="Calibri"/>
               </a:rPr>
-              <a:t>More Demo Ideas</a:t>
+              <a:t>Connecting GNU Radio to Other Radios</a:t>
             </a:r>
           </a:p>
         </p:txBody>
@@ -5807,14 +6082,62 @@
       </p:sp>
       <p:sp>
         <p:nvSpPr>
-          <p:cNvPr id="6" name="TextBox 5"/>
+          <p:cNvPr id="6" name="Rounded Rectangle 5"/>
+          <p:cNvSpPr/>
+          <p:nvPr/>
+        </p:nvSpPr>
+        <p:spPr>
+          <a:xfrm>
+            <a:off x="640080" y="1920240"/>
+            <a:ext cx="5212080" cy="4114800"/>
+          </a:xfrm>
+          <a:prstGeom prst="roundRect">
+            <a:avLst>
+              <a:gd name="adj" fmla="val 4000"/>
+            </a:avLst>
+          </a:prstGeom>
+          <a:solidFill>
+            <a:srgbClr val="0F2438"/>
+          </a:solidFill>
+          <a:ln w="12700">
+            <a:solidFill>
+              <a:srgbClr val="1B5E58"/>
+            </a:solidFill>
+          </a:ln>
+          <a:effectLst/>
+        </p:spPr>
+        <p:style>
+          <a:lnRef idx="1">
+            <a:schemeClr val="accent1"/>
+          </a:lnRef>
+          <a:fillRef idx="3">
+            <a:schemeClr val="accent1"/>
+          </a:fillRef>
+          <a:effectRef idx="2">
+            <a:schemeClr val="accent1"/>
+          </a:effectRef>
+          <a:fontRef idx="minor">
+            <a:schemeClr val="lt1"/>
+          </a:fontRef>
+        </p:style>
+        <p:txBody>
+          <a:bodyPr rtlCol="0" anchor="ctr"/>
+          <a:lstStyle/>
+          <a:p>
+            <a:pPr algn="ctr"/>
+          </a:p>
+        </p:txBody>
+      </p:sp>
+      <p:sp>
+        <p:nvSpPr>
+          <p:cNvPr id="7" name="TextBox 6"/>
           <p:cNvSpPr txBox="1"/>
           <p:nvPr/>
         </p:nvSpPr>
         <p:spPr>
           <a:xfrm>
-            <a:off x="640080" y="1874519"/>
-            <a:ext cx="5120640" cy="320040"/>
+            <a:off x="960120" y="2148840"/>
+            <a:ext cx="4572000" cy="365760"/>
           </a:xfrm>
           <a:prstGeom prst="rect">
             <a:avLst/>
@@ -5833,27 +6156,27 @@
               </a:lnSpc>
             </a:pPr>
             <a:r>
-              <a:rPr sz="1600" b="1" i="0">
+              <a:rPr sz="1900" b="1" i="0">
                 <a:solidFill>
                   <a:srgbClr val="35D0BA"/>
                 </a:solidFill>
                 <a:latin typeface="Calibri"/>
               </a:rPr>
-              <a:t>Quick wins</a:t>
-            </a:r>
-          </a:p>
-        </p:txBody>
-      </p:sp>
-      <p:sp>
-        <p:nvSpPr>
-          <p:cNvPr id="7" name="TextBox 6"/>
+              <a:t>Other SDRs</a:t>
+            </a:r>
+          </a:p>
+        </p:txBody>
+      </p:sp>
+      <p:sp>
+        <p:nvSpPr>
+          <p:cNvPr id="8" name="TextBox 7"/>
           <p:cNvSpPr txBox="1"/>
           <p:nvPr/>
         </p:nvSpPr>
         <p:spPr>
           <a:xfrm>
-            <a:off x="640080" y="2286000"/>
-            <a:ext cx="5120640" cy="3474720"/>
+            <a:off x="960120" y="2606040"/>
+            <a:ext cx="4572000" cy="3200400"/>
           </a:xfrm>
           <a:prstGeom prst="rect">
             <a:avLst/>
@@ -5871,17 +6194,17 @@
                 <a:spcPct val="112000"/>
               </a:lnSpc>
               <a:spcAft>
-                <a:spcPts val="1400"/>
+                <a:spcPts val="1200"/>
               </a:spcAft>
             </a:pPr>
             <a:r>
-              <a:rPr sz="1700">
+              <a:rPr sz="1600">
                 <a:solidFill>
                   <a:srgbClr val="D7E3EC"/>
                 </a:solidFill>
                 <a:latin typeface="Calibri"/>
               </a:rPr>
-              <a:t>•  CTCSS/PL tone squelch decode</a:t>
+              <a:t>•  Same GRC blocks, different hardware -- SoapySDR supports RTL-SDR, LimeSDR, PlutoSDR, Airspy, SDRplay, and more through one common driver API.</a:t>
             </a:r>
           </a:p>
           <a:p>
@@ -5890,17 +6213,17 @@
                 <a:spcPct val="112000"/>
               </a:lnSpc>
               <a:spcAft>
-                <a:spcPts val="1400"/>
+                <a:spcPts val="1200"/>
               </a:spcAft>
             </a:pPr>
             <a:r>
-              <a:rPr sz="1700">
+              <a:rPr sz="1600">
                 <a:solidFill>
                   <a:srgbClr val="D7E3EC"/>
                 </a:solidFill>
                 <a:latin typeface="Calibri"/>
               </a:rPr>
-              <a:t>•  CW (Morse) ID transmitter</a:t>
+              <a:t>•  USRP hardware typically goes through UHD instead -- GNU Radio ships dedicated UHD blocks for it.</a:t>
             </a:r>
           </a:p>
           <a:p>
@@ -5909,50 +6232,79 @@
                 <a:spcPct val="112000"/>
               </a:lnSpc>
               <a:spcAft>
-                <a:spcPts val="1400"/>
+                <a:spcPts val="1200"/>
               </a:spcAft>
             </a:pPr>
             <a:r>
-              <a:rPr sz="1700">
+              <a:rPr sz="1600">
                 <a:solidFill>
                   <a:srgbClr val="D7E3EC"/>
                 </a:solidFill>
                 <a:latin typeface="Calibri"/>
               </a:rPr>
-              <a:t>•  RDS decode from FM broadcast</a:t>
-            </a:r>
-          </a:p>
-          <a:p>
-            <a:pPr>
-              <a:lnSpc>
-                <a:spcPct val="112000"/>
-              </a:lnSpc>
-              <a:spcAft>
-                <a:spcPts val="1400"/>
-              </a:spcAft>
-            </a:pPr>
-            <a:r>
-              <a:rPr sz="1700">
-                <a:solidFill>
-                  <a:srgbClr val="D7E3EC"/>
-                </a:solidFill>
-                <a:latin typeface="Calibri"/>
-              </a:rPr>
-              <a:t>•  APRS decode (144.390 MHz)</a:t>
-            </a:r>
-          </a:p>
-        </p:txBody>
-      </p:sp>
-      <p:sp>
-        <p:nvSpPr>
-          <p:cNvPr id="8" name="TextBox 7"/>
+              <a:t>•  Swapping hardware is usually a one-block change in the flowgraph, not a redesign.</a:t>
+            </a:r>
+          </a:p>
+        </p:txBody>
+      </p:sp>
+      <p:sp>
+        <p:nvSpPr>
+          <p:cNvPr id="9" name="Rounded Rectangle 8"/>
+          <p:cNvSpPr/>
+          <p:nvPr/>
+        </p:nvSpPr>
+        <p:spPr>
+          <a:xfrm>
+            <a:off x="6309360" y="1920240"/>
+            <a:ext cx="5212080" cy="4114800"/>
+          </a:xfrm>
+          <a:prstGeom prst="roundRect">
+            <a:avLst>
+              <a:gd name="adj" fmla="val 4000"/>
+            </a:avLst>
+          </a:prstGeom>
+          <a:solidFill>
+            <a:srgbClr val="0F2438"/>
+          </a:solidFill>
+          <a:ln w="12700">
+            <a:solidFill>
+              <a:srgbClr val="1B5E58"/>
+            </a:solidFill>
+          </a:ln>
+          <a:effectLst/>
+        </p:spPr>
+        <p:style>
+          <a:lnRef idx="1">
+            <a:schemeClr val="accent1"/>
+          </a:lnRef>
+          <a:fillRef idx="3">
+            <a:schemeClr val="accent1"/>
+          </a:fillRef>
+          <a:effectRef idx="2">
+            <a:schemeClr val="accent1"/>
+          </a:effectRef>
+          <a:fontRef idx="minor">
+            <a:schemeClr val="lt1"/>
+          </a:fontRef>
+        </p:style>
+        <p:txBody>
+          <a:bodyPr rtlCol="0" anchor="ctr"/>
+          <a:lstStyle/>
+          <a:p>
+            <a:pPr algn="ctr"/>
+          </a:p>
+        </p:txBody>
+      </p:sp>
+      <p:sp>
+        <p:nvSpPr>
+          <p:cNvPr id="10" name="TextBox 9"/>
           <p:cNvSpPr txBox="1"/>
           <p:nvPr/>
         </p:nvSpPr>
         <p:spPr>
           <a:xfrm>
-            <a:off x="6309360" y="1874519"/>
-            <a:ext cx="5120640" cy="320040"/>
+            <a:off x="6629400" y="2148840"/>
+            <a:ext cx="4572000" cy="365760"/>
           </a:xfrm>
           <a:prstGeom prst="rect">
             <a:avLst/>
@@ -5971,27 +6323,27 @@
               </a:lnSpc>
             </a:pPr>
             <a:r>
-              <a:rPr sz="1600" b="1" i="0">
+              <a:rPr sz="1900" b="1" i="0">
                 <a:solidFill>
                   <a:srgbClr val="35D0BA"/>
                 </a:solidFill>
                 <a:latin typeface="Calibri"/>
               </a:rPr>
-              <a:t>Bigger swings</a:t>
-            </a:r>
-          </a:p>
-        </p:txBody>
-      </p:sp>
-      <p:sp>
-        <p:nvSpPr>
-          <p:cNvPr id="9" name="TextBox 8"/>
+              <a:t>Analog / Non-SDR Radios</a:t>
+            </a:r>
+          </a:p>
+        </p:txBody>
+      </p:sp>
+      <p:sp>
+        <p:nvSpPr>
+          <p:cNvPr id="11" name="TextBox 10"/>
           <p:cNvSpPr txBox="1"/>
           <p:nvPr/>
         </p:nvSpPr>
         <p:spPr>
           <a:xfrm>
-            <a:off x="6309360" y="2286000"/>
-            <a:ext cx="5120640" cy="3474720"/>
+            <a:off x="6629400" y="2606040"/>
+            <a:ext cx="4572000" cy="3200400"/>
           </a:xfrm>
           <a:prstGeom prst="rect">
             <a:avLst/>
@@ -6009,17 +6361,17 @@
                 <a:spcPct val="112000"/>
               </a:lnSpc>
               <a:spcAft>
-                <a:spcPts val="1400"/>
+                <a:spcPts val="1200"/>
               </a:spcAft>
             </a:pPr>
             <a:r>
-              <a:rPr sz="1700">
+              <a:rPr sz="1600">
                 <a:solidFill>
                   <a:srgbClr val="D7E3EC"/>
                 </a:solidFill>
                 <a:latin typeface="Calibri"/>
               </a:rPr>
-              <a:t>•  WSPR / FT8 weak-signal decode</a:t>
+              <a:t>•  Audio interface: a USB sound card wired to a radio's mic/speaker (or data) port runs digital modes -- APRS, PSK31, and more -- through a normal transceiver, no RF-direct hardware needed.</a:t>
             </a:r>
           </a:p>
           <a:p>
@@ -6028,17 +6380,17 @@
                 <a:spcPct val="112000"/>
               </a:lnSpc>
               <a:spcAft>
-                <a:spcPts val="1400"/>
+                <a:spcPts val="1200"/>
               </a:spcAft>
             </a:pPr>
             <a:r>
-              <a:rPr sz="1700">
+              <a:rPr sz="1600">
                 <a:solidFill>
                   <a:srgbClr val="D7E3EC"/>
                 </a:solidFill>
                 <a:latin typeface="Calibri"/>
               </a:rPr>
-              <a:t>•  ADS-B aircraft tracking (1090 MHz)</a:t>
+              <a:t>•  Rig control (CAT): Hamlib-based blocks let a flowgraph key PTT and set frequency on a physical radio over serial/USB.</a:t>
             </a:r>
           </a:p>
           <a:p>
@@ -6047,50 +6399,31 @@
                 <a:spcPct val="112000"/>
               </a:lnSpc>
               <a:spcAft>
-                <a:spcPts val="1400"/>
+                <a:spcPts val="1200"/>
               </a:spcAft>
             </a:pPr>
             <a:r>
-              <a:rPr sz="1700">
+              <a:rPr sz="1600">
                 <a:solidFill>
                   <a:srgbClr val="D7E3EC"/>
                 </a:solidFill>
                 <a:latin typeface="Calibri"/>
               </a:rPr>
-              <a:t>•  Cross-band digital repeater</a:t>
-            </a:r>
-          </a:p>
-          <a:p>
-            <a:pPr>
-              <a:lnSpc>
-                <a:spcPct val="112000"/>
-              </a:lnSpc>
-              <a:spcAft>
-                <a:spcPts val="1400"/>
-              </a:spcAft>
-            </a:pPr>
-            <a:r>
-              <a:rPr sz="1700">
-                <a:solidFill>
-                  <a:srgbClr val="D7E3EC"/>
-                </a:solidFill>
-                <a:latin typeface="Calibri"/>
-              </a:rPr>
-              <a:t>•  Digital voice (DMR / D-STAR) decode</a:t>
-            </a:r>
-          </a:p>
-        </p:txBody>
-      </p:sp>
-      <p:sp>
-        <p:nvSpPr>
-          <p:cNvPr id="10" name="TextBox 9"/>
+              <a:t>•  Direct RF coupling: exactly what tonight's demo did -- the SDR transmits or receives over the air, and the other radio just needs an antenna.</a:t>
+            </a:r>
+          </a:p>
+        </p:txBody>
+      </p:sp>
+      <p:sp>
+        <p:nvSpPr>
+          <p:cNvPr id="12" name="TextBox 11"/>
           <p:cNvSpPr txBox="1"/>
           <p:nvPr/>
         </p:nvSpPr>
         <p:spPr>
           <a:xfrm>
-            <a:off x="640080" y="5943600"/>
-            <a:ext cx="10058400" cy="365760"/>
+            <a:off x="640080" y="6473952"/>
+            <a:ext cx="10058400" cy="274320"/>
           </a:xfrm>
           <a:prstGeom prst="rect">
             <a:avLst/>
@@ -6115,21 +6448,21 @@
                 </a:solidFill>
                 <a:latin typeface="Calibri"/>
               </a:rPr>
-              <a:t>Full writeup with effort/dependency notes: BRAINSTORM.md</a:t>
-            </a:r>
-          </a:p>
-        </p:txBody>
-      </p:sp>
-      <p:sp>
-        <p:nvSpPr>
-          <p:cNvPr id="11" name="TextBox 10"/>
+              <a:t>Tonight only used one SDR and one handheld over RF -- the same tools bridge to almost anything with an antenna or an audio jack.</a:t>
+            </a:r>
+          </a:p>
+        </p:txBody>
+      </p:sp>
+      <p:sp>
+        <p:nvSpPr>
+          <p:cNvPr id="13" name="TextBox 12"/>
           <p:cNvSpPr txBox="1"/>
           <p:nvPr/>
         </p:nvSpPr>
         <p:spPr>
           <a:xfrm>
-            <a:off x="640080" y="6473952"/>
-            <a:ext cx="7315200" cy="274320"/>
+            <a:off x="11292840" y="6473952"/>
+            <a:ext cx="731520" cy="274320"/>
           </a:xfrm>
           <a:prstGeom prst="rect">
             <a:avLst/>
@@ -6142,7 +6475,7 @@
           </a:bodyPr>
           <a:lstStyle/>
           <a:p>
-            <a:pPr algn="l">
+            <a:pPr algn="r">
               <a:lnSpc>
                 <a:spcPct val="115000"/>
               </a:lnSpc>
@@ -6154,46 +6487,7 @@
                 </a:solidFill>
                 <a:latin typeface="Calibri"/>
               </a:rPr>
-              <a:t>SDR Demo -- GNU Radio + HackRF + Ham Handheld</a:t>
-            </a:r>
-          </a:p>
-        </p:txBody>
-      </p:sp>
-      <p:sp>
-        <p:nvSpPr>
-          <p:cNvPr id="12" name="TextBox 11"/>
-          <p:cNvSpPr txBox="1"/>
-          <p:nvPr/>
-        </p:nvSpPr>
-        <p:spPr>
-          <a:xfrm>
-            <a:off x="11292840" y="6473952"/>
-            <a:ext cx="731520" cy="274320"/>
-          </a:xfrm>
-          <a:prstGeom prst="rect">
-            <a:avLst/>
-          </a:prstGeom>
-          <a:noFill/>
-        </p:spPr>
-        <p:txBody>
-          <a:bodyPr wrap="square" anchor="t" lIns="0" rIns="0" tIns="0" bIns="0">
-            <a:spAutoFit/>
-          </a:bodyPr>
-          <a:lstStyle/>
-          <a:p>
-            <a:pPr algn="r">
-              <a:lnSpc>
-                <a:spcPct val="115000"/>
-              </a:lnSpc>
-            </a:pPr>
-            <a:r>
-              <a:rPr sz="1000" b="0" i="0">
-                <a:solidFill>
-                  <a:srgbClr val="8EA7BA"/>
-                </a:solidFill>
-                <a:latin typeface="Calibri"/>
-              </a:rPr>
-              <a:t>15 / 19</a:t>
+              <a:t>15 / 21</a:t>
             </a:r>
           </a:p>
         </p:txBody>
@@ -6294,7 +6588,7 @@
                 </a:solidFill>
                 <a:latin typeface="Calibri"/>
               </a:rPr>
-              <a:t>REFERENCE</a:t>
+              <a:t>RECAP</a:t>
             </a:r>
           </a:p>
         </p:txBody>
@@ -6333,7 +6627,7 @@
                 </a:solidFill>
                 <a:latin typeface="Calibri"/>
               </a:rPr>
-              <a:t>Specs at a Glance</a:t>
+              <a:t>What Just Happened, Technically</a:t>
             </a:r>
           </a:p>
         </p:txBody>
@@ -6384,58 +6678,14 @@
       </p:sp>
       <p:sp>
         <p:nvSpPr>
-          <p:cNvPr id="6" name="Rectangle 5"/>
-          <p:cNvSpPr/>
+          <p:cNvPr id="6" name="TextBox 5"/>
+          <p:cNvSpPr txBox="1"/>
           <p:nvPr/>
         </p:nvSpPr>
         <p:spPr>
           <a:xfrm>
             <a:off x="640080" y="1920240"/>
-            <a:ext cx="10881360" cy="566928"/>
-          </a:xfrm>
-          <a:prstGeom prst="rect">
-            <a:avLst/>
-          </a:prstGeom>
-          <a:solidFill>
-            <a:srgbClr val="0F2438"/>
-          </a:solidFill>
-          <a:ln>
-            <a:noFill/>
-          </a:ln>
-          <a:effectLst/>
-        </p:spPr>
-        <p:style>
-          <a:lnRef idx="1">
-            <a:schemeClr val="accent1"/>
-          </a:lnRef>
-          <a:fillRef idx="3">
-            <a:schemeClr val="accent1"/>
-          </a:fillRef>
-          <a:effectRef idx="2">
-            <a:schemeClr val="accent1"/>
-          </a:effectRef>
-          <a:fontRef idx="minor">
-            <a:schemeClr val="lt1"/>
-          </a:fontRef>
-        </p:style>
-        <p:txBody>
-          <a:bodyPr rtlCol="0" anchor="ctr"/>
-          <a:lstStyle/>
-          <a:p>
-            <a:pPr algn="ctr"/>
-          </a:p>
-        </p:txBody>
-      </p:sp>
-      <p:sp>
-        <p:nvSpPr>
-          <p:cNvPr id="7" name="TextBox 6"/>
-          <p:cNvSpPr txBox="1"/>
-          <p:nvPr/>
-        </p:nvSpPr>
-        <p:spPr>
-          <a:xfrm>
-            <a:off x="868680" y="1920240"/>
-            <a:ext cx="4114800" cy="566928"/>
+            <a:ext cx="10698480" cy="4114800"/>
           </a:xfrm>
           <a:prstGeom prst="rect">
             <a:avLst/>
@@ -6443,802 +6693,91 @@
           <a:noFill/>
         </p:spPr>
         <p:txBody>
-          <a:bodyPr wrap="square" anchor="ctr" lIns="0" rIns="0" tIns="0" bIns="0">
+          <a:bodyPr wrap="square">
             <a:spAutoFit/>
           </a:bodyPr>
           <a:lstStyle/>
           <a:p>
-            <a:pPr algn="l">
-              <a:lnSpc>
-                <a:spcPct val="115000"/>
-              </a:lnSpc>
-            </a:pPr>
-            <a:r>
-              <a:rPr sz="1500" b="1" i="0">
-                <a:solidFill>
-                  <a:srgbClr val="35D0BA"/>
-                </a:solidFill>
-                <a:latin typeface="Calibri"/>
-              </a:rPr>
-              <a:t>Frequency range</a:t>
-            </a:r>
-          </a:p>
-        </p:txBody>
-      </p:sp>
-      <p:sp>
-        <p:nvSpPr>
-          <p:cNvPr id="8" name="TextBox 7"/>
-          <p:cNvSpPr txBox="1"/>
-          <p:nvPr/>
-        </p:nvSpPr>
-        <p:spPr>
-          <a:xfrm>
-            <a:off x="5212080" y="1920240"/>
-            <a:ext cx="6126480" cy="566928"/>
-          </a:xfrm>
-          <a:prstGeom prst="rect">
-            <a:avLst/>
-          </a:prstGeom>
-          <a:noFill/>
-        </p:spPr>
-        <p:txBody>
-          <a:bodyPr wrap="square" anchor="ctr" lIns="0" rIns="0" tIns="0" bIns="0">
-            <a:spAutoFit/>
-          </a:bodyPr>
-          <a:lstStyle/>
-          <a:p>
-            <a:pPr algn="l">
-              <a:lnSpc>
-                <a:spcPct val="115000"/>
-              </a:lnSpc>
-            </a:pPr>
-            <a:r>
-              <a:rPr sz="1500" b="0" i="0">
+            <a:pPr>
+              <a:lnSpc>
+                <a:spcPct val="112000"/>
+              </a:lnSpc>
+              <a:spcAft>
+                <a:spcPts val="1600"/>
+              </a:spcAft>
+            </a:pPr>
+            <a:r>
+              <a:rPr sz="1900">
                 <a:solidFill>
                   <a:srgbClr val="D7E3EC"/>
                 </a:solidFill>
                 <a:latin typeface="Calibri"/>
               </a:rPr>
-              <a:t>1 MHz – 6 GHz (HackRF One)</a:t>
-            </a:r>
-          </a:p>
-        </p:txBody>
-      </p:sp>
-      <p:sp>
-        <p:nvSpPr>
-          <p:cNvPr id="9" name="Rectangle 8"/>
-          <p:cNvSpPr/>
-          <p:nvPr/>
-        </p:nvSpPr>
-        <p:spPr>
-          <a:xfrm>
-            <a:off x="640080" y="2487168"/>
-            <a:ext cx="10881360" cy="566928"/>
-          </a:xfrm>
-          <a:prstGeom prst="rect">
-            <a:avLst/>
-          </a:prstGeom>
-          <a:solidFill>
-            <a:srgbClr val="0A1929"/>
-          </a:solidFill>
-          <a:ln>
-            <a:noFill/>
-          </a:ln>
-          <a:effectLst/>
-        </p:spPr>
-        <p:style>
-          <a:lnRef idx="1">
-            <a:schemeClr val="accent1"/>
-          </a:lnRef>
-          <a:fillRef idx="3">
-            <a:schemeClr val="accent1"/>
-          </a:fillRef>
-          <a:effectRef idx="2">
-            <a:schemeClr val="accent1"/>
-          </a:effectRef>
-          <a:fontRef idx="minor">
-            <a:schemeClr val="lt1"/>
-          </a:fontRef>
-        </p:style>
-        <p:txBody>
-          <a:bodyPr rtlCol="0" anchor="ctr"/>
-          <a:lstStyle/>
-          <a:p>
-            <a:pPr algn="ctr"/>
-          </a:p>
-        </p:txBody>
-      </p:sp>
-      <p:sp>
-        <p:nvSpPr>
-          <p:cNvPr id="10" name="TextBox 9"/>
-          <p:cNvSpPr txBox="1"/>
-          <p:nvPr/>
-        </p:nvSpPr>
-        <p:spPr>
-          <a:xfrm>
-            <a:off x="868680" y="2487168"/>
-            <a:ext cx="4114800" cy="566928"/>
-          </a:xfrm>
-          <a:prstGeom prst="rect">
-            <a:avLst/>
-          </a:prstGeom>
-          <a:noFill/>
-        </p:spPr>
-        <p:txBody>
-          <a:bodyPr wrap="square" anchor="ctr" lIns="0" rIns="0" tIns="0" bIns="0">
-            <a:spAutoFit/>
-          </a:bodyPr>
-          <a:lstStyle/>
-          <a:p>
-            <a:pPr algn="l">
-              <a:lnSpc>
-                <a:spcPct val="115000"/>
-              </a:lnSpc>
-            </a:pPr>
-            <a:r>
-              <a:rPr sz="1500" b="1" i="0">
-                <a:solidFill>
-                  <a:srgbClr val="35D0BA"/>
-                </a:solidFill>
-                <a:latin typeface="Calibri"/>
-              </a:rPr>
-              <a:t>Sample rate used today</a:t>
-            </a:r>
-          </a:p>
-        </p:txBody>
-      </p:sp>
-      <p:sp>
-        <p:nvSpPr>
-          <p:cNvPr id="11" name="TextBox 10"/>
-          <p:cNvSpPr txBox="1"/>
-          <p:nvPr/>
-        </p:nvSpPr>
-        <p:spPr>
-          <a:xfrm>
-            <a:off x="5212080" y="2487168"/>
-            <a:ext cx="6126480" cy="566928"/>
-          </a:xfrm>
-          <a:prstGeom prst="rect">
-            <a:avLst/>
-          </a:prstGeom>
-          <a:noFill/>
-        </p:spPr>
-        <p:txBody>
-          <a:bodyPr wrap="square" anchor="ctr" lIns="0" rIns="0" tIns="0" bIns="0">
-            <a:spAutoFit/>
-          </a:bodyPr>
-          <a:lstStyle/>
-          <a:p>
-            <a:pPr algn="l">
-              <a:lnSpc>
-                <a:spcPct val="115000"/>
-              </a:lnSpc>
-            </a:pPr>
-            <a:r>
-              <a:rPr sz="1500" b="0" i="0">
+              <a:t>•  One piece of hardware -- the same HackRF -- was an FM radio, a spectrum analyzer, a repeater receiver, a wideband recorder, and a voice transceiver, in the same 20 minutes.</a:t>
+            </a:r>
+          </a:p>
+          <a:p>
+            <a:pPr>
+              <a:lnSpc>
+                <a:spcPct val="112000"/>
+              </a:lnSpc>
+              <a:spcAft>
+                <a:spcPts val="1600"/>
+              </a:spcAft>
+            </a:pPr>
+            <a:r>
+              <a:rPr sz="1900">
                 <a:solidFill>
                   <a:srgbClr val="D7E3EC"/>
                 </a:solidFill>
                 <a:latin typeface="Calibri"/>
               </a:rPr>
-              <a:t>2–10 Msps depending on demo</a:t>
-            </a:r>
-          </a:p>
-        </p:txBody>
-      </p:sp>
-      <p:sp>
-        <p:nvSpPr>
-          <p:cNvPr id="12" name="Rectangle 11"/>
-          <p:cNvSpPr/>
-          <p:nvPr/>
-        </p:nvSpPr>
-        <p:spPr>
-          <a:xfrm>
-            <a:off x="640080" y="3054096"/>
-            <a:ext cx="10881360" cy="566928"/>
-          </a:xfrm>
-          <a:prstGeom prst="rect">
-            <a:avLst/>
-          </a:prstGeom>
-          <a:solidFill>
-            <a:srgbClr val="0F2438"/>
-          </a:solidFill>
-          <a:ln>
-            <a:noFill/>
-          </a:ln>
-          <a:effectLst/>
-        </p:spPr>
-        <p:style>
-          <a:lnRef idx="1">
-            <a:schemeClr val="accent1"/>
-          </a:lnRef>
-          <a:fillRef idx="3">
-            <a:schemeClr val="accent1"/>
-          </a:fillRef>
-          <a:effectRef idx="2">
-            <a:schemeClr val="accent1"/>
-          </a:effectRef>
-          <a:fontRef idx="minor">
-            <a:schemeClr val="lt1"/>
-          </a:fontRef>
-        </p:style>
-        <p:txBody>
-          <a:bodyPr rtlCol="0" anchor="ctr"/>
-          <a:lstStyle/>
-          <a:p>
-            <a:pPr algn="ctr"/>
-          </a:p>
-        </p:txBody>
-      </p:sp>
-      <p:sp>
-        <p:nvSpPr>
-          <p:cNvPr id="13" name="TextBox 12"/>
-          <p:cNvSpPr txBox="1"/>
-          <p:nvPr/>
-        </p:nvSpPr>
-        <p:spPr>
-          <a:xfrm>
-            <a:off x="868680" y="3054096"/>
-            <a:ext cx="4114800" cy="566928"/>
-          </a:xfrm>
-          <a:prstGeom prst="rect">
-            <a:avLst/>
-          </a:prstGeom>
-          <a:noFill/>
-        </p:spPr>
-        <p:txBody>
-          <a:bodyPr wrap="square" anchor="ctr" lIns="0" rIns="0" tIns="0" bIns="0">
-            <a:spAutoFit/>
-          </a:bodyPr>
-          <a:lstStyle/>
-          <a:p>
-            <a:pPr algn="l">
-              <a:lnSpc>
-                <a:spcPct val="115000"/>
-              </a:lnSpc>
-            </a:pPr>
-            <a:r>
-              <a:rPr sz="1500" b="1" i="0">
-                <a:solidFill>
-                  <a:srgbClr val="35D0BA"/>
-                </a:solidFill>
-                <a:latin typeface="Calibri"/>
-              </a:rPr>
-              <a:t>2m band</a:t>
-            </a:r>
-          </a:p>
-        </p:txBody>
-      </p:sp>
-      <p:sp>
-        <p:nvSpPr>
-          <p:cNvPr id="14" name="TextBox 13"/>
-          <p:cNvSpPr txBox="1"/>
-          <p:nvPr/>
-        </p:nvSpPr>
-        <p:spPr>
-          <a:xfrm>
-            <a:off x="5212080" y="3054096"/>
-            <a:ext cx="6126480" cy="566928"/>
-          </a:xfrm>
-          <a:prstGeom prst="rect">
-            <a:avLst/>
-          </a:prstGeom>
-          <a:noFill/>
-        </p:spPr>
-        <p:txBody>
-          <a:bodyPr wrap="square" anchor="ctr" lIns="0" rIns="0" tIns="0" bIns="0">
-            <a:spAutoFit/>
-          </a:bodyPr>
-          <a:lstStyle/>
-          <a:p>
-            <a:pPr algn="l">
-              <a:lnSpc>
-                <a:spcPct val="115000"/>
-              </a:lnSpc>
-            </a:pPr>
-            <a:r>
-              <a:rPr sz="1500" b="0" i="0">
+              <a:t>•  The only thing that changed between demos was which flowgraph was loaded -- no soldering, no new hardware.</a:t>
+            </a:r>
+          </a:p>
+          <a:p>
+            <a:pPr>
+              <a:lnSpc>
+                <a:spcPct val="112000"/>
+              </a:lnSpc>
+              <a:spcAft>
+                <a:spcPts val="1600"/>
+              </a:spcAft>
+            </a:pPr>
+            <a:r>
+              <a:rPr sz="1900">
                 <a:solidFill>
                   <a:srgbClr val="D7E3EC"/>
                 </a:solidFill>
                 <a:latin typeface="Calibri"/>
               </a:rPr>
-              <a:t>144.000 – 148.000 MHz</a:t>
-            </a:r>
-          </a:p>
-        </p:txBody>
-      </p:sp>
-      <p:sp>
-        <p:nvSpPr>
-          <p:cNvPr id="15" name="Rectangle 14"/>
-          <p:cNvSpPr/>
-          <p:nvPr/>
-        </p:nvSpPr>
-        <p:spPr>
-          <a:xfrm>
-            <a:off x="640080" y="3621024"/>
-            <a:ext cx="10881360" cy="566928"/>
-          </a:xfrm>
-          <a:prstGeom prst="rect">
-            <a:avLst/>
-          </a:prstGeom>
-          <a:solidFill>
-            <a:srgbClr val="0A1929"/>
-          </a:solidFill>
-          <a:ln>
-            <a:noFill/>
-          </a:ln>
-          <a:effectLst/>
-        </p:spPr>
-        <p:style>
-          <a:lnRef idx="1">
-            <a:schemeClr val="accent1"/>
-          </a:lnRef>
-          <a:fillRef idx="3">
-            <a:schemeClr val="accent1"/>
-          </a:fillRef>
-          <a:effectRef idx="2">
-            <a:schemeClr val="accent1"/>
-          </a:effectRef>
-          <a:fontRef idx="minor">
-            <a:schemeClr val="lt1"/>
-          </a:fontRef>
-        </p:style>
-        <p:txBody>
-          <a:bodyPr rtlCol="0" anchor="ctr"/>
-          <a:lstStyle/>
-          <a:p>
-            <a:pPr algn="ctr"/>
-          </a:p>
-        </p:txBody>
-      </p:sp>
-      <p:sp>
-        <p:nvSpPr>
-          <p:cNvPr id="16" name="TextBox 15"/>
-          <p:cNvSpPr txBox="1"/>
-          <p:nvPr/>
-        </p:nvSpPr>
-        <p:spPr>
-          <a:xfrm>
-            <a:off x="868680" y="3621024"/>
-            <a:ext cx="4114800" cy="566928"/>
-          </a:xfrm>
-          <a:prstGeom prst="rect">
-            <a:avLst/>
-          </a:prstGeom>
-          <a:noFill/>
-        </p:spPr>
-        <p:txBody>
-          <a:bodyPr wrap="square" anchor="ctr" lIns="0" rIns="0" tIns="0" bIns="0">
-            <a:spAutoFit/>
-          </a:bodyPr>
-          <a:lstStyle/>
-          <a:p>
-            <a:pPr algn="l">
-              <a:lnSpc>
-                <a:spcPct val="115000"/>
-              </a:lnSpc>
-            </a:pPr>
-            <a:r>
-              <a:rPr sz="1500" b="1" i="0">
-                <a:solidFill>
-                  <a:srgbClr val="35D0BA"/>
-                </a:solidFill>
-                <a:latin typeface="Calibri"/>
-              </a:rPr>
-              <a:t>70cm band</a:t>
-            </a:r>
-          </a:p>
-        </p:txBody>
-      </p:sp>
-      <p:sp>
-        <p:nvSpPr>
-          <p:cNvPr id="17" name="TextBox 16"/>
-          <p:cNvSpPr txBox="1"/>
-          <p:nvPr/>
-        </p:nvSpPr>
-        <p:spPr>
-          <a:xfrm>
-            <a:off x="5212080" y="3621024"/>
-            <a:ext cx="6126480" cy="566928"/>
-          </a:xfrm>
-          <a:prstGeom prst="rect">
-            <a:avLst/>
-          </a:prstGeom>
-          <a:noFill/>
-        </p:spPr>
-        <p:txBody>
-          <a:bodyPr wrap="square" anchor="ctr" lIns="0" rIns="0" tIns="0" bIns="0">
-            <a:spAutoFit/>
-          </a:bodyPr>
-          <a:lstStyle/>
-          <a:p>
-            <a:pPr algn="l">
-              <a:lnSpc>
-                <a:spcPct val="115000"/>
-              </a:lnSpc>
-            </a:pPr>
-            <a:r>
-              <a:rPr sz="1500" b="0" i="0">
+              <a:t>•  The recording in Demo 3 wasn't a simulation of the 2m band -- it was the actual RF, represented as numbers, played back as actual RF.</a:t>
+            </a:r>
+          </a:p>
+          <a:p>
+            <a:pPr>
+              <a:lnSpc>
+                <a:spcPct val="112000"/>
+              </a:lnSpc>
+              <a:spcAft>
+                <a:spcPts val="1600"/>
+              </a:spcAft>
+            </a:pPr>
+            <a:r>
+              <a:rPr sz="1900">
                 <a:solidFill>
                   <a:srgbClr val="D7E3EC"/>
                 </a:solidFill>
                 <a:latin typeface="Calibri"/>
               </a:rPr>
-              <a:t>420.000 – 450.000 MHz</a:t>
-            </a:r>
-          </a:p>
-        </p:txBody>
-      </p:sp>
-      <p:sp>
-        <p:nvSpPr>
-          <p:cNvPr id="18" name="Rectangle 17"/>
-          <p:cNvSpPr/>
-          <p:nvPr/>
-        </p:nvSpPr>
-        <p:spPr>
-          <a:xfrm>
-            <a:off x="640080" y="4187952"/>
-            <a:ext cx="10881360" cy="566928"/>
-          </a:xfrm>
-          <a:prstGeom prst="rect">
-            <a:avLst/>
-          </a:prstGeom>
-          <a:solidFill>
-            <a:srgbClr val="0F2438"/>
-          </a:solidFill>
-          <a:ln>
-            <a:noFill/>
-          </a:ln>
-          <a:effectLst/>
-        </p:spPr>
-        <p:style>
-          <a:lnRef idx="1">
-            <a:schemeClr val="accent1"/>
-          </a:lnRef>
-          <a:fillRef idx="3">
-            <a:schemeClr val="accent1"/>
-          </a:fillRef>
-          <a:effectRef idx="2">
-            <a:schemeClr val="accent1"/>
-          </a:effectRef>
-          <a:fontRef idx="minor">
-            <a:schemeClr val="lt1"/>
-          </a:fontRef>
-        </p:style>
-        <p:txBody>
-          <a:bodyPr rtlCol="0" anchor="ctr"/>
-          <a:lstStyle/>
-          <a:p>
-            <a:pPr algn="ctr"/>
-          </a:p>
-        </p:txBody>
-      </p:sp>
-      <p:sp>
-        <p:nvSpPr>
-          <p:cNvPr id="19" name="TextBox 18"/>
-          <p:cNvSpPr txBox="1"/>
-          <p:nvPr/>
-        </p:nvSpPr>
-        <p:spPr>
-          <a:xfrm>
-            <a:off x="868680" y="4187952"/>
-            <a:ext cx="4114800" cy="566928"/>
-          </a:xfrm>
-          <a:prstGeom prst="rect">
-            <a:avLst/>
-          </a:prstGeom>
-          <a:noFill/>
-        </p:spPr>
-        <p:txBody>
-          <a:bodyPr wrap="square" anchor="ctr" lIns="0" rIns="0" tIns="0" bIns="0">
-            <a:spAutoFit/>
-          </a:bodyPr>
-          <a:lstStyle/>
-          <a:p>
-            <a:pPr algn="l">
-              <a:lnSpc>
-                <a:spcPct val="115000"/>
-              </a:lnSpc>
-            </a:pPr>
-            <a:r>
-              <a:rPr sz="1500" b="1" i="0">
-                <a:solidFill>
-                  <a:srgbClr val="35D0BA"/>
-                </a:solidFill>
-                <a:latin typeface="Calibri"/>
-              </a:rPr>
-              <a:t>2m simplex calling freq</a:t>
-            </a:r>
-          </a:p>
-        </p:txBody>
-      </p:sp>
-      <p:sp>
-        <p:nvSpPr>
-          <p:cNvPr id="20" name="TextBox 19"/>
-          <p:cNvSpPr txBox="1"/>
-          <p:nvPr/>
-        </p:nvSpPr>
-        <p:spPr>
-          <a:xfrm>
-            <a:off x="5212080" y="4187952"/>
-            <a:ext cx="6126480" cy="566928"/>
-          </a:xfrm>
-          <a:prstGeom prst="rect">
-            <a:avLst/>
-          </a:prstGeom>
-          <a:noFill/>
-        </p:spPr>
-        <p:txBody>
-          <a:bodyPr wrap="square" anchor="ctr" lIns="0" rIns="0" tIns="0" bIns="0">
-            <a:spAutoFit/>
-          </a:bodyPr>
-          <a:lstStyle/>
-          <a:p>
-            <a:pPr algn="l">
-              <a:lnSpc>
-                <a:spcPct val="115000"/>
-              </a:lnSpc>
-            </a:pPr>
-            <a:r>
-              <a:rPr sz="1500" b="0" i="0">
-                <a:solidFill>
-                  <a:srgbClr val="D7E3EC"/>
-                </a:solidFill>
-                <a:latin typeface="Calibri"/>
-              </a:rPr>
-              <a:t>146.520 MHz</a:t>
-            </a:r>
-          </a:p>
-        </p:txBody>
-      </p:sp>
-      <p:sp>
-        <p:nvSpPr>
-          <p:cNvPr id="21" name="Rectangle 20"/>
-          <p:cNvSpPr/>
-          <p:nvPr/>
-        </p:nvSpPr>
-        <p:spPr>
-          <a:xfrm>
-            <a:off x="640080" y="4754880"/>
-            <a:ext cx="10881360" cy="566928"/>
-          </a:xfrm>
-          <a:prstGeom prst="rect">
-            <a:avLst/>
-          </a:prstGeom>
-          <a:solidFill>
-            <a:srgbClr val="0A1929"/>
-          </a:solidFill>
-          <a:ln>
-            <a:noFill/>
-          </a:ln>
-          <a:effectLst/>
-        </p:spPr>
-        <p:style>
-          <a:lnRef idx="1">
-            <a:schemeClr val="accent1"/>
-          </a:lnRef>
-          <a:fillRef idx="3">
-            <a:schemeClr val="accent1"/>
-          </a:fillRef>
-          <a:effectRef idx="2">
-            <a:schemeClr val="accent1"/>
-          </a:effectRef>
-          <a:fontRef idx="minor">
-            <a:schemeClr val="lt1"/>
-          </a:fontRef>
-        </p:style>
-        <p:txBody>
-          <a:bodyPr rtlCol="0" anchor="ctr"/>
-          <a:lstStyle/>
-          <a:p>
-            <a:pPr algn="ctr"/>
-          </a:p>
-        </p:txBody>
-      </p:sp>
-      <p:sp>
-        <p:nvSpPr>
-          <p:cNvPr id="22" name="TextBox 21"/>
-          <p:cNvSpPr txBox="1"/>
-          <p:nvPr/>
-        </p:nvSpPr>
-        <p:spPr>
-          <a:xfrm>
-            <a:off x="868680" y="4754880"/>
-            <a:ext cx="4114800" cy="566928"/>
-          </a:xfrm>
-          <a:prstGeom prst="rect">
-            <a:avLst/>
-          </a:prstGeom>
-          <a:noFill/>
-        </p:spPr>
-        <p:txBody>
-          <a:bodyPr wrap="square" anchor="ctr" lIns="0" rIns="0" tIns="0" bIns="0">
-            <a:spAutoFit/>
-          </a:bodyPr>
-          <a:lstStyle/>
-          <a:p>
-            <a:pPr algn="l">
-              <a:lnSpc>
-                <a:spcPct val="115000"/>
-              </a:lnSpc>
-            </a:pPr>
-            <a:r>
-              <a:rPr sz="1500" b="1" i="0">
-                <a:solidFill>
-                  <a:srgbClr val="35D0BA"/>
-                </a:solidFill>
-                <a:latin typeface="Calibri"/>
-              </a:rPr>
-              <a:t>Demo 3 capture</a:t>
-            </a:r>
-          </a:p>
-        </p:txBody>
-      </p:sp>
-      <p:sp>
-        <p:nvSpPr>
-          <p:cNvPr id="23" name="TextBox 22"/>
-          <p:cNvSpPr txBox="1"/>
-          <p:nvPr/>
-        </p:nvSpPr>
-        <p:spPr>
-          <a:xfrm>
-            <a:off x="5212080" y="4754880"/>
-            <a:ext cx="6126480" cy="566928"/>
-          </a:xfrm>
-          <a:prstGeom prst="rect">
-            <a:avLst/>
-          </a:prstGeom>
-          <a:noFill/>
-        </p:spPr>
-        <p:txBody>
-          <a:bodyPr wrap="square" anchor="ctr" lIns="0" rIns="0" tIns="0" bIns="0">
-            <a:spAutoFit/>
-          </a:bodyPr>
-          <a:lstStyle/>
-          <a:p>
-            <a:pPr algn="l">
-              <a:lnSpc>
-                <a:spcPct val="115000"/>
-              </a:lnSpc>
-            </a:pPr>
-            <a:r>
-              <a:rPr sz="1500" b="0" i="0">
-                <a:solidFill>
-                  <a:srgbClr val="D7E3EC"/>
-                </a:solidFill>
-                <a:latin typeface="Calibri"/>
-              </a:rPr>
-              <a:t>146.0 MHz center @ 6 Msps ≈ 2.9 GB/min</a:t>
-            </a:r>
-          </a:p>
-        </p:txBody>
-      </p:sp>
-      <p:sp>
-        <p:nvSpPr>
-          <p:cNvPr id="24" name="Rectangle 23"/>
-          <p:cNvSpPr/>
-          <p:nvPr/>
-        </p:nvSpPr>
-        <p:spPr>
-          <a:xfrm>
-            <a:off x="640080" y="5321808"/>
-            <a:ext cx="10881360" cy="566928"/>
-          </a:xfrm>
-          <a:prstGeom prst="rect">
-            <a:avLst/>
-          </a:prstGeom>
-          <a:solidFill>
-            <a:srgbClr val="0F2438"/>
-          </a:solidFill>
-          <a:ln>
-            <a:noFill/>
-          </a:ln>
-          <a:effectLst/>
-        </p:spPr>
-        <p:style>
-          <a:lnRef idx="1">
-            <a:schemeClr val="accent1"/>
-          </a:lnRef>
-          <a:fillRef idx="3">
-            <a:schemeClr val="accent1"/>
-          </a:fillRef>
-          <a:effectRef idx="2">
-            <a:schemeClr val="accent1"/>
-          </a:effectRef>
-          <a:fontRef idx="minor">
-            <a:schemeClr val="lt1"/>
-          </a:fontRef>
-        </p:style>
-        <p:txBody>
-          <a:bodyPr rtlCol="0" anchor="ctr"/>
-          <a:lstStyle/>
-          <a:p>
-            <a:pPr algn="ctr"/>
-          </a:p>
-        </p:txBody>
-      </p:sp>
-      <p:sp>
-        <p:nvSpPr>
-          <p:cNvPr id="25" name="TextBox 24"/>
-          <p:cNvSpPr txBox="1"/>
-          <p:nvPr/>
-        </p:nvSpPr>
-        <p:spPr>
-          <a:xfrm>
-            <a:off x="868680" y="5321808"/>
-            <a:ext cx="4114800" cy="566928"/>
-          </a:xfrm>
-          <a:prstGeom prst="rect">
-            <a:avLst/>
-          </a:prstGeom>
-          <a:noFill/>
-        </p:spPr>
-        <p:txBody>
-          <a:bodyPr wrap="square" anchor="ctr" lIns="0" rIns="0" tIns="0" bIns="0">
-            <a:spAutoFit/>
-          </a:bodyPr>
-          <a:lstStyle/>
-          <a:p>
-            <a:pPr algn="l">
-              <a:lnSpc>
-                <a:spcPct val="115000"/>
-              </a:lnSpc>
-            </a:pPr>
-            <a:r>
-              <a:rPr sz="1500" b="1" i="0">
-                <a:solidFill>
-                  <a:srgbClr val="35D0BA"/>
-                </a:solidFill>
-                <a:latin typeface="Calibri"/>
-              </a:rPr>
-              <a:t>HackRF TX power (typical)</a:t>
-            </a:r>
-          </a:p>
-        </p:txBody>
-      </p:sp>
-      <p:sp>
-        <p:nvSpPr>
-          <p:cNvPr id="26" name="TextBox 25"/>
-          <p:cNvSpPr txBox="1"/>
-          <p:nvPr/>
-        </p:nvSpPr>
-        <p:spPr>
-          <a:xfrm>
-            <a:off x="5212080" y="5321808"/>
-            <a:ext cx="6126480" cy="566928"/>
-          </a:xfrm>
-          <a:prstGeom prst="rect">
-            <a:avLst/>
-          </a:prstGeom>
-          <a:noFill/>
-        </p:spPr>
-        <p:txBody>
-          <a:bodyPr wrap="square" anchor="ctr" lIns="0" rIns="0" tIns="0" bIns="0">
-            <a:spAutoFit/>
-          </a:bodyPr>
-          <a:lstStyle/>
-          <a:p>
-            <a:pPr algn="l">
-              <a:lnSpc>
-                <a:spcPct val="115000"/>
-              </a:lnSpc>
-            </a:pPr>
-            <a:r>
-              <a:rPr sz="1500" b="0" i="0">
-                <a:solidFill>
-                  <a:srgbClr val="D7E3EC"/>
-                </a:solidFill>
-                <a:latin typeface="Calibri"/>
-              </a:rPr>
-              <a:t>≈ 10–15 dBm max, kept low for these demos</a:t>
-            </a:r>
-          </a:p>
-        </p:txBody>
-      </p:sp>
-      <p:sp>
-        <p:nvSpPr>
-          <p:cNvPr id="27" name="TextBox 26"/>
+              <a:t>•  That's the whole idea of “software defined”: the radio is defined by the software running on general-purpose hardware, not by purpose-built circuitry.</a:t>
+            </a:r>
+          </a:p>
+        </p:txBody>
+      </p:sp>
+      <p:sp>
+        <p:nvSpPr>
+          <p:cNvPr id="7" name="TextBox 6"/>
           <p:cNvSpPr txBox="1"/>
           <p:nvPr/>
         </p:nvSpPr>
@@ -7277,7 +6816,7 @@
       </p:sp>
       <p:sp>
         <p:nvSpPr>
-          <p:cNvPr id="28" name="TextBox 27"/>
+          <p:cNvPr id="8" name="TextBox 7"/>
           <p:cNvSpPr txBox="1"/>
           <p:nvPr/>
         </p:nvSpPr>
@@ -7309,7 +6848,7 @@
                 </a:solidFill>
                 <a:latin typeface="Calibri"/>
               </a:rPr>
-              <a:t>16 / 19</a:t>
+              <a:t>16 / 21</a:t>
             </a:r>
           </a:p>
         </p:txBody>
@@ -7410,7 +6949,7 @@
                 </a:solidFill>
                 <a:latin typeface="Calibri"/>
               </a:rPr>
-              <a:t>RESOURCES</a:t>
+              <a:t>WHERE THIS GOES NEXT</a:t>
             </a:r>
           </a:p>
         </p:txBody>
@@ -7449,7 +6988,7 @@
                 </a:solidFill>
                 <a:latin typeface="Calibri"/>
               </a:rPr>
-              <a:t>Go Build Something</a:t>
+              <a:t>More Demo Ideas</a:t>
             </a:r>
           </a:p>
         </p:txBody>
@@ -7506,8 +7045,47 @@
         </p:nvSpPr>
         <p:spPr>
           <a:xfrm>
-            <a:off x="640080" y="1920240"/>
-            <a:ext cx="10698480" cy="4114800"/>
+            <a:off x="640080" y="1874519"/>
+            <a:ext cx="5120640" cy="320040"/>
+          </a:xfrm>
+          <a:prstGeom prst="rect">
+            <a:avLst/>
+          </a:prstGeom>
+          <a:noFill/>
+        </p:spPr>
+        <p:txBody>
+          <a:bodyPr wrap="square" anchor="t" lIns="0" rIns="0" tIns="0" bIns="0">
+            <a:spAutoFit/>
+          </a:bodyPr>
+          <a:lstStyle/>
+          <a:p>
+            <a:pPr algn="l">
+              <a:lnSpc>
+                <a:spcPct val="115000"/>
+              </a:lnSpc>
+            </a:pPr>
+            <a:r>
+              <a:rPr sz="1600" b="1" i="0">
+                <a:solidFill>
+                  <a:srgbClr val="35D0BA"/>
+                </a:solidFill>
+                <a:latin typeface="Calibri"/>
+              </a:rPr>
+              <a:t>Quick wins</a:t>
+            </a:r>
+          </a:p>
+        </p:txBody>
+      </p:sp>
+      <p:sp>
+        <p:nvSpPr>
+          <p:cNvPr id="7" name="TextBox 6"/>
+          <p:cNvSpPr txBox="1"/>
+          <p:nvPr/>
+        </p:nvSpPr>
+        <p:spPr>
+          <a:xfrm>
+            <a:off x="640080" y="2286000"/>
+            <a:ext cx="5120640" cy="3474720"/>
           </a:xfrm>
           <a:prstGeom prst="rect">
             <a:avLst/>
@@ -7525,33 +7103,36 @@
                 <a:spcPct val="112000"/>
               </a:lnSpc>
               <a:spcAft>
-                <a:spcPts val="1800"/>
+                <a:spcPts val="1400"/>
               </a:spcAft>
             </a:pPr>
             <a:r>
-              <a:rPr sz="1900">
+              <a:rPr sz="1700">
                 <a:solidFill>
                   <a:srgbClr val="D7E3EC"/>
                 </a:solidFill>
                 <a:latin typeface="Calibri"/>
               </a:rPr>
-              <a:t>•  GNU Radio</a:t>
-            </a:r>
-          </a:p>
-          <a:p>
-            <a:pPr lvl="1">
+              <a:t>•  CTCSS/PL tone squelch decode</a:t>
+            </a:r>
+          </a:p>
+          <a:p>
+            <a:pPr>
+              <a:lnSpc>
+                <a:spcPct val="112000"/>
+              </a:lnSpc>
               <a:spcAft>
-                <a:spcPts val="600"/>
+                <a:spcPts val="1400"/>
               </a:spcAft>
             </a:pPr>
             <a:r>
-              <a:rPr sz="1600">
-                <a:solidFill>
-                  <a:srgbClr val="8EA7BA"/>
-                </a:solidFill>
-                <a:latin typeface="Calibri"/>
-              </a:rPr>
-              <a:t>–  gnuradio.org — the toolkit, docs, and tutorials</a:t>
+              <a:rPr sz="1700">
+                <a:solidFill>
+                  <a:srgbClr val="D7E3EC"/>
+                </a:solidFill>
+                <a:latin typeface="Calibri"/>
+              </a:rPr>
+              <a:t>•  CW (Morse) ID transmitter</a:t>
             </a:r>
           </a:p>
           <a:p>
@@ -7560,152 +7141,50 @@
                 <a:spcPct val="112000"/>
               </a:lnSpc>
               <a:spcAft>
-                <a:spcPts val="1800"/>
+                <a:spcPts val="1400"/>
               </a:spcAft>
             </a:pPr>
             <a:r>
-              <a:rPr sz="1900">
+              <a:rPr sz="1700">
                 <a:solidFill>
                   <a:srgbClr val="D7E3EC"/>
                 </a:solidFill>
                 <a:latin typeface="Calibri"/>
               </a:rPr>
-              <a:t>•  HackRF One</a:t>
-            </a:r>
-          </a:p>
-          <a:p>
-            <a:pPr lvl="1">
+              <a:t>•  RDS decode from FM broadcast</a:t>
+            </a:r>
+          </a:p>
+          <a:p>
+            <a:pPr>
+              <a:lnSpc>
+                <a:spcPct val="112000"/>
+              </a:lnSpc>
               <a:spcAft>
-                <a:spcPts val="600"/>
+                <a:spcPts val="1400"/>
               </a:spcAft>
             </a:pPr>
             <a:r>
-              <a:rPr sz="1600">
-                <a:solidFill>
-                  <a:srgbClr val="8EA7BA"/>
-                </a:solidFill>
-                <a:latin typeface="Calibri"/>
-              </a:rPr>
-              <a:t>–  greatscottgadgets.com/hackrf — hardware + firmware</a:t>
-            </a:r>
-          </a:p>
-          <a:p>
-            <a:pPr>
-              <a:lnSpc>
-                <a:spcPct val="112000"/>
-              </a:lnSpc>
-              <a:spcAft>
-                <a:spcPts val="1800"/>
-              </a:spcAft>
-            </a:pPr>
-            <a:r>
-              <a:rPr sz="1900">
+              <a:rPr sz="1700">
                 <a:solidFill>
                   <a:srgbClr val="D7E3EC"/>
                 </a:solidFill>
                 <a:latin typeface="Calibri"/>
               </a:rPr>
-              <a:t>•  SoapySDR</a:t>
-            </a:r>
-          </a:p>
-          <a:p>
-            <a:pPr lvl="1">
-              <a:spcAft>
-                <a:spcPts val="600"/>
-              </a:spcAft>
-            </a:pPr>
-            <a:r>
-              <a:rPr sz="1600">
-                <a:solidFill>
-                  <a:srgbClr val="8EA7BA"/>
-                </a:solidFill>
-                <a:latin typeface="Calibri"/>
-              </a:rPr>
-              <a:t>–  github.com/pothosware/SoapySDR — the hardware abstraction layer used today</a:t>
-            </a:r>
-          </a:p>
-          <a:p>
-            <a:pPr>
-              <a:lnSpc>
-                <a:spcPct val="112000"/>
-              </a:lnSpc>
-              <a:spcAft>
-                <a:spcPts val="1800"/>
-              </a:spcAft>
-            </a:pPr>
-            <a:r>
-              <a:rPr sz="1900">
-                <a:solidFill>
-                  <a:srgbClr val="D7E3EC"/>
-                </a:solidFill>
-                <a:latin typeface="Calibri"/>
-              </a:rPr>
-              <a:t>•  ARRL</a:t>
-            </a:r>
-          </a:p>
-          <a:p>
-            <a:pPr lvl="1">
-              <a:spcAft>
-                <a:spcPts val="600"/>
-              </a:spcAft>
-            </a:pPr>
-            <a:r>
-              <a:rPr sz="1600">
-                <a:solidFill>
-                  <a:srgbClr val="8EA7BA"/>
-                </a:solidFill>
-                <a:latin typeface="Calibri"/>
-              </a:rPr>
-              <a:t>–  arrl.org — licensing info and Part 97 reference</a:t>
-            </a:r>
-          </a:p>
-          <a:p>
-            <a:pPr>
-              <a:lnSpc>
-                <a:spcPct val="112000"/>
-              </a:lnSpc>
-              <a:spcAft>
-                <a:spcPts val="1800"/>
-              </a:spcAft>
-            </a:pPr>
-            <a:r>
-              <a:rPr sz="1900">
-                <a:solidFill>
-                  <a:srgbClr val="D7E3EC"/>
-                </a:solidFill>
-                <a:latin typeface="Calibri"/>
-              </a:rPr>
-              <a:t>•  This kit</a:t>
-            </a:r>
-          </a:p>
-          <a:p>
-            <a:pPr lvl="1">
-              <a:spcAft>
-                <a:spcPts val="600"/>
-              </a:spcAft>
-            </a:pPr>
-            <a:r>
-              <a:rPr sz="1600">
-                <a:solidFill>
-                  <a:srgbClr val="8EA7BA"/>
-                </a:solidFill>
-                <a:latin typeface="Calibri"/>
-              </a:rPr>
-              <a:t>–  All flowgraphs, README, and brainstorm doc are in this repo’s flowgraphs/ and top-level README.md / BRAINSTORM.md</a:t>
-            </a:r>
-          </a:p>
-        </p:txBody>
-      </p:sp>
-      <p:sp>
-        <p:nvSpPr>
-          <p:cNvPr id="7" name="TextBox 6"/>
+              <a:t>•  APRS decode (144.390 MHz)</a:t>
+            </a:r>
+          </a:p>
+        </p:txBody>
+      </p:sp>
+      <p:sp>
+        <p:nvSpPr>
+          <p:cNvPr id="8" name="TextBox 7"/>
           <p:cNvSpPr txBox="1"/>
           <p:nvPr/>
         </p:nvSpPr>
         <p:spPr>
           <a:xfrm>
-            <a:off x="640080" y="6473952"/>
-            <a:ext cx="7315200" cy="274320"/>
+            <a:off x="6309360" y="1874519"/>
+            <a:ext cx="5120640" cy="320040"/>
           </a:xfrm>
           <a:prstGeom prst="rect">
             <a:avLst/>
@@ -7724,27 +7203,126 @@
               </a:lnSpc>
             </a:pPr>
             <a:r>
-              <a:rPr sz="1000" b="0" i="0">
-                <a:solidFill>
-                  <a:srgbClr val="8EA7BA"/>
-                </a:solidFill>
-                <a:latin typeface="Calibri"/>
-              </a:rPr>
-              <a:t>SDR Demo -- GNU Radio + HackRF + Ham Handheld</a:t>
-            </a:r>
-          </a:p>
-        </p:txBody>
-      </p:sp>
-      <p:sp>
-        <p:nvSpPr>
-          <p:cNvPr id="8" name="TextBox 7"/>
+              <a:rPr sz="1600" b="1" i="0">
+                <a:solidFill>
+                  <a:srgbClr val="35D0BA"/>
+                </a:solidFill>
+                <a:latin typeface="Calibri"/>
+              </a:rPr>
+              <a:t>Bigger swings</a:t>
+            </a:r>
+          </a:p>
+        </p:txBody>
+      </p:sp>
+      <p:sp>
+        <p:nvSpPr>
+          <p:cNvPr id="9" name="TextBox 8"/>
           <p:cNvSpPr txBox="1"/>
           <p:nvPr/>
         </p:nvSpPr>
         <p:spPr>
           <a:xfrm>
-            <a:off x="11292840" y="6473952"/>
-            <a:ext cx="731520" cy="274320"/>
+            <a:off x="6309360" y="2286000"/>
+            <a:ext cx="5120640" cy="3474720"/>
+          </a:xfrm>
+          <a:prstGeom prst="rect">
+            <a:avLst/>
+          </a:prstGeom>
+          <a:noFill/>
+        </p:spPr>
+        <p:txBody>
+          <a:bodyPr wrap="square">
+            <a:spAutoFit/>
+          </a:bodyPr>
+          <a:lstStyle/>
+          <a:p>
+            <a:pPr>
+              <a:lnSpc>
+                <a:spcPct val="112000"/>
+              </a:lnSpc>
+              <a:spcAft>
+                <a:spcPts val="1400"/>
+              </a:spcAft>
+            </a:pPr>
+            <a:r>
+              <a:rPr sz="1700">
+                <a:solidFill>
+                  <a:srgbClr val="D7E3EC"/>
+                </a:solidFill>
+                <a:latin typeface="Calibri"/>
+              </a:rPr>
+              <a:t>•  WSPR / FT8 weak-signal decode</a:t>
+            </a:r>
+          </a:p>
+          <a:p>
+            <a:pPr>
+              <a:lnSpc>
+                <a:spcPct val="112000"/>
+              </a:lnSpc>
+              <a:spcAft>
+                <a:spcPts val="1400"/>
+              </a:spcAft>
+            </a:pPr>
+            <a:r>
+              <a:rPr sz="1700">
+                <a:solidFill>
+                  <a:srgbClr val="D7E3EC"/>
+                </a:solidFill>
+                <a:latin typeface="Calibri"/>
+              </a:rPr>
+              <a:t>•  ADS-B aircraft tracking (1090 MHz)</a:t>
+            </a:r>
+          </a:p>
+          <a:p>
+            <a:pPr>
+              <a:lnSpc>
+                <a:spcPct val="112000"/>
+              </a:lnSpc>
+              <a:spcAft>
+                <a:spcPts val="1400"/>
+              </a:spcAft>
+            </a:pPr>
+            <a:r>
+              <a:rPr sz="1700">
+                <a:solidFill>
+                  <a:srgbClr val="D7E3EC"/>
+                </a:solidFill>
+                <a:latin typeface="Calibri"/>
+              </a:rPr>
+              <a:t>•  Cross-band digital repeater</a:t>
+            </a:r>
+          </a:p>
+          <a:p>
+            <a:pPr>
+              <a:lnSpc>
+                <a:spcPct val="112000"/>
+              </a:lnSpc>
+              <a:spcAft>
+                <a:spcPts val="1400"/>
+              </a:spcAft>
+            </a:pPr>
+            <a:r>
+              <a:rPr sz="1700">
+                <a:solidFill>
+                  <a:srgbClr val="D7E3EC"/>
+                </a:solidFill>
+                <a:latin typeface="Calibri"/>
+              </a:rPr>
+              <a:t>•  Digital voice (DMR / D-STAR) decode</a:t>
+            </a:r>
+          </a:p>
+        </p:txBody>
+      </p:sp>
+      <p:sp>
+        <p:nvSpPr>
+          <p:cNvPr id="10" name="TextBox 9"/>
+          <p:cNvSpPr txBox="1"/>
+          <p:nvPr/>
+        </p:nvSpPr>
+        <p:spPr>
+          <a:xfrm>
+            <a:off x="640080" y="5943600"/>
+            <a:ext cx="10058400" cy="365760"/>
           </a:xfrm>
           <a:prstGeom prst="rect">
             <a:avLst/>
@@ -7757,6 +7335,84 @@
           </a:bodyPr>
           <a:lstStyle/>
           <a:p>
+            <a:pPr algn="l">
+              <a:lnSpc>
+                <a:spcPct val="115000"/>
+              </a:lnSpc>
+            </a:pPr>
+            <a:r>
+              <a:rPr sz="1300" b="0" i="1">
+                <a:solidFill>
+                  <a:srgbClr val="8EA7BA"/>
+                </a:solidFill>
+                <a:latin typeface="Calibri"/>
+              </a:rPr>
+              <a:t>Full writeup with effort/dependency notes: BRAINSTORM.md</a:t>
+            </a:r>
+          </a:p>
+        </p:txBody>
+      </p:sp>
+      <p:sp>
+        <p:nvSpPr>
+          <p:cNvPr id="11" name="TextBox 10"/>
+          <p:cNvSpPr txBox="1"/>
+          <p:nvPr/>
+        </p:nvSpPr>
+        <p:spPr>
+          <a:xfrm>
+            <a:off x="640080" y="6473952"/>
+            <a:ext cx="7315200" cy="274320"/>
+          </a:xfrm>
+          <a:prstGeom prst="rect">
+            <a:avLst/>
+          </a:prstGeom>
+          <a:noFill/>
+        </p:spPr>
+        <p:txBody>
+          <a:bodyPr wrap="square" anchor="t" lIns="0" rIns="0" tIns="0" bIns="0">
+            <a:spAutoFit/>
+          </a:bodyPr>
+          <a:lstStyle/>
+          <a:p>
+            <a:pPr algn="l">
+              <a:lnSpc>
+                <a:spcPct val="115000"/>
+              </a:lnSpc>
+            </a:pPr>
+            <a:r>
+              <a:rPr sz="1000" b="0" i="0">
+                <a:solidFill>
+                  <a:srgbClr val="8EA7BA"/>
+                </a:solidFill>
+                <a:latin typeface="Calibri"/>
+              </a:rPr>
+              <a:t>SDR Demo -- GNU Radio + HackRF + Ham Handheld</a:t>
+            </a:r>
+          </a:p>
+        </p:txBody>
+      </p:sp>
+      <p:sp>
+        <p:nvSpPr>
+          <p:cNvPr id="12" name="TextBox 11"/>
+          <p:cNvSpPr txBox="1"/>
+          <p:nvPr/>
+        </p:nvSpPr>
+        <p:spPr>
+          <a:xfrm>
+            <a:off x="11292840" y="6473952"/>
+            <a:ext cx="731520" cy="274320"/>
+          </a:xfrm>
+          <a:prstGeom prst="rect">
+            <a:avLst/>
+          </a:prstGeom>
+          <a:noFill/>
+        </p:spPr>
+        <p:txBody>
+          <a:bodyPr wrap="square" anchor="t" lIns="0" rIns="0" tIns="0" bIns="0">
+            <a:spAutoFit/>
+          </a:bodyPr>
+          <a:lstStyle/>
+          <a:p>
             <a:pPr algn="r">
               <a:lnSpc>
                 <a:spcPct val="115000"/>
@@ -7769,7 +7425,7 @@
                 </a:solidFill>
                 <a:latin typeface="Calibri"/>
               </a:rPr>
-              <a:t>17 / 19</a:t>
+              <a:t>17 / 21</a:t>
             </a:r>
           </a:p>
         </p:txBody>
@@ -7844,8 +7500,8 @@
         </p:nvSpPr>
         <p:spPr>
           <a:xfrm>
-            <a:off x="822960" y="2651760"/>
-            <a:ext cx="10515600" cy="1097280"/>
+            <a:off x="640080" y="457200"/>
+            <a:ext cx="10881360" cy="365760"/>
           </a:xfrm>
           <a:prstGeom prst="rect">
             <a:avLst/>
@@ -7864,13 +7520,13 @@
               </a:lnSpc>
             </a:pPr>
             <a:r>
-              <a:rPr sz="4800" b="1" i="0">
-                <a:solidFill>
-                  <a:srgbClr val="FFFFFF"/>
-                </a:solidFill>
-                <a:latin typeface="Calibri"/>
-              </a:rPr>
-              <a:t>Thank You</a:t>
+              <a:rPr sz="1400" b="1" i="0">
+                <a:solidFill>
+                  <a:srgbClr val="35D0BA"/>
+                </a:solidFill>
+                <a:latin typeface="Calibri"/>
+              </a:rPr>
+              <a:t>REFERENCE</a:t>
             </a:r>
           </a:p>
         </p:txBody>
@@ -7883,8 +7539,8 @@
         </p:nvSpPr>
         <p:spPr>
           <a:xfrm>
-            <a:off x="822960" y="3657600"/>
-            <a:ext cx="10058400" cy="548640"/>
+            <a:off x="640080" y="786384"/>
+            <a:ext cx="10881360" cy="822960"/>
           </a:xfrm>
           <a:prstGeom prst="rect">
             <a:avLst/>
@@ -7903,13 +7559,13 @@
               </a:lnSpc>
             </a:pPr>
             <a:r>
-              <a:rPr sz="2000" b="0" i="0">
-                <a:solidFill>
-                  <a:srgbClr val="D7E3EC"/>
-                </a:solidFill>
-                <a:latin typeface="Calibri"/>
-              </a:rPr>
-              <a:t>Questions? Let's get on the air.</a:t>
+              <a:rPr sz="3200" b="1" i="0">
+                <a:solidFill>
+                  <a:srgbClr val="FFFFFF"/>
+                </a:solidFill>
+                <a:latin typeface="Calibri"/>
+              </a:rPr>
+              <a:t>Specs at a Glance</a:t>
             </a:r>
           </a:p>
         </p:txBody>
@@ -7922,8 +7578,8 @@
         </p:nvSpPr>
         <p:spPr>
           <a:xfrm>
-            <a:off x="841248" y="4206240"/>
-            <a:ext cx="1280160" cy="50800"/>
+            <a:off x="640080" y="1481328"/>
+            <a:ext cx="1005840" cy="50800"/>
           </a:xfrm>
           <a:prstGeom prst="rect">
             <a:avLst/>
@@ -7960,14 +7616,868 @@
       </p:sp>
       <p:sp>
         <p:nvSpPr>
-          <p:cNvPr id="6" name="TextBox 5"/>
+          <p:cNvPr id="6" name="Rectangle 5"/>
+          <p:cNvSpPr/>
+          <p:nvPr/>
+        </p:nvSpPr>
+        <p:spPr>
+          <a:xfrm>
+            <a:off x="640080" y="1920240"/>
+            <a:ext cx="10881360" cy="566928"/>
+          </a:xfrm>
+          <a:prstGeom prst="rect">
+            <a:avLst/>
+          </a:prstGeom>
+          <a:solidFill>
+            <a:srgbClr val="0F2438"/>
+          </a:solidFill>
+          <a:ln>
+            <a:noFill/>
+          </a:ln>
+          <a:effectLst/>
+        </p:spPr>
+        <p:style>
+          <a:lnRef idx="1">
+            <a:schemeClr val="accent1"/>
+          </a:lnRef>
+          <a:fillRef idx="3">
+            <a:schemeClr val="accent1"/>
+          </a:fillRef>
+          <a:effectRef idx="2">
+            <a:schemeClr val="accent1"/>
+          </a:effectRef>
+          <a:fontRef idx="minor">
+            <a:schemeClr val="lt1"/>
+          </a:fontRef>
+        </p:style>
+        <p:txBody>
+          <a:bodyPr rtlCol="0" anchor="ctr"/>
+          <a:lstStyle/>
+          <a:p>
+            <a:pPr algn="ctr"/>
+          </a:p>
+        </p:txBody>
+      </p:sp>
+      <p:sp>
+        <p:nvSpPr>
+          <p:cNvPr id="7" name="TextBox 6"/>
           <p:cNvSpPr txBox="1"/>
           <p:nvPr/>
         </p:nvSpPr>
         <p:spPr>
           <a:xfrm>
-            <a:off x="822960" y="6035040"/>
-            <a:ext cx="7315200" cy="365760"/>
+            <a:off x="868680" y="1920240"/>
+            <a:ext cx="4114800" cy="566928"/>
+          </a:xfrm>
+          <a:prstGeom prst="rect">
+            <a:avLst/>
+          </a:prstGeom>
+          <a:noFill/>
+        </p:spPr>
+        <p:txBody>
+          <a:bodyPr wrap="square" anchor="ctr" lIns="0" rIns="0" tIns="0" bIns="0">
+            <a:spAutoFit/>
+          </a:bodyPr>
+          <a:lstStyle/>
+          <a:p>
+            <a:pPr algn="l">
+              <a:lnSpc>
+                <a:spcPct val="115000"/>
+              </a:lnSpc>
+            </a:pPr>
+            <a:r>
+              <a:rPr sz="1500" b="1" i="0">
+                <a:solidFill>
+                  <a:srgbClr val="35D0BA"/>
+                </a:solidFill>
+                <a:latin typeface="Calibri"/>
+              </a:rPr>
+              <a:t>Frequency range</a:t>
+            </a:r>
+          </a:p>
+        </p:txBody>
+      </p:sp>
+      <p:sp>
+        <p:nvSpPr>
+          <p:cNvPr id="8" name="TextBox 7"/>
+          <p:cNvSpPr txBox="1"/>
+          <p:nvPr/>
+        </p:nvSpPr>
+        <p:spPr>
+          <a:xfrm>
+            <a:off x="5212080" y="1920240"/>
+            <a:ext cx="6126480" cy="566928"/>
+          </a:xfrm>
+          <a:prstGeom prst="rect">
+            <a:avLst/>
+          </a:prstGeom>
+          <a:noFill/>
+        </p:spPr>
+        <p:txBody>
+          <a:bodyPr wrap="square" anchor="ctr" lIns="0" rIns="0" tIns="0" bIns="0">
+            <a:spAutoFit/>
+          </a:bodyPr>
+          <a:lstStyle/>
+          <a:p>
+            <a:pPr algn="l">
+              <a:lnSpc>
+                <a:spcPct val="115000"/>
+              </a:lnSpc>
+            </a:pPr>
+            <a:r>
+              <a:rPr sz="1500" b="0" i="0">
+                <a:solidFill>
+                  <a:srgbClr val="D7E3EC"/>
+                </a:solidFill>
+                <a:latin typeface="Calibri"/>
+              </a:rPr>
+              <a:t>1 MHz – 6 GHz (HackRF One)</a:t>
+            </a:r>
+          </a:p>
+        </p:txBody>
+      </p:sp>
+      <p:sp>
+        <p:nvSpPr>
+          <p:cNvPr id="9" name="Rectangle 8"/>
+          <p:cNvSpPr/>
+          <p:nvPr/>
+        </p:nvSpPr>
+        <p:spPr>
+          <a:xfrm>
+            <a:off x="640080" y="2487168"/>
+            <a:ext cx="10881360" cy="566928"/>
+          </a:xfrm>
+          <a:prstGeom prst="rect">
+            <a:avLst/>
+          </a:prstGeom>
+          <a:solidFill>
+            <a:srgbClr val="0A1929"/>
+          </a:solidFill>
+          <a:ln>
+            <a:noFill/>
+          </a:ln>
+          <a:effectLst/>
+        </p:spPr>
+        <p:style>
+          <a:lnRef idx="1">
+            <a:schemeClr val="accent1"/>
+          </a:lnRef>
+          <a:fillRef idx="3">
+            <a:schemeClr val="accent1"/>
+          </a:fillRef>
+          <a:effectRef idx="2">
+            <a:schemeClr val="accent1"/>
+          </a:effectRef>
+          <a:fontRef idx="minor">
+            <a:schemeClr val="lt1"/>
+          </a:fontRef>
+        </p:style>
+        <p:txBody>
+          <a:bodyPr rtlCol="0" anchor="ctr"/>
+          <a:lstStyle/>
+          <a:p>
+            <a:pPr algn="ctr"/>
+          </a:p>
+        </p:txBody>
+      </p:sp>
+      <p:sp>
+        <p:nvSpPr>
+          <p:cNvPr id="10" name="TextBox 9"/>
+          <p:cNvSpPr txBox="1"/>
+          <p:nvPr/>
+        </p:nvSpPr>
+        <p:spPr>
+          <a:xfrm>
+            <a:off x="868680" y="2487168"/>
+            <a:ext cx="4114800" cy="566928"/>
+          </a:xfrm>
+          <a:prstGeom prst="rect">
+            <a:avLst/>
+          </a:prstGeom>
+          <a:noFill/>
+        </p:spPr>
+        <p:txBody>
+          <a:bodyPr wrap="square" anchor="ctr" lIns="0" rIns="0" tIns="0" bIns="0">
+            <a:spAutoFit/>
+          </a:bodyPr>
+          <a:lstStyle/>
+          <a:p>
+            <a:pPr algn="l">
+              <a:lnSpc>
+                <a:spcPct val="115000"/>
+              </a:lnSpc>
+            </a:pPr>
+            <a:r>
+              <a:rPr sz="1500" b="1" i="0">
+                <a:solidFill>
+                  <a:srgbClr val="35D0BA"/>
+                </a:solidFill>
+                <a:latin typeface="Calibri"/>
+              </a:rPr>
+              <a:t>Sample rate used today</a:t>
+            </a:r>
+          </a:p>
+        </p:txBody>
+      </p:sp>
+      <p:sp>
+        <p:nvSpPr>
+          <p:cNvPr id="11" name="TextBox 10"/>
+          <p:cNvSpPr txBox="1"/>
+          <p:nvPr/>
+        </p:nvSpPr>
+        <p:spPr>
+          <a:xfrm>
+            <a:off x="5212080" y="2487168"/>
+            <a:ext cx="6126480" cy="566928"/>
+          </a:xfrm>
+          <a:prstGeom prst="rect">
+            <a:avLst/>
+          </a:prstGeom>
+          <a:noFill/>
+        </p:spPr>
+        <p:txBody>
+          <a:bodyPr wrap="square" anchor="ctr" lIns="0" rIns="0" tIns="0" bIns="0">
+            <a:spAutoFit/>
+          </a:bodyPr>
+          <a:lstStyle/>
+          <a:p>
+            <a:pPr algn="l">
+              <a:lnSpc>
+                <a:spcPct val="115000"/>
+              </a:lnSpc>
+            </a:pPr>
+            <a:r>
+              <a:rPr sz="1500" b="0" i="0">
+                <a:solidFill>
+                  <a:srgbClr val="D7E3EC"/>
+                </a:solidFill>
+                <a:latin typeface="Calibri"/>
+              </a:rPr>
+              <a:t>2–10 Msps depending on demo</a:t>
+            </a:r>
+          </a:p>
+        </p:txBody>
+      </p:sp>
+      <p:sp>
+        <p:nvSpPr>
+          <p:cNvPr id="12" name="Rectangle 11"/>
+          <p:cNvSpPr/>
+          <p:nvPr/>
+        </p:nvSpPr>
+        <p:spPr>
+          <a:xfrm>
+            <a:off x="640080" y="3054096"/>
+            <a:ext cx="10881360" cy="566928"/>
+          </a:xfrm>
+          <a:prstGeom prst="rect">
+            <a:avLst/>
+          </a:prstGeom>
+          <a:solidFill>
+            <a:srgbClr val="0F2438"/>
+          </a:solidFill>
+          <a:ln>
+            <a:noFill/>
+          </a:ln>
+          <a:effectLst/>
+        </p:spPr>
+        <p:style>
+          <a:lnRef idx="1">
+            <a:schemeClr val="accent1"/>
+          </a:lnRef>
+          <a:fillRef idx="3">
+            <a:schemeClr val="accent1"/>
+          </a:fillRef>
+          <a:effectRef idx="2">
+            <a:schemeClr val="accent1"/>
+          </a:effectRef>
+          <a:fontRef idx="minor">
+            <a:schemeClr val="lt1"/>
+          </a:fontRef>
+        </p:style>
+        <p:txBody>
+          <a:bodyPr rtlCol="0" anchor="ctr"/>
+          <a:lstStyle/>
+          <a:p>
+            <a:pPr algn="ctr"/>
+          </a:p>
+        </p:txBody>
+      </p:sp>
+      <p:sp>
+        <p:nvSpPr>
+          <p:cNvPr id="13" name="TextBox 12"/>
+          <p:cNvSpPr txBox="1"/>
+          <p:nvPr/>
+        </p:nvSpPr>
+        <p:spPr>
+          <a:xfrm>
+            <a:off x="868680" y="3054096"/>
+            <a:ext cx="4114800" cy="566928"/>
+          </a:xfrm>
+          <a:prstGeom prst="rect">
+            <a:avLst/>
+          </a:prstGeom>
+          <a:noFill/>
+        </p:spPr>
+        <p:txBody>
+          <a:bodyPr wrap="square" anchor="ctr" lIns="0" rIns="0" tIns="0" bIns="0">
+            <a:spAutoFit/>
+          </a:bodyPr>
+          <a:lstStyle/>
+          <a:p>
+            <a:pPr algn="l">
+              <a:lnSpc>
+                <a:spcPct val="115000"/>
+              </a:lnSpc>
+            </a:pPr>
+            <a:r>
+              <a:rPr sz="1500" b="1" i="0">
+                <a:solidFill>
+                  <a:srgbClr val="35D0BA"/>
+                </a:solidFill>
+                <a:latin typeface="Calibri"/>
+              </a:rPr>
+              <a:t>2m band</a:t>
+            </a:r>
+          </a:p>
+        </p:txBody>
+      </p:sp>
+      <p:sp>
+        <p:nvSpPr>
+          <p:cNvPr id="14" name="TextBox 13"/>
+          <p:cNvSpPr txBox="1"/>
+          <p:nvPr/>
+        </p:nvSpPr>
+        <p:spPr>
+          <a:xfrm>
+            <a:off x="5212080" y="3054096"/>
+            <a:ext cx="6126480" cy="566928"/>
+          </a:xfrm>
+          <a:prstGeom prst="rect">
+            <a:avLst/>
+          </a:prstGeom>
+          <a:noFill/>
+        </p:spPr>
+        <p:txBody>
+          <a:bodyPr wrap="square" anchor="ctr" lIns="0" rIns="0" tIns="0" bIns="0">
+            <a:spAutoFit/>
+          </a:bodyPr>
+          <a:lstStyle/>
+          <a:p>
+            <a:pPr algn="l">
+              <a:lnSpc>
+                <a:spcPct val="115000"/>
+              </a:lnSpc>
+            </a:pPr>
+            <a:r>
+              <a:rPr sz="1500" b="0" i="0">
+                <a:solidFill>
+                  <a:srgbClr val="D7E3EC"/>
+                </a:solidFill>
+                <a:latin typeface="Calibri"/>
+              </a:rPr>
+              <a:t>144.000 – 148.000 MHz</a:t>
+            </a:r>
+          </a:p>
+        </p:txBody>
+      </p:sp>
+      <p:sp>
+        <p:nvSpPr>
+          <p:cNvPr id="15" name="Rectangle 14"/>
+          <p:cNvSpPr/>
+          <p:nvPr/>
+        </p:nvSpPr>
+        <p:spPr>
+          <a:xfrm>
+            <a:off x="640080" y="3621024"/>
+            <a:ext cx="10881360" cy="566928"/>
+          </a:xfrm>
+          <a:prstGeom prst="rect">
+            <a:avLst/>
+          </a:prstGeom>
+          <a:solidFill>
+            <a:srgbClr val="0A1929"/>
+          </a:solidFill>
+          <a:ln>
+            <a:noFill/>
+          </a:ln>
+          <a:effectLst/>
+        </p:spPr>
+        <p:style>
+          <a:lnRef idx="1">
+            <a:schemeClr val="accent1"/>
+          </a:lnRef>
+          <a:fillRef idx="3">
+            <a:schemeClr val="accent1"/>
+          </a:fillRef>
+          <a:effectRef idx="2">
+            <a:schemeClr val="accent1"/>
+          </a:effectRef>
+          <a:fontRef idx="minor">
+            <a:schemeClr val="lt1"/>
+          </a:fontRef>
+        </p:style>
+        <p:txBody>
+          <a:bodyPr rtlCol="0" anchor="ctr"/>
+          <a:lstStyle/>
+          <a:p>
+            <a:pPr algn="ctr"/>
+          </a:p>
+        </p:txBody>
+      </p:sp>
+      <p:sp>
+        <p:nvSpPr>
+          <p:cNvPr id="16" name="TextBox 15"/>
+          <p:cNvSpPr txBox="1"/>
+          <p:nvPr/>
+        </p:nvSpPr>
+        <p:spPr>
+          <a:xfrm>
+            <a:off x="868680" y="3621024"/>
+            <a:ext cx="4114800" cy="566928"/>
+          </a:xfrm>
+          <a:prstGeom prst="rect">
+            <a:avLst/>
+          </a:prstGeom>
+          <a:noFill/>
+        </p:spPr>
+        <p:txBody>
+          <a:bodyPr wrap="square" anchor="ctr" lIns="0" rIns="0" tIns="0" bIns="0">
+            <a:spAutoFit/>
+          </a:bodyPr>
+          <a:lstStyle/>
+          <a:p>
+            <a:pPr algn="l">
+              <a:lnSpc>
+                <a:spcPct val="115000"/>
+              </a:lnSpc>
+            </a:pPr>
+            <a:r>
+              <a:rPr sz="1500" b="1" i="0">
+                <a:solidFill>
+                  <a:srgbClr val="35D0BA"/>
+                </a:solidFill>
+                <a:latin typeface="Calibri"/>
+              </a:rPr>
+              <a:t>70cm band</a:t>
+            </a:r>
+          </a:p>
+        </p:txBody>
+      </p:sp>
+      <p:sp>
+        <p:nvSpPr>
+          <p:cNvPr id="17" name="TextBox 16"/>
+          <p:cNvSpPr txBox="1"/>
+          <p:nvPr/>
+        </p:nvSpPr>
+        <p:spPr>
+          <a:xfrm>
+            <a:off x="5212080" y="3621024"/>
+            <a:ext cx="6126480" cy="566928"/>
+          </a:xfrm>
+          <a:prstGeom prst="rect">
+            <a:avLst/>
+          </a:prstGeom>
+          <a:noFill/>
+        </p:spPr>
+        <p:txBody>
+          <a:bodyPr wrap="square" anchor="ctr" lIns="0" rIns="0" tIns="0" bIns="0">
+            <a:spAutoFit/>
+          </a:bodyPr>
+          <a:lstStyle/>
+          <a:p>
+            <a:pPr algn="l">
+              <a:lnSpc>
+                <a:spcPct val="115000"/>
+              </a:lnSpc>
+            </a:pPr>
+            <a:r>
+              <a:rPr sz="1500" b="0" i="0">
+                <a:solidFill>
+                  <a:srgbClr val="D7E3EC"/>
+                </a:solidFill>
+                <a:latin typeface="Calibri"/>
+              </a:rPr>
+              <a:t>420.000 – 450.000 MHz</a:t>
+            </a:r>
+          </a:p>
+        </p:txBody>
+      </p:sp>
+      <p:sp>
+        <p:nvSpPr>
+          <p:cNvPr id="18" name="Rectangle 17"/>
+          <p:cNvSpPr/>
+          <p:nvPr/>
+        </p:nvSpPr>
+        <p:spPr>
+          <a:xfrm>
+            <a:off x="640080" y="4187952"/>
+            <a:ext cx="10881360" cy="566928"/>
+          </a:xfrm>
+          <a:prstGeom prst="rect">
+            <a:avLst/>
+          </a:prstGeom>
+          <a:solidFill>
+            <a:srgbClr val="0F2438"/>
+          </a:solidFill>
+          <a:ln>
+            <a:noFill/>
+          </a:ln>
+          <a:effectLst/>
+        </p:spPr>
+        <p:style>
+          <a:lnRef idx="1">
+            <a:schemeClr val="accent1"/>
+          </a:lnRef>
+          <a:fillRef idx="3">
+            <a:schemeClr val="accent1"/>
+          </a:fillRef>
+          <a:effectRef idx="2">
+            <a:schemeClr val="accent1"/>
+          </a:effectRef>
+          <a:fontRef idx="minor">
+            <a:schemeClr val="lt1"/>
+          </a:fontRef>
+        </p:style>
+        <p:txBody>
+          <a:bodyPr rtlCol="0" anchor="ctr"/>
+          <a:lstStyle/>
+          <a:p>
+            <a:pPr algn="ctr"/>
+          </a:p>
+        </p:txBody>
+      </p:sp>
+      <p:sp>
+        <p:nvSpPr>
+          <p:cNvPr id="19" name="TextBox 18"/>
+          <p:cNvSpPr txBox="1"/>
+          <p:nvPr/>
+        </p:nvSpPr>
+        <p:spPr>
+          <a:xfrm>
+            <a:off x="868680" y="4187952"/>
+            <a:ext cx="4114800" cy="566928"/>
+          </a:xfrm>
+          <a:prstGeom prst="rect">
+            <a:avLst/>
+          </a:prstGeom>
+          <a:noFill/>
+        </p:spPr>
+        <p:txBody>
+          <a:bodyPr wrap="square" anchor="ctr" lIns="0" rIns="0" tIns="0" bIns="0">
+            <a:spAutoFit/>
+          </a:bodyPr>
+          <a:lstStyle/>
+          <a:p>
+            <a:pPr algn="l">
+              <a:lnSpc>
+                <a:spcPct val="115000"/>
+              </a:lnSpc>
+            </a:pPr>
+            <a:r>
+              <a:rPr sz="1500" b="1" i="0">
+                <a:solidFill>
+                  <a:srgbClr val="35D0BA"/>
+                </a:solidFill>
+                <a:latin typeface="Calibri"/>
+              </a:rPr>
+              <a:t>2m simplex calling freq</a:t>
+            </a:r>
+          </a:p>
+        </p:txBody>
+      </p:sp>
+      <p:sp>
+        <p:nvSpPr>
+          <p:cNvPr id="20" name="TextBox 19"/>
+          <p:cNvSpPr txBox="1"/>
+          <p:nvPr/>
+        </p:nvSpPr>
+        <p:spPr>
+          <a:xfrm>
+            <a:off x="5212080" y="4187952"/>
+            <a:ext cx="6126480" cy="566928"/>
+          </a:xfrm>
+          <a:prstGeom prst="rect">
+            <a:avLst/>
+          </a:prstGeom>
+          <a:noFill/>
+        </p:spPr>
+        <p:txBody>
+          <a:bodyPr wrap="square" anchor="ctr" lIns="0" rIns="0" tIns="0" bIns="0">
+            <a:spAutoFit/>
+          </a:bodyPr>
+          <a:lstStyle/>
+          <a:p>
+            <a:pPr algn="l">
+              <a:lnSpc>
+                <a:spcPct val="115000"/>
+              </a:lnSpc>
+            </a:pPr>
+            <a:r>
+              <a:rPr sz="1500" b="0" i="0">
+                <a:solidFill>
+                  <a:srgbClr val="D7E3EC"/>
+                </a:solidFill>
+                <a:latin typeface="Calibri"/>
+              </a:rPr>
+              <a:t>146.520 MHz</a:t>
+            </a:r>
+          </a:p>
+        </p:txBody>
+      </p:sp>
+      <p:sp>
+        <p:nvSpPr>
+          <p:cNvPr id="21" name="Rectangle 20"/>
+          <p:cNvSpPr/>
+          <p:nvPr/>
+        </p:nvSpPr>
+        <p:spPr>
+          <a:xfrm>
+            <a:off x="640080" y="4754880"/>
+            <a:ext cx="10881360" cy="566928"/>
+          </a:xfrm>
+          <a:prstGeom prst="rect">
+            <a:avLst/>
+          </a:prstGeom>
+          <a:solidFill>
+            <a:srgbClr val="0A1929"/>
+          </a:solidFill>
+          <a:ln>
+            <a:noFill/>
+          </a:ln>
+          <a:effectLst/>
+        </p:spPr>
+        <p:style>
+          <a:lnRef idx="1">
+            <a:schemeClr val="accent1"/>
+          </a:lnRef>
+          <a:fillRef idx="3">
+            <a:schemeClr val="accent1"/>
+          </a:fillRef>
+          <a:effectRef idx="2">
+            <a:schemeClr val="accent1"/>
+          </a:effectRef>
+          <a:fontRef idx="minor">
+            <a:schemeClr val="lt1"/>
+          </a:fontRef>
+        </p:style>
+        <p:txBody>
+          <a:bodyPr rtlCol="0" anchor="ctr"/>
+          <a:lstStyle/>
+          <a:p>
+            <a:pPr algn="ctr"/>
+          </a:p>
+        </p:txBody>
+      </p:sp>
+      <p:sp>
+        <p:nvSpPr>
+          <p:cNvPr id="22" name="TextBox 21"/>
+          <p:cNvSpPr txBox="1"/>
+          <p:nvPr/>
+        </p:nvSpPr>
+        <p:spPr>
+          <a:xfrm>
+            <a:off x="868680" y="4754880"/>
+            <a:ext cx="4114800" cy="566928"/>
+          </a:xfrm>
+          <a:prstGeom prst="rect">
+            <a:avLst/>
+          </a:prstGeom>
+          <a:noFill/>
+        </p:spPr>
+        <p:txBody>
+          <a:bodyPr wrap="square" anchor="ctr" lIns="0" rIns="0" tIns="0" bIns="0">
+            <a:spAutoFit/>
+          </a:bodyPr>
+          <a:lstStyle/>
+          <a:p>
+            <a:pPr algn="l">
+              <a:lnSpc>
+                <a:spcPct val="115000"/>
+              </a:lnSpc>
+            </a:pPr>
+            <a:r>
+              <a:rPr sz="1500" b="1" i="0">
+                <a:solidFill>
+                  <a:srgbClr val="35D0BA"/>
+                </a:solidFill>
+                <a:latin typeface="Calibri"/>
+              </a:rPr>
+              <a:t>Demo 3 capture</a:t>
+            </a:r>
+          </a:p>
+        </p:txBody>
+      </p:sp>
+      <p:sp>
+        <p:nvSpPr>
+          <p:cNvPr id="23" name="TextBox 22"/>
+          <p:cNvSpPr txBox="1"/>
+          <p:nvPr/>
+        </p:nvSpPr>
+        <p:spPr>
+          <a:xfrm>
+            <a:off x="5212080" y="4754880"/>
+            <a:ext cx="6126480" cy="566928"/>
+          </a:xfrm>
+          <a:prstGeom prst="rect">
+            <a:avLst/>
+          </a:prstGeom>
+          <a:noFill/>
+        </p:spPr>
+        <p:txBody>
+          <a:bodyPr wrap="square" anchor="ctr" lIns="0" rIns="0" tIns="0" bIns="0">
+            <a:spAutoFit/>
+          </a:bodyPr>
+          <a:lstStyle/>
+          <a:p>
+            <a:pPr algn="l">
+              <a:lnSpc>
+                <a:spcPct val="115000"/>
+              </a:lnSpc>
+            </a:pPr>
+            <a:r>
+              <a:rPr sz="1500" b="0" i="0">
+                <a:solidFill>
+                  <a:srgbClr val="D7E3EC"/>
+                </a:solidFill>
+                <a:latin typeface="Calibri"/>
+              </a:rPr>
+              <a:t>146.0 MHz center @ 6 Msps ≈ 2.9 GB/min</a:t>
+            </a:r>
+          </a:p>
+        </p:txBody>
+      </p:sp>
+      <p:sp>
+        <p:nvSpPr>
+          <p:cNvPr id="24" name="Rectangle 23"/>
+          <p:cNvSpPr/>
+          <p:nvPr/>
+        </p:nvSpPr>
+        <p:spPr>
+          <a:xfrm>
+            <a:off x="640080" y="5321808"/>
+            <a:ext cx="10881360" cy="566928"/>
+          </a:xfrm>
+          <a:prstGeom prst="rect">
+            <a:avLst/>
+          </a:prstGeom>
+          <a:solidFill>
+            <a:srgbClr val="0F2438"/>
+          </a:solidFill>
+          <a:ln>
+            <a:noFill/>
+          </a:ln>
+          <a:effectLst/>
+        </p:spPr>
+        <p:style>
+          <a:lnRef idx="1">
+            <a:schemeClr val="accent1"/>
+          </a:lnRef>
+          <a:fillRef idx="3">
+            <a:schemeClr val="accent1"/>
+          </a:fillRef>
+          <a:effectRef idx="2">
+            <a:schemeClr val="accent1"/>
+          </a:effectRef>
+          <a:fontRef idx="minor">
+            <a:schemeClr val="lt1"/>
+          </a:fontRef>
+        </p:style>
+        <p:txBody>
+          <a:bodyPr rtlCol="0" anchor="ctr"/>
+          <a:lstStyle/>
+          <a:p>
+            <a:pPr algn="ctr"/>
+          </a:p>
+        </p:txBody>
+      </p:sp>
+      <p:sp>
+        <p:nvSpPr>
+          <p:cNvPr id="25" name="TextBox 24"/>
+          <p:cNvSpPr txBox="1"/>
+          <p:nvPr/>
+        </p:nvSpPr>
+        <p:spPr>
+          <a:xfrm>
+            <a:off x="868680" y="5321808"/>
+            <a:ext cx="4114800" cy="566928"/>
+          </a:xfrm>
+          <a:prstGeom prst="rect">
+            <a:avLst/>
+          </a:prstGeom>
+          <a:noFill/>
+        </p:spPr>
+        <p:txBody>
+          <a:bodyPr wrap="square" anchor="ctr" lIns="0" rIns="0" tIns="0" bIns="0">
+            <a:spAutoFit/>
+          </a:bodyPr>
+          <a:lstStyle/>
+          <a:p>
+            <a:pPr algn="l">
+              <a:lnSpc>
+                <a:spcPct val="115000"/>
+              </a:lnSpc>
+            </a:pPr>
+            <a:r>
+              <a:rPr sz="1500" b="1" i="0">
+                <a:solidFill>
+                  <a:srgbClr val="35D0BA"/>
+                </a:solidFill>
+                <a:latin typeface="Calibri"/>
+              </a:rPr>
+              <a:t>HackRF TX power (typical)</a:t>
+            </a:r>
+          </a:p>
+        </p:txBody>
+      </p:sp>
+      <p:sp>
+        <p:nvSpPr>
+          <p:cNvPr id="26" name="TextBox 25"/>
+          <p:cNvSpPr txBox="1"/>
+          <p:nvPr/>
+        </p:nvSpPr>
+        <p:spPr>
+          <a:xfrm>
+            <a:off x="5212080" y="5321808"/>
+            <a:ext cx="6126480" cy="566928"/>
+          </a:xfrm>
+          <a:prstGeom prst="rect">
+            <a:avLst/>
+          </a:prstGeom>
+          <a:noFill/>
+        </p:spPr>
+        <p:txBody>
+          <a:bodyPr wrap="square" anchor="ctr" lIns="0" rIns="0" tIns="0" bIns="0">
+            <a:spAutoFit/>
+          </a:bodyPr>
+          <a:lstStyle/>
+          <a:p>
+            <a:pPr algn="l">
+              <a:lnSpc>
+                <a:spcPct val="115000"/>
+              </a:lnSpc>
+            </a:pPr>
+            <a:r>
+              <a:rPr sz="1500" b="0" i="0">
+                <a:solidFill>
+                  <a:srgbClr val="D7E3EC"/>
+                </a:solidFill>
+                <a:latin typeface="Calibri"/>
+              </a:rPr>
+              <a:t>≈ 10–15 dBm max, kept low for these demos</a:t>
+            </a:r>
+          </a:p>
+        </p:txBody>
+      </p:sp>
+      <p:sp>
+        <p:nvSpPr>
+          <p:cNvPr id="27" name="TextBox 26"/>
+          <p:cNvSpPr txBox="1"/>
+          <p:nvPr/>
+        </p:nvSpPr>
+        <p:spPr>
+          <a:xfrm>
+            <a:off x="640080" y="6473952"/>
+            <a:ext cx="7315200" cy="274320"/>
           </a:xfrm>
           <a:prstGeom prst="rect">
             <a:avLst/>
@@ -7986,13 +8496,52 @@
               </a:lnSpc>
             </a:pPr>
             <a:r>
-              <a:rPr sz="1400" b="0" i="0">
+              <a:rPr sz="1000" b="0" i="0">
                 <a:solidFill>
                   <a:srgbClr val="8EA7BA"/>
                 </a:solidFill>
                 <a:latin typeface="Calibri"/>
               </a:rPr>
-              <a:t>Mark Grennan  •  W5TSU  •  mark@grennan.com</a:t>
+              <a:t>SDR Demo -- GNU Radio + HackRF + Ham Handheld</a:t>
+            </a:r>
+          </a:p>
+        </p:txBody>
+      </p:sp>
+      <p:sp>
+        <p:nvSpPr>
+          <p:cNvPr id="28" name="TextBox 27"/>
+          <p:cNvSpPr txBox="1"/>
+          <p:nvPr/>
+        </p:nvSpPr>
+        <p:spPr>
+          <a:xfrm>
+            <a:off x="11292840" y="6473952"/>
+            <a:ext cx="731520" cy="274320"/>
+          </a:xfrm>
+          <a:prstGeom prst="rect">
+            <a:avLst/>
+          </a:prstGeom>
+          <a:noFill/>
+        </p:spPr>
+        <p:txBody>
+          <a:bodyPr wrap="square" anchor="t" lIns="0" rIns="0" tIns="0" bIns="0">
+            <a:spAutoFit/>
+          </a:bodyPr>
+          <a:lstStyle/>
+          <a:p>
+            <a:pPr algn="r">
+              <a:lnSpc>
+                <a:spcPct val="115000"/>
+              </a:lnSpc>
+            </a:pPr>
+            <a:r>
+              <a:rPr sz="1000" b="0" i="0">
+                <a:solidFill>
+                  <a:srgbClr val="8EA7BA"/>
+                </a:solidFill>
+                <a:latin typeface="Calibri"/>
+              </a:rPr>
+              <a:t>18 / 21</a:t>
             </a:r>
           </a:p>
         </p:txBody>
@@ -9191,7 +9740,690 @@
                 </a:solidFill>
                 <a:latin typeface="Calibri"/>
               </a:rPr>
-              <a:t>1 / 19</a:t>
+              <a:t>1 / 21</a:t>
+            </a:r>
+          </a:p>
+        </p:txBody>
+      </p:sp>
+    </p:spTree>
+  </p:cSld>
+  <p:clrMapOvr>
+    <a:masterClrMapping/>
+  </p:clrMapOvr>
+</p:sld>
+</file>
+
+<file path=ppt/slides/slide20.xml><?xml version="1.0" encoding="utf-8"?>
+<p:sld xmlns:a="http://schemas.openxmlformats.org/drawingml/2006/main" xmlns:p="http://schemas.openxmlformats.org/presentationml/2006/main" xmlns:r="http://schemas.openxmlformats.org/officeDocument/2006/relationships">
+  <p:cSld>
+    <p:spTree>
+      <p:nvGrpSpPr>
+        <p:cNvPr id="1" name=""/>
+        <p:cNvGrpSpPr/>
+        <p:nvPr/>
+      </p:nvGrpSpPr>
+      <p:grpSpPr/>
+      <p:sp>
+        <p:nvSpPr>
+          <p:cNvPr id="2" name="Rectangle 1"/>
+          <p:cNvSpPr/>
+          <p:nvPr/>
+        </p:nvSpPr>
+        <p:spPr>
+          <a:xfrm>
+            <a:off x="0" y="0"/>
+            <a:ext cx="12191695" cy="6858000"/>
+          </a:xfrm>
+          <a:prstGeom prst="rect">
+            <a:avLst/>
+          </a:prstGeom>
+          <a:solidFill>
+            <a:srgbClr val="0A1929"/>
+          </a:solidFill>
+          <a:ln>
+            <a:noFill/>
+          </a:ln>
+          <a:effectLst/>
+        </p:spPr>
+        <p:style>
+          <a:lnRef idx="1">
+            <a:schemeClr val="accent1"/>
+          </a:lnRef>
+          <a:fillRef idx="3">
+            <a:schemeClr val="accent1"/>
+          </a:fillRef>
+          <a:effectRef idx="2">
+            <a:schemeClr val="accent1"/>
+          </a:effectRef>
+          <a:fontRef idx="minor">
+            <a:schemeClr val="lt1"/>
+          </a:fontRef>
+        </p:style>
+        <p:txBody>
+          <a:bodyPr rtlCol="0" anchor="ctr"/>
+          <a:lstStyle/>
+          <a:p>
+            <a:pPr algn="ctr"/>
+          </a:p>
+        </p:txBody>
+      </p:sp>
+      <p:sp>
+        <p:nvSpPr>
+          <p:cNvPr id="3" name="TextBox 2"/>
+          <p:cNvSpPr txBox="1"/>
+          <p:nvPr/>
+        </p:nvSpPr>
+        <p:spPr>
+          <a:xfrm>
+            <a:off x="640080" y="457200"/>
+            <a:ext cx="10881360" cy="365760"/>
+          </a:xfrm>
+          <a:prstGeom prst="rect">
+            <a:avLst/>
+          </a:prstGeom>
+          <a:noFill/>
+        </p:spPr>
+        <p:txBody>
+          <a:bodyPr wrap="square" anchor="t" lIns="0" rIns="0" tIns="0" bIns="0">
+            <a:spAutoFit/>
+          </a:bodyPr>
+          <a:lstStyle/>
+          <a:p>
+            <a:pPr algn="l">
+              <a:lnSpc>
+                <a:spcPct val="115000"/>
+              </a:lnSpc>
+            </a:pPr>
+            <a:r>
+              <a:rPr sz="1400" b="1" i="0">
+                <a:solidFill>
+                  <a:srgbClr val="35D0BA"/>
+                </a:solidFill>
+                <a:latin typeface="Calibri"/>
+              </a:rPr>
+              <a:t>RESOURCES</a:t>
+            </a:r>
+          </a:p>
+        </p:txBody>
+      </p:sp>
+      <p:sp>
+        <p:nvSpPr>
+          <p:cNvPr id="4" name="TextBox 3"/>
+          <p:cNvSpPr txBox="1"/>
+          <p:nvPr/>
+        </p:nvSpPr>
+        <p:spPr>
+          <a:xfrm>
+            <a:off x="640080" y="786384"/>
+            <a:ext cx="10881360" cy="822960"/>
+          </a:xfrm>
+          <a:prstGeom prst="rect">
+            <a:avLst/>
+          </a:prstGeom>
+          <a:noFill/>
+        </p:spPr>
+        <p:txBody>
+          <a:bodyPr wrap="square" anchor="t" lIns="0" rIns="0" tIns="0" bIns="0">
+            <a:spAutoFit/>
+          </a:bodyPr>
+          <a:lstStyle/>
+          <a:p>
+            <a:pPr algn="l">
+              <a:lnSpc>
+                <a:spcPct val="115000"/>
+              </a:lnSpc>
+            </a:pPr>
+            <a:r>
+              <a:rPr sz="3200" b="1" i="0">
+                <a:solidFill>
+                  <a:srgbClr val="FFFFFF"/>
+                </a:solidFill>
+                <a:latin typeface="Calibri"/>
+              </a:rPr>
+              <a:t>Go Build Something</a:t>
+            </a:r>
+          </a:p>
+        </p:txBody>
+      </p:sp>
+      <p:sp>
+        <p:nvSpPr>
+          <p:cNvPr id="5" name="Rectangle 4"/>
+          <p:cNvSpPr/>
+          <p:nvPr/>
+        </p:nvSpPr>
+        <p:spPr>
+          <a:xfrm>
+            <a:off x="640080" y="1481328"/>
+            <a:ext cx="1005840" cy="50800"/>
+          </a:xfrm>
+          <a:prstGeom prst="rect">
+            <a:avLst/>
+          </a:prstGeom>
+          <a:solidFill>
+            <a:srgbClr val="35D0BA"/>
+          </a:solidFill>
+          <a:ln>
+            <a:noFill/>
+          </a:ln>
+          <a:effectLst/>
+        </p:spPr>
+        <p:style>
+          <a:lnRef idx="1">
+            <a:schemeClr val="accent1"/>
+          </a:lnRef>
+          <a:fillRef idx="3">
+            <a:schemeClr val="accent1"/>
+          </a:fillRef>
+          <a:effectRef idx="2">
+            <a:schemeClr val="accent1"/>
+          </a:effectRef>
+          <a:fontRef idx="minor">
+            <a:schemeClr val="lt1"/>
+          </a:fontRef>
+        </p:style>
+        <p:txBody>
+          <a:bodyPr rtlCol="0" anchor="ctr"/>
+          <a:lstStyle/>
+          <a:p>
+            <a:pPr algn="ctr"/>
+          </a:p>
+        </p:txBody>
+      </p:sp>
+      <p:sp>
+        <p:nvSpPr>
+          <p:cNvPr id="6" name="TextBox 5"/>
+          <p:cNvSpPr txBox="1"/>
+          <p:nvPr/>
+        </p:nvSpPr>
+        <p:spPr>
+          <a:xfrm>
+            <a:off x="640080" y="1920240"/>
+            <a:ext cx="10698480" cy="4114800"/>
+          </a:xfrm>
+          <a:prstGeom prst="rect">
+            <a:avLst/>
+          </a:prstGeom>
+          <a:noFill/>
+        </p:spPr>
+        <p:txBody>
+          <a:bodyPr wrap="square">
+            <a:spAutoFit/>
+          </a:bodyPr>
+          <a:lstStyle/>
+          <a:p>
+            <a:pPr>
+              <a:lnSpc>
+                <a:spcPct val="112000"/>
+              </a:lnSpc>
+              <a:spcAft>
+                <a:spcPts val="1800"/>
+              </a:spcAft>
+            </a:pPr>
+            <a:r>
+              <a:rPr sz="1900">
+                <a:solidFill>
+                  <a:srgbClr val="D7E3EC"/>
+                </a:solidFill>
+                <a:latin typeface="Calibri"/>
+              </a:rPr>
+              <a:t>•  GNU Radio</a:t>
+            </a:r>
+          </a:p>
+          <a:p>
+            <a:pPr lvl="1">
+              <a:spcAft>
+                <a:spcPts val="600"/>
+              </a:spcAft>
+            </a:pPr>
+            <a:r>
+              <a:rPr sz="1600">
+                <a:solidFill>
+                  <a:srgbClr val="8EA7BA"/>
+                </a:solidFill>
+                <a:latin typeface="Calibri"/>
+              </a:rPr>
+              <a:t>–  gnuradio.org — the toolkit, docs, and tutorials</a:t>
+            </a:r>
+          </a:p>
+          <a:p>
+            <a:pPr>
+              <a:lnSpc>
+                <a:spcPct val="112000"/>
+              </a:lnSpc>
+              <a:spcAft>
+                <a:spcPts val="1800"/>
+              </a:spcAft>
+            </a:pPr>
+            <a:r>
+              <a:rPr sz="1900">
+                <a:solidFill>
+                  <a:srgbClr val="D7E3EC"/>
+                </a:solidFill>
+                <a:latin typeface="Calibri"/>
+              </a:rPr>
+              <a:t>•  HackRF One</a:t>
+            </a:r>
+          </a:p>
+          <a:p>
+            <a:pPr lvl="1">
+              <a:spcAft>
+                <a:spcPts val="600"/>
+              </a:spcAft>
+            </a:pPr>
+            <a:r>
+              <a:rPr sz="1600">
+                <a:solidFill>
+                  <a:srgbClr val="8EA7BA"/>
+                </a:solidFill>
+                <a:latin typeface="Calibri"/>
+              </a:rPr>
+              <a:t>–  greatscottgadgets.com/hackrf — hardware + firmware</a:t>
+            </a:r>
+          </a:p>
+          <a:p>
+            <a:pPr>
+              <a:lnSpc>
+                <a:spcPct val="112000"/>
+              </a:lnSpc>
+              <a:spcAft>
+                <a:spcPts val="1800"/>
+              </a:spcAft>
+            </a:pPr>
+            <a:r>
+              <a:rPr sz="1900">
+                <a:solidFill>
+                  <a:srgbClr val="D7E3EC"/>
+                </a:solidFill>
+                <a:latin typeface="Calibri"/>
+              </a:rPr>
+              <a:t>•  SoapySDR</a:t>
+            </a:r>
+          </a:p>
+          <a:p>
+            <a:pPr lvl="1">
+              <a:spcAft>
+                <a:spcPts val="600"/>
+              </a:spcAft>
+            </a:pPr>
+            <a:r>
+              <a:rPr sz="1600">
+                <a:solidFill>
+                  <a:srgbClr val="8EA7BA"/>
+                </a:solidFill>
+                <a:latin typeface="Calibri"/>
+              </a:rPr>
+              <a:t>–  github.com/pothosware/SoapySDR — the hardware abstraction layer used today</a:t>
+            </a:r>
+          </a:p>
+          <a:p>
+            <a:pPr>
+              <a:lnSpc>
+                <a:spcPct val="112000"/>
+              </a:lnSpc>
+              <a:spcAft>
+                <a:spcPts val="1800"/>
+              </a:spcAft>
+            </a:pPr>
+            <a:r>
+              <a:rPr sz="1900">
+                <a:solidFill>
+                  <a:srgbClr val="D7E3EC"/>
+                </a:solidFill>
+                <a:latin typeface="Calibri"/>
+              </a:rPr>
+              <a:t>•  ARRL</a:t>
+            </a:r>
+          </a:p>
+          <a:p>
+            <a:pPr lvl="1">
+              <a:spcAft>
+                <a:spcPts val="600"/>
+              </a:spcAft>
+            </a:pPr>
+            <a:r>
+              <a:rPr sz="1600">
+                <a:solidFill>
+                  <a:srgbClr val="8EA7BA"/>
+                </a:solidFill>
+                <a:latin typeface="Calibri"/>
+              </a:rPr>
+              <a:t>–  arrl.org — licensing info and Part 97 reference</a:t>
+            </a:r>
+          </a:p>
+          <a:p>
+            <a:pPr>
+              <a:lnSpc>
+                <a:spcPct val="112000"/>
+              </a:lnSpc>
+              <a:spcAft>
+                <a:spcPts val="1800"/>
+              </a:spcAft>
+            </a:pPr>
+            <a:r>
+              <a:rPr sz="1900">
+                <a:solidFill>
+                  <a:srgbClr val="D7E3EC"/>
+                </a:solidFill>
+                <a:latin typeface="Calibri"/>
+              </a:rPr>
+              <a:t>•  This kit</a:t>
+            </a:r>
+          </a:p>
+          <a:p>
+            <a:pPr lvl="1">
+              <a:spcAft>
+                <a:spcPts val="600"/>
+              </a:spcAft>
+            </a:pPr>
+            <a:r>
+              <a:rPr sz="1600">
+                <a:solidFill>
+                  <a:srgbClr val="8EA7BA"/>
+                </a:solidFill>
+                <a:latin typeface="Calibri"/>
+              </a:rPr>
+              <a:t>–  All flowgraphs, README, and brainstorm doc are in this repo’s flowgraphs/ and top-level README.md / BRAINSTORM.md</a:t>
+            </a:r>
+          </a:p>
+        </p:txBody>
+      </p:sp>
+      <p:sp>
+        <p:nvSpPr>
+          <p:cNvPr id="7" name="TextBox 6"/>
+          <p:cNvSpPr txBox="1"/>
+          <p:nvPr/>
+        </p:nvSpPr>
+        <p:spPr>
+          <a:xfrm>
+            <a:off x="640080" y="6473952"/>
+            <a:ext cx="7315200" cy="274320"/>
+          </a:xfrm>
+          <a:prstGeom prst="rect">
+            <a:avLst/>
+          </a:prstGeom>
+          <a:noFill/>
+        </p:spPr>
+        <p:txBody>
+          <a:bodyPr wrap="square" anchor="t" lIns="0" rIns="0" tIns="0" bIns="0">
+            <a:spAutoFit/>
+          </a:bodyPr>
+          <a:lstStyle/>
+          <a:p>
+            <a:pPr algn="l">
+              <a:lnSpc>
+                <a:spcPct val="115000"/>
+              </a:lnSpc>
+            </a:pPr>
+            <a:r>
+              <a:rPr sz="1000" b="0" i="0">
+                <a:solidFill>
+                  <a:srgbClr val="8EA7BA"/>
+                </a:solidFill>
+                <a:latin typeface="Calibri"/>
+              </a:rPr>
+              <a:t>SDR Demo -- GNU Radio + HackRF + Ham Handheld</a:t>
+            </a:r>
+          </a:p>
+        </p:txBody>
+      </p:sp>
+      <p:sp>
+        <p:nvSpPr>
+          <p:cNvPr id="8" name="TextBox 7"/>
+          <p:cNvSpPr txBox="1"/>
+          <p:nvPr/>
+        </p:nvSpPr>
+        <p:spPr>
+          <a:xfrm>
+            <a:off x="11292840" y="6473952"/>
+            <a:ext cx="731520" cy="274320"/>
+          </a:xfrm>
+          <a:prstGeom prst="rect">
+            <a:avLst/>
+          </a:prstGeom>
+          <a:noFill/>
+        </p:spPr>
+        <p:txBody>
+          <a:bodyPr wrap="square" anchor="t" lIns="0" rIns="0" tIns="0" bIns="0">
+            <a:spAutoFit/>
+          </a:bodyPr>
+          <a:lstStyle/>
+          <a:p>
+            <a:pPr algn="r">
+              <a:lnSpc>
+                <a:spcPct val="115000"/>
+              </a:lnSpc>
+            </a:pPr>
+            <a:r>
+              <a:rPr sz="1000" b="0" i="0">
+                <a:solidFill>
+                  <a:srgbClr val="8EA7BA"/>
+                </a:solidFill>
+                <a:latin typeface="Calibri"/>
+              </a:rPr>
+              <a:t>19 / 21</a:t>
+            </a:r>
+          </a:p>
+        </p:txBody>
+      </p:sp>
+    </p:spTree>
+  </p:cSld>
+  <p:clrMapOvr>
+    <a:masterClrMapping/>
+  </p:clrMapOvr>
+</p:sld>
+</file>
+
+<file path=ppt/slides/slide21.xml><?xml version="1.0" encoding="utf-8"?>
+<p:sld xmlns:a="http://schemas.openxmlformats.org/drawingml/2006/main" xmlns:p="http://schemas.openxmlformats.org/presentationml/2006/main" xmlns:r="http://schemas.openxmlformats.org/officeDocument/2006/relationships">
+  <p:cSld>
+    <p:spTree>
+      <p:nvGrpSpPr>
+        <p:cNvPr id="1" name=""/>
+        <p:cNvGrpSpPr/>
+        <p:nvPr/>
+      </p:nvGrpSpPr>
+      <p:grpSpPr/>
+      <p:sp>
+        <p:nvSpPr>
+          <p:cNvPr id="2" name="Rectangle 1"/>
+          <p:cNvSpPr/>
+          <p:nvPr/>
+        </p:nvSpPr>
+        <p:spPr>
+          <a:xfrm>
+            <a:off x="0" y="0"/>
+            <a:ext cx="12191695" cy="6858000"/>
+          </a:xfrm>
+          <a:prstGeom prst="rect">
+            <a:avLst/>
+          </a:prstGeom>
+          <a:solidFill>
+            <a:srgbClr val="0A1929"/>
+          </a:solidFill>
+          <a:ln>
+            <a:noFill/>
+          </a:ln>
+          <a:effectLst/>
+        </p:spPr>
+        <p:style>
+          <a:lnRef idx="1">
+            <a:schemeClr val="accent1"/>
+          </a:lnRef>
+          <a:fillRef idx="3">
+            <a:schemeClr val="accent1"/>
+          </a:fillRef>
+          <a:effectRef idx="2">
+            <a:schemeClr val="accent1"/>
+          </a:effectRef>
+          <a:fontRef idx="minor">
+            <a:schemeClr val="lt1"/>
+          </a:fontRef>
+        </p:style>
+        <p:txBody>
+          <a:bodyPr rtlCol="0" anchor="ctr"/>
+          <a:lstStyle/>
+          <a:p>
+            <a:pPr algn="ctr"/>
+          </a:p>
+        </p:txBody>
+      </p:sp>
+      <p:sp>
+        <p:nvSpPr>
+          <p:cNvPr id="3" name="TextBox 2"/>
+          <p:cNvSpPr txBox="1"/>
+          <p:nvPr/>
+        </p:nvSpPr>
+        <p:spPr>
+          <a:xfrm>
+            <a:off x="822960" y="2651760"/>
+            <a:ext cx="10515600" cy="1097280"/>
+          </a:xfrm>
+          <a:prstGeom prst="rect">
+            <a:avLst/>
+          </a:prstGeom>
+          <a:noFill/>
+        </p:spPr>
+        <p:txBody>
+          <a:bodyPr wrap="square" anchor="t" lIns="0" rIns="0" tIns="0" bIns="0">
+            <a:spAutoFit/>
+          </a:bodyPr>
+          <a:lstStyle/>
+          <a:p>
+            <a:pPr algn="l">
+              <a:lnSpc>
+                <a:spcPct val="115000"/>
+              </a:lnSpc>
+            </a:pPr>
+            <a:r>
+              <a:rPr sz="4800" b="1" i="0">
+                <a:solidFill>
+                  <a:srgbClr val="FFFFFF"/>
+                </a:solidFill>
+                <a:latin typeface="Calibri"/>
+              </a:rPr>
+              <a:t>Thank You</a:t>
+            </a:r>
+          </a:p>
+        </p:txBody>
+      </p:sp>
+      <p:sp>
+        <p:nvSpPr>
+          <p:cNvPr id="4" name="TextBox 3"/>
+          <p:cNvSpPr txBox="1"/>
+          <p:nvPr/>
+        </p:nvSpPr>
+        <p:spPr>
+          <a:xfrm>
+            <a:off x="822960" y="3657600"/>
+            <a:ext cx="10058400" cy="548640"/>
+          </a:xfrm>
+          <a:prstGeom prst="rect">
+            <a:avLst/>
+          </a:prstGeom>
+          <a:noFill/>
+        </p:spPr>
+        <p:txBody>
+          <a:bodyPr wrap="square" anchor="t" lIns="0" rIns="0" tIns="0" bIns="0">
+            <a:spAutoFit/>
+          </a:bodyPr>
+          <a:lstStyle/>
+          <a:p>
+            <a:pPr algn="l">
+              <a:lnSpc>
+                <a:spcPct val="115000"/>
+              </a:lnSpc>
+            </a:pPr>
+            <a:r>
+              <a:rPr sz="2000" b="0" i="0">
+                <a:solidFill>
+                  <a:srgbClr val="D7E3EC"/>
+                </a:solidFill>
+                <a:latin typeface="Calibri"/>
+              </a:rPr>
+              <a:t>Questions? Let's get on the air.</a:t>
+            </a:r>
+          </a:p>
+        </p:txBody>
+      </p:sp>
+      <p:sp>
+        <p:nvSpPr>
+          <p:cNvPr id="5" name="Rectangle 4"/>
+          <p:cNvSpPr/>
+          <p:nvPr/>
+        </p:nvSpPr>
+        <p:spPr>
+          <a:xfrm>
+            <a:off x="841248" y="4206240"/>
+            <a:ext cx="1280160" cy="50800"/>
+          </a:xfrm>
+          <a:prstGeom prst="rect">
+            <a:avLst/>
+          </a:prstGeom>
+          <a:solidFill>
+            <a:srgbClr val="35D0BA"/>
+          </a:solidFill>
+          <a:ln>
+            <a:noFill/>
+          </a:ln>
+          <a:effectLst/>
+        </p:spPr>
+        <p:style>
+          <a:lnRef idx="1">
+            <a:schemeClr val="accent1"/>
+          </a:lnRef>
+          <a:fillRef idx="3">
+            <a:schemeClr val="accent1"/>
+          </a:fillRef>
+          <a:effectRef idx="2">
+            <a:schemeClr val="accent1"/>
+          </a:effectRef>
+          <a:fontRef idx="minor">
+            <a:schemeClr val="lt1"/>
+          </a:fontRef>
+        </p:style>
+        <p:txBody>
+          <a:bodyPr rtlCol="0" anchor="ctr"/>
+          <a:lstStyle/>
+          <a:p>
+            <a:pPr algn="ctr"/>
+          </a:p>
+        </p:txBody>
+      </p:sp>
+      <p:sp>
+        <p:nvSpPr>
+          <p:cNvPr id="6" name="TextBox 5"/>
+          <p:cNvSpPr txBox="1"/>
+          <p:nvPr/>
+        </p:nvSpPr>
+        <p:spPr>
+          <a:xfrm>
+            <a:off x="822960" y="6035040"/>
+            <a:ext cx="7315200" cy="365760"/>
+          </a:xfrm>
+          <a:prstGeom prst="rect">
+            <a:avLst/>
+          </a:prstGeom>
+          <a:noFill/>
+        </p:spPr>
+        <p:txBody>
+          <a:bodyPr wrap="square" anchor="t" lIns="0" rIns="0" tIns="0" bIns="0">
+            <a:spAutoFit/>
+          </a:bodyPr>
+          <a:lstStyle/>
+          <a:p>
+            <a:pPr algn="l">
+              <a:lnSpc>
+                <a:spcPct val="115000"/>
+              </a:lnSpc>
+            </a:pPr>
+            <a:r>
+              <a:rPr sz="1400" b="0" i="0">
+                <a:solidFill>
+                  <a:srgbClr val="8EA7BA"/>
+                </a:solidFill>
+                <a:latin typeface="Calibri"/>
+              </a:rPr>
+              <a:t>Mark Grennan  •  W5TSU  •  mark@grennan.com</a:t>
             </a:r>
           </a:p>
         </p:txBody>
@@ -9864,7 +11096,7 @@
                 </a:solidFill>
                 <a:latin typeface="Calibri"/>
               </a:rPr>
-              <a:t>2 / 19</a:t>
+              <a:t>2 / 21</a:t>
             </a:r>
           </a:p>
         </p:txBody>
@@ -10564,7 +11796,7 @@
                 </a:solidFill>
                 <a:latin typeface="Calibri"/>
               </a:rPr>
-              <a:t>3 / 19</a:t>
+              <a:t>3 / 21</a:t>
             </a:r>
           </a:p>
         </p:txBody>
@@ -11217,7 +12449,7 @@
                 </a:solidFill>
                 <a:latin typeface="Calibri"/>
               </a:rPr>
-              <a:t>4 / 19</a:t>
+              <a:t>4 / 21</a:t>
             </a:r>
           </a:p>
         </p:txBody>
@@ -12116,11 +13348,35 @@
                 </a:solidFill>
                 <a:latin typeface="Calibri"/>
               </a:rPr>
-              <a:t>5 / 19</a:t>
-            </a:r>
-          </a:p>
-        </p:txBody>
-      </p:sp>
+              <a:t>5 / 21</a:t>
+            </a:r>
+          </a:p>
+        </p:txBody>
+      </p:sp>
+      <p:pic>
+        <p:nvPicPr>
+          <p:cNvPr id="20" name="Picture 19" descr="gnuradio_logo.png"/>
+          <p:cNvPicPr>
+            <a:picLocks noChangeAspect="1"/>
+          </p:cNvPicPr>
+          <p:nvPr/>
+        </p:nvPicPr>
+        <p:blipFill>
+          <a:blip r:embed="rId2"/>
+          <a:stretch>
+            <a:fillRect/>
+          </a:stretch>
+        </p:blipFill>
+        <p:spPr>
+          <a:xfrm>
+            <a:off x="7781544" y="219456"/>
+            <a:ext cx="3346704" cy="1673352"/>
+          </a:xfrm>
+          <a:prstGeom prst="rect">
+            <a:avLst/>
+          </a:prstGeom>
+        </p:spPr>
+      </p:pic>
     </p:spTree>
   </p:cSld>
   <p:clrMapOvr>
@@ -12821,11 +14077,35 @@
                 </a:solidFill>
                 <a:latin typeface="Calibri"/>
               </a:rPr>
-              <a:t>6 / 19</a:t>
-            </a:r>
-          </a:p>
-        </p:txBody>
-      </p:sp>
+              <a:t>6 / 21</a:t>
+            </a:r>
+          </a:p>
+        </p:txBody>
+      </p:sp>
+      <p:pic>
+        <p:nvPicPr>
+          <p:cNvPr id="16" name="Picture 15" descr="grc_flowgraph_screenshot.jpg"/>
+          <p:cNvPicPr>
+            <a:picLocks noChangeAspect="1"/>
+          </p:cNvPicPr>
+          <p:nvPr/>
+        </p:nvPicPr>
+        <p:blipFill>
+          <a:blip r:embed="rId2"/>
+          <a:stretch>
+            <a:fillRect/>
+          </a:stretch>
+        </p:blipFill>
+        <p:spPr>
+          <a:xfrm>
+            <a:off x="6345936" y="173736"/>
+            <a:ext cx="4754880" cy="1499616"/>
+          </a:xfrm>
+          <a:prstGeom prst="rect">
+            <a:avLst/>
+          </a:prstGeom>
+        </p:spPr>
+      </p:pic>
     </p:spTree>
   </p:cSld>
   <p:clrMapOvr>
@@ -13199,7 +14479,7 @@
                 </a:solidFill>
                 <a:latin typeface="Calibri"/>
               </a:rPr>
-              <a:t>7 / 19</a:t>
+              <a:t>7 / 21</a:t>
             </a:r>
           </a:p>
         </p:txBody>
@@ -13596,7 +14876,7 @@
                 </a:solidFill>
                 <a:latin typeface="Calibri"/>
               </a:rPr>
-              <a:t>8 / 19</a:t>
+              <a:t>8 / 21</a:t>
             </a:r>
           </a:p>
         </p:txBody>

--- a/slides/SDR_Demo.pptx
+++ b/slides/SDR_Demo.pptx
@@ -5397,7 +5397,7 @@
                 </a:solidFill>
                 <a:latin typeface="Calibri"/>
               </a:rPr>
-              <a:t>GNU Radio: What It Is, How It's Used</a:t>
+              <a:t>GNU Radio: What It Actually Is</a:t>
             </a:r>
           </a:p>
         </p:txBody>
@@ -5448,49 +5448,100 @@
       </p:sp>
       <p:sp>
         <p:nvSpPr>
-          <p:cNvPr id="6" name="Rounded Rectangle 5"/>
-          <p:cNvSpPr/>
+          <p:cNvPr id="6" name="TextBox 5"/>
+          <p:cNvSpPr txBox="1"/>
           <p:nvPr/>
         </p:nvSpPr>
         <p:spPr>
           <a:xfrm>
             <a:off x="640080" y="1920240"/>
-            <a:ext cx="5212080" cy="4114800"/>
-          </a:xfrm>
-          <a:prstGeom prst="roundRect">
-            <a:avLst>
-              <a:gd name="adj" fmla="val 4000"/>
-            </a:avLst>
-          </a:prstGeom>
-          <a:solidFill>
-            <a:srgbClr val="0F2438"/>
-          </a:solidFill>
-          <a:ln w="12700">
-            <a:solidFill>
-              <a:srgbClr val="1B5E58"/>
-            </a:solidFill>
-          </a:ln>
-          <a:effectLst/>
-        </p:spPr>
-        <p:style>
-          <a:lnRef idx="1">
-            <a:schemeClr val="accent1"/>
-          </a:lnRef>
-          <a:fillRef idx="3">
-            <a:schemeClr val="accent1"/>
-          </a:fillRef>
-          <a:effectRef idx="2">
-            <a:schemeClr val="accent1"/>
-          </a:effectRef>
-          <a:fontRef idx="minor">
-            <a:schemeClr val="lt1"/>
-          </a:fontRef>
-        </p:style>
-        <p:txBody>
-          <a:bodyPr rtlCol="0" anchor="ctr"/>
-          <a:lstStyle/>
-          <a:p>
-            <a:pPr algn="ctr"/>
+            <a:ext cx="10698480" cy="4114800"/>
+          </a:xfrm>
+          <a:prstGeom prst="rect">
+            <a:avLst/>
+          </a:prstGeom>
+          <a:noFill/>
+        </p:spPr>
+        <p:txBody>
+          <a:bodyPr wrap="square">
+            <a:spAutoFit/>
+          </a:bodyPr>
+          <a:lstStyle/>
+          <a:p>
+            <a:pPr>
+              <a:lnSpc>
+                <a:spcPct val="112000"/>
+              </a:lnSpc>
+              <a:spcAft>
+                <a:spcPts val="1600"/>
+              </a:spcAft>
+            </a:pPr>
+            <a:r>
+              <a:rPr sz="1900">
+                <a:solidFill>
+                  <a:srgbClr val="D7E3EC"/>
+                </a:solidFill>
+                <a:latin typeface="Calibri"/>
+              </a:rPr>
+              <a:t>•  Started in 2001 (Eric Blossom); now stewarded by the GNU Radio Project and the GNU Radio Foundation.</a:t>
+            </a:r>
+          </a:p>
+          <a:p>
+            <a:pPr>
+              <a:lnSpc>
+                <a:spcPct val="112000"/>
+              </a:lnSpc>
+              <a:spcAft>
+                <a:spcPts val="1600"/>
+              </a:spcAft>
+            </a:pPr>
+            <a:r>
+              <a:rPr sz="1900">
+                <a:solidFill>
+                  <a:srgbClr val="D7E3EC"/>
+                </a:solidFill>
+                <a:latin typeface="Calibri"/>
+              </a:rPr>
+              <a:t>•  C++ underneath for real-time DSP performance; Python (and GNU Radio Companion) on top for building and scripting flowgraphs.</a:t>
+            </a:r>
+          </a:p>
+          <a:p>
+            <a:pPr>
+              <a:lnSpc>
+                <a:spcPct val="112000"/>
+              </a:lnSpc>
+              <a:spcAft>
+                <a:spcPts val="1600"/>
+              </a:spcAft>
+            </a:pPr>
+            <a:r>
+              <a:rPr sz="1900">
+                <a:solidFill>
+                  <a:srgbClr val="D7E3EC"/>
+                </a:solidFill>
+                <a:latin typeface="Calibri"/>
+              </a:rPr>
+              <a:t>•  A scheduler manages sample buffers between blocks -- the same runtime whether the samples are live from a HackRF or read back from a file.</a:t>
+            </a:r>
+          </a:p>
+          <a:p>
+            <a:pPr>
+              <a:lnSpc>
+                <a:spcPct val="112000"/>
+              </a:lnSpc>
+              <a:spcAft>
+                <a:spcPts val="1600"/>
+              </a:spcAft>
+            </a:pPr>
+            <a:r>
+              <a:rPr sz="1900">
+                <a:solidFill>
+                  <a:srgbClr val="D7E3EC"/>
+                </a:solidFill>
+                <a:latin typeface="Calibri"/>
+              </a:rPr>
+              <a:t>•  Hundreds of built-in blocks -- filters, modulators, channel coding, synchronization -- plus a large ecosystem of out-of-tree (OOT) modules for specific protocols.</a:t>
+            </a:r>
           </a:p>
         </p:txBody>
       </p:sp>
@@ -5502,8 +5553,8 @@
         </p:nvSpPr>
         <p:spPr>
           <a:xfrm>
-            <a:off x="960120" y="2148840"/>
-            <a:ext cx="4572000" cy="365760"/>
+            <a:off x="640080" y="6473952"/>
+            <a:ext cx="8229600" cy="274320"/>
           </a:xfrm>
           <a:prstGeom prst="rect">
             <a:avLst/>
@@ -5522,13 +5573,13 @@
               </a:lnSpc>
             </a:pPr>
             <a:r>
-              <a:rPr sz="1900" b="1" i="0">
-                <a:solidFill>
-                  <a:srgbClr val="35D0BA"/>
-                </a:solidFill>
-                <a:latin typeface="Calibri"/>
-              </a:rPr>
-              <a:t>What It Actually Is</a:t>
+              <a:rPr sz="1000" b="0" i="1">
+                <a:solidFill>
+                  <a:srgbClr val="8EA7BA"/>
+                </a:solidFill>
+                <a:latin typeface="Calibri"/>
+              </a:rPr>
+              <a:t>Source: gnuradio.org -- GNU Radio Conference (GRCon) happens every year</a:t>
             </a:r>
           </a:p>
         </p:txBody>
@@ -5536,330 +5587,6 @@
       <p:sp>
         <p:nvSpPr>
           <p:cNvPr id="8" name="TextBox 7"/>
-          <p:cNvSpPr txBox="1"/>
-          <p:nvPr/>
-        </p:nvSpPr>
-        <p:spPr>
-          <a:xfrm>
-            <a:off x="960120" y="2606040"/>
-            <a:ext cx="4572000" cy="3200400"/>
-          </a:xfrm>
-          <a:prstGeom prst="rect">
-            <a:avLst/>
-          </a:prstGeom>
-          <a:noFill/>
-        </p:spPr>
-        <p:txBody>
-          <a:bodyPr wrap="square">
-            <a:spAutoFit/>
-          </a:bodyPr>
-          <a:lstStyle/>
-          <a:p>
-            <a:pPr>
-              <a:lnSpc>
-                <a:spcPct val="112000"/>
-              </a:lnSpc>
-              <a:spcAft>
-                <a:spcPts val="1000"/>
-              </a:spcAft>
-            </a:pPr>
-            <a:r>
-              <a:rPr sz="1500">
-                <a:solidFill>
-                  <a:srgbClr val="D7E3EC"/>
-                </a:solidFill>
-                <a:latin typeface="Calibri"/>
-              </a:rPr>
-              <a:t>•  Started in 2001 (Eric Blossom); now stewarded by the GNU Radio Project and the GNU Radio Foundation.</a:t>
-            </a:r>
-          </a:p>
-          <a:p>
-            <a:pPr>
-              <a:lnSpc>
-                <a:spcPct val="112000"/>
-              </a:lnSpc>
-              <a:spcAft>
-                <a:spcPts val="1000"/>
-              </a:spcAft>
-            </a:pPr>
-            <a:r>
-              <a:rPr sz="1500">
-                <a:solidFill>
-                  <a:srgbClr val="D7E3EC"/>
-                </a:solidFill>
-                <a:latin typeface="Calibri"/>
-              </a:rPr>
-              <a:t>•  C++ underneath for real-time DSP performance; Python (and GNU Radio Companion) on top for building and scripting flowgraphs.</a:t>
-            </a:r>
-          </a:p>
-          <a:p>
-            <a:pPr>
-              <a:lnSpc>
-                <a:spcPct val="112000"/>
-              </a:lnSpc>
-              <a:spcAft>
-                <a:spcPts val="1000"/>
-              </a:spcAft>
-            </a:pPr>
-            <a:r>
-              <a:rPr sz="1500">
-                <a:solidFill>
-                  <a:srgbClr val="D7E3EC"/>
-                </a:solidFill>
-                <a:latin typeface="Calibri"/>
-              </a:rPr>
-              <a:t>•  A scheduler manages sample buffers between blocks -- the same runtime whether the samples are live from a HackRF or read back from a file.</a:t>
-            </a:r>
-          </a:p>
-          <a:p>
-            <a:pPr>
-              <a:lnSpc>
-                <a:spcPct val="112000"/>
-              </a:lnSpc>
-              <a:spcAft>
-                <a:spcPts val="1000"/>
-              </a:spcAft>
-            </a:pPr>
-            <a:r>
-              <a:rPr sz="1500">
-                <a:solidFill>
-                  <a:srgbClr val="D7E3EC"/>
-                </a:solidFill>
-                <a:latin typeface="Calibri"/>
-              </a:rPr>
-              <a:t>•  Hundreds of built-in blocks -- filters, modulators, channel coding, synchronization -- plus a large ecosystem of out-of-tree (OOT) modules for specific protocols.</a:t>
-            </a:r>
-          </a:p>
-        </p:txBody>
-      </p:sp>
-      <p:sp>
-        <p:nvSpPr>
-          <p:cNvPr id="9" name="Rounded Rectangle 8"/>
-          <p:cNvSpPr/>
-          <p:nvPr/>
-        </p:nvSpPr>
-        <p:spPr>
-          <a:xfrm>
-            <a:off x="6309360" y="1920240"/>
-            <a:ext cx="5212080" cy="4114800"/>
-          </a:xfrm>
-          <a:prstGeom prst="roundRect">
-            <a:avLst>
-              <a:gd name="adj" fmla="val 4000"/>
-            </a:avLst>
-          </a:prstGeom>
-          <a:solidFill>
-            <a:srgbClr val="0F2438"/>
-          </a:solidFill>
-          <a:ln w="12700">
-            <a:solidFill>
-              <a:srgbClr val="1B5E58"/>
-            </a:solidFill>
-          </a:ln>
-          <a:effectLst/>
-        </p:spPr>
-        <p:style>
-          <a:lnRef idx="1">
-            <a:schemeClr val="accent1"/>
-          </a:lnRef>
-          <a:fillRef idx="3">
-            <a:schemeClr val="accent1"/>
-          </a:fillRef>
-          <a:effectRef idx="2">
-            <a:schemeClr val="accent1"/>
-          </a:effectRef>
-          <a:fontRef idx="minor">
-            <a:schemeClr val="lt1"/>
-          </a:fontRef>
-        </p:style>
-        <p:txBody>
-          <a:bodyPr rtlCol="0" anchor="ctr"/>
-          <a:lstStyle/>
-          <a:p>
-            <a:pPr algn="ctr"/>
-          </a:p>
-        </p:txBody>
-      </p:sp>
-      <p:sp>
-        <p:nvSpPr>
-          <p:cNvPr id="10" name="TextBox 9"/>
-          <p:cNvSpPr txBox="1"/>
-          <p:nvPr/>
-        </p:nvSpPr>
-        <p:spPr>
-          <a:xfrm>
-            <a:off x="6629400" y="2148840"/>
-            <a:ext cx="4572000" cy="365760"/>
-          </a:xfrm>
-          <a:prstGeom prst="rect">
-            <a:avLst/>
-          </a:prstGeom>
-          <a:noFill/>
-        </p:spPr>
-        <p:txBody>
-          <a:bodyPr wrap="square" anchor="t" lIns="0" rIns="0" tIns="0" bIns="0">
-            <a:spAutoFit/>
-          </a:bodyPr>
-          <a:lstStyle/>
-          <a:p>
-            <a:pPr algn="l">
-              <a:lnSpc>
-                <a:spcPct val="115000"/>
-              </a:lnSpc>
-            </a:pPr>
-            <a:r>
-              <a:rPr sz="1900" b="1" i="0">
-                <a:solidFill>
-                  <a:srgbClr val="35D0BA"/>
-                </a:solidFill>
-                <a:latin typeface="Calibri"/>
-              </a:rPr>
-              <a:t>How We Used It Tonight</a:t>
-            </a:r>
-          </a:p>
-        </p:txBody>
-      </p:sp>
-      <p:sp>
-        <p:nvSpPr>
-          <p:cNvPr id="11" name="TextBox 10"/>
-          <p:cNvSpPr txBox="1"/>
-          <p:nvPr/>
-        </p:nvSpPr>
-        <p:spPr>
-          <a:xfrm>
-            <a:off x="6629400" y="2606040"/>
-            <a:ext cx="4572000" cy="3200400"/>
-          </a:xfrm>
-          <a:prstGeom prst="rect">
-            <a:avLst/>
-          </a:prstGeom>
-          <a:noFill/>
-        </p:spPr>
-        <p:txBody>
-          <a:bodyPr wrap="square">
-            <a:spAutoFit/>
-          </a:bodyPr>
-          <a:lstStyle/>
-          <a:p>
-            <a:pPr>
-              <a:lnSpc>
-                <a:spcPct val="112000"/>
-              </a:lnSpc>
-              <a:spcAft>
-                <a:spcPts val="1000"/>
-              </a:spcAft>
-            </a:pPr>
-            <a:r>
-              <a:rPr sz="1500">
-                <a:solidFill>
-                  <a:srgbClr val="D7E3EC"/>
-                </a:solidFill>
-                <a:latin typeface="Calibri"/>
-              </a:rPr>
-              <a:t>•  Every demo was the same runtime, different flowgraph -- GRC just generates the Python self.connect(...) calls behind those block diagrams.</a:t>
-            </a:r>
-          </a:p>
-          <a:p>
-            <a:pPr>
-              <a:lnSpc>
-                <a:spcPct val="112000"/>
-              </a:lnSpc>
-              <a:spcAft>
-                <a:spcPts val="1000"/>
-              </a:spcAft>
-            </a:pPr>
-            <a:r>
-              <a:rPr sz="1500">
-                <a:solidFill>
-                  <a:srgbClr val="D7E3EC"/>
-                </a:solidFill>
-                <a:latin typeface="Calibri"/>
-              </a:rPr>
-              <a:t>•  SoapySDR blocks are what actually talked to the HackRF -- swap that one block and the same flowgraph can drive different hardware.</a:t>
-            </a:r>
-          </a:p>
-          <a:p>
-            <a:pPr>
-              <a:lnSpc>
-                <a:spcPct val="112000"/>
-              </a:lnSpc>
-              <a:spcAft>
-                <a:spcPts val="1000"/>
-              </a:spcAft>
-            </a:pPr>
-            <a:r>
-              <a:rPr sz="1500">
-                <a:solidFill>
-                  <a:srgbClr val="D7E3EC"/>
-                </a:solidFill>
-                <a:latin typeface="Calibri"/>
-              </a:rPr>
-              <a:t>•  Nothing here was compiled or flashed -- editing a flowgraph and rerunning it is the entire iteration loop.</a:t>
-            </a:r>
-          </a:p>
-          <a:p>
-            <a:pPr>
-              <a:lnSpc>
-                <a:spcPct val="112000"/>
-              </a:lnSpc>
-              <a:spcAft>
-                <a:spcPts val="1000"/>
-              </a:spcAft>
-            </a:pPr>
-            <a:r>
-              <a:rPr sz="1500">
-                <a:solidFill>
-                  <a:srgbClr val="D7E3EC"/>
-                </a:solidFill>
-                <a:latin typeface="Calibri"/>
-              </a:rPr>
-              <a:t>•  The .grc files themselves are plain text -- that's why this whole demo kit lives in a git repo.</a:t>
-            </a:r>
-          </a:p>
-        </p:txBody>
-      </p:sp>
-      <p:sp>
-        <p:nvSpPr>
-          <p:cNvPr id="12" name="TextBox 11"/>
-          <p:cNvSpPr txBox="1"/>
-          <p:nvPr/>
-        </p:nvSpPr>
-        <p:spPr>
-          <a:xfrm>
-            <a:off x="640080" y="6473952"/>
-            <a:ext cx="8229600" cy="274320"/>
-          </a:xfrm>
-          <a:prstGeom prst="rect">
-            <a:avLst/>
-          </a:prstGeom>
-          <a:noFill/>
-        </p:spPr>
-        <p:txBody>
-          <a:bodyPr wrap="square" anchor="t" lIns="0" rIns="0" tIns="0" bIns="0">
-            <a:spAutoFit/>
-          </a:bodyPr>
-          <a:lstStyle/>
-          <a:p>
-            <a:pPr algn="l">
-              <a:lnSpc>
-                <a:spcPct val="115000"/>
-              </a:lnSpc>
-            </a:pPr>
-            <a:r>
-              <a:rPr sz="1000" b="0" i="1">
-                <a:solidFill>
-                  <a:srgbClr val="8EA7BA"/>
-                </a:solidFill>
-                <a:latin typeface="Calibri"/>
-              </a:rPr>
-              <a:t>Source: gnuradio.org -- GNU Radio Conference (GRCon) happens every year</a:t>
-            </a:r>
-          </a:p>
-        </p:txBody>
-      </p:sp>
-      <p:sp>
-        <p:nvSpPr>
-          <p:cNvPr id="13" name="TextBox 12"/>
           <p:cNvSpPr txBox="1"/>
           <p:nvPr/>
         </p:nvSpPr>

--- a/slides/SDR_Demo.pptx
+++ b/slides/SDR_Demo.pptx
@@ -5397,7 +5397,7 @@
                 </a:solidFill>
                 <a:latin typeface="Calibri"/>
               </a:rPr>
-              <a:t>GNU Radio: What It Actually Is</a:t>
+              <a:t>GNU Radio: What It Is, How It's Used</a:t>
             </a:r>
           </a:p>
         </p:txBody>
@@ -5448,14 +5448,101 @@
       </p:sp>
       <p:sp>
         <p:nvSpPr>
-          <p:cNvPr id="6" name="TextBox 5"/>
+          <p:cNvPr id="6" name="Rounded Rectangle 5"/>
+          <p:cNvSpPr/>
+          <p:nvPr/>
+        </p:nvSpPr>
+        <p:spPr>
+          <a:xfrm>
+            <a:off x="640080" y="1920240"/>
+            <a:ext cx="5212080" cy="4114800"/>
+          </a:xfrm>
+          <a:prstGeom prst="roundRect">
+            <a:avLst>
+              <a:gd name="adj" fmla="val 4000"/>
+            </a:avLst>
+          </a:prstGeom>
+          <a:solidFill>
+            <a:srgbClr val="0F2438"/>
+          </a:solidFill>
+          <a:ln w="12700">
+            <a:solidFill>
+              <a:srgbClr val="1B5E58"/>
+            </a:solidFill>
+          </a:ln>
+          <a:effectLst/>
+        </p:spPr>
+        <p:style>
+          <a:lnRef idx="1">
+            <a:schemeClr val="accent1"/>
+          </a:lnRef>
+          <a:fillRef idx="3">
+            <a:schemeClr val="accent1"/>
+          </a:fillRef>
+          <a:effectRef idx="2">
+            <a:schemeClr val="accent1"/>
+          </a:effectRef>
+          <a:fontRef idx="minor">
+            <a:schemeClr val="lt1"/>
+          </a:fontRef>
+        </p:style>
+        <p:txBody>
+          <a:bodyPr rtlCol="0" anchor="ctr"/>
+          <a:lstStyle/>
+          <a:p>
+            <a:pPr algn="ctr"/>
+          </a:p>
+        </p:txBody>
+      </p:sp>
+      <p:sp>
+        <p:nvSpPr>
+          <p:cNvPr id="7" name="TextBox 6"/>
           <p:cNvSpPr txBox="1"/>
           <p:nvPr/>
         </p:nvSpPr>
         <p:spPr>
           <a:xfrm>
-            <a:off x="640080" y="1920240"/>
-            <a:ext cx="10698480" cy="4114800"/>
+            <a:off x="960120" y="2148840"/>
+            <a:ext cx="4572000" cy="365760"/>
+          </a:xfrm>
+          <a:prstGeom prst="rect">
+            <a:avLst/>
+          </a:prstGeom>
+          <a:noFill/>
+        </p:spPr>
+        <p:txBody>
+          <a:bodyPr wrap="square" anchor="t" lIns="0" rIns="0" tIns="0" bIns="0">
+            <a:spAutoFit/>
+          </a:bodyPr>
+          <a:lstStyle/>
+          <a:p>
+            <a:pPr algn="l">
+              <a:lnSpc>
+                <a:spcPct val="115000"/>
+              </a:lnSpc>
+            </a:pPr>
+            <a:r>
+              <a:rPr sz="1900" b="1" i="0">
+                <a:solidFill>
+                  <a:srgbClr val="35D0BA"/>
+                </a:solidFill>
+                <a:latin typeface="Calibri"/>
+              </a:rPr>
+              <a:t>What It Actually Is</a:t>
+            </a:r>
+          </a:p>
+        </p:txBody>
+      </p:sp>
+      <p:sp>
+        <p:nvSpPr>
+          <p:cNvPr id="8" name="TextBox 7"/>
+          <p:cNvSpPr txBox="1"/>
+          <p:nvPr/>
+        </p:nvSpPr>
+        <p:spPr>
+          <a:xfrm>
+            <a:off x="960120" y="2606040"/>
+            <a:ext cx="4572000" cy="3200400"/>
           </a:xfrm>
           <a:prstGeom prst="rect">
             <a:avLst/>
@@ -5473,11 +5560,11 @@
                 <a:spcPct val="112000"/>
               </a:lnSpc>
               <a:spcAft>
-                <a:spcPts val="1600"/>
+                <a:spcPts val="1000"/>
               </a:spcAft>
             </a:pPr>
             <a:r>
-              <a:rPr sz="1900">
+              <a:rPr sz="1500">
                 <a:solidFill>
                   <a:srgbClr val="D7E3EC"/>
                 </a:solidFill>
@@ -5492,11 +5579,11 @@
                 <a:spcPct val="112000"/>
               </a:lnSpc>
               <a:spcAft>
-                <a:spcPts val="1600"/>
+                <a:spcPts val="1000"/>
               </a:spcAft>
             </a:pPr>
             <a:r>
-              <a:rPr sz="1900">
+              <a:rPr sz="1500">
                 <a:solidFill>
                   <a:srgbClr val="D7E3EC"/>
                 </a:solidFill>
@@ -5511,11 +5598,11 @@
                 <a:spcPct val="112000"/>
               </a:lnSpc>
               <a:spcAft>
-                <a:spcPts val="1600"/>
+                <a:spcPts val="1000"/>
               </a:spcAft>
             </a:pPr>
             <a:r>
-              <a:rPr sz="1900">
+              <a:rPr sz="1500">
                 <a:solidFill>
                   <a:srgbClr val="D7E3EC"/>
                 </a:solidFill>
@@ -5530,11 +5617,11 @@
                 <a:spcPct val="112000"/>
               </a:lnSpc>
               <a:spcAft>
-                <a:spcPts val="1600"/>
+                <a:spcPts val="1000"/>
               </a:spcAft>
             </a:pPr>
             <a:r>
-              <a:rPr sz="1900">
+              <a:rPr sz="1500">
                 <a:solidFill>
                   <a:srgbClr val="D7E3EC"/>
                 </a:solidFill>
@@ -5547,14 +5634,14 @@
       </p:sp>
       <p:sp>
         <p:nvSpPr>
-          <p:cNvPr id="7" name="TextBox 6"/>
+          <p:cNvPr id="9" name="TextBox 8"/>
           <p:cNvSpPr txBox="1"/>
           <p:nvPr/>
         </p:nvSpPr>
         <p:spPr>
           <a:xfrm>
-            <a:off x="640080" y="6473952"/>
-            <a:ext cx="8229600" cy="274320"/>
+            <a:off x="6629400" y="2148840"/>
+            <a:ext cx="4572000" cy="292608"/>
           </a:xfrm>
           <a:prstGeom prst="rect">
             <a:avLst/>
@@ -5573,27 +5660,59 @@
               </a:lnSpc>
             </a:pPr>
             <a:r>
-              <a:rPr sz="1000" b="0" i="1">
-                <a:solidFill>
-                  <a:srgbClr val="8EA7BA"/>
-                </a:solidFill>
-                <a:latin typeface="Calibri"/>
-              </a:rPr>
-              <a:t>Source: gnuradio.org -- GNU Radio Conference (GRCon) happens every year</a:t>
-            </a:r>
-          </a:p>
-        </p:txBody>
-      </p:sp>
-      <p:sp>
-        <p:nvSpPr>
-          <p:cNvPr id="8" name="TextBox 7"/>
+              <a:rPr sz="1900" b="1" i="0">
+                <a:solidFill>
+                  <a:srgbClr val="35D0BA"/>
+                </a:solidFill>
+                <a:latin typeface="Calibri"/>
+              </a:rPr>
+              <a:t>How to learn GNU-Radio Companion</a:t>
+            </a:r>
+          </a:p>
+        </p:txBody>
+      </p:sp>
+      <p:sp>
+        <p:nvSpPr>
+          <p:cNvPr id="10" name="TextBox 9"/>
           <p:cNvSpPr txBox="1"/>
           <p:nvPr/>
         </p:nvSpPr>
         <p:spPr>
           <a:xfrm>
-            <a:off x="11292840" y="6473952"/>
-            <a:ext cx="731520" cy="274320"/>
+            <a:off x="6629400" y="2606040"/>
+            <a:ext cx="4572000" cy="969264"/>
+          </a:xfrm>
+          <a:prstGeom prst="rect">
+            <a:avLst/>
+          </a:prstGeom>
+          <a:noFill/>
+        </p:spPr>
+        <p:txBody>
+          <a:bodyPr wrap="square">
+            <a:spAutoFit/>
+          </a:bodyPr>
+          <a:lstStyle/>
+          <a:p>
+            <a:r>
+              <a:rPr sz="1500">
+                <a:latin typeface="Calibri"/>
+                <a:hlinkClick r:id="rId2"/>
+              </a:rPr>
+              <a:t>https://www.youtube.com/playlist?list=PLywxmTaHNUNyKmgF70q8q3QHYIw_LFbrX</a:t>
+            </a:r>
+          </a:p>
+        </p:txBody>
+      </p:sp>
+      <p:sp>
+        <p:nvSpPr>
+          <p:cNvPr id="11" name="TextBox 10"/>
+          <p:cNvSpPr txBox="1"/>
+          <p:nvPr/>
+        </p:nvSpPr>
+        <p:spPr>
+          <a:xfrm>
+            <a:off x="640080" y="6473952"/>
+            <a:ext cx="8229600" cy="274320"/>
           </a:xfrm>
           <a:prstGeom prst="rect">
             <a:avLst/>
@@ -5606,6 +5725,45 @@
           </a:bodyPr>
           <a:lstStyle/>
           <a:p>
+            <a:pPr algn="l">
+              <a:lnSpc>
+                <a:spcPct val="115000"/>
+              </a:lnSpc>
+            </a:pPr>
+            <a:r>
+              <a:rPr sz="1000" b="0" i="1">
+                <a:solidFill>
+                  <a:srgbClr val="8EA7BA"/>
+                </a:solidFill>
+                <a:latin typeface="Calibri"/>
+              </a:rPr>
+              <a:t>Source: gnuradio.org -- GNU Radio Conference (GRCon) happens every year</a:t>
+            </a:r>
+          </a:p>
+        </p:txBody>
+      </p:sp>
+      <p:sp>
+        <p:nvSpPr>
+          <p:cNvPr id="12" name="TextBox 11"/>
+          <p:cNvSpPr txBox="1"/>
+          <p:nvPr/>
+        </p:nvSpPr>
+        <p:spPr>
+          <a:xfrm>
+            <a:off x="11292840" y="6473952"/>
+            <a:ext cx="731520" cy="274320"/>
+          </a:xfrm>
+          <a:prstGeom prst="rect">
+            <a:avLst/>
+          </a:prstGeom>
+          <a:noFill/>
+        </p:spPr>
+        <p:txBody>
+          <a:bodyPr wrap="square" anchor="t" lIns="0" rIns="0" tIns="0" bIns="0">
+            <a:spAutoFit/>
+          </a:bodyPr>
+          <a:lstStyle/>
+          <a:p>
             <a:pPr algn="r">
               <a:lnSpc>
                 <a:spcPct val="115000"/>
@@ -5623,6 +5781,30 @@
           </a:p>
         </p:txBody>
       </p:sp>
+      <p:pic>
+        <p:nvPicPr>
+          <p:cNvPr id="13" name="Picture 12" descr="learn_gnuradio_youtube_thumb.png"/>
+          <p:cNvPicPr>
+            <a:picLocks noChangeAspect="1"/>
+          </p:cNvPicPr>
+          <p:nvPr/>
+        </p:nvPicPr>
+        <p:blipFill>
+          <a:blip r:embed="rId3"/>
+          <a:stretch>
+            <a:fillRect/>
+          </a:stretch>
+        </p:blipFill>
+        <p:spPr>
+          <a:xfrm>
+            <a:off x="6336792" y="3300984"/>
+            <a:ext cx="5266944" cy="3136392"/>
+          </a:xfrm>
+          <a:prstGeom prst="rect">
+            <a:avLst/>
+          </a:prstGeom>
+        </p:spPr>
+      </p:pic>
     </p:spTree>
   </p:cSld>
   <p:clrMapOvr>
@@ -6315,7 +6497,7 @@
                 </a:solidFill>
                 <a:latin typeface="Calibri"/>
               </a:rPr>
-              <a:t>RECAP</a:t>
+              <a:t>ONE WORD, THREE MEANINGS</a:t>
             </a:r>
           </a:p>
         </p:txBody>
@@ -6354,7 +6536,7 @@
                 </a:solidFill>
                 <a:latin typeface="Calibri"/>
               </a:rPr>
-              <a:t>What Just Happened, Technically</a:t>
+              <a:t>Three Kinds of Bandwidth</a:t>
             </a:r>
           </a:p>
         </p:txBody>
@@ -6405,14 +6587,101 @@
       </p:sp>
       <p:sp>
         <p:nvSpPr>
-          <p:cNvPr id="6" name="TextBox 5"/>
+          <p:cNvPr id="6" name="Rounded Rectangle 5"/>
+          <p:cNvSpPr/>
+          <p:nvPr/>
+        </p:nvSpPr>
+        <p:spPr>
+          <a:xfrm>
+            <a:off x="640080" y="1920240"/>
+            <a:ext cx="3502152" cy="4114800"/>
+          </a:xfrm>
+          <a:prstGeom prst="roundRect">
+            <a:avLst>
+              <a:gd name="adj" fmla="val 5000"/>
+            </a:avLst>
+          </a:prstGeom>
+          <a:solidFill>
+            <a:srgbClr val="0F2438"/>
+          </a:solidFill>
+          <a:ln w="12700">
+            <a:solidFill>
+              <a:srgbClr val="1B5E58"/>
+            </a:solidFill>
+          </a:ln>
+          <a:effectLst/>
+        </p:spPr>
+        <p:style>
+          <a:lnRef idx="1">
+            <a:schemeClr val="accent1"/>
+          </a:lnRef>
+          <a:fillRef idx="3">
+            <a:schemeClr val="accent1"/>
+          </a:fillRef>
+          <a:effectRef idx="2">
+            <a:schemeClr val="accent1"/>
+          </a:effectRef>
+          <a:fontRef idx="minor">
+            <a:schemeClr val="lt1"/>
+          </a:fontRef>
+        </p:style>
+        <p:txBody>
+          <a:bodyPr rtlCol="0" anchor="ctr"/>
+          <a:lstStyle/>
+          <a:p>
+            <a:pPr algn="ctr"/>
+          </a:p>
+        </p:txBody>
+      </p:sp>
+      <p:sp>
+        <p:nvSpPr>
+          <p:cNvPr id="7" name="TextBox 6"/>
           <p:cNvSpPr txBox="1"/>
           <p:nvPr/>
         </p:nvSpPr>
         <p:spPr>
           <a:xfrm>
-            <a:off x="640080" y="1920240"/>
-            <a:ext cx="10698480" cy="4114800"/>
+            <a:off x="868680" y="2103120"/>
+            <a:ext cx="3044952" cy="640080"/>
+          </a:xfrm>
+          <a:prstGeom prst="rect">
+            <a:avLst/>
+          </a:prstGeom>
+          <a:noFill/>
+        </p:spPr>
+        <p:txBody>
+          <a:bodyPr wrap="square" anchor="t" lIns="0" rIns="0" tIns="0" bIns="0">
+            <a:spAutoFit/>
+          </a:bodyPr>
+          <a:lstStyle/>
+          <a:p>
+            <a:pPr algn="l">
+              <a:lnSpc>
+                <a:spcPct val="115000"/>
+              </a:lnSpc>
+            </a:pPr>
+            <a:r>
+              <a:rPr sz="1600" b="1" i="0">
+                <a:solidFill>
+                  <a:srgbClr val="35D0BA"/>
+                </a:solidFill>
+                <a:latin typeface="Calibri"/>
+              </a:rPr>
+              <a:t>SDR (RF) Bandwidth</a:t>
+            </a:r>
+          </a:p>
+        </p:txBody>
+      </p:sp>
+      <p:sp>
+        <p:nvSpPr>
+          <p:cNvPr id="8" name="TextBox 7"/>
+          <p:cNvSpPr txBox="1"/>
+          <p:nvPr/>
+        </p:nvSpPr>
+        <p:spPr>
+          <a:xfrm>
+            <a:off x="868680" y="2788920"/>
+            <a:ext cx="3044952" cy="3108960"/>
           </a:xfrm>
           <a:prstGeom prst="rect">
             <a:avLst/>
@@ -6430,17 +6699,17 @@
                 <a:spcPct val="112000"/>
               </a:lnSpc>
               <a:spcAft>
-                <a:spcPts val="1600"/>
+                <a:spcPts val="1000"/>
               </a:spcAft>
             </a:pPr>
             <a:r>
-              <a:rPr sz="1900">
+              <a:rPr sz="1300">
                 <a:solidFill>
                   <a:srgbClr val="D7E3EC"/>
                 </a:solidFill>
                 <a:latin typeface="Calibri"/>
               </a:rPr>
-              <a:t>•  One piece of hardware -- the same HackRF -- was an FM radio, a spectrum analyzer, a repeater receiver, a wideband recorder, and a voice transceiver, in the same 20 minutes.</a:t>
+              <a:t>•  Instantaneous bandwidth = sample rate itself -- spans -Fs/2 to +Fs/2 around wherever you're tuned.</a:t>
             </a:r>
           </a:p>
           <a:p>
@@ -6449,17 +6718,17 @@
                 <a:spcPct val="112000"/>
               </a:lnSpc>
               <a:spcAft>
-                <a:spcPts val="1600"/>
+                <a:spcPts val="1000"/>
               </a:spcAft>
             </a:pPr>
             <a:r>
-              <a:rPr sz="1900">
+              <a:rPr sz="1300">
                 <a:solidFill>
                   <a:srgbClr val="D7E3EC"/>
                 </a:solidFill>
                 <a:latin typeface="Calibri"/>
               </a:rPr>
-              <a:t>•  The only thing that changed between demos was which flowgraph was loaded -- no soldering, no new hardware.</a:t>
+              <a:t>•  HackRF: up to 20 Msps -&gt; up to 20 MHz of spectrum visible at once.</a:t>
             </a:r>
           </a:p>
           <a:p>
@@ -6468,50 +6737,79 @@
                 <a:spcPct val="112000"/>
               </a:lnSpc>
               <a:spcAft>
-                <a:spcPts val="1600"/>
+                <a:spcPts val="1000"/>
               </a:spcAft>
             </a:pPr>
             <a:r>
-              <a:rPr sz="1900">
+              <a:rPr sz="1300">
                 <a:solidFill>
                   <a:srgbClr val="D7E3EC"/>
                 </a:solidFill>
                 <a:latin typeface="Calibri"/>
               </a:rPr>
-              <a:t>•  The recording in Demo 3 wasn't a simulation of the 2m band -- it was the actual RF, represented as numbers, played back as actual RF.</a:t>
-            </a:r>
-          </a:p>
-          <a:p>
-            <a:pPr>
-              <a:lnSpc>
-                <a:spcPct val="112000"/>
-              </a:lnSpc>
-              <a:spcAft>
-                <a:spcPts val="1600"/>
-              </a:spcAft>
-            </a:pPr>
-            <a:r>
-              <a:rPr sz="1900">
-                <a:solidFill>
-                  <a:srgbClr val="D7E3EC"/>
-                </a:solidFill>
-                <a:latin typeface="Calibri"/>
-              </a:rPr>
-              <a:t>•  That's the whole idea of “software defined”: the radio is defined by the software running on general-purpose hardware, not by purpose-built circuitry.</a:t>
-            </a:r>
-          </a:p>
-        </p:txBody>
-      </p:sp>
-      <p:sp>
-        <p:nvSpPr>
-          <p:cNvPr id="7" name="TextBox 6"/>
+              <a:t>•  Rule of thumb: trust only the center ~4/5 of that ("Sean's 4/5 rule") -- the anti-alias filter rolls off near the edges.</a:t>
+            </a:r>
+          </a:p>
+        </p:txBody>
+      </p:sp>
+      <p:sp>
+        <p:nvSpPr>
+          <p:cNvPr id="9" name="Rounded Rectangle 8"/>
+          <p:cNvSpPr/>
+          <p:nvPr/>
+        </p:nvSpPr>
+        <p:spPr>
+          <a:xfrm>
+            <a:off x="4325112" y="1920240"/>
+            <a:ext cx="3502152" cy="4114800"/>
+          </a:xfrm>
+          <a:prstGeom prst="roundRect">
+            <a:avLst>
+              <a:gd name="adj" fmla="val 5000"/>
+            </a:avLst>
+          </a:prstGeom>
+          <a:solidFill>
+            <a:srgbClr val="0F2438"/>
+          </a:solidFill>
+          <a:ln w="12700">
+            <a:solidFill>
+              <a:srgbClr val="1B5E58"/>
+            </a:solidFill>
+          </a:ln>
+          <a:effectLst/>
+        </p:spPr>
+        <p:style>
+          <a:lnRef idx="1">
+            <a:schemeClr val="accent1"/>
+          </a:lnRef>
+          <a:fillRef idx="3">
+            <a:schemeClr val="accent1"/>
+          </a:fillRef>
+          <a:effectRef idx="2">
+            <a:schemeClr val="accent1"/>
+          </a:effectRef>
+          <a:fontRef idx="minor">
+            <a:schemeClr val="lt1"/>
+          </a:fontRef>
+        </p:style>
+        <p:txBody>
+          <a:bodyPr rtlCol="0" anchor="ctr"/>
+          <a:lstStyle/>
+          <a:p>
+            <a:pPr algn="ctr"/>
+          </a:p>
+        </p:txBody>
+      </p:sp>
+      <p:sp>
+        <p:nvSpPr>
+          <p:cNvPr id="10" name="TextBox 9"/>
           <p:cNvSpPr txBox="1"/>
           <p:nvPr/>
         </p:nvSpPr>
         <p:spPr>
           <a:xfrm>
-            <a:off x="640080" y="6473952"/>
-            <a:ext cx="7315200" cy="274320"/>
+            <a:off x="4553712" y="2103120"/>
+            <a:ext cx="3044952" cy="640080"/>
           </a:xfrm>
           <a:prstGeom prst="rect">
             <a:avLst/>
@@ -6530,20 +6828,306 @@
               </a:lnSpc>
             </a:pPr>
             <a:r>
-              <a:rPr sz="1000" b="0" i="0">
+              <a:rPr sz="1600" b="1" i="0">
+                <a:solidFill>
+                  <a:srgbClr val="35D0BA"/>
+                </a:solidFill>
+                <a:latin typeface="Calibri"/>
+              </a:rPr>
+              <a:t>Interface Bandwidth (USB)</a:t>
+            </a:r>
+          </a:p>
+        </p:txBody>
+      </p:sp>
+      <p:sp>
+        <p:nvSpPr>
+          <p:cNvPr id="11" name="TextBox 10"/>
+          <p:cNvSpPr txBox="1"/>
+          <p:nvPr/>
+        </p:nvSpPr>
+        <p:spPr>
+          <a:xfrm>
+            <a:off x="4553712" y="2788920"/>
+            <a:ext cx="3044952" cy="3108960"/>
+          </a:xfrm>
+          <a:prstGeom prst="rect">
+            <a:avLst/>
+          </a:prstGeom>
+          <a:noFill/>
+        </p:spPr>
+        <p:txBody>
+          <a:bodyPr wrap="square">
+            <a:spAutoFit/>
+          </a:bodyPr>
+          <a:lstStyle/>
+          <a:p>
+            <a:pPr>
+              <a:lnSpc>
+                <a:spcPct val="112000"/>
+              </a:lnSpc>
+              <a:spcAft>
+                <a:spcPts val="1000"/>
+              </a:spcAft>
+            </a:pPr>
+            <a:r>
+              <a:rPr sz="1300">
+                <a:solidFill>
+                  <a:srgbClr val="D7E3EC"/>
+                </a:solidFill>
+                <a:latin typeface="Calibri"/>
+              </a:rPr>
+              <a:t>•  A separate bottleneck: getting every sample off the SDR and into the computer, in real time, without dropping any.</a:t>
+            </a:r>
+          </a:p>
+          <a:p>
+            <a:pPr>
+              <a:lnSpc>
+                <a:spcPct val="112000"/>
+              </a:lnSpc>
+              <a:spcAft>
+                <a:spcPts val="1000"/>
+              </a:spcAft>
+            </a:pPr>
+            <a:r>
+              <a:rPr sz="1300">
+                <a:solidFill>
+                  <a:srgbClr val="D7E3EC"/>
+                </a:solidFill>
+                <a:latin typeface="Calibri"/>
+              </a:rPr>
+              <a:t>•  HackRF: USB 2.0 Hi-Speed. At 20 Msps complex 8-bit, that's ~320 Mbps -- already close to USB2's practical ceiling.</a:t>
+            </a:r>
+          </a:p>
+          <a:p>
+            <a:pPr>
+              <a:lnSpc>
+                <a:spcPct val="112000"/>
+              </a:lnSpc>
+              <a:spcAft>
+                <a:spcPts val="1000"/>
+              </a:spcAft>
+            </a:pPr>
+            <a:r>
+              <a:rPr sz="1300">
+                <a:solidFill>
+                  <a:srgbClr val="D7E3EC"/>
+                </a:solidFill>
+                <a:latin typeface="Calibri"/>
+              </a:rPr>
+              <a:t>•  Exactly why hackrf_info warns about other devices sharing the USB bus at high sample rates.</a:t>
+            </a:r>
+          </a:p>
+        </p:txBody>
+      </p:sp>
+      <p:sp>
+        <p:nvSpPr>
+          <p:cNvPr id="12" name="Rounded Rectangle 11"/>
+          <p:cNvSpPr/>
+          <p:nvPr/>
+        </p:nvSpPr>
+        <p:spPr>
+          <a:xfrm>
+            <a:off x="8010144" y="1920240"/>
+            <a:ext cx="3502152" cy="4114800"/>
+          </a:xfrm>
+          <a:prstGeom prst="roundRect">
+            <a:avLst>
+              <a:gd name="adj" fmla="val 5000"/>
+            </a:avLst>
+          </a:prstGeom>
+          <a:solidFill>
+            <a:srgbClr val="0F2438"/>
+          </a:solidFill>
+          <a:ln w="12700">
+            <a:solidFill>
+              <a:srgbClr val="1B5E58"/>
+            </a:solidFill>
+          </a:ln>
+          <a:effectLst/>
+        </p:spPr>
+        <p:style>
+          <a:lnRef idx="1">
+            <a:schemeClr val="accent1"/>
+          </a:lnRef>
+          <a:fillRef idx="3">
+            <a:schemeClr val="accent1"/>
+          </a:fillRef>
+          <a:effectRef idx="2">
+            <a:schemeClr val="accent1"/>
+          </a:effectRef>
+          <a:fontRef idx="minor">
+            <a:schemeClr val="lt1"/>
+          </a:fontRef>
+        </p:style>
+        <p:txBody>
+          <a:bodyPr rtlCol="0" anchor="ctr"/>
+          <a:lstStyle/>
+          <a:p>
+            <a:pPr algn="ctr"/>
+          </a:p>
+        </p:txBody>
+      </p:sp>
+      <p:sp>
+        <p:nvSpPr>
+          <p:cNvPr id="13" name="TextBox 12"/>
+          <p:cNvSpPr txBox="1"/>
+          <p:nvPr/>
+        </p:nvSpPr>
+        <p:spPr>
+          <a:xfrm>
+            <a:off x="8238744" y="2103120"/>
+            <a:ext cx="3044952" cy="640080"/>
+          </a:xfrm>
+          <a:prstGeom prst="rect">
+            <a:avLst/>
+          </a:prstGeom>
+          <a:noFill/>
+        </p:spPr>
+        <p:txBody>
+          <a:bodyPr wrap="square" anchor="t" lIns="0" rIns="0" tIns="0" bIns="0">
+            <a:spAutoFit/>
+          </a:bodyPr>
+          <a:lstStyle/>
+          <a:p>
+            <a:pPr algn="l">
+              <a:lnSpc>
+                <a:spcPct val="115000"/>
+              </a:lnSpc>
+            </a:pPr>
+            <a:r>
+              <a:rPr sz="1600" b="1" i="0">
+                <a:solidFill>
+                  <a:srgbClr val="35D0BA"/>
+                </a:solidFill>
+                <a:latin typeface="Calibri"/>
+              </a:rPr>
+              <a:t>Receive Bandwidth (What the Software Decodes)</a:t>
+            </a:r>
+          </a:p>
+        </p:txBody>
+      </p:sp>
+      <p:sp>
+        <p:nvSpPr>
+          <p:cNvPr id="14" name="TextBox 13"/>
+          <p:cNvSpPr txBox="1"/>
+          <p:nvPr/>
+        </p:nvSpPr>
+        <p:spPr>
+          <a:xfrm>
+            <a:off x="8238744" y="2788920"/>
+            <a:ext cx="3044952" cy="3108960"/>
+          </a:xfrm>
+          <a:prstGeom prst="rect">
+            <a:avLst/>
+          </a:prstGeom>
+          <a:noFill/>
+        </p:spPr>
+        <p:txBody>
+          <a:bodyPr wrap="square">
+            <a:spAutoFit/>
+          </a:bodyPr>
+          <a:lstStyle/>
+          <a:p>
+            <a:pPr>
+              <a:lnSpc>
+                <a:spcPct val="112000"/>
+              </a:lnSpc>
+              <a:spcAft>
+                <a:spcPts val="1000"/>
+              </a:spcAft>
+            </a:pPr>
+            <a:r>
+              <a:rPr sz="1300">
+                <a:solidFill>
+                  <a:srgbClr val="D7E3EC"/>
+                </a:solidFill>
+                <a:latin typeface="Calibri"/>
+              </a:rPr>
+              <a:t>•  The RF capture and the channel actually being decoded are two different numbers.</a:t>
+            </a:r>
+          </a:p>
+          <a:p>
+            <a:pPr>
+              <a:lnSpc>
+                <a:spcPct val="112000"/>
+              </a:lnSpc>
+              <a:spcAft>
+                <a:spcPts val="1000"/>
+              </a:spcAft>
+            </a:pPr>
+            <a:r>
+              <a:rPr sz="1300">
+                <a:solidFill>
+                  <a:srgbClr val="D7E3EC"/>
+                </a:solidFill>
+                <a:latin typeface="Calibri"/>
+              </a:rPr>
+              <a:t>•  Demo 3 captured 6 MHz of the 2m band; one NBFM voice channel is only ~16 kHz wide.</a:t>
+            </a:r>
+          </a:p>
+          <a:p>
+            <a:pPr>
+              <a:lnSpc>
+                <a:spcPct val="112000"/>
+              </a:lnSpc>
+              <a:spcAft>
+                <a:spcPts val="1000"/>
+              </a:spcAft>
+            </a:pPr>
+            <a:r>
+              <a:rPr sz="1300">
+                <a:solidFill>
+                  <a:srgbClr val="D7E3EC"/>
+                </a:solidFill>
+                <a:latin typeface="Calibri"/>
+              </a:rPr>
+              <a:t>•  That gap is exactly the Filter/Resample block from "Reading a Flowgraph" -- narrowing a wide capture down to one channel.</a:t>
+            </a:r>
+          </a:p>
+        </p:txBody>
+      </p:sp>
+      <p:sp>
+        <p:nvSpPr>
+          <p:cNvPr id="15" name="TextBox 14"/>
+          <p:cNvSpPr txBox="1"/>
+          <p:nvPr/>
+        </p:nvSpPr>
+        <p:spPr>
+          <a:xfrm>
+            <a:off x="640080" y="6473952"/>
+            <a:ext cx="10058400" cy="274320"/>
+          </a:xfrm>
+          <a:prstGeom prst="rect">
+            <a:avLst/>
+          </a:prstGeom>
+          <a:noFill/>
+        </p:spPr>
+        <p:txBody>
+          <a:bodyPr wrap="square" anchor="t" lIns="0" rIns="0" tIns="0" bIns="0">
+            <a:spAutoFit/>
+          </a:bodyPr>
+          <a:lstStyle/>
+          <a:p>
+            <a:pPr algn="l">
+              <a:lnSpc>
+                <a:spcPct val="115000"/>
+              </a:lnSpc>
+            </a:pPr>
+            <a:r>
+              <a:rPr sz="1000" b="0" i="1">
                 <a:solidFill>
                   <a:srgbClr val="8EA7BA"/>
                 </a:solidFill>
                 <a:latin typeface="Calibri"/>
               </a:rPr>
-              <a:t>SDR Demo -- GNU Radio + HackRF + Ham Handheld</a:t>
-            </a:r>
-          </a:p>
-        </p:txBody>
-      </p:sp>
-      <p:sp>
-        <p:nvSpPr>
-          <p:cNvPr id="8" name="TextBox 7"/>
+              <a:t>Source: pysdr.org (Ch. 3, IQ Sampling -- sample rate = instantaneous bandwidth, Nyquist, "Sean's 4/5 rule")</a:t>
+            </a:r>
+          </a:p>
+        </p:txBody>
+      </p:sp>
+      <p:sp>
+        <p:nvSpPr>
+          <p:cNvPr id="16" name="TextBox 15"/>
           <p:cNvSpPr txBox="1"/>
           <p:nvPr/>
         </p:nvSpPr>

--- a/slides/SDR_Demo.pptx
+++ b/slides/SDR_Demo.pptx
@@ -26,6 +26,7 @@
     <p:sldId id="274" r:id="rId25"/>
     <p:sldId id="275" r:id="rId26"/>
     <p:sldId id="276" r:id="rId27"/>
+    <p:sldId id="277" r:id="rId28"/>
   </p:sldIdLst>
   <p:sldSz cx="12191695" cy="6858000" type="screen4x3"/>
   <p:notesSz cx="6858000" cy="9144000"/>
@@ -3744,7 +3745,7 @@
                 </a:solidFill>
                 <a:latin typeface="Calibri"/>
               </a:rPr>
-              <a:t>9 / 21</a:t>
+              <a:t>9 / 22</a:t>
             </a:r>
           </a:p>
         </p:txBody>
@@ -4124,7 +4125,7 @@
                 </a:solidFill>
                 <a:latin typeface="Calibri"/>
               </a:rPr>
-              <a:t>10 / 21</a:t>
+              <a:t>10 / 22</a:t>
             </a:r>
           </a:p>
         </p:txBody>
@@ -4482,7 +4483,7 @@
                 </a:solidFill>
                 <a:latin typeface="Calibri"/>
               </a:rPr>
-              <a:t>11 / 21</a:t>
+              <a:t>11 / 22</a:t>
             </a:r>
           </a:p>
         </p:txBody>
@@ -4879,7 +4880,7 @@
                 </a:solidFill>
                 <a:latin typeface="Calibri"/>
               </a:rPr>
-              <a:t>12 / 21</a:t>
+              <a:t>12 / 22</a:t>
             </a:r>
           </a:p>
         </p:txBody>
@@ -5257,7 +5258,7 @@
                 </a:solidFill>
                 <a:latin typeface="Calibri"/>
               </a:rPr>
-              <a:t>13 / 21</a:t>
+              <a:t>13 / 22</a:t>
             </a:r>
           </a:p>
         </p:txBody>
@@ -5776,7 +5777,7 @@
                 </a:solidFill>
                 <a:latin typeface="Calibri"/>
               </a:rPr>
-              <a:t>14 / 21</a:t>
+              <a:t>14 / 22</a:t>
             </a:r>
           </a:p>
         </p:txBody>
@@ -6396,7 +6397,7 @@
                 </a:solidFill>
                 <a:latin typeface="Calibri"/>
               </a:rPr>
-              <a:t>15 / 21</a:t>
+              <a:t>15 / 22</a:t>
             </a:r>
           </a:p>
         </p:txBody>
@@ -7159,7 +7160,7 @@
                 </a:solidFill>
                 <a:latin typeface="Calibri"/>
               </a:rPr>
-              <a:t>16 / 21</a:t>
+              <a:t>16 / 22</a:t>
             </a:r>
           </a:p>
         </p:txBody>
@@ -7736,7 +7737,7 @@
                 </a:solidFill>
                 <a:latin typeface="Calibri"/>
               </a:rPr>
-              <a:t>17 / 21</a:t>
+              <a:t>17 / 22</a:t>
             </a:r>
           </a:p>
         </p:txBody>
@@ -8852,7 +8853,7 @@
                 </a:solidFill>
                 <a:latin typeface="Calibri"/>
               </a:rPr>
-              <a:t>18 / 21</a:t>
+              <a:t>18 / 22</a:t>
             </a:r>
           </a:p>
         </p:txBody>
@@ -10051,7 +10052,7 @@
                 </a:solidFill>
                 <a:latin typeface="Calibri"/>
               </a:rPr>
-              <a:t>1 / 21</a:t>
+              <a:t>1 / 22</a:t>
             </a:r>
           </a:p>
         </p:txBody>
@@ -10511,7 +10512,7 @@
                 </a:solidFill>
                 <a:latin typeface="Calibri"/>
               </a:rPr>
-              <a:t>19 / 21</a:t>
+              <a:t>19 / 22</a:t>
             </a:r>
           </a:p>
         </p:txBody>
@@ -10586,6 +10587,791 @@
         </p:nvSpPr>
         <p:spPr>
           <a:xfrm>
+            <a:off x="640080" y="457200"/>
+            <a:ext cx="10881360" cy="365760"/>
+          </a:xfrm>
+          <a:prstGeom prst="rect">
+            <a:avLst/>
+          </a:prstGeom>
+          <a:noFill/>
+        </p:spPr>
+        <p:txBody>
+          <a:bodyPr wrap="square" anchor="t" lIns="0" rIns="0" tIns="0" bIns="0">
+            <a:spAutoFit/>
+          </a:bodyPr>
+          <a:lstStyle/>
+          <a:p>
+            <a:pPr algn="l">
+              <a:lnSpc>
+                <a:spcPct val="115000"/>
+              </a:lnSpc>
+            </a:pPr>
+            <a:r>
+              <a:rPr sz="1400" b="1" i="0">
+                <a:solidFill>
+                  <a:srgbClr val="35D0BA"/>
+                </a:solidFill>
+                <a:latin typeface="Calibri"/>
+              </a:rPr>
+              <a:t>SOFTWARE DEFINED RADIO REQUIRES SOFTWARE</a:t>
+            </a:r>
+          </a:p>
+        </p:txBody>
+      </p:sp>
+      <p:sp>
+        <p:nvSpPr>
+          <p:cNvPr id="4" name="TextBox 3"/>
+          <p:cNvSpPr txBox="1"/>
+          <p:nvPr/>
+        </p:nvSpPr>
+        <p:spPr>
+          <a:xfrm>
+            <a:off x="640080" y="786384"/>
+            <a:ext cx="10881360" cy="822960"/>
+          </a:xfrm>
+          <a:prstGeom prst="rect">
+            <a:avLst/>
+          </a:prstGeom>
+          <a:noFill/>
+        </p:spPr>
+        <p:txBody>
+          <a:bodyPr wrap="square" anchor="t" lIns="0" rIns="0" tIns="0" bIns="0">
+            <a:spAutoFit/>
+          </a:bodyPr>
+          <a:lstStyle/>
+          <a:p>
+            <a:pPr algn="l">
+              <a:lnSpc>
+                <a:spcPct val="115000"/>
+              </a:lnSpc>
+            </a:pPr>
+            <a:r>
+              <a:rPr sz="3200" b="1" i="0">
+                <a:solidFill>
+                  <a:srgbClr val="FFFFFF"/>
+                </a:solidFill>
+                <a:latin typeface="Calibri"/>
+              </a:rPr>
+              <a:t>Learn the DSP, in Python: pysdr.org</a:t>
+            </a:r>
+          </a:p>
+        </p:txBody>
+      </p:sp>
+      <p:sp>
+        <p:nvSpPr>
+          <p:cNvPr id="5" name="Rectangle 4"/>
+          <p:cNvSpPr/>
+          <p:nvPr/>
+        </p:nvSpPr>
+        <p:spPr>
+          <a:xfrm>
+            <a:off x="640080" y="1481328"/>
+            <a:ext cx="1005840" cy="50800"/>
+          </a:xfrm>
+          <a:prstGeom prst="rect">
+            <a:avLst/>
+          </a:prstGeom>
+          <a:solidFill>
+            <a:srgbClr val="35D0BA"/>
+          </a:solidFill>
+          <a:ln>
+            <a:noFill/>
+          </a:ln>
+          <a:effectLst/>
+        </p:spPr>
+        <p:style>
+          <a:lnRef idx="1">
+            <a:schemeClr val="accent1"/>
+          </a:lnRef>
+          <a:fillRef idx="3">
+            <a:schemeClr val="accent1"/>
+          </a:fillRef>
+          <a:effectRef idx="2">
+            <a:schemeClr val="accent1"/>
+          </a:effectRef>
+          <a:fontRef idx="minor">
+            <a:schemeClr val="lt1"/>
+          </a:fontRef>
+        </p:style>
+        <p:txBody>
+          <a:bodyPr rtlCol="0" anchor="ctr"/>
+          <a:lstStyle/>
+          <a:p>
+            <a:pPr algn="ctr"/>
+          </a:p>
+        </p:txBody>
+      </p:sp>
+      <p:sp>
+        <p:nvSpPr>
+          <p:cNvPr id="6" name="TextBox 5"/>
+          <p:cNvSpPr txBox="1"/>
+          <p:nvPr/>
+        </p:nvSpPr>
+        <p:spPr>
+          <a:xfrm>
+            <a:off x="640080" y="1920240"/>
+            <a:ext cx="10698480" cy="1051560"/>
+          </a:xfrm>
+          <a:prstGeom prst="rect">
+            <a:avLst/>
+          </a:prstGeom>
+          <a:noFill/>
+        </p:spPr>
+        <p:txBody>
+          <a:bodyPr wrap="square">
+            <a:spAutoFit/>
+          </a:bodyPr>
+          <a:lstStyle/>
+          <a:p>
+            <a:pPr>
+              <a:lnSpc>
+                <a:spcPct val="112000"/>
+              </a:lnSpc>
+              <a:spcAft>
+                <a:spcPts val="1000"/>
+              </a:spcAft>
+            </a:pPr>
+            <a:r>
+              <a:rPr sz="1600">
+                <a:solidFill>
+                  <a:srgbClr val="D7E3EC"/>
+                </a:solidFill>
+                <a:latin typeface="Calibri"/>
+              </a:rPr>
+              <a:t>•  Everything tonight ran through GNU Radio Companion's drag-and-drop canvas -- pysdr.org teaches the same DSP by writing the Python (NumPy/SciPy) yourself, concept by concept.</a:t>
+            </a:r>
+          </a:p>
+          <a:p>
+            <a:pPr>
+              <a:lnSpc>
+                <a:spcPct val="112000"/>
+              </a:lnSpc>
+              <a:spcAft>
+                <a:spcPts val="1000"/>
+              </a:spcAft>
+            </a:pPr>
+            <a:r>
+              <a:rPr sz="1600">
+                <a:solidFill>
+                  <a:srgbClr val="D7E3EC"/>
+                </a:solidFill>
+                <a:latin typeface="Calibri"/>
+              </a:rPr>
+              <a:t>•  Free, written for engineers, no textbook required first -- the same site cited earlier tonight for noise (slide 3) and bandwidth/Nyquist (slide 17).</a:t>
+            </a:r>
+          </a:p>
+        </p:txBody>
+      </p:sp>
+      <p:sp>
+        <p:nvSpPr>
+          <p:cNvPr id="7" name="Rounded Rectangle 6"/>
+          <p:cNvSpPr/>
+          <p:nvPr/>
+        </p:nvSpPr>
+        <p:spPr>
+          <a:xfrm>
+            <a:off x="678027" y="3383280"/>
+            <a:ext cx="2331720" cy="1005840"/>
+          </a:xfrm>
+          <a:prstGeom prst="roundRect">
+            <a:avLst>
+              <a:gd name="adj" fmla="val 12000"/>
+            </a:avLst>
+          </a:prstGeom>
+          <a:solidFill>
+            <a:srgbClr val="1B5E58"/>
+          </a:solidFill>
+          <a:ln w="15875">
+            <a:solidFill>
+              <a:srgbClr val="35D0BA"/>
+            </a:solidFill>
+          </a:ln>
+          <a:effectLst/>
+        </p:spPr>
+        <p:style>
+          <a:lnRef idx="1">
+            <a:schemeClr val="accent1"/>
+          </a:lnRef>
+          <a:fillRef idx="3">
+            <a:schemeClr val="accent1"/>
+          </a:fillRef>
+          <a:effectRef idx="2">
+            <a:schemeClr val="accent1"/>
+          </a:effectRef>
+          <a:fontRef idx="minor">
+            <a:schemeClr val="lt1"/>
+          </a:fontRef>
+        </p:style>
+        <p:txBody>
+          <a:bodyPr rtlCol="0" anchor="ctr"/>
+          <a:lstStyle/>
+          <a:p>
+            <a:pPr algn="ctr"/>
+            <a:r>
+              <a:rPr sz="1500" b="1">
+                <a:solidFill>
+                  <a:srgbClr val="FFFFFF"/>
+                </a:solidFill>
+                <a:latin typeface="Calibri"/>
+              </a:rPr>
+              <a:t>Fourier
+Transforms</a:t>
+            </a:r>
+          </a:p>
+        </p:txBody>
+      </p:sp>
+      <p:sp>
+        <p:nvSpPr>
+          <p:cNvPr id="8" name="Right Arrow 7"/>
+          <p:cNvSpPr/>
+          <p:nvPr/>
+        </p:nvSpPr>
+        <p:spPr>
+          <a:xfrm>
+            <a:off x="3009747" y="3730752"/>
+            <a:ext cx="502920" cy="310896"/>
+          </a:xfrm>
+          <a:prstGeom prst="rightArrow">
+            <a:avLst/>
+          </a:prstGeom>
+          <a:solidFill>
+            <a:srgbClr val="35D0BA"/>
+          </a:solidFill>
+          <a:ln>
+            <a:noFill/>
+          </a:ln>
+          <a:effectLst/>
+        </p:spPr>
+        <p:style>
+          <a:lnRef idx="1">
+            <a:schemeClr val="accent1"/>
+          </a:lnRef>
+          <a:fillRef idx="3">
+            <a:schemeClr val="accent1"/>
+          </a:fillRef>
+          <a:effectRef idx="2">
+            <a:schemeClr val="accent1"/>
+          </a:effectRef>
+          <a:fontRef idx="minor">
+            <a:schemeClr val="lt1"/>
+          </a:fontRef>
+        </p:style>
+        <p:txBody>
+          <a:bodyPr rtlCol="0" anchor="ctr"/>
+          <a:lstStyle/>
+          <a:p>
+            <a:pPr algn="ctr"/>
+          </a:p>
+        </p:txBody>
+      </p:sp>
+      <p:sp>
+        <p:nvSpPr>
+          <p:cNvPr id="9" name="Rounded Rectangle 8"/>
+          <p:cNvSpPr/>
+          <p:nvPr/>
+        </p:nvSpPr>
+        <p:spPr>
+          <a:xfrm>
+            <a:off x="3512667" y="3383280"/>
+            <a:ext cx="2331720" cy="1005840"/>
+          </a:xfrm>
+          <a:prstGeom prst="roundRect">
+            <a:avLst>
+              <a:gd name="adj" fmla="val 12000"/>
+            </a:avLst>
+          </a:prstGeom>
+          <a:solidFill>
+            <a:srgbClr val="0F2438"/>
+          </a:solidFill>
+          <a:ln w="15875">
+            <a:solidFill>
+              <a:srgbClr val="35D0BA"/>
+            </a:solidFill>
+          </a:ln>
+          <a:effectLst/>
+        </p:spPr>
+        <p:style>
+          <a:lnRef idx="1">
+            <a:schemeClr val="accent1"/>
+          </a:lnRef>
+          <a:fillRef idx="3">
+            <a:schemeClr val="accent1"/>
+          </a:fillRef>
+          <a:effectRef idx="2">
+            <a:schemeClr val="accent1"/>
+          </a:effectRef>
+          <a:fontRef idx="minor">
+            <a:schemeClr val="lt1"/>
+          </a:fontRef>
+        </p:style>
+        <p:txBody>
+          <a:bodyPr rtlCol="0" anchor="ctr"/>
+          <a:lstStyle/>
+          <a:p>
+            <a:pPr algn="ctr"/>
+            <a:r>
+              <a:rPr sz="1500" b="1">
+                <a:solidFill>
+                  <a:srgbClr val="FFFFFF"/>
+                </a:solidFill>
+                <a:latin typeface="Calibri"/>
+              </a:rPr>
+              <a:t>Filters</a:t>
+            </a:r>
+          </a:p>
+        </p:txBody>
+      </p:sp>
+      <p:sp>
+        <p:nvSpPr>
+          <p:cNvPr id="10" name="Right Arrow 9"/>
+          <p:cNvSpPr/>
+          <p:nvPr/>
+        </p:nvSpPr>
+        <p:spPr>
+          <a:xfrm>
+            <a:off x="5844387" y="3730752"/>
+            <a:ext cx="502920" cy="310896"/>
+          </a:xfrm>
+          <a:prstGeom prst="rightArrow">
+            <a:avLst/>
+          </a:prstGeom>
+          <a:solidFill>
+            <a:srgbClr val="35D0BA"/>
+          </a:solidFill>
+          <a:ln>
+            <a:noFill/>
+          </a:ln>
+          <a:effectLst/>
+        </p:spPr>
+        <p:style>
+          <a:lnRef idx="1">
+            <a:schemeClr val="accent1"/>
+          </a:lnRef>
+          <a:fillRef idx="3">
+            <a:schemeClr val="accent1"/>
+          </a:fillRef>
+          <a:effectRef idx="2">
+            <a:schemeClr val="accent1"/>
+          </a:effectRef>
+          <a:fontRef idx="minor">
+            <a:schemeClr val="lt1"/>
+          </a:fontRef>
+        </p:style>
+        <p:txBody>
+          <a:bodyPr rtlCol="0" anchor="ctr"/>
+          <a:lstStyle/>
+          <a:p>
+            <a:pPr algn="ctr"/>
+          </a:p>
+        </p:txBody>
+      </p:sp>
+      <p:sp>
+        <p:nvSpPr>
+          <p:cNvPr id="11" name="Rounded Rectangle 10"/>
+          <p:cNvSpPr/>
+          <p:nvPr/>
+        </p:nvSpPr>
+        <p:spPr>
+          <a:xfrm>
+            <a:off x="6347307" y="3383280"/>
+            <a:ext cx="2331720" cy="1005840"/>
+          </a:xfrm>
+          <a:prstGeom prst="roundRect">
+            <a:avLst>
+              <a:gd name="adj" fmla="val 12000"/>
+            </a:avLst>
+          </a:prstGeom>
+          <a:solidFill>
+            <a:srgbClr val="0F2438"/>
+          </a:solidFill>
+          <a:ln w="15875">
+            <a:solidFill>
+              <a:srgbClr val="35D0BA"/>
+            </a:solidFill>
+          </a:ln>
+          <a:effectLst/>
+        </p:spPr>
+        <p:style>
+          <a:lnRef idx="1">
+            <a:schemeClr val="accent1"/>
+          </a:lnRef>
+          <a:fillRef idx="3">
+            <a:schemeClr val="accent1"/>
+          </a:fillRef>
+          <a:effectRef idx="2">
+            <a:schemeClr val="accent1"/>
+          </a:effectRef>
+          <a:fontRef idx="minor">
+            <a:schemeClr val="lt1"/>
+          </a:fontRef>
+        </p:style>
+        <p:txBody>
+          <a:bodyPr rtlCol="0" anchor="ctr"/>
+          <a:lstStyle/>
+          <a:p>
+            <a:pPr algn="ctr"/>
+            <a:r>
+              <a:rPr sz="1500" b="1">
+                <a:solidFill>
+                  <a:srgbClr val="FFFFFF"/>
+                </a:solidFill>
+                <a:latin typeface="Calibri"/>
+              </a:rPr>
+              <a:t>Digital
+Modulation</a:t>
+            </a:r>
+          </a:p>
+        </p:txBody>
+      </p:sp>
+      <p:sp>
+        <p:nvSpPr>
+          <p:cNvPr id="12" name="Right Arrow 11"/>
+          <p:cNvSpPr/>
+          <p:nvPr/>
+        </p:nvSpPr>
+        <p:spPr>
+          <a:xfrm>
+            <a:off x="8679027" y="3730752"/>
+            <a:ext cx="502920" cy="310896"/>
+          </a:xfrm>
+          <a:prstGeom prst="rightArrow">
+            <a:avLst/>
+          </a:prstGeom>
+          <a:solidFill>
+            <a:srgbClr val="35D0BA"/>
+          </a:solidFill>
+          <a:ln>
+            <a:noFill/>
+          </a:ln>
+          <a:effectLst/>
+        </p:spPr>
+        <p:style>
+          <a:lnRef idx="1">
+            <a:schemeClr val="accent1"/>
+          </a:lnRef>
+          <a:fillRef idx="3">
+            <a:schemeClr val="accent1"/>
+          </a:fillRef>
+          <a:effectRef idx="2">
+            <a:schemeClr val="accent1"/>
+          </a:effectRef>
+          <a:fontRef idx="minor">
+            <a:schemeClr val="lt1"/>
+          </a:fontRef>
+        </p:style>
+        <p:txBody>
+          <a:bodyPr rtlCol="0" anchor="ctr"/>
+          <a:lstStyle/>
+          <a:p>
+            <a:pPr algn="ctr"/>
+          </a:p>
+        </p:txBody>
+      </p:sp>
+      <p:sp>
+        <p:nvSpPr>
+          <p:cNvPr id="13" name="Rounded Rectangle 12"/>
+          <p:cNvSpPr/>
+          <p:nvPr/>
+        </p:nvSpPr>
+        <p:spPr>
+          <a:xfrm>
+            <a:off x="9181947" y="3383280"/>
+            <a:ext cx="2331720" cy="1005840"/>
+          </a:xfrm>
+          <a:prstGeom prst="roundRect">
+            <a:avLst>
+              <a:gd name="adj" fmla="val 12000"/>
+            </a:avLst>
+          </a:prstGeom>
+          <a:solidFill>
+            <a:srgbClr val="1B5E58"/>
+          </a:solidFill>
+          <a:ln w="15875">
+            <a:solidFill>
+              <a:srgbClr val="35D0BA"/>
+            </a:solidFill>
+          </a:ln>
+          <a:effectLst/>
+        </p:spPr>
+        <p:style>
+          <a:lnRef idx="1">
+            <a:schemeClr val="accent1"/>
+          </a:lnRef>
+          <a:fillRef idx="3">
+            <a:schemeClr val="accent1"/>
+          </a:fillRef>
+          <a:effectRef idx="2">
+            <a:schemeClr val="accent1"/>
+          </a:effectRef>
+          <a:fontRef idx="minor">
+            <a:schemeClr val="lt1"/>
+          </a:fontRef>
+        </p:style>
+        <p:txBody>
+          <a:bodyPr rtlCol="0" anchor="ctr"/>
+          <a:lstStyle/>
+          <a:p>
+            <a:pPr algn="ctr"/>
+            <a:r>
+              <a:rPr sz="1500" b="1">
+                <a:solidFill>
+                  <a:srgbClr val="FFFFFF"/>
+                </a:solidFill>
+                <a:latin typeface="Calibri"/>
+              </a:rPr>
+              <a:t>RX &amp; TX
+in Python</a:t>
+            </a:r>
+          </a:p>
+        </p:txBody>
+      </p:sp>
+      <p:sp>
+        <p:nvSpPr>
+          <p:cNvPr id="14" name="TextBox 13"/>
+          <p:cNvSpPr txBox="1"/>
+          <p:nvPr/>
+        </p:nvSpPr>
+        <p:spPr>
+          <a:xfrm>
+            <a:off x="640080" y="4709160"/>
+            <a:ext cx="10698480" cy="1463040"/>
+          </a:xfrm>
+          <a:prstGeom prst="rect">
+            <a:avLst/>
+          </a:prstGeom>
+          <a:noFill/>
+        </p:spPr>
+        <p:txBody>
+          <a:bodyPr wrap="square">
+            <a:spAutoFit/>
+          </a:bodyPr>
+          <a:lstStyle/>
+          <a:p>
+            <a:pPr>
+              <a:lnSpc>
+                <a:spcPct val="112000"/>
+              </a:lnSpc>
+              <a:spcAft>
+                <a:spcPts val="400"/>
+              </a:spcAft>
+            </a:pPr>
+            <a:r>
+              <a:rPr sz="1300">
+                <a:solidFill>
+                  <a:srgbClr val="D7E3EC"/>
+                </a:solidFill>
+                <a:latin typeface="Calibri"/>
+              </a:rPr>
+              <a:t>•  Fourier Transforms: the FFT math behind every spectrum plot and waterfall shown tonight.</a:t>
+            </a:r>
+          </a:p>
+          <a:p>
+            <a:pPr>
+              <a:lnSpc>
+                <a:spcPct val="112000"/>
+              </a:lnSpc>
+              <a:spcAft>
+                <a:spcPts val="400"/>
+              </a:spcAft>
+            </a:pPr>
+            <a:r>
+              <a:rPr sz="1300">
+                <a:solidFill>
+                  <a:srgbClr val="D7E3EC"/>
+                </a:solidFill>
+                <a:latin typeface="Calibri"/>
+              </a:rPr>
+              <a:t>•  Filters: the same low-pass/channel-select filtering every flowgraph tonight used, written out by hand.</a:t>
+            </a:r>
+          </a:p>
+          <a:p>
+            <a:pPr>
+              <a:lnSpc>
+                <a:spcPct val="112000"/>
+              </a:lnSpc>
+              <a:spcAft>
+                <a:spcPts val="400"/>
+              </a:spcAft>
+            </a:pPr>
+            <a:r>
+              <a:rPr sz="1300">
+                <a:solidFill>
+                  <a:srgbClr val="D7E3EC"/>
+                </a:solidFill>
+                <a:latin typeface="Calibri"/>
+              </a:rPr>
+              <a:t>•  Digital Modulation: ASK, PSK, QAM, FSK -- how bits become RF, from first principles.</a:t>
+            </a:r>
+          </a:p>
+          <a:p>
+            <a:pPr>
+              <a:lnSpc>
+                <a:spcPct val="112000"/>
+              </a:lnSpc>
+              <a:spcAft>
+                <a:spcPts val="400"/>
+              </a:spcAft>
+            </a:pPr>
+            <a:r>
+              <a:rPr sz="1300">
+                <a:solidFill>
+                  <a:srgbClr val="D7E3EC"/>
+                </a:solidFill>
+                <a:latin typeface="Calibri"/>
+              </a:rPr>
+              <a:t>•  RX &amp; TX in Python: PlutoSDR, USRP, RTL-SDR, and HackRF, each driven directly from a Python script -- no GRC canvas required.</a:t>
+            </a:r>
+          </a:p>
+        </p:txBody>
+      </p:sp>
+      <p:sp>
+        <p:nvSpPr>
+          <p:cNvPr id="15" name="TextBox 14"/>
+          <p:cNvSpPr txBox="1"/>
+          <p:nvPr/>
+        </p:nvSpPr>
+        <p:spPr>
+          <a:xfrm>
+            <a:off x="640080" y="6473952"/>
+            <a:ext cx="8229600" cy="274320"/>
+          </a:xfrm>
+          <a:prstGeom prst="rect">
+            <a:avLst/>
+          </a:prstGeom>
+          <a:noFill/>
+        </p:spPr>
+        <p:txBody>
+          <a:bodyPr wrap="square" anchor="t" lIns="0" rIns="0" tIns="0" bIns="0">
+            <a:spAutoFit/>
+          </a:bodyPr>
+          <a:lstStyle/>
+          <a:p>
+            <a:pPr algn="l">
+              <a:lnSpc>
+                <a:spcPct val="115000"/>
+              </a:lnSpc>
+            </a:pPr>
+            <a:r>
+              <a:rPr sz="1000" b="0" i="1">
+                <a:solidFill>
+                  <a:srgbClr val="8EA7BA"/>
+                </a:solidFill>
+                <a:latin typeface="Calibri"/>
+              </a:rPr>
+              <a:t>pysdr.org -- "A Guide to SDR and DSP using Python"</a:t>
+            </a:r>
+          </a:p>
+        </p:txBody>
+      </p:sp>
+      <p:sp>
+        <p:nvSpPr>
+          <p:cNvPr id="16" name="TextBox 15"/>
+          <p:cNvSpPr txBox="1"/>
+          <p:nvPr/>
+        </p:nvSpPr>
+        <p:spPr>
+          <a:xfrm>
+            <a:off x="11292840" y="6473952"/>
+            <a:ext cx="731520" cy="274320"/>
+          </a:xfrm>
+          <a:prstGeom prst="rect">
+            <a:avLst/>
+          </a:prstGeom>
+          <a:noFill/>
+        </p:spPr>
+        <p:txBody>
+          <a:bodyPr wrap="square" anchor="t" lIns="0" rIns="0" tIns="0" bIns="0">
+            <a:spAutoFit/>
+          </a:bodyPr>
+          <a:lstStyle/>
+          <a:p>
+            <a:pPr algn="r">
+              <a:lnSpc>
+                <a:spcPct val="115000"/>
+              </a:lnSpc>
+            </a:pPr>
+            <a:r>
+              <a:rPr sz="1000" b="0" i="0">
+                <a:solidFill>
+                  <a:srgbClr val="8EA7BA"/>
+                </a:solidFill>
+                <a:latin typeface="Calibri"/>
+              </a:rPr>
+              <a:t>20 / 22</a:t>
+            </a:r>
+          </a:p>
+        </p:txBody>
+      </p:sp>
+    </p:spTree>
+  </p:cSld>
+  <p:clrMapOvr>
+    <a:masterClrMapping/>
+  </p:clrMapOvr>
+</p:sld>
+</file>
+
+<file path=ppt/slides/slide22.xml><?xml version="1.0" encoding="utf-8"?>
+<p:sld xmlns:a="http://schemas.openxmlformats.org/drawingml/2006/main" xmlns:p="http://schemas.openxmlformats.org/presentationml/2006/main" xmlns:r="http://schemas.openxmlformats.org/officeDocument/2006/relationships">
+  <p:cSld>
+    <p:spTree>
+      <p:nvGrpSpPr>
+        <p:cNvPr id="1" name=""/>
+        <p:cNvGrpSpPr/>
+        <p:nvPr/>
+      </p:nvGrpSpPr>
+      <p:grpSpPr/>
+      <p:sp>
+        <p:nvSpPr>
+          <p:cNvPr id="2" name="Rectangle 1"/>
+          <p:cNvSpPr/>
+          <p:nvPr/>
+        </p:nvSpPr>
+        <p:spPr>
+          <a:xfrm>
+            <a:off x="0" y="0"/>
+            <a:ext cx="12191695" cy="6858000"/>
+          </a:xfrm>
+          <a:prstGeom prst="rect">
+            <a:avLst/>
+          </a:prstGeom>
+          <a:solidFill>
+            <a:srgbClr val="0A1929"/>
+          </a:solidFill>
+          <a:ln>
+            <a:noFill/>
+          </a:ln>
+          <a:effectLst/>
+        </p:spPr>
+        <p:style>
+          <a:lnRef idx="1">
+            <a:schemeClr val="accent1"/>
+          </a:lnRef>
+          <a:fillRef idx="3">
+            <a:schemeClr val="accent1"/>
+          </a:fillRef>
+          <a:effectRef idx="2">
+            <a:schemeClr val="accent1"/>
+          </a:effectRef>
+          <a:fontRef idx="minor">
+            <a:schemeClr val="lt1"/>
+          </a:fontRef>
+        </p:style>
+        <p:txBody>
+          <a:bodyPr rtlCol="0" anchor="ctr"/>
+          <a:lstStyle/>
+          <a:p>
+            <a:pPr algn="ctr"/>
+          </a:p>
+        </p:txBody>
+      </p:sp>
+      <p:sp>
+        <p:nvSpPr>
+          <p:cNvPr id="3" name="TextBox 2"/>
+          <p:cNvSpPr txBox="1"/>
+          <p:nvPr/>
+        </p:nvSpPr>
+        <p:spPr>
+          <a:xfrm>
             <a:off x="822960" y="2651760"/>
             <a:ext cx="10515600" cy="1097280"/>
           </a:xfrm>
@@ -11407,7 +12193,7 @@
                 </a:solidFill>
                 <a:latin typeface="Calibri"/>
               </a:rPr>
-              <a:t>2 / 21</a:t>
+              <a:t>2 / 22</a:t>
             </a:r>
           </a:p>
         </p:txBody>
@@ -12107,7 +12893,7 @@
                 </a:solidFill>
                 <a:latin typeface="Calibri"/>
               </a:rPr>
-              <a:t>3 / 21</a:t>
+              <a:t>3 / 22</a:t>
             </a:r>
           </a:p>
         </p:txBody>
@@ -12760,7 +13546,7 @@
                 </a:solidFill>
                 <a:latin typeface="Calibri"/>
               </a:rPr>
-              <a:t>4 / 21</a:t>
+              <a:t>4 / 22</a:t>
             </a:r>
           </a:p>
         </p:txBody>
@@ -13659,7 +14445,7 @@
                 </a:solidFill>
                 <a:latin typeface="Calibri"/>
               </a:rPr>
-              <a:t>5 / 21</a:t>
+              <a:t>5 / 22</a:t>
             </a:r>
           </a:p>
         </p:txBody>
@@ -14388,7 +15174,7 @@
                 </a:solidFill>
                 <a:latin typeface="Calibri"/>
               </a:rPr>
-              <a:t>6 / 21</a:t>
+              <a:t>6 / 22</a:t>
             </a:r>
           </a:p>
         </p:txBody>
@@ -14790,7 +15576,7 @@
                 </a:solidFill>
                 <a:latin typeface="Calibri"/>
               </a:rPr>
-              <a:t>7 / 21</a:t>
+              <a:t>7 / 22</a:t>
             </a:r>
           </a:p>
         </p:txBody>
@@ -15187,7 +15973,7 @@
                 </a:solidFill>
                 <a:latin typeface="Calibri"/>
               </a:rPr>
-              <a:t>8 / 21</a:t>
+              <a:t>8 / 22</a:t>
             </a:r>
           </a:p>
         </p:txBody>

--- a/slides/SDR_Demo.pptx
+++ b/slides/SDR_Demo.pptx
@@ -7633,8 +7633,8 @@
         </p:nvSpPr>
         <p:spPr>
           <a:xfrm>
-            <a:off x="640080" y="5943600"/>
-            <a:ext cx="10058400" cy="365760"/>
+            <a:off x="640080" y="5897880"/>
+            <a:ext cx="10058400" cy="274320"/>
           </a:xfrm>
           <a:prstGeom prst="rect">
             <a:avLst/>
@@ -7672,8 +7672,8 @@
         </p:nvSpPr>
         <p:spPr>
           <a:xfrm>
-            <a:off x="640080" y="6473952"/>
-            <a:ext cx="7315200" cy="274320"/>
+            <a:off x="640080" y="6199632"/>
+            <a:ext cx="10881360" cy="274320"/>
           </a:xfrm>
           <a:prstGeom prst="rect">
             <a:avLst/>
@@ -7681,24 +7681,26 @@
           <a:noFill/>
         </p:spPr>
         <p:txBody>
-          <a:bodyPr wrap="square" anchor="t" lIns="0" rIns="0" tIns="0" bIns="0">
+          <a:bodyPr wrap="square">
             <a:spAutoFit/>
           </a:bodyPr>
           <a:lstStyle/>
           <a:p>
-            <a:pPr algn="l">
-              <a:lnSpc>
-                <a:spcPct val="115000"/>
-              </a:lnSpc>
-            </a:pPr>
-            <a:r>
-              <a:rPr sz="1000" b="0" i="0">
+            <a:r>
+              <a:rPr sz="1300" i="1">
                 <a:solidFill>
                   <a:srgbClr val="8EA7BA"/>
                 </a:solidFill>
                 <a:latin typeface="Calibri"/>
               </a:rPr>
-              <a:t>SDR Demo -- GNU Radio + HackRF + Ham Handheld</a:t>
+              <a:t>Working GNU Radio flowgraphs for many of these modes (ham club tutorial repo): </a:t>
+            </a:r>
+            <a:r>
+              <a:rPr sz="1300" i="1">
+                <a:latin typeface="Calibri"/>
+                <a:hlinkClick r:id="rId2"/>
+              </a:rPr>
+              <a:t>github.com/argilo/sdr-examples</a:t>
             </a:r>
           </a:p>
         </p:txBody>

--- a/slides/SDR_Demo.pptx
+++ b/slides/SDR_Demo.pptx
@@ -13163,13 +13163,68 @@
       </p:sp>
       <p:sp>
         <p:nvSpPr>
-          <p:cNvPr id="6" name="TextBox 5"/>
+          <p:cNvPr id="6" name="Rounded Rectangle 5"/>
+          <p:cNvSpPr/>
+          <p:nvPr/>
+        </p:nvSpPr>
+        <p:spPr>
+          <a:xfrm>
+            <a:off x="640080" y="1691640"/>
+            <a:ext cx="1371600" cy="320040"/>
+          </a:xfrm>
+          <a:prstGeom prst="roundRect">
+            <a:avLst>
+              <a:gd name="adj" fmla="val 50000"/>
+            </a:avLst>
+          </a:prstGeom>
+          <a:solidFill>
+            <a:srgbClr val="1B5E58"/>
+          </a:solidFill>
+          <a:ln>
+            <a:noFill/>
+          </a:ln>
+          <a:effectLst/>
+        </p:spPr>
+        <p:style>
+          <a:lnRef idx="1">
+            <a:schemeClr val="accent1"/>
+          </a:lnRef>
+          <a:fillRef idx="3">
+            <a:schemeClr val="accent1"/>
+          </a:fillRef>
+          <a:effectRef idx="2">
+            <a:schemeClr val="accent1"/>
+          </a:effectRef>
+          <a:fontRef idx="minor">
+            <a:schemeClr val="lt1"/>
+          </a:fontRef>
+        </p:style>
+        <p:txBody>
+          <a:bodyPr rtlCol="0" anchor="ctr" lIns="50800" rIns="50800" tIns="0" bIns="0"/>
+          <a:lstStyle/>
+          <a:p>
+            <a:pPr algn="ctr"/>
+            <a:r>
+              <a:rPr sz="1200" b="1">
+                <a:solidFill>
+                  <a:srgbClr val="35D0BA"/>
+                </a:solidFill>
+                <a:latin typeface="Calibri"/>
+              </a:rPr>
+              <a:t>RECEIVE ONLY</a:t>
+            </a:r>
+          </a:p>
+        </p:txBody>
+      </p:sp>
+      <p:sp>
+        <p:nvSpPr>
+          <p:cNvPr id="7" name="TextBox 6"/>
           <p:cNvSpPr txBox="1"/>
           <p:nvPr/>
         </p:nvSpPr>
         <p:spPr>
           <a:xfrm>
-            <a:off x="640080" y="1920240"/>
+            <a:off x="640080" y="2240280"/>
             <a:ext cx="10881360" cy="1463040"/>
           </a:xfrm>
           <a:prstGeom prst="rect">
@@ -13188,17 +13243,17 @@
                 <a:spcPct val="112000"/>
               </a:lnSpc>
               <a:spcAft>
-                <a:spcPts val="1400"/>
+                <a:spcPts val="1200"/>
               </a:spcAft>
             </a:pPr>
             <a:r>
-              <a:rPr sz="1800">
+              <a:rPr sz="1700">
                 <a:solidFill>
                   <a:srgbClr val="D7E3EC"/>
                 </a:solidFill>
                 <a:latin typeface="Calibri"/>
               </a:rPr>
-              <a:t>•  Everything on the last slide -- thermal noise, atmospheric sferics, switching power supplies -- is audible right now, live, for free, no hardware required.</a:t>
+              <a:t>•  Everything on the last slide -- thermal noise, atmospheric sferics, switching power supplies -- is audible right now, live.</a:t>
             </a:r>
           </a:p>
           <a:p>
@@ -13207,31 +13262,70 @@
                 <a:spcPct val="112000"/>
               </a:lnSpc>
               <a:spcAft>
-                <a:spcPts val="1400"/>
+                <a:spcPts val="1200"/>
               </a:spcAft>
             </a:pPr>
             <a:r>
-              <a:rPr sz="1800">
+              <a:rPr sz="1700">
                 <a:solidFill>
                   <a:srgbClr val="D7E3EC"/>
                 </a:solidFill>
                 <a:latin typeface="Calibri"/>
               </a:rPr>
-              <a:t>•  WebSDR runs a worldwide network of real receivers online, streaming live spectrum audio anyone can tune -- the exact mix of signal and noise this whole talk is about.</a:t>
-            </a:r>
-          </a:p>
-        </p:txBody>
-      </p:sp>
-      <p:sp>
-        <p:nvSpPr>
-          <p:cNvPr id="7" name="Rounded Rectangle 6"/>
+              <a:t>•  The entire 20-meter ham band (14.000-14.350 MHz), captured all at once and played as one audio stream -- not tuned to any single station, just the raw mix of everything active on the band.</a:t>
+            </a:r>
+          </a:p>
+        </p:txBody>
+      </p:sp>
+      <p:sp>
+        <p:nvSpPr>
+          <p:cNvPr id="8" name="TextBox 7"/>
+          <p:cNvSpPr txBox="1"/>
+          <p:nvPr/>
+        </p:nvSpPr>
+        <p:spPr>
+          <a:xfrm>
+            <a:off x="640080" y="3977639"/>
+            <a:ext cx="10881360" cy="320040"/>
+          </a:xfrm>
+          <a:prstGeom prst="rect">
+            <a:avLst/>
+          </a:prstGeom>
+          <a:noFill/>
+        </p:spPr>
+        <p:txBody>
+          <a:bodyPr wrap="square" anchor="t" lIns="0" rIns="0" tIns="0" bIns="0">
+            <a:spAutoFit/>
+          </a:bodyPr>
+          <a:lstStyle/>
+          <a:p>
+            <a:pPr algn="ctr">
+              <a:lnSpc>
+                <a:spcPct val="115000"/>
+              </a:lnSpc>
+            </a:pPr>
+            <a:r>
+              <a:rPr sz="1300" b="0" i="1">
+                <a:solidFill>
+                  <a:srgbClr val="8EA7BA"/>
+                </a:solidFill>
+                <a:latin typeface="Calibri"/>
+              </a:rPr>
+              <a:t>Prefer to go exploring on your own later? A worldwide network of live receivers anyone can tune:</a:t>
+            </a:r>
+          </a:p>
+        </p:txBody>
+      </p:sp>
+      <p:sp>
+        <p:nvSpPr>
+          <p:cNvPr id="9" name="Rounded Rectangle 8"/>
           <p:cNvSpPr/>
           <p:nvPr/>
         </p:nvSpPr>
         <p:spPr>
           <a:xfrm>
-            <a:off x="3355848" y="3794760"/>
-            <a:ext cx="5486400" cy="822960"/>
+            <a:off x="3355848" y="4389120"/>
+            <a:ext cx="5486400" cy="685800"/>
           </a:xfrm>
           <a:prstGeom prst="roundRect">
             <a:avLst>
@@ -13268,7 +13362,7 @@
           <a:p>
             <a:pPr algn="ctr"/>
             <a:r>
-              <a:rPr sz="2200" b="1">
+              <a:rPr sz="1900" b="1">
                 <a:solidFill>
                   <a:srgbClr val="35D0BA"/>
                 </a:solidFill>
@@ -13282,13 +13376,13 @@
       </p:sp>
       <p:sp>
         <p:nvSpPr>
-          <p:cNvPr id="8" name="TextBox 7"/>
+          <p:cNvPr id="10" name="TextBox 9"/>
           <p:cNvSpPr txBox="1"/>
           <p:nvPr/>
         </p:nvSpPr>
         <p:spPr>
           <a:xfrm>
-            <a:off x="640080" y="4892040"/>
+            <a:off x="640080" y="5257800"/>
             <a:ext cx="10881360" cy="365760"/>
           </a:xfrm>
           <a:prstGeom prst="rect">
@@ -13308,7 +13402,7 @@
               </a:lnSpc>
             </a:pPr>
             <a:r>
-              <a:rPr sz="1500" b="0" i="1">
+              <a:rPr sz="1400" b="0" i="1">
                 <a:solidFill>
                   <a:srgbClr val="8EA7BA"/>
                 </a:solidFill>
@@ -13321,7 +13415,7 @@
       </p:sp>
       <p:sp>
         <p:nvSpPr>
-          <p:cNvPr id="9" name="TextBox 8"/>
+          <p:cNvPr id="11" name="TextBox 10"/>
           <p:cNvSpPr txBox="1"/>
           <p:nvPr/>
         </p:nvSpPr>
@@ -13360,7 +13454,7 @@
       </p:sp>
       <p:sp>
         <p:nvSpPr>
-          <p:cNvPr id="10" name="TextBox 9"/>
+          <p:cNvPr id="12" name="TextBox 11"/>
           <p:cNvSpPr txBox="1"/>
           <p:nvPr/>
         </p:nvSpPr>

--- a/slides/SDR_Demo.pptx
+++ b/slides/SDR_Demo.pptx
@@ -14051,7 +14051,7 @@
                 </a:solidFill>
                 <a:latin typeface="Calibri"/>
               </a:rPr>
-              <a:t>Real hardware built to do exactly this -- an SDR front end plus Linux demodulating FM, SSB, and M17 digital voice out of live RF:</a:t>
+              <a:t>Once you can pick a signal out of the noise, the next question is "what am I even listening to" -- a crowdsourced field guide:</a:t>
             </a:r>
           </a:p>
         </p:txBody>
@@ -14087,7 +14087,7 @@
                 <a:latin typeface="Calibri"/>
                 <a:hlinkClick r:id="rId2"/>
               </a:rPr>
-              <a:t>github.com/M17-Project/LinHT-hw</a:t>
+              <a:t>sigidwiki.com -- Signal Identification Guide</a:t>
             </a:r>
           </a:p>
         </p:txBody>
@@ -14126,7 +14126,7 @@
                 </a:solidFill>
                 <a:latin typeface="Calibri"/>
               </a:rPr>
-              <a:t>LinHT: an open-source Linux handheld SDR transceiver -- FM/SSB/M17, CC BY-NC-SA 4.0</a:t>
+              <a:t>sigidwiki.com -- ~600 identified signals with example sounds and waterfall images, from VLF to UHF</a:t>
             </a:r>
           </a:p>
         </p:txBody>
